--- a/report/Präsentation_final.pptx
+++ b/report/Präsentation_final.pptx
@@ -2369,10 +2369,18 @@
         <a:lstStyle/>
         <a:p>
           <a:r>
-            <a:rPr lang="en-GB" sz="1600" dirty="0"/>
+            <a:rPr lang="en-GB" sz="1600" b="1" i="1" dirty="0">
+              <a:solidFill>
+                <a:srgbClr val="FF0000"/>
+              </a:solidFill>
+            </a:rPr>
             <a:t>Creating a function to read the velocity of thrown punches/calculate it using the IMU-Data</a:t>
           </a:r>
-          <a:endParaRPr lang="en-US" sz="1600" dirty="0"/>
+          <a:endParaRPr lang="en-US" sz="1600" b="1" i="1" dirty="0">
+            <a:solidFill>
+              <a:srgbClr val="FF0000"/>
+            </a:solidFill>
+          </a:endParaRPr>
         </a:p>
       </dgm:t>
     </dgm:pt>
@@ -3998,10 +4006,18 @@
             <a:buNone/>
           </a:pPr>
           <a:r>
-            <a:rPr lang="en-GB" sz="1600" kern="1200" dirty="0"/>
+            <a:rPr lang="en-GB" sz="1600" b="1" i="1" kern="1200" dirty="0">
+              <a:solidFill>
+                <a:srgbClr val="FF0000"/>
+              </a:solidFill>
+            </a:rPr>
             <a:t>Creating a function to read the velocity of thrown punches/calculate it using the IMU-Data</a:t>
           </a:r>
-          <a:endParaRPr lang="en-US" sz="1600" kern="1200" dirty="0"/>
+          <a:endParaRPr lang="en-US" sz="1600" b="1" i="1" kern="1200" dirty="0">
+            <a:solidFill>
+              <a:srgbClr val="FF0000"/>
+            </a:solidFill>
+          </a:endParaRPr>
         </a:p>
       </dsp:txBody>
       <dsp:txXfrm>
@@ -6908,7 +6924,7 @@
           <a:p>
             <a:fld id="{34FDB5A7-DA16-4448-8282-3E19F6C995A7}" type="datetimeFigureOut">
               <a:rPr lang="de-AT" smtClean="0"/>
-              <a:t>21.02.2026</a:t>
+              <a:t>22.02.2026</a:t>
             </a:fld>
             <a:endParaRPr lang="de-AT"/>
           </a:p>
@@ -7393,8 +7409,1631 @@
           <a:lstStyle/>
           <a:p>
             <a:r>
-              <a:rPr lang="de-AT" dirty="0"/>
-              <a:t>Holz</a:t>
+              <a:rPr lang="de-AT" dirty="0" err="1"/>
+              <a:t>We</a:t>
+            </a:r>
+            <a:r>
+              <a:rPr lang="de-AT" dirty="0"/>
+              <a:t> ran </a:t>
+            </a:r>
+            <a:r>
+              <a:rPr lang="de-AT" dirty="0" err="1"/>
+              <a:t>into</a:t>
+            </a:r>
+            <a:r>
+              <a:rPr lang="de-AT" dirty="0"/>
+              <a:t> </a:t>
+            </a:r>
+            <a:r>
+              <a:rPr lang="de-AT" dirty="0" err="1"/>
+              <a:t>some</a:t>
+            </a:r>
+            <a:r>
+              <a:rPr lang="de-AT" dirty="0"/>
+              <a:t> </a:t>
+            </a:r>
+            <a:r>
+              <a:rPr lang="de-AT" dirty="0" err="1"/>
+              <a:t>problems</a:t>
+            </a:r>
+            <a:r>
+              <a:rPr lang="de-AT" dirty="0"/>
+              <a:t> </a:t>
+            </a:r>
+            <a:r>
+              <a:rPr lang="de-AT" dirty="0" err="1"/>
+              <a:t>along</a:t>
+            </a:r>
+            <a:r>
+              <a:rPr lang="de-AT" dirty="0"/>
+              <a:t> </a:t>
+            </a:r>
+            <a:r>
+              <a:rPr lang="de-AT" dirty="0" err="1"/>
+              <a:t>our</a:t>
+            </a:r>
+            <a:r>
+              <a:rPr lang="de-AT" dirty="0"/>
+              <a:t> </a:t>
+            </a:r>
+            <a:r>
+              <a:rPr lang="de-AT" dirty="0" err="1"/>
+              <a:t>jorney</a:t>
+            </a:r>
+            <a:r>
+              <a:rPr lang="de-AT" dirty="0"/>
+              <a:t>, </a:t>
+            </a:r>
+            <a:r>
+              <a:rPr lang="de-AT" dirty="0" err="1"/>
+              <a:t>some</a:t>
+            </a:r>
+            <a:r>
+              <a:rPr lang="de-AT" dirty="0"/>
+              <a:t> </a:t>
+            </a:r>
+            <a:r>
+              <a:rPr lang="de-AT" dirty="0" err="1"/>
+              <a:t>of</a:t>
+            </a:r>
+            <a:r>
+              <a:rPr lang="de-AT" dirty="0"/>
+              <a:t> </a:t>
+            </a:r>
+            <a:r>
+              <a:rPr lang="de-AT" dirty="0" err="1"/>
+              <a:t>which</a:t>
+            </a:r>
+            <a:r>
+              <a:rPr lang="de-AT" dirty="0"/>
+              <a:t> i </a:t>
+            </a:r>
+            <a:r>
+              <a:rPr lang="de-AT" dirty="0" err="1"/>
+              <a:t>would</a:t>
+            </a:r>
+            <a:r>
+              <a:rPr lang="de-AT" dirty="0"/>
+              <a:t> like </a:t>
+            </a:r>
+            <a:r>
+              <a:rPr lang="de-AT" dirty="0" err="1"/>
+              <a:t>to</a:t>
+            </a:r>
+            <a:r>
+              <a:rPr lang="de-AT" dirty="0"/>
+              <a:t> </a:t>
+            </a:r>
+            <a:r>
+              <a:rPr lang="de-AT" dirty="0" err="1"/>
+              <a:t>talk</a:t>
+            </a:r>
+            <a:r>
+              <a:rPr lang="de-AT" dirty="0"/>
+              <a:t> </a:t>
+            </a:r>
+            <a:r>
+              <a:rPr lang="de-AT" dirty="0" err="1"/>
+              <a:t>about</a:t>
+            </a:r>
+            <a:r>
+              <a:rPr lang="de-AT" dirty="0"/>
+              <a:t>.</a:t>
+            </a:r>
+          </a:p>
+          <a:p>
+            <a:endParaRPr lang="de-AT" dirty="0"/>
+          </a:p>
+          <a:p>
+            <a:r>
+              <a:rPr lang="de-AT" dirty="0" err="1"/>
+              <a:t>One</a:t>
+            </a:r>
+            <a:r>
+              <a:rPr lang="de-AT" dirty="0"/>
+              <a:t> </a:t>
+            </a:r>
+            <a:r>
+              <a:rPr lang="de-AT" dirty="0" err="1"/>
+              <a:t>problem</a:t>
+            </a:r>
+            <a:r>
+              <a:rPr lang="de-AT" dirty="0"/>
+              <a:t> </a:t>
+            </a:r>
+            <a:r>
+              <a:rPr lang="de-AT" dirty="0" err="1"/>
+              <a:t>we</a:t>
+            </a:r>
+            <a:r>
+              <a:rPr lang="de-AT" dirty="0"/>
+              <a:t> </a:t>
+            </a:r>
+            <a:r>
+              <a:rPr lang="de-AT" dirty="0" err="1"/>
+              <a:t>faced</a:t>
+            </a:r>
+            <a:r>
+              <a:rPr lang="de-AT" dirty="0"/>
+              <a:t> </a:t>
+            </a:r>
+            <a:r>
+              <a:rPr lang="de-AT" dirty="0" err="1"/>
+              <a:t>were</a:t>
+            </a:r>
+            <a:r>
+              <a:rPr lang="de-AT" dirty="0"/>
+              <a:t> </a:t>
+            </a:r>
+            <a:r>
+              <a:rPr lang="de-AT" dirty="0" err="1"/>
+              <a:t>overlapping</a:t>
+            </a:r>
+            <a:r>
+              <a:rPr lang="de-AT" dirty="0"/>
+              <a:t> </a:t>
+            </a:r>
+            <a:r>
+              <a:rPr lang="de-AT" dirty="0" err="1"/>
+              <a:t>labels</a:t>
+            </a:r>
+            <a:r>
+              <a:rPr lang="de-AT" dirty="0"/>
+              <a:t>, </a:t>
+            </a:r>
+            <a:r>
+              <a:rPr lang="de-AT" dirty="0" err="1"/>
+              <a:t>which</a:t>
+            </a:r>
+            <a:r>
+              <a:rPr lang="de-AT" dirty="0"/>
+              <a:t> </a:t>
+            </a:r>
+            <a:r>
+              <a:rPr lang="de-AT" dirty="0" err="1"/>
+              <a:t>were</a:t>
+            </a:r>
+            <a:r>
+              <a:rPr lang="de-AT" dirty="0"/>
+              <a:t> </a:t>
+            </a:r>
+            <a:r>
+              <a:rPr lang="de-AT" dirty="0" err="1"/>
+              <a:t>sometimes</a:t>
+            </a:r>
+            <a:r>
+              <a:rPr lang="de-AT" dirty="0"/>
+              <a:t> </a:t>
+            </a:r>
+            <a:r>
+              <a:rPr lang="de-AT" dirty="0" err="1"/>
+              <a:t>generated</a:t>
+            </a:r>
+            <a:r>
+              <a:rPr lang="de-AT" dirty="0"/>
+              <a:t> </a:t>
+            </a:r>
+            <a:r>
+              <a:rPr lang="de-AT" dirty="0" err="1"/>
+              <a:t>by</a:t>
+            </a:r>
+            <a:r>
+              <a:rPr lang="de-AT" dirty="0"/>
+              <a:t> </a:t>
+            </a:r>
+            <a:r>
+              <a:rPr lang="de-AT" dirty="0" err="1"/>
+              <a:t>Deepcraft</a:t>
+            </a:r>
+            <a:r>
+              <a:rPr lang="de-AT" dirty="0"/>
+              <a:t> Studio </a:t>
+            </a:r>
+            <a:r>
+              <a:rPr lang="de-AT" dirty="0" err="1"/>
+              <a:t>while</a:t>
+            </a:r>
+            <a:r>
+              <a:rPr lang="de-AT" dirty="0"/>
+              <a:t> </a:t>
+            </a:r>
+            <a:r>
+              <a:rPr lang="de-AT" dirty="0" err="1"/>
+              <a:t>setting</a:t>
+            </a:r>
+            <a:r>
+              <a:rPr lang="de-AT" dirty="0"/>
+              <a:t> a </a:t>
+            </a:r>
+            <a:r>
+              <a:rPr lang="de-AT" dirty="0" err="1"/>
+              <a:t>label</a:t>
+            </a:r>
+            <a:r>
+              <a:rPr lang="de-AT" dirty="0"/>
+              <a:t> in </a:t>
+            </a:r>
+            <a:r>
+              <a:rPr lang="de-AT" dirty="0" err="1"/>
+              <a:t>the</a:t>
+            </a:r>
+            <a:r>
+              <a:rPr lang="de-AT" dirty="0"/>
+              <a:t> </a:t>
+            </a:r>
+            <a:r>
+              <a:rPr lang="de-AT" dirty="0" err="1"/>
+              <a:t>session</a:t>
+            </a:r>
+            <a:r>
+              <a:rPr lang="de-AT" dirty="0"/>
+              <a:t>. These </a:t>
+            </a:r>
+            <a:r>
+              <a:rPr lang="de-AT" dirty="0" err="1"/>
+              <a:t>had</a:t>
+            </a:r>
+            <a:r>
+              <a:rPr lang="de-AT" dirty="0"/>
+              <a:t> </a:t>
+            </a:r>
+            <a:r>
+              <a:rPr lang="de-AT" dirty="0" err="1"/>
+              <a:t>to</a:t>
+            </a:r>
+            <a:r>
+              <a:rPr lang="de-AT" dirty="0"/>
+              <a:t> </a:t>
+            </a:r>
+            <a:r>
+              <a:rPr lang="de-AT" dirty="0" err="1"/>
+              <a:t>be</a:t>
+            </a:r>
+            <a:r>
+              <a:rPr lang="de-AT" dirty="0"/>
+              <a:t> </a:t>
+            </a:r>
+            <a:r>
+              <a:rPr lang="de-AT" dirty="0" err="1"/>
+              <a:t>found</a:t>
+            </a:r>
+            <a:r>
+              <a:rPr lang="de-AT" dirty="0"/>
+              <a:t> and </a:t>
+            </a:r>
+            <a:r>
+              <a:rPr lang="de-AT" dirty="0" err="1"/>
+              <a:t>deleted</a:t>
+            </a:r>
+            <a:r>
+              <a:rPr lang="de-AT" dirty="0"/>
+              <a:t> in </a:t>
+            </a:r>
+            <a:r>
+              <a:rPr lang="de-AT" dirty="0" err="1"/>
+              <a:t>the</a:t>
+            </a:r>
+            <a:r>
+              <a:rPr lang="de-AT" dirty="0"/>
+              <a:t> </a:t>
+            </a:r>
+            <a:r>
+              <a:rPr lang="de-AT" dirty="0" err="1"/>
+              <a:t>classification</a:t>
+            </a:r>
+            <a:endParaRPr lang="de-AT" dirty="0"/>
+          </a:p>
+          <a:p>
+            <a:endParaRPr lang="de-AT" dirty="0"/>
+          </a:p>
+          <a:p>
+            <a:r>
+              <a:rPr lang="de-AT" dirty="0" err="1"/>
+              <a:t>Furthermore</a:t>
+            </a:r>
+            <a:r>
+              <a:rPr lang="de-AT" dirty="0"/>
+              <a:t> </a:t>
+            </a:r>
+            <a:r>
+              <a:rPr lang="de-AT" dirty="0" err="1"/>
+              <a:t>while</a:t>
+            </a:r>
+            <a:r>
+              <a:rPr lang="de-AT" dirty="0"/>
+              <a:t> </a:t>
+            </a:r>
+            <a:r>
+              <a:rPr lang="de-AT" dirty="0" err="1"/>
+              <a:t>playing</a:t>
+            </a:r>
+            <a:r>
+              <a:rPr lang="de-AT" dirty="0"/>
+              <a:t> </a:t>
+            </a:r>
+            <a:r>
+              <a:rPr lang="de-AT" dirty="0" err="1"/>
+              <a:t>around</a:t>
+            </a:r>
+            <a:r>
+              <a:rPr lang="de-AT" dirty="0"/>
+              <a:t> </a:t>
+            </a:r>
+            <a:r>
+              <a:rPr lang="de-AT" dirty="0" err="1"/>
+              <a:t>with</a:t>
+            </a:r>
+            <a:r>
+              <a:rPr lang="de-AT" dirty="0"/>
+              <a:t> </a:t>
+            </a:r>
+            <a:r>
+              <a:rPr lang="de-AT" dirty="0" err="1"/>
+              <a:t>model</a:t>
+            </a:r>
+            <a:r>
+              <a:rPr lang="de-AT" dirty="0"/>
+              <a:t> </a:t>
+            </a:r>
+            <a:r>
+              <a:rPr lang="de-AT" dirty="0" err="1"/>
+              <a:t>paramteres</a:t>
+            </a:r>
+            <a:r>
+              <a:rPr lang="de-AT" dirty="0"/>
+              <a:t> </a:t>
+            </a:r>
+            <a:r>
+              <a:rPr lang="de-AT" dirty="0" err="1"/>
+              <a:t>we</a:t>
+            </a:r>
+            <a:r>
+              <a:rPr lang="de-AT" dirty="0"/>
+              <a:t> </a:t>
+            </a:r>
+            <a:r>
+              <a:rPr lang="de-AT" dirty="0" err="1"/>
+              <a:t>found</a:t>
+            </a:r>
+            <a:r>
+              <a:rPr lang="de-AT" dirty="0"/>
+              <a:t> </a:t>
+            </a:r>
+            <a:r>
+              <a:rPr lang="de-AT" dirty="0" err="1"/>
+              <a:t>ourselves</a:t>
+            </a:r>
+            <a:r>
+              <a:rPr lang="de-AT" dirty="0"/>
+              <a:t> not </a:t>
+            </a:r>
+            <a:r>
+              <a:rPr lang="de-AT" dirty="0" err="1"/>
+              <a:t>really</a:t>
+            </a:r>
+            <a:r>
+              <a:rPr lang="de-AT" dirty="0"/>
+              <a:t> </a:t>
+            </a:r>
+            <a:r>
+              <a:rPr lang="de-AT" dirty="0" err="1"/>
+              <a:t>knowing</a:t>
+            </a:r>
+            <a:r>
+              <a:rPr lang="de-AT" dirty="0"/>
+              <a:t> </a:t>
+            </a:r>
+            <a:r>
+              <a:rPr lang="de-AT" dirty="0" err="1"/>
+              <a:t>which</a:t>
+            </a:r>
+            <a:r>
+              <a:rPr lang="de-AT" dirty="0"/>
+              <a:t> </a:t>
+            </a:r>
+            <a:r>
+              <a:rPr lang="de-AT" dirty="0" err="1"/>
+              <a:t>paramters</a:t>
+            </a:r>
+            <a:r>
+              <a:rPr lang="de-AT" dirty="0"/>
+              <a:t> </a:t>
+            </a:r>
+            <a:r>
+              <a:rPr lang="de-AT" dirty="0" err="1"/>
+              <a:t>lead</a:t>
+            </a:r>
+            <a:r>
+              <a:rPr lang="de-AT" dirty="0"/>
+              <a:t> </a:t>
+            </a:r>
+            <a:r>
+              <a:rPr lang="de-AT" dirty="0" err="1"/>
+              <a:t>to</a:t>
+            </a:r>
+            <a:r>
+              <a:rPr lang="de-AT" dirty="0"/>
+              <a:t> </a:t>
+            </a:r>
+            <a:r>
+              <a:rPr lang="de-AT" dirty="0" err="1"/>
+              <a:t>better</a:t>
+            </a:r>
+            <a:r>
+              <a:rPr lang="de-AT" dirty="0"/>
+              <a:t> </a:t>
+            </a:r>
+            <a:r>
+              <a:rPr lang="de-AT" dirty="0" err="1"/>
+              <a:t>results</a:t>
+            </a:r>
+            <a:r>
+              <a:rPr lang="de-AT" dirty="0"/>
+              <a:t>, </a:t>
+            </a:r>
+            <a:r>
+              <a:rPr lang="de-AT" dirty="0" err="1"/>
+              <a:t>besides</a:t>
+            </a:r>
+            <a:r>
+              <a:rPr lang="de-AT" dirty="0"/>
+              <a:t> </a:t>
+            </a:r>
+            <a:r>
+              <a:rPr lang="de-AT" dirty="0" err="1"/>
+              <a:t>gathering</a:t>
+            </a:r>
+            <a:r>
+              <a:rPr lang="de-AT" dirty="0"/>
+              <a:t> </a:t>
+            </a:r>
+            <a:r>
+              <a:rPr lang="de-AT" dirty="0" err="1"/>
+              <a:t>more</a:t>
+            </a:r>
+            <a:r>
+              <a:rPr lang="de-AT" dirty="0"/>
+              <a:t> </a:t>
+            </a:r>
+            <a:r>
+              <a:rPr lang="de-AT" dirty="0" err="1"/>
+              <a:t>data</a:t>
+            </a:r>
+            <a:endParaRPr lang="de-AT" dirty="0"/>
+          </a:p>
+          <a:p>
+            <a:endParaRPr lang="de-AT" dirty="0"/>
+          </a:p>
+          <a:p>
+            <a:r>
+              <a:rPr lang="de-AT" dirty="0" err="1"/>
+              <a:t>When</a:t>
+            </a:r>
+            <a:r>
+              <a:rPr lang="de-AT" dirty="0"/>
+              <a:t> </a:t>
+            </a:r>
+            <a:r>
+              <a:rPr lang="de-AT" dirty="0" err="1"/>
+              <a:t>we</a:t>
+            </a:r>
+            <a:r>
+              <a:rPr lang="de-AT" dirty="0"/>
+              <a:t> </a:t>
+            </a:r>
+            <a:r>
+              <a:rPr lang="de-AT" dirty="0" err="1"/>
+              <a:t>implemented</a:t>
+            </a:r>
+            <a:r>
+              <a:rPr lang="de-AT" dirty="0"/>
+              <a:t> </a:t>
+            </a:r>
+            <a:r>
+              <a:rPr lang="de-AT" dirty="0" err="1"/>
+              <a:t>the</a:t>
+            </a:r>
+            <a:r>
+              <a:rPr lang="de-AT" dirty="0"/>
+              <a:t> Model in </a:t>
+            </a:r>
+            <a:r>
+              <a:rPr lang="de-AT" dirty="0" err="1"/>
+              <a:t>Micropython</a:t>
+            </a:r>
+            <a:r>
+              <a:rPr lang="de-AT" dirty="0"/>
+              <a:t> </a:t>
+            </a:r>
+            <a:r>
+              <a:rPr lang="de-AT" dirty="0" err="1"/>
+              <a:t>we</a:t>
+            </a:r>
+            <a:r>
+              <a:rPr lang="de-AT" dirty="0"/>
+              <a:t> </a:t>
+            </a:r>
+            <a:r>
+              <a:rPr lang="de-AT" dirty="0" err="1"/>
+              <a:t>had</a:t>
+            </a:r>
+            <a:r>
+              <a:rPr lang="de-AT" dirty="0"/>
+              <a:t> a </a:t>
+            </a:r>
+            <a:r>
+              <a:rPr lang="de-AT" dirty="0" err="1"/>
+              <a:t>model</a:t>
+            </a:r>
+            <a:r>
+              <a:rPr lang="de-AT" dirty="0"/>
+              <a:t> </a:t>
+            </a:r>
+            <a:r>
+              <a:rPr lang="de-AT" dirty="0" err="1"/>
+              <a:t>which</a:t>
+            </a:r>
+            <a:r>
+              <a:rPr lang="de-AT" dirty="0"/>
+              <a:t> </a:t>
+            </a:r>
+            <a:r>
+              <a:rPr lang="de-AT" dirty="0" err="1"/>
+              <a:t>used</a:t>
+            </a:r>
+            <a:r>
+              <a:rPr lang="de-AT" dirty="0"/>
+              <a:t> 400Hz IMU </a:t>
+            </a:r>
+            <a:r>
+              <a:rPr lang="de-AT" dirty="0" err="1"/>
+              <a:t>data</a:t>
+            </a:r>
+            <a:r>
+              <a:rPr lang="de-AT" dirty="0"/>
+              <a:t>, </a:t>
+            </a:r>
+            <a:r>
+              <a:rPr lang="de-AT" dirty="0" err="1"/>
+              <a:t>which</a:t>
+            </a:r>
+            <a:r>
+              <a:rPr lang="de-AT" dirty="0"/>
+              <a:t> </a:t>
+            </a:r>
+            <a:r>
+              <a:rPr lang="de-AT" dirty="0" err="1"/>
+              <a:t>we</a:t>
+            </a:r>
+            <a:r>
+              <a:rPr lang="de-AT" dirty="0"/>
+              <a:t> </a:t>
+            </a:r>
+            <a:r>
+              <a:rPr lang="de-AT" dirty="0" err="1"/>
+              <a:t>found</a:t>
+            </a:r>
+            <a:r>
+              <a:rPr lang="de-AT" dirty="0"/>
+              <a:t> out was </a:t>
+            </a:r>
+            <a:r>
+              <a:rPr lang="de-AT" dirty="0" err="1"/>
+              <a:t>very</a:t>
+            </a:r>
+            <a:r>
+              <a:rPr lang="de-AT" dirty="0"/>
+              <a:t> </a:t>
+            </a:r>
+            <a:r>
+              <a:rPr lang="de-AT" dirty="0" err="1"/>
+              <a:t>problematic</a:t>
+            </a:r>
+            <a:r>
+              <a:rPr lang="de-AT" dirty="0"/>
+              <a:t> </a:t>
+            </a:r>
+            <a:r>
+              <a:rPr lang="de-AT" dirty="0" err="1"/>
+              <a:t>because</a:t>
+            </a:r>
+            <a:r>
+              <a:rPr lang="de-AT" dirty="0"/>
+              <a:t> </a:t>
+            </a:r>
+            <a:r>
+              <a:rPr lang="de-AT" dirty="0" err="1"/>
+              <a:t>we</a:t>
+            </a:r>
+            <a:r>
+              <a:rPr lang="de-AT" dirty="0"/>
+              <a:t> </a:t>
+            </a:r>
+            <a:r>
+              <a:rPr lang="de-AT" dirty="0" err="1"/>
+              <a:t>werent</a:t>
+            </a:r>
+            <a:r>
+              <a:rPr lang="de-AT" dirty="0"/>
+              <a:t> </a:t>
+            </a:r>
+            <a:r>
+              <a:rPr lang="de-AT" dirty="0" err="1"/>
+              <a:t>able</a:t>
+            </a:r>
+            <a:r>
+              <a:rPr lang="de-AT" dirty="0"/>
+              <a:t> </a:t>
+            </a:r>
+            <a:r>
+              <a:rPr lang="de-AT" dirty="0" err="1"/>
+              <a:t>to</a:t>
+            </a:r>
+            <a:r>
+              <a:rPr lang="de-AT" dirty="0"/>
+              <a:t> </a:t>
+            </a:r>
+            <a:r>
+              <a:rPr lang="de-AT" dirty="0" err="1"/>
+              <a:t>enqueue</a:t>
+            </a:r>
+            <a:r>
+              <a:rPr lang="de-AT" dirty="0"/>
+              <a:t> </a:t>
+            </a:r>
+            <a:r>
+              <a:rPr lang="de-AT" dirty="0" err="1"/>
+              <a:t>the</a:t>
+            </a:r>
+            <a:r>
+              <a:rPr lang="de-AT" dirty="0"/>
+              <a:t> </a:t>
+            </a:r>
+            <a:r>
+              <a:rPr lang="de-AT" dirty="0" err="1"/>
+              <a:t>data</a:t>
+            </a:r>
+            <a:r>
+              <a:rPr lang="de-AT" dirty="0"/>
+              <a:t> fast </a:t>
+            </a:r>
+            <a:r>
+              <a:rPr lang="de-AT" dirty="0" err="1"/>
+              <a:t>enough</a:t>
+            </a:r>
+            <a:r>
+              <a:rPr lang="de-AT" dirty="0"/>
+              <a:t>. The fastest loop time </a:t>
+            </a:r>
+            <a:r>
+              <a:rPr lang="de-AT" dirty="0" err="1"/>
+              <a:t>we</a:t>
+            </a:r>
+            <a:r>
+              <a:rPr lang="de-AT" dirty="0"/>
+              <a:t> </a:t>
+            </a:r>
+            <a:r>
+              <a:rPr lang="de-AT" dirty="0" err="1"/>
+              <a:t>achieved</a:t>
+            </a:r>
+            <a:r>
+              <a:rPr lang="de-AT" dirty="0"/>
+              <a:t> </a:t>
+            </a:r>
+            <a:r>
+              <a:rPr lang="de-AT" dirty="0" err="1"/>
+              <a:t>were</a:t>
+            </a:r>
+            <a:r>
+              <a:rPr lang="de-AT" dirty="0"/>
+              <a:t> 3ms, </a:t>
+            </a:r>
+            <a:r>
+              <a:rPr lang="de-AT" dirty="0" err="1"/>
+              <a:t>which</a:t>
+            </a:r>
+            <a:r>
+              <a:rPr lang="de-AT" dirty="0"/>
+              <a:t> </a:t>
+            </a:r>
+            <a:r>
+              <a:rPr lang="de-AT" dirty="0" err="1"/>
+              <a:t>is</a:t>
+            </a:r>
+            <a:r>
+              <a:rPr lang="de-AT" dirty="0"/>
+              <a:t> half a </a:t>
+            </a:r>
+            <a:r>
+              <a:rPr lang="de-AT" dirty="0" err="1"/>
+              <a:t>ms</a:t>
+            </a:r>
+            <a:r>
+              <a:rPr lang="de-AT" dirty="0"/>
+              <a:t> off </a:t>
+            </a:r>
+            <a:r>
+              <a:rPr lang="de-AT" dirty="0" err="1"/>
+              <a:t>the</a:t>
+            </a:r>
+            <a:r>
+              <a:rPr lang="de-AT" dirty="0"/>
+              <a:t> </a:t>
+            </a:r>
+            <a:r>
+              <a:rPr lang="de-AT" dirty="0" err="1"/>
+              <a:t>desired</a:t>
+            </a:r>
+            <a:r>
+              <a:rPr lang="de-AT" dirty="0"/>
+              <a:t> 2,5ms/400Hz. </a:t>
+            </a:r>
+            <a:r>
+              <a:rPr lang="de-AT" dirty="0" err="1"/>
+              <a:t>Thats</a:t>
+            </a:r>
+            <a:r>
+              <a:rPr lang="de-AT" dirty="0"/>
+              <a:t> </a:t>
+            </a:r>
+            <a:r>
+              <a:rPr lang="de-AT" dirty="0" err="1"/>
+              <a:t>why</a:t>
+            </a:r>
+            <a:r>
+              <a:rPr lang="de-AT" dirty="0"/>
+              <a:t> </a:t>
+            </a:r>
+            <a:r>
+              <a:rPr lang="de-AT" dirty="0" err="1"/>
+              <a:t>we</a:t>
+            </a:r>
+            <a:r>
+              <a:rPr lang="de-AT" dirty="0"/>
+              <a:t> </a:t>
+            </a:r>
+            <a:r>
+              <a:rPr lang="de-AT" dirty="0" err="1"/>
+              <a:t>created</a:t>
+            </a:r>
+            <a:r>
+              <a:rPr lang="de-AT" dirty="0"/>
+              <a:t> an extra </a:t>
+            </a:r>
+            <a:r>
+              <a:rPr lang="de-AT" dirty="0" err="1"/>
+              <a:t>pythonscript</a:t>
+            </a:r>
+            <a:r>
+              <a:rPr lang="de-AT" dirty="0"/>
+              <a:t> </a:t>
+            </a:r>
+            <a:r>
+              <a:rPr lang="de-AT" dirty="0" err="1"/>
+              <a:t>to</a:t>
+            </a:r>
+            <a:r>
+              <a:rPr lang="de-AT" dirty="0"/>
+              <a:t> </a:t>
+            </a:r>
+            <a:r>
+              <a:rPr lang="de-AT" dirty="0" err="1"/>
+              <a:t>manually</a:t>
+            </a:r>
+            <a:r>
+              <a:rPr lang="de-AT" dirty="0"/>
+              <a:t> </a:t>
+            </a:r>
+            <a:r>
+              <a:rPr lang="de-AT" dirty="0" err="1"/>
+              <a:t>downsample</a:t>
+            </a:r>
+            <a:r>
+              <a:rPr lang="de-AT" dirty="0"/>
+              <a:t> </a:t>
+            </a:r>
+            <a:r>
+              <a:rPr lang="de-AT" dirty="0" err="1"/>
+              <a:t>the</a:t>
+            </a:r>
+            <a:r>
+              <a:rPr lang="de-AT" dirty="0"/>
+              <a:t> </a:t>
+            </a:r>
+            <a:r>
+              <a:rPr lang="de-AT" dirty="0" err="1"/>
+              <a:t>data</a:t>
+            </a:r>
+            <a:r>
+              <a:rPr lang="de-AT" dirty="0"/>
+              <a:t> </a:t>
+            </a:r>
+            <a:r>
+              <a:rPr lang="de-AT" dirty="0" err="1"/>
+              <a:t>files</a:t>
+            </a:r>
+            <a:r>
+              <a:rPr lang="de-AT" dirty="0"/>
+              <a:t> </a:t>
+            </a:r>
+            <a:r>
+              <a:rPr lang="de-AT" dirty="0" err="1"/>
+              <a:t>to</a:t>
+            </a:r>
+            <a:r>
+              <a:rPr lang="de-AT" dirty="0"/>
+              <a:t> 100Hz</a:t>
+            </a:r>
+          </a:p>
+          <a:p>
+            <a:endParaRPr lang="de-AT" dirty="0"/>
+          </a:p>
+          <a:p>
+            <a:r>
+              <a:rPr lang="de-AT" dirty="0" err="1"/>
+              <a:t>Furthermore</a:t>
+            </a:r>
+            <a:r>
+              <a:rPr lang="de-AT" dirty="0"/>
+              <a:t> in </a:t>
+            </a:r>
+            <a:r>
+              <a:rPr lang="de-AT" dirty="0" err="1"/>
+              <a:t>the</a:t>
+            </a:r>
+            <a:r>
+              <a:rPr lang="de-AT" dirty="0"/>
+              <a:t> </a:t>
+            </a:r>
+            <a:r>
+              <a:rPr lang="de-AT" dirty="0" err="1"/>
+              <a:t>main</a:t>
+            </a:r>
+            <a:r>
+              <a:rPr lang="de-AT" dirty="0"/>
+              <a:t> loop </a:t>
+            </a:r>
+            <a:r>
+              <a:rPr lang="de-AT" dirty="0" err="1"/>
+              <a:t>we</a:t>
+            </a:r>
+            <a:r>
+              <a:rPr lang="de-AT" dirty="0"/>
+              <a:t> </a:t>
+            </a:r>
+            <a:r>
+              <a:rPr lang="de-AT" dirty="0" err="1"/>
+              <a:t>encountered</a:t>
+            </a:r>
+            <a:r>
+              <a:rPr lang="de-AT" dirty="0"/>
+              <a:t> </a:t>
+            </a:r>
+            <a:r>
+              <a:rPr lang="de-AT" dirty="0" err="1"/>
+              <a:t>problems</a:t>
+            </a:r>
+            <a:r>
+              <a:rPr lang="de-AT" dirty="0"/>
+              <a:t> </a:t>
+            </a:r>
+            <a:r>
+              <a:rPr lang="de-AT" dirty="0" err="1"/>
+              <a:t>while</a:t>
+            </a:r>
+            <a:r>
+              <a:rPr lang="de-AT" dirty="0"/>
+              <a:t> </a:t>
+            </a:r>
+            <a:r>
+              <a:rPr lang="de-AT" dirty="0" err="1"/>
+              <a:t>timing</a:t>
+            </a:r>
+            <a:r>
+              <a:rPr lang="de-AT" dirty="0"/>
+              <a:t> </a:t>
+            </a:r>
+            <a:r>
+              <a:rPr lang="de-AT" dirty="0" err="1"/>
+              <a:t>the</a:t>
+            </a:r>
+            <a:r>
+              <a:rPr lang="de-AT" dirty="0"/>
+              <a:t> </a:t>
+            </a:r>
+            <a:r>
+              <a:rPr lang="de-AT" dirty="0" err="1"/>
+              <a:t>enqueueing</a:t>
+            </a:r>
+            <a:r>
+              <a:rPr lang="de-AT" dirty="0"/>
+              <a:t>/IMU </a:t>
+            </a:r>
+            <a:r>
+              <a:rPr lang="de-AT" dirty="0" err="1"/>
+              <a:t>data</a:t>
+            </a:r>
+            <a:r>
+              <a:rPr lang="de-AT" dirty="0"/>
+              <a:t> </a:t>
+            </a:r>
+            <a:r>
+              <a:rPr lang="de-AT" dirty="0" err="1"/>
+              <a:t>sampling</a:t>
+            </a:r>
+            <a:r>
+              <a:rPr lang="de-AT" dirty="0"/>
+              <a:t>. </a:t>
+            </a:r>
+            <a:r>
+              <a:rPr lang="de-AT" dirty="0" err="1"/>
+              <a:t>Using</a:t>
+            </a:r>
+            <a:r>
+              <a:rPr lang="de-AT" dirty="0"/>
+              <a:t> an </a:t>
+            </a:r>
+            <a:r>
+              <a:rPr lang="de-AT" dirty="0" err="1"/>
+              <a:t>if-selection</a:t>
+            </a:r>
+            <a:r>
+              <a:rPr lang="de-AT" dirty="0"/>
+              <a:t> and </a:t>
+            </a:r>
+            <a:r>
+              <a:rPr lang="de-AT" dirty="0" err="1"/>
+              <a:t>timing</a:t>
+            </a:r>
+            <a:r>
+              <a:rPr lang="de-AT" dirty="0"/>
+              <a:t> </a:t>
+            </a:r>
+            <a:r>
+              <a:rPr lang="de-AT" dirty="0" err="1"/>
+              <a:t>the</a:t>
+            </a:r>
+            <a:r>
+              <a:rPr lang="de-AT" dirty="0"/>
+              <a:t> </a:t>
+            </a:r>
+            <a:r>
+              <a:rPr lang="de-AT" dirty="0" err="1"/>
+              <a:t>delay</a:t>
+            </a:r>
+            <a:r>
+              <a:rPr lang="de-AT" dirty="0"/>
+              <a:t> </a:t>
+            </a:r>
+            <a:r>
+              <a:rPr lang="de-AT" dirty="0" err="1"/>
+              <a:t>lead</a:t>
+            </a:r>
+            <a:r>
+              <a:rPr lang="de-AT" dirty="0"/>
+              <a:t> </a:t>
+            </a:r>
+            <a:r>
+              <a:rPr lang="de-AT" dirty="0" err="1"/>
+              <a:t>to</a:t>
+            </a:r>
+            <a:r>
+              <a:rPr lang="de-AT" dirty="0"/>
+              <a:t> </a:t>
+            </a:r>
+            <a:r>
+              <a:rPr lang="de-AT" dirty="0" err="1"/>
+              <a:t>the</a:t>
+            </a:r>
+            <a:r>
+              <a:rPr lang="de-AT" dirty="0"/>
+              <a:t> PSOC6 </a:t>
+            </a:r>
+            <a:r>
+              <a:rPr lang="de-AT" dirty="0" err="1"/>
+              <a:t>stalling</a:t>
+            </a:r>
+            <a:r>
+              <a:rPr lang="de-AT" dirty="0"/>
+              <a:t> after a </a:t>
+            </a:r>
+            <a:r>
+              <a:rPr lang="de-AT" dirty="0" err="1"/>
+              <a:t>few</a:t>
+            </a:r>
+            <a:r>
+              <a:rPr lang="de-AT" dirty="0"/>
+              <a:t> </a:t>
+            </a:r>
+            <a:r>
+              <a:rPr lang="de-AT" dirty="0" err="1"/>
+              <a:t>seconds</a:t>
+            </a:r>
+            <a:r>
+              <a:rPr lang="de-AT" dirty="0"/>
+              <a:t>, different </a:t>
+            </a:r>
+            <a:r>
+              <a:rPr lang="de-AT" dirty="0" err="1"/>
+              <a:t>tries</a:t>
+            </a:r>
+            <a:r>
+              <a:rPr lang="de-AT" dirty="0"/>
+              <a:t> </a:t>
+            </a:r>
+            <a:r>
+              <a:rPr lang="de-AT" dirty="0" err="1"/>
+              <a:t>to</a:t>
+            </a:r>
+            <a:r>
+              <a:rPr lang="de-AT" dirty="0"/>
+              <a:t> </a:t>
+            </a:r>
+            <a:r>
+              <a:rPr lang="de-AT" dirty="0" err="1"/>
+              <a:t>solve</a:t>
+            </a:r>
+            <a:r>
+              <a:rPr lang="de-AT" dirty="0"/>
+              <a:t> </a:t>
+            </a:r>
+            <a:r>
+              <a:rPr lang="de-AT" dirty="0" err="1"/>
+              <a:t>the</a:t>
+            </a:r>
+            <a:r>
+              <a:rPr lang="de-AT" dirty="0"/>
+              <a:t> </a:t>
+            </a:r>
+            <a:r>
+              <a:rPr lang="de-AT" dirty="0" err="1"/>
+              <a:t>problem</a:t>
+            </a:r>
+            <a:r>
+              <a:rPr lang="de-AT" dirty="0"/>
+              <a:t> like </a:t>
+            </a:r>
+            <a:r>
+              <a:rPr lang="de-AT" dirty="0" err="1"/>
+              <a:t>manually</a:t>
+            </a:r>
+            <a:r>
+              <a:rPr lang="de-AT" dirty="0"/>
+              <a:t> </a:t>
+            </a:r>
+            <a:r>
+              <a:rPr lang="de-AT" dirty="0" err="1"/>
+              <a:t>triggering</a:t>
+            </a:r>
+            <a:r>
+              <a:rPr lang="de-AT" dirty="0"/>
+              <a:t> </a:t>
+            </a:r>
+            <a:r>
+              <a:rPr lang="de-AT" dirty="0" err="1"/>
+              <a:t>the</a:t>
+            </a:r>
+            <a:r>
+              <a:rPr lang="de-AT" dirty="0"/>
+              <a:t> </a:t>
+            </a:r>
+            <a:r>
+              <a:rPr lang="de-AT" dirty="0" err="1"/>
+              <a:t>garbage</a:t>
+            </a:r>
+            <a:r>
+              <a:rPr lang="de-AT" dirty="0"/>
+              <a:t> </a:t>
+            </a:r>
+            <a:r>
+              <a:rPr lang="de-AT" dirty="0" err="1"/>
+              <a:t>collector</a:t>
+            </a:r>
+            <a:r>
+              <a:rPr lang="de-AT" dirty="0"/>
+              <a:t> </a:t>
+            </a:r>
+            <a:r>
+              <a:rPr lang="de-AT" dirty="0" err="1"/>
+              <a:t>did</a:t>
+            </a:r>
+            <a:r>
+              <a:rPr lang="de-AT" dirty="0"/>
+              <a:t> not </a:t>
+            </a:r>
+            <a:r>
+              <a:rPr lang="de-AT" dirty="0" err="1"/>
+              <a:t>work</a:t>
+            </a:r>
+            <a:r>
+              <a:rPr lang="de-AT" dirty="0"/>
+              <a:t>. </a:t>
+            </a:r>
+            <a:r>
+              <a:rPr lang="de-AT" dirty="0" err="1"/>
+              <a:t>Using</a:t>
+            </a:r>
+            <a:r>
+              <a:rPr lang="de-AT" dirty="0"/>
+              <a:t> </a:t>
+            </a:r>
+            <a:r>
+              <a:rPr lang="de-AT" dirty="0" err="1"/>
+              <a:t>time.wait_ms</a:t>
+            </a:r>
+            <a:r>
+              <a:rPr lang="de-AT" dirty="0"/>
+              <a:t>() </a:t>
+            </a:r>
+            <a:r>
+              <a:rPr lang="de-AT" dirty="0" err="1"/>
+              <a:t>to</a:t>
+            </a:r>
+            <a:r>
+              <a:rPr lang="de-AT" dirty="0"/>
+              <a:t> </a:t>
+            </a:r>
+            <a:r>
+              <a:rPr lang="de-AT" dirty="0" err="1"/>
+              <a:t>achieve</a:t>
+            </a:r>
+            <a:r>
+              <a:rPr lang="de-AT" dirty="0"/>
+              <a:t> </a:t>
+            </a:r>
+            <a:r>
+              <a:rPr lang="de-AT" dirty="0" err="1"/>
+              <a:t>the</a:t>
+            </a:r>
+            <a:r>
+              <a:rPr lang="de-AT" dirty="0"/>
+              <a:t> 10ms loop </a:t>
+            </a:r>
+            <a:r>
+              <a:rPr lang="de-AT" dirty="0" err="1"/>
+              <a:t>runtime</a:t>
+            </a:r>
+            <a:r>
+              <a:rPr lang="de-AT" dirty="0"/>
+              <a:t> </a:t>
+            </a:r>
+            <a:r>
+              <a:rPr lang="de-AT" dirty="0" err="1"/>
+              <a:t>worked</a:t>
+            </a:r>
+            <a:r>
+              <a:rPr lang="de-AT" dirty="0"/>
+              <a:t> out </a:t>
+            </a:r>
+            <a:r>
+              <a:rPr lang="de-AT" dirty="0" err="1"/>
+              <a:t>perfectly</a:t>
+            </a:r>
+            <a:r>
+              <a:rPr lang="de-AT" dirty="0"/>
+              <a:t> (</a:t>
+            </a:r>
+            <a:r>
+              <a:rPr lang="de-AT" dirty="0" err="1"/>
+              <a:t>bad</a:t>
+            </a:r>
+            <a:r>
+              <a:rPr lang="de-AT" dirty="0"/>
+              <a:t> </a:t>
+            </a:r>
+            <a:r>
+              <a:rPr lang="de-AT" dirty="0" err="1"/>
+              <a:t>practice</a:t>
+            </a:r>
+            <a:r>
+              <a:rPr lang="de-AT" dirty="0"/>
+              <a:t> </a:t>
+            </a:r>
+            <a:r>
+              <a:rPr lang="de-AT" dirty="0" err="1"/>
+              <a:t>nonetheless</a:t>
+            </a:r>
+            <a:r>
+              <a:rPr lang="de-AT" dirty="0"/>
+              <a:t>).</a:t>
+            </a:r>
+          </a:p>
+          <a:p>
+            <a:endParaRPr lang="de-AT" dirty="0"/>
+          </a:p>
+          <a:p>
+            <a:r>
+              <a:rPr lang="de-AT" dirty="0" err="1"/>
+              <a:t>Another</a:t>
+            </a:r>
+            <a:r>
+              <a:rPr lang="de-AT" dirty="0"/>
+              <a:t> </a:t>
+            </a:r>
+            <a:r>
+              <a:rPr lang="de-AT" dirty="0" err="1"/>
+              <a:t>problem</a:t>
+            </a:r>
+            <a:r>
+              <a:rPr lang="de-AT" dirty="0"/>
+              <a:t> </a:t>
+            </a:r>
+            <a:r>
+              <a:rPr lang="de-AT" dirty="0" err="1"/>
+              <a:t>has</a:t>
+            </a:r>
+            <a:r>
+              <a:rPr lang="de-AT" dirty="0"/>
+              <a:t> </a:t>
+            </a:r>
+            <a:r>
+              <a:rPr lang="de-AT" dirty="0" err="1"/>
+              <a:t>to</a:t>
+            </a:r>
+            <a:r>
+              <a:rPr lang="de-AT" dirty="0"/>
+              <a:t> do </a:t>
+            </a:r>
+            <a:r>
+              <a:rPr lang="de-AT" dirty="0" err="1"/>
+              <a:t>with</a:t>
+            </a:r>
+            <a:r>
+              <a:rPr lang="de-AT" dirty="0"/>
+              <a:t> </a:t>
+            </a:r>
+            <a:r>
+              <a:rPr lang="de-AT" dirty="0" err="1"/>
+              <a:t>the</a:t>
+            </a:r>
+            <a:r>
+              <a:rPr lang="de-AT" dirty="0"/>
+              <a:t> </a:t>
+            </a:r>
+            <a:r>
+              <a:rPr lang="de-AT" dirty="0" err="1"/>
+              <a:t>sliding</a:t>
+            </a:r>
+            <a:r>
+              <a:rPr lang="de-AT" dirty="0"/>
+              <a:t> </a:t>
+            </a:r>
+            <a:r>
+              <a:rPr lang="de-AT" dirty="0" err="1"/>
+              <a:t>window</a:t>
+            </a:r>
+            <a:r>
+              <a:rPr lang="de-AT" dirty="0"/>
+              <a:t> and </a:t>
+            </a:r>
+            <a:r>
+              <a:rPr lang="de-AT" dirty="0" err="1"/>
+              <a:t>its</a:t>
+            </a:r>
+            <a:r>
+              <a:rPr lang="de-AT" dirty="0"/>
+              <a:t> </a:t>
+            </a:r>
+            <a:r>
+              <a:rPr lang="de-AT" dirty="0" err="1"/>
+              <a:t>length</a:t>
+            </a:r>
+            <a:r>
+              <a:rPr lang="de-AT" dirty="0"/>
+              <a:t>, </a:t>
+            </a:r>
+            <a:r>
+              <a:rPr lang="de-AT" dirty="0" err="1"/>
+              <a:t>sometimes</a:t>
+            </a:r>
+            <a:r>
+              <a:rPr lang="de-AT" dirty="0"/>
+              <a:t> </a:t>
+            </a:r>
+            <a:r>
+              <a:rPr lang="de-AT" dirty="0" err="1"/>
+              <a:t>when</a:t>
+            </a:r>
+            <a:r>
+              <a:rPr lang="de-AT" dirty="0"/>
+              <a:t> a </a:t>
+            </a:r>
+            <a:r>
+              <a:rPr lang="de-AT" dirty="0" err="1"/>
+              <a:t>punch</a:t>
+            </a:r>
+            <a:r>
+              <a:rPr lang="de-AT" dirty="0"/>
+              <a:t> </a:t>
+            </a:r>
+            <a:r>
+              <a:rPr lang="de-AT" dirty="0" err="1"/>
+              <a:t>reaches</a:t>
+            </a:r>
+            <a:r>
+              <a:rPr lang="de-AT" dirty="0"/>
+              <a:t> </a:t>
+            </a:r>
+            <a:r>
+              <a:rPr lang="de-AT" dirty="0" err="1"/>
+              <a:t>across</a:t>
+            </a:r>
+            <a:r>
+              <a:rPr lang="de-AT" dirty="0"/>
+              <a:t> </a:t>
+            </a:r>
+            <a:r>
+              <a:rPr lang="de-AT" dirty="0" err="1"/>
+              <a:t>two</a:t>
+            </a:r>
+            <a:r>
+              <a:rPr lang="de-AT" dirty="0"/>
+              <a:t> </a:t>
+            </a:r>
+            <a:r>
+              <a:rPr lang="de-AT" dirty="0" err="1"/>
+              <a:t>sliding</a:t>
+            </a:r>
+            <a:r>
+              <a:rPr lang="de-AT" dirty="0"/>
+              <a:t> </a:t>
+            </a:r>
+            <a:r>
+              <a:rPr lang="de-AT" dirty="0" err="1"/>
+              <a:t>windows</a:t>
+            </a:r>
+            <a:r>
+              <a:rPr lang="de-AT" dirty="0"/>
+              <a:t>/</a:t>
+            </a:r>
+            <a:r>
+              <a:rPr lang="de-AT" dirty="0" err="1"/>
+              <a:t>predicition</a:t>
+            </a:r>
+            <a:r>
+              <a:rPr lang="de-AT" dirty="0"/>
+              <a:t> </a:t>
+            </a:r>
+            <a:r>
+              <a:rPr lang="de-AT" dirty="0" err="1"/>
+              <a:t>periods</a:t>
+            </a:r>
+            <a:r>
+              <a:rPr lang="de-AT" dirty="0"/>
+              <a:t> </a:t>
+            </a:r>
+            <a:r>
+              <a:rPr lang="de-AT" dirty="0" err="1"/>
+              <a:t>it</a:t>
+            </a:r>
+            <a:r>
+              <a:rPr lang="de-AT" dirty="0"/>
+              <a:t> </a:t>
+            </a:r>
+            <a:r>
+              <a:rPr lang="de-AT" dirty="0" err="1"/>
+              <a:t>leads</a:t>
+            </a:r>
+            <a:r>
+              <a:rPr lang="de-AT" dirty="0"/>
+              <a:t> </a:t>
+            </a:r>
+            <a:r>
+              <a:rPr lang="de-AT" dirty="0" err="1"/>
+              <a:t>to</a:t>
+            </a:r>
+            <a:r>
+              <a:rPr lang="de-AT" dirty="0"/>
+              <a:t> </a:t>
+            </a:r>
+            <a:r>
+              <a:rPr lang="de-AT" dirty="0" err="1"/>
+              <a:t>the</a:t>
+            </a:r>
+            <a:r>
+              <a:rPr lang="de-AT" dirty="0"/>
+              <a:t> </a:t>
+            </a:r>
+            <a:r>
+              <a:rPr lang="de-AT" dirty="0" err="1"/>
+              <a:t>predicition</a:t>
+            </a:r>
+            <a:r>
+              <a:rPr lang="de-AT" dirty="0"/>
+              <a:t> </a:t>
+            </a:r>
+            <a:r>
+              <a:rPr lang="de-AT" dirty="0" err="1"/>
+              <a:t>value</a:t>
+            </a:r>
+            <a:r>
+              <a:rPr lang="de-AT" dirty="0"/>
+              <a:t> </a:t>
+            </a:r>
+            <a:r>
+              <a:rPr lang="de-AT" dirty="0" err="1"/>
+              <a:t>being</a:t>
+            </a:r>
+            <a:r>
+              <a:rPr lang="de-AT" dirty="0"/>
+              <a:t> </a:t>
+            </a:r>
+            <a:r>
+              <a:rPr lang="de-AT" dirty="0" err="1"/>
+              <a:t>higher</a:t>
+            </a:r>
+            <a:r>
+              <a:rPr lang="de-AT" dirty="0"/>
+              <a:t> </a:t>
+            </a:r>
+            <a:r>
+              <a:rPr lang="de-AT" dirty="0" err="1"/>
+              <a:t>than</a:t>
+            </a:r>
+            <a:r>
+              <a:rPr lang="de-AT" dirty="0"/>
+              <a:t> 0.6 </a:t>
+            </a:r>
+            <a:r>
+              <a:rPr lang="de-AT" dirty="0" err="1"/>
+              <a:t>which</a:t>
+            </a:r>
+            <a:r>
+              <a:rPr lang="de-AT" dirty="0"/>
+              <a:t> </a:t>
+            </a:r>
+            <a:r>
+              <a:rPr lang="de-AT" dirty="0" err="1"/>
+              <a:t>counts</a:t>
+            </a:r>
+            <a:r>
+              <a:rPr lang="de-AT" dirty="0"/>
+              <a:t> </a:t>
+            </a:r>
+            <a:r>
+              <a:rPr lang="de-AT" dirty="0" err="1"/>
+              <a:t>one</a:t>
+            </a:r>
+            <a:r>
+              <a:rPr lang="de-AT" dirty="0"/>
+              <a:t> </a:t>
+            </a:r>
+            <a:r>
+              <a:rPr lang="de-AT" dirty="0" err="1"/>
+              <a:t>punch</a:t>
+            </a:r>
+            <a:r>
+              <a:rPr lang="de-AT" dirty="0"/>
+              <a:t> </a:t>
+            </a:r>
+            <a:r>
+              <a:rPr lang="de-AT" dirty="0" err="1"/>
+              <a:t>as</a:t>
+            </a:r>
+            <a:r>
+              <a:rPr lang="de-AT" dirty="0"/>
+              <a:t> </a:t>
+            </a:r>
+            <a:r>
+              <a:rPr lang="de-AT" dirty="0" err="1"/>
+              <a:t>two</a:t>
+            </a:r>
+            <a:r>
+              <a:rPr lang="de-AT" dirty="0"/>
+              <a:t>. This </a:t>
+            </a:r>
+            <a:r>
+              <a:rPr lang="de-AT" dirty="0" err="1"/>
+              <a:t>could</a:t>
+            </a:r>
+            <a:r>
+              <a:rPr lang="de-AT" dirty="0"/>
+              <a:t> </a:t>
+            </a:r>
+            <a:r>
+              <a:rPr lang="de-AT" dirty="0" err="1"/>
+              <a:t>be</a:t>
+            </a:r>
+            <a:r>
+              <a:rPr lang="de-AT" dirty="0"/>
+              <a:t> </a:t>
+            </a:r>
+            <a:r>
+              <a:rPr lang="de-AT" dirty="0" err="1"/>
+              <a:t>fixed</a:t>
+            </a:r>
+            <a:r>
+              <a:rPr lang="de-AT" dirty="0"/>
+              <a:t> </a:t>
+            </a:r>
+            <a:r>
+              <a:rPr lang="de-AT" dirty="0" err="1"/>
+              <a:t>by</a:t>
+            </a:r>
+            <a:r>
+              <a:rPr lang="de-AT" dirty="0"/>
+              <a:t> </a:t>
+            </a:r>
+            <a:r>
+              <a:rPr lang="de-AT" dirty="0" err="1"/>
+              <a:t>trying</a:t>
+            </a:r>
+            <a:r>
+              <a:rPr lang="de-AT" dirty="0"/>
+              <a:t> out </a:t>
+            </a:r>
+            <a:r>
+              <a:rPr lang="de-AT" dirty="0" err="1"/>
+              <a:t>other</a:t>
+            </a:r>
+            <a:r>
+              <a:rPr lang="de-AT" dirty="0"/>
+              <a:t> </a:t>
+            </a:r>
+            <a:r>
+              <a:rPr lang="de-AT" dirty="0" err="1"/>
+              <a:t>sliding</a:t>
+            </a:r>
+            <a:r>
+              <a:rPr lang="de-AT" dirty="0"/>
+              <a:t> </a:t>
+            </a:r>
+            <a:r>
+              <a:rPr lang="de-AT" dirty="0" err="1"/>
+              <a:t>window</a:t>
+            </a:r>
+            <a:r>
+              <a:rPr lang="de-AT" dirty="0"/>
+              <a:t> </a:t>
+            </a:r>
+            <a:r>
+              <a:rPr lang="de-AT" dirty="0" err="1"/>
+              <a:t>values</a:t>
+            </a:r>
+            <a:r>
+              <a:rPr lang="de-AT" dirty="0"/>
+              <a:t> </a:t>
+            </a:r>
+            <a:r>
+              <a:rPr lang="de-AT" dirty="0" err="1"/>
+              <a:t>or</a:t>
+            </a:r>
+            <a:r>
+              <a:rPr lang="de-AT" dirty="0"/>
+              <a:t> </a:t>
+            </a:r>
+            <a:r>
+              <a:rPr lang="de-AT" dirty="0" err="1"/>
+              <a:t>peak</a:t>
+            </a:r>
+            <a:r>
+              <a:rPr lang="de-AT" dirty="0"/>
+              <a:t> </a:t>
+            </a:r>
+            <a:r>
+              <a:rPr lang="de-AT" dirty="0" err="1"/>
+              <a:t>detection</a:t>
+            </a:r>
+            <a:r>
+              <a:rPr lang="de-AT" dirty="0"/>
+              <a:t> in </a:t>
+            </a:r>
+            <a:r>
+              <a:rPr lang="de-AT" dirty="0" err="1"/>
+              <a:t>our</a:t>
+            </a:r>
+            <a:r>
+              <a:rPr lang="de-AT" dirty="0"/>
+              <a:t> </a:t>
+            </a:r>
+            <a:r>
+              <a:rPr lang="de-AT" dirty="0" err="1"/>
+              <a:t>Micropython</a:t>
+            </a:r>
+            <a:r>
+              <a:rPr lang="de-AT"/>
+              <a:t> code</a:t>
             </a:r>
           </a:p>
         </p:txBody>
@@ -7827,6 +9466,492 @@
           <a:bodyPr/>
           <a:lstStyle/>
           <a:p>
+            <a:r>
+              <a:rPr lang="de-AT" dirty="0"/>
+              <a:t>Data </a:t>
+            </a:r>
+            <a:r>
+              <a:rPr lang="de-AT" dirty="0" err="1"/>
+              <a:t>of</a:t>
+            </a:r>
+            <a:r>
+              <a:rPr lang="de-AT" dirty="0"/>
+              <a:t> </a:t>
+            </a:r>
+            <a:r>
+              <a:rPr lang="de-AT" dirty="0" err="1"/>
+              <a:t>one</a:t>
+            </a:r>
+            <a:r>
+              <a:rPr lang="de-AT" dirty="0"/>
+              <a:t> </a:t>
+            </a:r>
+            <a:r>
+              <a:rPr lang="de-AT" dirty="0" err="1"/>
+              <a:t>person</a:t>
+            </a:r>
+            <a:r>
+              <a:rPr lang="de-AT" dirty="0"/>
+              <a:t> </a:t>
+            </a:r>
+            <a:r>
+              <a:rPr lang="de-AT" dirty="0" err="1"/>
+              <a:t>for</a:t>
+            </a:r>
+            <a:r>
+              <a:rPr lang="de-AT" dirty="0"/>
+              <a:t> </a:t>
+            </a:r>
+            <a:r>
+              <a:rPr lang="de-AT" dirty="0" err="1"/>
+              <a:t>greater</a:t>
+            </a:r>
+            <a:r>
+              <a:rPr lang="de-AT" dirty="0"/>
+              <a:t> </a:t>
+            </a:r>
+            <a:r>
+              <a:rPr lang="de-AT" dirty="0" err="1"/>
+              <a:t>accuracy</a:t>
+            </a:r>
+            <a:r>
+              <a:rPr lang="de-AT" dirty="0"/>
+              <a:t>. </a:t>
+            </a:r>
+            <a:r>
+              <a:rPr lang="de-AT" dirty="0" err="1"/>
+              <a:t>Gathered</a:t>
+            </a:r>
+            <a:r>
+              <a:rPr lang="de-AT" dirty="0"/>
+              <a:t> a total </a:t>
+            </a:r>
+            <a:r>
+              <a:rPr lang="de-AT" dirty="0" err="1"/>
+              <a:t>of</a:t>
+            </a:r>
+            <a:r>
+              <a:rPr lang="de-AT" dirty="0"/>
+              <a:t> 45 </a:t>
+            </a:r>
+            <a:r>
+              <a:rPr lang="de-AT" dirty="0" err="1"/>
+              <a:t>minutes</a:t>
+            </a:r>
+            <a:r>
+              <a:rPr lang="de-AT" dirty="0"/>
+              <a:t> </a:t>
+            </a:r>
+            <a:r>
+              <a:rPr lang="de-AT" dirty="0" err="1"/>
+              <a:t>of</a:t>
+            </a:r>
+            <a:r>
+              <a:rPr lang="de-AT" dirty="0"/>
+              <a:t> </a:t>
+            </a:r>
+            <a:r>
+              <a:rPr lang="de-AT" dirty="0" err="1"/>
+              <a:t>data</a:t>
+            </a:r>
+            <a:r>
+              <a:rPr lang="de-AT" dirty="0"/>
+              <a:t>, 18,5 </a:t>
+            </a:r>
+            <a:r>
+              <a:rPr lang="de-AT" dirty="0" err="1"/>
+              <a:t>labeled</a:t>
+            </a:r>
+            <a:r>
+              <a:rPr lang="de-AT" dirty="0"/>
+              <a:t>. </a:t>
+            </a:r>
+          </a:p>
+          <a:p>
+            <a:endParaRPr lang="de-AT" dirty="0"/>
+          </a:p>
+          <a:p>
+            <a:r>
+              <a:rPr lang="de-AT" dirty="0" err="1"/>
+              <a:t>We</a:t>
+            </a:r>
+            <a:r>
+              <a:rPr lang="de-AT" dirty="0"/>
+              <a:t> </a:t>
+            </a:r>
+            <a:r>
+              <a:rPr lang="de-AT" dirty="0" err="1"/>
+              <a:t>chose</a:t>
+            </a:r>
+            <a:r>
+              <a:rPr lang="de-AT" dirty="0"/>
+              <a:t> a 60/20/20 </a:t>
+            </a:r>
+            <a:r>
+              <a:rPr lang="de-AT" dirty="0" err="1"/>
+              <a:t>split</a:t>
+            </a:r>
+            <a:r>
+              <a:rPr lang="de-AT" dirty="0"/>
+              <a:t> </a:t>
+            </a:r>
+            <a:r>
+              <a:rPr lang="de-AT" dirty="0" err="1"/>
+              <a:t>as</a:t>
+            </a:r>
+            <a:r>
+              <a:rPr lang="de-AT" dirty="0"/>
+              <a:t> </a:t>
+            </a:r>
+            <a:r>
+              <a:rPr lang="de-AT" dirty="0" err="1"/>
+              <a:t>suggested</a:t>
+            </a:r>
+            <a:r>
+              <a:rPr lang="de-AT" dirty="0"/>
+              <a:t> in </a:t>
+            </a:r>
+            <a:r>
+              <a:rPr lang="de-AT" dirty="0" err="1"/>
+              <a:t>the</a:t>
+            </a:r>
+            <a:r>
+              <a:rPr lang="de-AT" dirty="0"/>
+              <a:t> </a:t>
+            </a:r>
+            <a:r>
+              <a:rPr lang="de-AT" dirty="0" err="1"/>
+              <a:t>lecture</a:t>
+            </a:r>
+            <a:r>
+              <a:rPr lang="de-AT" dirty="0"/>
+              <a:t> </a:t>
+            </a:r>
+            <a:r>
+              <a:rPr lang="de-AT" dirty="0" err="1"/>
+              <a:t>part</a:t>
+            </a:r>
+            <a:r>
+              <a:rPr lang="de-AT" dirty="0"/>
+              <a:t> </a:t>
+            </a:r>
+            <a:r>
+              <a:rPr lang="de-AT" dirty="0" err="1"/>
+              <a:t>of</a:t>
+            </a:r>
+            <a:r>
+              <a:rPr lang="de-AT" dirty="0"/>
+              <a:t> </a:t>
+            </a:r>
+            <a:r>
+              <a:rPr lang="de-AT" dirty="0" err="1"/>
+              <a:t>the</a:t>
+            </a:r>
+            <a:r>
+              <a:rPr lang="de-AT" dirty="0"/>
+              <a:t> </a:t>
+            </a:r>
+            <a:r>
+              <a:rPr lang="de-AT" dirty="0" err="1"/>
+              <a:t>project</a:t>
+            </a:r>
+            <a:r>
+              <a:rPr lang="de-AT" dirty="0"/>
+              <a:t>. </a:t>
+            </a:r>
+          </a:p>
+          <a:p>
+            <a:endParaRPr lang="de-AT" dirty="0"/>
+          </a:p>
+          <a:p>
+            <a:r>
+              <a:rPr lang="de-AT" dirty="0" err="1"/>
+              <a:t>Implemented</a:t>
+            </a:r>
+            <a:r>
+              <a:rPr lang="de-AT" dirty="0"/>
+              <a:t> negative </a:t>
+            </a:r>
+            <a:r>
+              <a:rPr lang="de-AT" dirty="0" err="1"/>
+              <a:t>data</a:t>
+            </a:r>
+            <a:r>
+              <a:rPr lang="de-AT" dirty="0"/>
+              <a:t> </a:t>
+            </a:r>
+            <a:r>
+              <a:rPr lang="de-AT" dirty="0" err="1"/>
+              <a:t>which</a:t>
+            </a:r>
+            <a:r>
+              <a:rPr lang="de-AT" dirty="0"/>
+              <a:t> </a:t>
+            </a:r>
+            <a:r>
+              <a:rPr lang="de-AT" dirty="0" err="1"/>
+              <a:t>consists</a:t>
+            </a:r>
+            <a:r>
+              <a:rPr lang="de-AT" dirty="0"/>
+              <a:t> </a:t>
+            </a:r>
+            <a:r>
+              <a:rPr lang="de-AT" dirty="0" err="1"/>
+              <a:t>of</a:t>
+            </a:r>
+            <a:r>
+              <a:rPr lang="de-AT" dirty="0"/>
+              <a:t> </a:t>
+            </a:r>
+            <a:r>
+              <a:rPr lang="de-AT" dirty="0" err="1"/>
+              <a:t>warming</a:t>
+            </a:r>
+            <a:r>
+              <a:rPr lang="de-AT" dirty="0"/>
+              <a:t> </a:t>
+            </a:r>
+            <a:r>
+              <a:rPr lang="de-AT" dirty="0" err="1"/>
+              <a:t>up</a:t>
+            </a:r>
+            <a:r>
+              <a:rPr lang="de-AT" dirty="0"/>
+              <a:t>, </a:t>
+            </a:r>
+            <a:r>
+              <a:rPr lang="de-AT" dirty="0" err="1"/>
+              <a:t>walking</a:t>
+            </a:r>
+            <a:r>
+              <a:rPr lang="de-AT" dirty="0"/>
+              <a:t> </a:t>
+            </a:r>
+            <a:r>
+              <a:rPr lang="de-AT" dirty="0" err="1"/>
+              <a:t>around</a:t>
+            </a:r>
+            <a:r>
+              <a:rPr lang="de-AT" dirty="0"/>
+              <a:t> and </a:t>
+            </a:r>
+            <a:r>
+              <a:rPr lang="de-AT" dirty="0" err="1"/>
+              <a:t>data</a:t>
+            </a:r>
+            <a:r>
+              <a:rPr lang="de-AT" dirty="0"/>
+              <a:t> </a:t>
+            </a:r>
+            <a:r>
+              <a:rPr lang="de-AT" dirty="0" err="1"/>
+              <a:t>which</a:t>
+            </a:r>
+            <a:r>
+              <a:rPr lang="de-AT" dirty="0"/>
+              <a:t> </a:t>
+            </a:r>
+            <a:r>
+              <a:rPr lang="de-AT" dirty="0" err="1"/>
+              <a:t>shows</a:t>
+            </a:r>
+            <a:r>
+              <a:rPr lang="de-AT" dirty="0"/>
+              <a:t> </a:t>
+            </a:r>
+            <a:r>
+              <a:rPr lang="de-AT" dirty="0" err="1"/>
+              <a:t>neither</a:t>
+            </a:r>
+            <a:r>
+              <a:rPr lang="de-AT" dirty="0"/>
+              <a:t> </a:t>
+            </a:r>
+            <a:r>
+              <a:rPr lang="de-AT" dirty="0" err="1"/>
+              <a:t>distinc</a:t>
+            </a:r>
+            <a:r>
+              <a:rPr lang="de-AT" dirty="0"/>
+              <a:t> </a:t>
+            </a:r>
+            <a:r>
+              <a:rPr lang="de-AT" dirty="0" err="1"/>
+              <a:t>punches</a:t>
+            </a:r>
+            <a:r>
+              <a:rPr lang="de-AT" dirty="0"/>
+              <a:t> </a:t>
+            </a:r>
+            <a:r>
+              <a:rPr lang="de-AT" dirty="0" err="1"/>
+              <a:t>thrown</a:t>
+            </a:r>
+            <a:r>
+              <a:rPr lang="de-AT" dirty="0"/>
+              <a:t> </a:t>
+            </a:r>
+            <a:r>
+              <a:rPr lang="de-AT" dirty="0" err="1"/>
+              <a:t>nor</a:t>
+            </a:r>
+            <a:r>
+              <a:rPr lang="de-AT" dirty="0"/>
+              <a:t> </a:t>
+            </a:r>
+            <a:r>
+              <a:rPr lang="de-AT" dirty="0" err="1"/>
+              <a:t>completly</a:t>
+            </a:r>
+            <a:r>
+              <a:rPr lang="de-AT" dirty="0"/>
+              <a:t> </a:t>
+            </a:r>
+            <a:r>
+              <a:rPr lang="de-AT" dirty="0" err="1"/>
+              <a:t>standing</a:t>
+            </a:r>
+            <a:r>
+              <a:rPr lang="de-AT" dirty="0"/>
+              <a:t> still.</a:t>
+            </a:r>
+          </a:p>
+          <a:p>
+            <a:r>
+              <a:rPr lang="de-AT" dirty="0"/>
+              <a:t> </a:t>
+            </a:r>
+          </a:p>
+          <a:p>
+            <a:r>
+              <a:rPr lang="de-AT" dirty="0"/>
+              <a:t>On </a:t>
+            </a:r>
+            <a:r>
+              <a:rPr lang="de-AT" dirty="0" err="1"/>
+              <a:t>the</a:t>
+            </a:r>
+            <a:r>
+              <a:rPr lang="de-AT" dirty="0"/>
+              <a:t> </a:t>
+            </a:r>
+            <a:r>
+              <a:rPr lang="de-AT" dirty="0" err="1"/>
+              <a:t>picture</a:t>
+            </a:r>
+            <a:r>
+              <a:rPr lang="de-AT" dirty="0"/>
+              <a:t> </a:t>
+            </a:r>
+            <a:r>
+              <a:rPr lang="de-AT" dirty="0" err="1"/>
+              <a:t>you</a:t>
+            </a:r>
+            <a:r>
+              <a:rPr lang="de-AT" dirty="0"/>
+              <a:t> </a:t>
+            </a:r>
+            <a:r>
+              <a:rPr lang="de-AT" dirty="0" err="1"/>
+              <a:t>can</a:t>
+            </a:r>
+            <a:r>
+              <a:rPr lang="de-AT" dirty="0"/>
+              <a:t> </a:t>
+            </a:r>
+            <a:r>
+              <a:rPr lang="de-AT" dirty="0" err="1"/>
+              <a:t>see</a:t>
+            </a:r>
+            <a:r>
+              <a:rPr lang="de-AT" dirty="0"/>
+              <a:t> </a:t>
+            </a:r>
+            <a:r>
+              <a:rPr lang="de-AT" dirty="0" err="1"/>
+              <a:t>the</a:t>
+            </a:r>
+            <a:r>
+              <a:rPr lang="de-AT" dirty="0"/>
+              <a:t> </a:t>
+            </a:r>
+            <a:r>
+              <a:rPr lang="de-AT" dirty="0" err="1"/>
+              <a:t>specific</a:t>
+            </a:r>
+            <a:r>
+              <a:rPr lang="de-AT" dirty="0"/>
+              <a:t> </a:t>
+            </a:r>
+            <a:r>
+              <a:rPr lang="de-AT" dirty="0" err="1"/>
+              <a:t>splits</a:t>
+            </a:r>
+            <a:r>
+              <a:rPr lang="de-AT" dirty="0"/>
+              <a:t> </a:t>
+            </a:r>
+            <a:r>
+              <a:rPr lang="de-AT" dirty="0" err="1"/>
+              <a:t>for</a:t>
+            </a:r>
+            <a:r>
+              <a:rPr lang="de-AT" dirty="0"/>
+              <a:t> </a:t>
+            </a:r>
+            <a:r>
+              <a:rPr lang="de-AT" dirty="0" err="1"/>
+              <a:t>train</a:t>
+            </a:r>
+            <a:r>
+              <a:rPr lang="de-AT" dirty="0"/>
+              <a:t>/</a:t>
+            </a:r>
+            <a:r>
+              <a:rPr lang="de-AT" dirty="0" err="1"/>
+              <a:t>validation</a:t>
+            </a:r>
+            <a:r>
+              <a:rPr lang="de-AT" dirty="0"/>
+              <a:t> and </a:t>
+            </a:r>
+            <a:r>
+              <a:rPr lang="de-AT" dirty="0" err="1"/>
+              <a:t>test</a:t>
+            </a:r>
+            <a:r>
+              <a:rPr lang="de-AT" dirty="0"/>
+              <a:t> </a:t>
+            </a:r>
+            <a:r>
+              <a:rPr lang="de-AT" dirty="0" err="1"/>
+              <a:t>we</a:t>
+            </a:r>
+            <a:r>
+              <a:rPr lang="de-AT" dirty="0"/>
+              <a:t> </a:t>
+            </a:r>
+            <a:r>
+              <a:rPr lang="de-AT" dirty="0" err="1"/>
+              <a:t>achieved</a:t>
+            </a:r>
+            <a:r>
+              <a:rPr lang="de-AT" dirty="0"/>
+              <a:t> in </a:t>
+            </a:r>
+            <a:r>
+              <a:rPr lang="de-AT" dirty="0" err="1"/>
+              <a:t>our</a:t>
+            </a:r>
+            <a:r>
+              <a:rPr lang="de-AT" dirty="0"/>
+              <a:t> </a:t>
+            </a:r>
+            <a:r>
+              <a:rPr lang="de-AT" dirty="0" err="1"/>
+              <a:t>classification</a:t>
+            </a:r>
             <a:endParaRPr lang="de-AT" dirty="0"/>
           </a:p>
         </p:txBody>
@@ -7911,6 +10036,506 @@
           <a:bodyPr/>
           <a:lstStyle/>
           <a:p>
+            <a:r>
+              <a:rPr lang="de-AT" dirty="0" err="1"/>
+              <a:t>Differene</a:t>
+            </a:r>
+            <a:r>
+              <a:rPr lang="de-AT" dirty="0"/>
+              <a:t> </a:t>
+            </a:r>
+            <a:r>
+              <a:rPr lang="de-AT" dirty="0" err="1"/>
+              <a:t>between</a:t>
+            </a:r>
+            <a:r>
+              <a:rPr lang="de-AT" dirty="0"/>
+              <a:t> </a:t>
+            </a:r>
+            <a:r>
+              <a:rPr lang="de-AT" dirty="0" err="1"/>
+              <a:t>tobi</a:t>
+            </a:r>
+            <a:r>
+              <a:rPr lang="de-AT" dirty="0"/>
+              <a:t> on </a:t>
+            </a:r>
+            <a:r>
+              <a:rPr lang="de-AT" dirty="0" err="1"/>
+              <a:t>the</a:t>
+            </a:r>
+            <a:r>
+              <a:rPr lang="de-AT" dirty="0"/>
+              <a:t> </a:t>
+            </a:r>
+            <a:r>
+              <a:rPr lang="de-AT" dirty="0" err="1"/>
+              <a:t>left</a:t>
+            </a:r>
+            <a:r>
+              <a:rPr lang="de-AT" dirty="0"/>
+              <a:t> and </a:t>
+            </a:r>
+            <a:r>
+              <a:rPr lang="de-AT" dirty="0" err="1"/>
+              <a:t>my</a:t>
+            </a:r>
+            <a:r>
+              <a:rPr lang="de-AT" dirty="0"/>
+              <a:t> </a:t>
+            </a:r>
+            <a:r>
+              <a:rPr lang="de-AT" dirty="0" err="1"/>
+              <a:t>data</a:t>
+            </a:r>
+            <a:r>
+              <a:rPr lang="de-AT" dirty="0"/>
+              <a:t> on </a:t>
+            </a:r>
+            <a:r>
+              <a:rPr lang="de-AT" dirty="0" err="1"/>
+              <a:t>the</a:t>
+            </a:r>
+            <a:r>
+              <a:rPr lang="de-AT" dirty="0"/>
+              <a:t> </a:t>
+            </a:r>
+            <a:r>
+              <a:rPr lang="de-AT" dirty="0" err="1"/>
+              <a:t>right</a:t>
+            </a:r>
+            <a:r>
+              <a:rPr lang="de-AT" dirty="0"/>
+              <a:t> </a:t>
+            </a:r>
+            <a:r>
+              <a:rPr lang="de-AT" dirty="0" err="1"/>
+              <a:t>is</a:t>
+            </a:r>
+            <a:r>
+              <a:rPr lang="de-AT" dirty="0"/>
+              <a:t> not </a:t>
+            </a:r>
+            <a:r>
+              <a:rPr lang="de-AT" dirty="0" err="1"/>
+              <a:t>as</a:t>
+            </a:r>
+            <a:r>
+              <a:rPr lang="de-AT" dirty="0"/>
+              <a:t> </a:t>
+            </a:r>
+            <a:r>
+              <a:rPr lang="de-AT" dirty="0" err="1"/>
+              <a:t>big</a:t>
+            </a:r>
+            <a:r>
+              <a:rPr lang="de-AT" dirty="0"/>
+              <a:t> </a:t>
+            </a:r>
+            <a:r>
+              <a:rPr lang="de-AT" dirty="0" err="1"/>
+              <a:t>as</a:t>
+            </a:r>
+            <a:r>
+              <a:rPr lang="de-AT" dirty="0"/>
+              <a:t> </a:t>
+            </a:r>
+            <a:r>
+              <a:rPr lang="de-AT" dirty="0" err="1"/>
+              <a:t>the</a:t>
+            </a:r>
+            <a:r>
+              <a:rPr lang="de-AT" dirty="0"/>
+              <a:t> </a:t>
+            </a:r>
+            <a:r>
+              <a:rPr lang="de-AT" dirty="0" err="1"/>
+              <a:t>difference</a:t>
+            </a:r>
+            <a:r>
+              <a:rPr lang="de-AT" dirty="0"/>
+              <a:t> </a:t>
+            </a:r>
+            <a:r>
+              <a:rPr lang="de-AT" dirty="0" err="1"/>
+              <a:t>to</a:t>
+            </a:r>
+            <a:r>
+              <a:rPr lang="de-AT" dirty="0"/>
+              <a:t> </a:t>
+            </a:r>
+            <a:r>
+              <a:rPr lang="de-AT" dirty="0" err="1"/>
+              <a:t>theos</a:t>
+            </a:r>
+            <a:r>
+              <a:rPr lang="de-AT" dirty="0"/>
+              <a:t> </a:t>
+            </a:r>
+            <a:r>
+              <a:rPr lang="de-AT" dirty="0" err="1"/>
+              <a:t>data</a:t>
+            </a:r>
+            <a:r>
+              <a:rPr lang="de-AT" dirty="0"/>
+              <a:t> in </a:t>
+            </a:r>
+            <a:r>
+              <a:rPr lang="de-AT" dirty="0" err="1"/>
+              <a:t>the</a:t>
+            </a:r>
+            <a:r>
+              <a:rPr lang="de-AT" dirty="0"/>
+              <a:t> </a:t>
+            </a:r>
+            <a:r>
+              <a:rPr lang="de-AT" dirty="0" err="1"/>
+              <a:t>middle</a:t>
+            </a:r>
+            <a:r>
+              <a:rPr lang="de-AT" dirty="0"/>
+              <a:t>. </a:t>
+            </a:r>
+            <a:r>
+              <a:rPr lang="de-AT" dirty="0" err="1"/>
+              <a:t>Its</a:t>
+            </a:r>
+            <a:r>
+              <a:rPr lang="de-AT" dirty="0"/>
+              <a:t> </a:t>
+            </a:r>
+            <a:r>
+              <a:rPr lang="de-AT" dirty="0" err="1"/>
+              <a:t>necessary</a:t>
+            </a:r>
+            <a:r>
+              <a:rPr lang="de-AT" dirty="0"/>
+              <a:t> </a:t>
+            </a:r>
+            <a:r>
+              <a:rPr lang="de-AT" dirty="0" err="1"/>
+              <a:t>to</a:t>
+            </a:r>
+            <a:r>
+              <a:rPr lang="de-AT" dirty="0"/>
+              <a:t> </a:t>
+            </a:r>
+            <a:r>
+              <a:rPr lang="de-AT" dirty="0" err="1"/>
+              <a:t>state</a:t>
+            </a:r>
+            <a:r>
+              <a:rPr lang="de-AT" dirty="0"/>
+              <a:t> </a:t>
+            </a:r>
+            <a:r>
+              <a:rPr lang="de-AT" dirty="0" err="1"/>
+              <a:t>that</a:t>
+            </a:r>
+            <a:r>
+              <a:rPr lang="de-AT" dirty="0"/>
+              <a:t> </a:t>
+            </a:r>
+            <a:r>
+              <a:rPr lang="de-AT" dirty="0" err="1"/>
+              <a:t>tobi</a:t>
+            </a:r>
+            <a:r>
+              <a:rPr lang="de-AT" dirty="0"/>
+              <a:t> and i </a:t>
+            </a:r>
+            <a:r>
+              <a:rPr lang="de-AT" dirty="0" err="1"/>
+              <a:t>have</a:t>
+            </a:r>
+            <a:r>
+              <a:rPr lang="de-AT" dirty="0"/>
+              <a:t> </a:t>
+            </a:r>
+            <a:r>
+              <a:rPr lang="de-AT" dirty="0" err="1"/>
+              <a:t>boxed</a:t>
+            </a:r>
+            <a:r>
+              <a:rPr lang="de-AT" dirty="0"/>
+              <a:t> multiple </a:t>
+            </a:r>
+            <a:r>
+              <a:rPr lang="de-AT" dirty="0" err="1"/>
+              <a:t>times</a:t>
+            </a:r>
+            <a:r>
+              <a:rPr lang="de-AT" dirty="0"/>
+              <a:t> </a:t>
+            </a:r>
+            <a:r>
+              <a:rPr lang="de-AT" dirty="0" err="1"/>
+              <a:t>before</a:t>
+            </a:r>
+            <a:r>
+              <a:rPr lang="de-AT" dirty="0"/>
+              <a:t> and </a:t>
+            </a:r>
+            <a:r>
+              <a:rPr lang="de-AT" dirty="0" err="1"/>
+              <a:t>theo</a:t>
+            </a:r>
+            <a:r>
+              <a:rPr lang="de-AT" dirty="0"/>
+              <a:t> </a:t>
+            </a:r>
+            <a:r>
+              <a:rPr lang="de-AT" dirty="0" err="1"/>
+              <a:t>took</a:t>
+            </a:r>
+            <a:r>
+              <a:rPr lang="de-AT" dirty="0"/>
+              <a:t> </a:t>
+            </a:r>
+            <a:r>
+              <a:rPr lang="de-AT" dirty="0" err="1"/>
+              <a:t>his</a:t>
+            </a:r>
+            <a:r>
+              <a:rPr lang="de-AT" dirty="0"/>
+              <a:t> </a:t>
+            </a:r>
+            <a:r>
+              <a:rPr lang="de-AT" dirty="0" err="1"/>
+              <a:t>first</a:t>
+            </a:r>
+            <a:r>
+              <a:rPr lang="de-AT" dirty="0"/>
+              <a:t> </a:t>
+            </a:r>
+            <a:r>
+              <a:rPr lang="de-AT" dirty="0" err="1"/>
+              <a:t>punches</a:t>
+            </a:r>
+            <a:r>
+              <a:rPr lang="de-AT" dirty="0"/>
+              <a:t> </a:t>
+            </a:r>
+            <a:r>
+              <a:rPr lang="de-AT" dirty="0" err="1"/>
+              <a:t>during</a:t>
+            </a:r>
+            <a:r>
+              <a:rPr lang="de-AT" dirty="0"/>
+              <a:t> </a:t>
+            </a:r>
+            <a:r>
+              <a:rPr lang="de-AT" dirty="0" err="1"/>
+              <a:t>our</a:t>
+            </a:r>
+            <a:r>
+              <a:rPr lang="de-AT" dirty="0"/>
+              <a:t> </a:t>
+            </a:r>
+            <a:r>
+              <a:rPr lang="de-AT" dirty="0" err="1"/>
+              <a:t>project</a:t>
+            </a:r>
+            <a:r>
+              <a:rPr lang="de-AT" dirty="0"/>
+              <a:t> (and </a:t>
+            </a:r>
+            <a:r>
+              <a:rPr lang="de-AT" dirty="0" err="1"/>
+              <a:t>with</a:t>
+            </a:r>
+            <a:r>
+              <a:rPr lang="de-AT" dirty="0"/>
+              <a:t> </a:t>
+            </a:r>
+            <a:r>
+              <a:rPr lang="de-AT" dirty="0" err="1"/>
+              <a:t>us</a:t>
+            </a:r>
+            <a:r>
+              <a:rPr lang="de-AT" dirty="0"/>
+              <a:t> </a:t>
+            </a:r>
+            <a:r>
+              <a:rPr lang="de-AT" dirty="0" err="1"/>
+              <a:t>as</a:t>
+            </a:r>
+            <a:r>
+              <a:rPr lang="de-AT" dirty="0"/>
+              <a:t> </a:t>
+            </a:r>
+            <a:r>
+              <a:rPr lang="de-AT" dirty="0" err="1"/>
+              <a:t>his</a:t>
+            </a:r>
+            <a:r>
+              <a:rPr lang="de-AT" dirty="0"/>
+              <a:t> </a:t>
+            </a:r>
+            <a:r>
+              <a:rPr lang="de-AT" dirty="0" err="1"/>
+              <a:t>coaches</a:t>
+            </a:r>
+            <a:r>
+              <a:rPr lang="de-AT" dirty="0"/>
+              <a:t> ;) ) </a:t>
+            </a:r>
+            <a:r>
+              <a:rPr lang="de-AT" dirty="0" err="1"/>
+              <a:t>That</a:t>
+            </a:r>
+            <a:r>
+              <a:rPr lang="de-AT" dirty="0"/>
+              <a:t> </a:t>
+            </a:r>
+            <a:r>
+              <a:rPr lang="de-AT" dirty="0" err="1"/>
+              <a:t>visualizes</a:t>
+            </a:r>
+            <a:r>
+              <a:rPr lang="de-AT" dirty="0"/>
+              <a:t> </a:t>
+            </a:r>
+            <a:r>
+              <a:rPr lang="de-AT" dirty="0" err="1"/>
+              <a:t>perfectly</a:t>
+            </a:r>
+            <a:r>
+              <a:rPr lang="de-AT" dirty="0"/>
+              <a:t> </a:t>
+            </a:r>
+            <a:r>
+              <a:rPr lang="de-AT" dirty="0" err="1"/>
+              <a:t>how</a:t>
+            </a:r>
+            <a:r>
+              <a:rPr lang="de-AT" dirty="0"/>
+              <a:t> </a:t>
+            </a:r>
+            <a:r>
+              <a:rPr lang="de-AT" dirty="0" err="1"/>
+              <a:t>significant</a:t>
+            </a:r>
+            <a:r>
+              <a:rPr lang="de-AT" dirty="0"/>
+              <a:t> </a:t>
+            </a:r>
+            <a:r>
+              <a:rPr lang="de-AT" dirty="0" err="1"/>
+              <a:t>the</a:t>
+            </a:r>
+            <a:r>
+              <a:rPr lang="de-AT" dirty="0"/>
+              <a:t> </a:t>
+            </a:r>
+            <a:r>
+              <a:rPr lang="de-AT" dirty="0" err="1"/>
+              <a:t>differences</a:t>
+            </a:r>
+            <a:r>
+              <a:rPr lang="de-AT" dirty="0"/>
+              <a:t> </a:t>
+            </a:r>
+            <a:r>
+              <a:rPr lang="de-AT" dirty="0" err="1"/>
+              <a:t>can</a:t>
+            </a:r>
+            <a:r>
+              <a:rPr lang="de-AT" dirty="0"/>
+              <a:t> </a:t>
+            </a:r>
+            <a:r>
+              <a:rPr lang="de-AT" dirty="0" err="1"/>
+              <a:t>be</a:t>
+            </a:r>
+            <a:r>
+              <a:rPr lang="de-AT" dirty="0"/>
+              <a:t>, </a:t>
+            </a:r>
+            <a:r>
+              <a:rPr lang="de-AT" dirty="0" err="1"/>
+              <a:t>therefore</a:t>
+            </a:r>
+            <a:r>
+              <a:rPr lang="de-AT" dirty="0"/>
+              <a:t> </a:t>
+            </a:r>
+            <a:r>
+              <a:rPr lang="de-AT" dirty="0" err="1"/>
+              <a:t>we</a:t>
+            </a:r>
+            <a:r>
+              <a:rPr lang="de-AT" dirty="0"/>
+              <a:t> </a:t>
+            </a:r>
+            <a:r>
+              <a:rPr lang="de-AT" dirty="0" err="1"/>
+              <a:t>decided</a:t>
+            </a:r>
+            <a:r>
+              <a:rPr lang="de-AT" dirty="0"/>
+              <a:t> </a:t>
+            </a:r>
+            <a:r>
+              <a:rPr lang="de-AT" dirty="0" err="1"/>
+              <a:t>to</a:t>
+            </a:r>
+            <a:r>
+              <a:rPr lang="de-AT" dirty="0"/>
+              <a:t> </a:t>
+            </a:r>
+            <a:r>
+              <a:rPr lang="de-AT" dirty="0" err="1"/>
+              <a:t>only</a:t>
+            </a:r>
+            <a:r>
+              <a:rPr lang="de-AT" dirty="0"/>
+              <a:t> </a:t>
+            </a:r>
+            <a:r>
+              <a:rPr lang="de-AT" dirty="0" err="1"/>
+              <a:t>use</a:t>
+            </a:r>
+            <a:r>
+              <a:rPr lang="de-AT" dirty="0"/>
+              <a:t> </a:t>
+            </a:r>
+            <a:r>
+              <a:rPr lang="de-AT" dirty="0" err="1"/>
+              <a:t>the</a:t>
+            </a:r>
+            <a:r>
+              <a:rPr lang="de-AT" dirty="0"/>
+              <a:t> </a:t>
+            </a:r>
+            <a:r>
+              <a:rPr lang="de-AT" dirty="0" err="1"/>
+              <a:t>data</a:t>
+            </a:r>
+            <a:r>
+              <a:rPr lang="de-AT" dirty="0"/>
+              <a:t> </a:t>
+            </a:r>
+            <a:r>
+              <a:rPr lang="de-AT" dirty="0" err="1"/>
+              <a:t>of</a:t>
+            </a:r>
+            <a:r>
+              <a:rPr lang="de-AT" dirty="0"/>
+              <a:t> </a:t>
+            </a:r>
+            <a:r>
+              <a:rPr lang="de-AT" dirty="0" err="1"/>
+              <a:t>one</a:t>
+            </a:r>
+            <a:r>
+              <a:rPr lang="de-AT" dirty="0"/>
+              <a:t> </a:t>
+            </a:r>
+            <a:r>
+              <a:rPr lang="de-AT" dirty="0" err="1"/>
+              <a:t>person</a:t>
+            </a:r>
             <a:endParaRPr lang="de-AT" dirty="0"/>
           </a:p>
         </p:txBody>
@@ -7995,7 +10620,853 @@
           <a:bodyPr/>
           <a:lstStyle/>
           <a:p>
+            <a:r>
+              <a:rPr lang="de-AT" dirty="0" err="1"/>
+              <a:t>We</a:t>
+            </a:r>
+            <a:r>
+              <a:rPr lang="de-AT" dirty="0"/>
+              <a:t> </a:t>
+            </a:r>
+            <a:r>
+              <a:rPr lang="de-AT" dirty="0" err="1"/>
+              <a:t>used</a:t>
+            </a:r>
+            <a:r>
+              <a:rPr lang="de-AT" dirty="0"/>
+              <a:t> </a:t>
+            </a:r>
+            <a:r>
+              <a:rPr lang="de-AT" dirty="0" err="1"/>
+              <a:t>the</a:t>
+            </a:r>
+            <a:r>
+              <a:rPr lang="de-AT" dirty="0"/>
+              <a:t> </a:t>
+            </a:r>
+            <a:r>
+              <a:rPr lang="de-AT" dirty="0" err="1"/>
+              <a:t>contextual</a:t>
+            </a:r>
+            <a:r>
+              <a:rPr lang="de-AT" dirty="0"/>
+              <a:t> </a:t>
+            </a:r>
+            <a:r>
+              <a:rPr lang="de-AT" dirty="0" err="1"/>
+              <a:t>window</a:t>
+            </a:r>
+            <a:r>
+              <a:rPr lang="de-AT" dirty="0"/>
+              <a:t>/</a:t>
+            </a:r>
+            <a:r>
+              <a:rPr lang="de-AT" dirty="0" err="1"/>
+              <a:t>sliding</a:t>
+            </a:r>
+            <a:r>
+              <a:rPr lang="de-AT" dirty="0"/>
+              <a:t> </a:t>
+            </a:r>
+            <a:r>
+              <a:rPr lang="de-AT" dirty="0" err="1"/>
+              <a:t>window</a:t>
+            </a:r>
+            <a:r>
+              <a:rPr lang="de-AT" dirty="0"/>
+              <a:t> </a:t>
+            </a:r>
+            <a:r>
+              <a:rPr lang="de-AT" dirty="0" err="1"/>
+              <a:t>as</a:t>
+            </a:r>
+            <a:r>
+              <a:rPr lang="de-AT" dirty="0"/>
+              <a:t> </a:t>
+            </a:r>
+            <a:r>
+              <a:rPr lang="de-AT" dirty="0" err="1"/>
+              <a:t>preprocessor</a:t>
+            </a:r>
+            <a:r>
+              <a:rPr lang="de-AT" dirty="0"/>
+              <a:t> </a:t>
+            </a:r>
+            <a:r>
+              <a:rPr lang="de-AT" dirty="0" err="1"/>
+              <a:t>layer</a:t>
+            </a:r>
+            <a:r>
+              <a:rPr lang="de-AT" dirty="0"/>
+              <a:t> </a:t>
+            </a:r>
+            <a:r>
+              <a:rPr lang="de-AT" dirty="0" err="1"/>
+              <a:t>for</a:t>
+            </a:r>
+            <a:r>
+              <a:rPr lang="de-AT" dirty="0"/>
+              <a:t> </a:t>
+            </a:r>
+            <a:r>
+              <a:rPr lang="de-AT" dirty="0" err="1"/>
+              <a:t>our</a:t>
+            </a:r>
+            <a:r>
+              <a:rPr lang="de-AT" dirty="0"/>
+              <a:t> </a:t>
+            </a:r>
+            <a:r>
+              <a:rPr lang="de-AT" dirty="0" err="1"/>
+              <a:t>classification</a:t>
+            </a:r>
+            <a:r>
+              <a:rPr lang="de-AT" dirty="0"/>
+              <a:t> </a:t>
+            </a:r>
+            <a:r>
+              <a:rPr lang="de-AT" dirty="0" err="1"/>
+              <a:t>with</a:t>
+            </a:r>
+            <a:r>
+              <a:rPr lang="de-AT" dirty="0"/>
+              <a:t> a </a:t>
+            </a:r>
+            <a:r>
+              <a:rPr lang="de-AT" dirty="0" err="1"/>
+              <a:t>window</a:t>
+            </a:r>
+            <a:r>
+              <a:rPr lang="de-AT" dirty="0"/>
+              <a:t> </a:t>
+            </a:r>
+            <a:r>
+              <a:rPr lang="de-AT" dirty="0" err="1"/>
+              <a:t>length</a:t>
+            </a:r>
+            <a:r>
+              <a:rPr lang="de-AT" dirty="0"/>
+              <a:t> </a:t>
+            </a:r>
+            <a:r>
+              <a:rPr lang="de-AT" dirty="0" err="1"/>
+              <a:t>of</a:t>
+            </a:r>
+            <a:r>
+              <a:rPr lang="de-AT" dirty="0"/>
+              <a:t> 0.5s and 2Hz </a:t>
+            </a:r>
+            <a:r>
+              <a:rPr lang="de-AT" dirty="0" err="1"/>
+              <a:t>prediciton</a:t>
+            </a:r>
+            <a:r>
+              <a:rPr lang="de-AT" dirty="0"/>
+              <a:t> </a:t>
+            </a:r>
+            <a:r>
+              <a:rPr lang="de-AT" dirty="0" err="1"/>
+              <a:t>frequency</a:t>
+            </a:r>
             <a:endParaRPr lang="de-AT" dirty="0"/>
+          </a:p>
+          <a:p>
+            <a:endParaRPr lang="de-AT" dirty="0"/>
+          </a:p>
+          <a:p>
+            <a:r>
+              <a:rPr lang="de-AT" dirty="0" err="1"/>
+              <a:t>For</a:t>
+            </a:r>
+            <a:r>
+              <a:rPr lang="de-AT" dirty="0"/>
+              <a:t> </a:t>
+            </a:r>
+            <a:r>
+              <a:rPr lang="de-AT" dirty="0" err="1"/>
+              <a:t>the</a:t>
+            </a:r>
+            <a:r>
+              <a:rPr lang="de-AT" dirty="0"/>
+              <a:t> </a:t>
+            </a:r>
+            <a:r>
+              <a:rPr lang="de-AT" dirty="0" err="1"/>
+              <a:t>model</a:t>
+            </a:r>
+            <a:r>
+              <a:rPr lang="de-AT" dirty="0"/>
+              <a:t> </a:t>
+            </a:r>
+            <a:r>
+              <a:rPr lang="de-AT" dirty="0" err="1"/>
+              <a:t>creation</a:t>
+            </a:r>
+            <a:r>
+              <a:rPr lang="de-AT" dirty="0"/>
+              <a:t> </a:t>
+            </a:r>
+            <a:r>
+              <a:rPr lang="de-AT" dirty="0" err="1"/>
+              <a:t>we</a:t>
+            </a:r>
+            <a:r>
+              <a:rPr lang="de-AT" dirty="0"/>
+              <a:t> </a:t>
+            </a:r>
+            <a:r>
+              <a:rPr lang="de-AT" dirty="0" err="1"/>
+              <a:t>used</a:t>
+            </a:r>
+            <a:r>
+              <a:rPr lang="de-AT" dirty="0"/>
+              <a:t> </a:t>
+            </a:r>
+            <a:r>
+              <a:rPr lang="de-AT" dirty="0" err="1"/>
+              <a:t>the</a:t>
+            </a:r>
+            <a:r>
+              <a:rPr lang="de-AT" dirty="0"/>
+              <a:t> </a:t>
+            </a:r>
+            <a:r>
+              <a:rPr lang="de-AT" dirty="0" err="1"/>
+              <a:t>model</a:t>
+            </a:r>
+            <a:r>
+              <a:rPr lang="de-AT" dirty="0"/>
+              <a:t> </a:t>
+            </a:r>
+            <a:r>
+              <a:rPr lang="de-AT" dirty="0" err="1"/>
+              <a:t>wizard</a:t>
+            </a:r>
+            <a:r>
+              <a:rPr lang="de-AT" dirty="0"/>
+              <a:t> and </a:t>
+            </a:r>
+            <a:r>
+              <a:rPr lang="de-AT" dirty="0" err="1"/>
+              <a:t>decided</a:t>
+            </a:r>
+            <a:r>
+              <a:rPr lang="de-AT" dirty="0"/>
+              <a:t> </a:t>
+            </a:r>
+            <a:r>
+              <a:rPr lang="de-AT" dirty="0" err="1"/>
+              <a:t>to</a:t>
+            </a:r>
+            <a:r>
+              <a:rPr lang="de-AT" dirty="0"/>
+              <a:t> </a:t>
+            </a:r>
+            <a:r>
+              <a:rPr lang="de-AT" dirty="0" err="1"/>
+              <a:t>go</a:t>
+            </a:r>
+            <a:r>
+              <a:rPr lang="de-AT" dirty="0"/>
+              <a:t> </a:t>
+            </a:r>
+            <a:r>
+              <a:rPr lang="de-AT" dirty="0" err="1"/>
+              <a:t>with</a:t>
+            </a:r>
+            <a:r>
+              <a:rPr lang="de-AT" dirty="0"/>
+              <a:t> </a:t>
+            </a:r>
+            <a:r>
+              <a:rPr lang="de-AT" dirty="0" err="1"/>
+              <a:t>the</a:t>
+            </a:r>
+            <a:r>
+              <a:rPr lang="de-AT" dirty="0"/>
+              <a:t> conv1d </a:t>
+            </a:r>
+            <a:r>
+              <a:rPr lang="de-AT" dirty="0" err="1"/>
+              <a:t>model</a:t>
+            </a:r>
+            <a:r>
+              <a:rPr lang="de-AT" dirty="0"/>
+              <a:t> </a:t>
+            </a:r>
+            <a:r>
+              <a:rPr lang="de-AT" dirty="0" err="1"/>
+              <a:t>family</a:t>
+            </a:r>
+            <a:r>
+              <a:rPr lang="de-AT" dirty="0"/>
+              <a:t>, medium </a:t>
+            </a:r>
+            <a:r>
+              <a:rPr lang="de-AT" dirty="0" err="1"/>
+              <a:t>model</a:t>
+            </a:r>
+            <a:r>
+              <a:rPr lang="de-AT" dirty="0"/>
+              <a:t> </a:t>
+            </a:r>
+            <a:r>
+              <a:rPr lang="de-AT" dirty="0" err="1"/>
+              <a:t>size</a:t>
+            </a:r>
+            <a:r>
+              <a:rPr lang="de-AT" dirty="0"/>
+              <a:t>. </a:t>
+            </a:r>
+            <a:r>
+              <a:rPr lang="de-AT" dirty="0" err="1"/>
+              <a:t>Balanced</a:t>
+            </a:r>
+            <a:r>
+              <a:rPr lang="de-AT" dirty="0"/>
+              <a:t> </a:t>
+            </a:r>
+            <a:r>
+              <a:rPr lang="de-AT" dirty="0" err="1"/>
+              <a:t>optimization</a:t>
+            </a:r>
+            <a:r>
+              <a:rPr lang="de-AT" dirty="0"/>
+              <a:t> </a:t>
+            </a:r>
+            <a:r>
+              <a:rPr lang="de-AT" dirty="0" err="1"/>
+              <a:t>as</a:t>
+            </a:r>
+            <a:r>
+              <a:rPr lang="de-AT" dirty="0"/>
+              <a:t> </a:t>
+            </a:r>
+            <a:r>
+              <a:rPr lang="de-AT" dirty="0" err="1"/>
+              <a:t>well</a:t>
+            </a:r>
+            <a:r>
+              <a:rPr lang="de-AT" dirty="0"/>
+              <a:t> </a:t>
+            </a:r>
+            <a:r>
+              <a:rPr lang="de-AT" dirty="0" err="1"/>
+              <a:t>as</a:t>
+            </a:r>
+            <a:r>
+              <a:rPr lang="de-AT" dirty="0"/>
+              <a:t> an medium </a:t>
+            </a:r>
+            <a:r>
+              <a:rPr lang="de-AT" dirty="0" err="1"/>
+              <a:t>learn</a:t>
+            </a:r>
+            <a:r>
+              <a:rPr lang="de-AT" dirty="0"/>
+              <a:t> rate and </a:t>
+            </a:r>
+            <a:r>
+              <a:rPr lang="de-AT" dirty="0" err="1"/>
+              <a:t>regularization</a:t>
+            </a:r>
+            <a:r>
+              <a:rPr lang="de-AT" dirty="0"/>
+              <a:t>.</a:t>
+            </a:r>
+          </a:p>
+          <a:p>
+            <a:endParaRPr lang="de-AT" dirty="0"/>
+          </a:p>
+          <a:p>
+            <a:r>
+              <a:rPr lang="de-AT" dirty="0" err="1"/>
+              <a:t>We</a:t>
+            </a:r>
+            <a:r>
+              <a:rPr lang="de-AT" dirty="0"/>
+              <a:t> </a:t>
+            </a:r>
+            <a:r>
+              <a:rPr lang="de-AT" dirty="0" err="1"/>
+              <a:t>created</a:t>
+            </a:r>
+            <a:r>
+              <a:rPr lang="de-AT" dirty="0"/>
+              <a:t> a </a:t>
+            </a:r>
+            <a:r>
+              <a:rPr lang="de-AT" dirty="0" err="1"/>
+              <a:t>lot</a:t>
+            </a:r>
+            <a:r>
+              <a:rPr lang="de-AT" dirty="0"/>
+              <a:t> </a:t>
+            </a:r>
+            <a:r>
+              <a:rPr lang="de-AT" dirty="0" err="1"/>
+              <a:t>of</a:t>
+            </a:r>
+            <a:r>
+              <a:rPr lang="de-AT" dirty="0"/>
+              <a:t> </a:t>
+            </a:r>
+            <a:r>
+              <a:rPr lang="de-AT" dirty="0" err="1"/>
+              <a:t>models</a:t>
+            </a:r>
+            <a:r>
+              <a:rPr lang="de-AT" dirty="0"/>
+              <a:t> and </a:t>
+            </a:r>
+            <a:r>
+              <a:rPr lang="de-AT" dirty="0" err="1"/>
+              <a:t>tried</a:t>
+            </a:r>
+            <a:r>
+              <a:rPr lang="de-AT" dirty="0"/>
+              <a:t> out </a:t>
+            </a:r>
+            <a:r>
+              <a:rPr lang="de-AT" dirty="0" err="1"/>
+              <a:t>varying</a:t>
+            </a:r>
+            <a:r>
+              <a:rPr lang="de-AT" dirty="0"/>
+              <a:t> </a:t>
+            </a:r>
+            <a:r>
+              <a:rPr lang="de-AT" dirty="0" err="1"/>
+              <a:t>paramteres</a:t>
+            </a:r>
+            <a:r>
+              <a:rPr lang="de-AT" dirty="0"/>
+              <a:t> and </a:t>
+            </a:r>
+            <a:r>
+              <a:rPr lang="de-AT" dirty="0" err="1"/>
+              <a:t>played</a:t>
+            </a:r>
+            <a:r>
+              <a:rPr lang="de-AT" dirty="0"/>
+              <a:t> </a:t>
+            </a:r>
+            <a:r>
+              <a:rPr lang="de-AT" dirty="0" err="1"/>
+              <a:t>around</a:t>
+            </a:r>
+            <a:r>
+              <a:rPr lang="de-AT" dirty="0"/>
+              <a:t> </a:t>
+            </a:r>
+            <a:r>
+              <a:rPr lang="de-AT" dirty="0" err="1"/>
+              <a:t>with</a:t>
+            </a:r>
+            <a:r>
+              <a:rPr lang="de-AT" dirty="0"/>
+              <a:t> </a:t>
+            </a:r>
+            <a:r>
+              <a:rPr lang="de-AT" dirty="0" err="1"/>
+              <a:t>the</a:t>
+            </a:r>
+            <a:r>
+              <a:rPr lang="de-AT" dirty="0"/>
+              <a:t> </a:t>
+            </a:r>
+            <a:r>
+              <a:rPr lang="de-AT" dirty="0" err="1"/>
+              <a:t>contextual</a:t>
+            </a:r>
+            <a:r>
+              <a:rPr lang="de-AT" dirty="0"/>
+              <a:t> </a:t>
+            </a:r>
+            <a:r>
+              <a:rPr lang="de-AT" dirty="0" err="1"/>
+              <a:t>window</a:t>
+            </a:r>
+            <a:r>
+              <a:rPr lang="de-AT" dirty="0"/>
+              <a:t> </a:t>
+            </a:r>
+            <a:r>
+              <a:rPr lang="de-AT" dirty="0" err="1"/>
+              <a:t>parameters</a:t>
+            </a:r>
+            <a:r>
+              <a:rPr lang="de-AT" dirty="0"/>
+              <a:t> </a:t>
+            </a:r>
+            <a:r>
+              <a:rPr lang="de-AT" dirty="0" err="1"/>
+              <a:t>as</a:t>
+            </a:r>
+            <a:r>
+              <a:rPr lang="de-AT" dirty="0"/>
+              <a:t> </a:t>
+            </a:r>
+            <a:r>
+              <a:rPr lang="de-AT" dirty="0" err="1"/>
+              <a:t>well</a:t>
+            </a:r>
+            <a:r>
+              <a:rPr lang="de-AT" dirty="0"/>
+              <a:t>. The </a:t>
+            </a:r>
+            <a:r>
+              <a:rPr lang="de-AT" dirty="0" err="1"/>
+              <a:t>parameters</a:t>
+            </a:r>
+            <a:r>
+              <a:rPr lang="de-AT" dirty="0"/>
+              <a:t> </a:t>
+            </a:r>
+            <a:r>
+              <a:rPr lang="de-AT" dirty="0" err="1"/>
+              <a:t>mentioned</a:t>
+            </a:r>
+            <a:r>
+              <a:rPr lang="de-AT" dirty="0"/>
+              <a:t> </a:t>
+            </a:r>
+            <a:r>
+              <a:rPr lang="de-AT" dirty="0" err="1"/>
+              <a:t>before</a:t>
+            </a:r>
+            <a:r>
+              <a:rPr lang="de-AT" dirty="0"/>
+              <a:t> </a:t>
+            </a:r>
+            <a:r>
+              <a:rPr lang="de-AT" dirty="0" err="1"/>
+              <a:t>achieved</a:t>
+            </a:r>
+            <a:r>
+              <a:rPr lang="de-AT" dirty="0"/>
+              <a:t> </a:t>
+            </a:r>
+            <a:r>
+              <a:rPr lang="de-AT" dirty="0" err="1"/>
+              <a:t>the</a:t>
+            </a:r>
+            <a:r>
+              <a:rPr lang="de-AT" dirty="0"/>
+              <a:t> </a:t>
+            </a:r>
+            <a:r>
+              <a:rPr lang="de-AT" dirty="0" err="1"/>
+              <a:t>best</a:t>
+            </a:r>
+            <a:r>
+              <a:rPr lang="de-AT" dirty="0"/>
+              <a:t> </a:t>
+            </a:r>
+            <a:r>
+              <a:rPr lang="de-AT" dirty="0" err="1"/>
+              <a:t>statistics</a:t>
+            </a:r>
+            <a:r>
+              <a:rPr lang="de-AT" dirty="0"/>
+              <a:t> </a:t>
+            </a:r>
+            <a:r>
+              <a:rPr lang="de-AT" dirty="0" err="1"/>
+              <a:t>overall</a:t>
+            </a:r>
+            <a:r>
+              <a:rPr lang="de-AT" dirty="0"/>
+              <a:t>, </a:t>
+            </a:r>
+            <a:r>
+              <a:rPr lang="de-AT" dirty="0" err="1"/>
+              <a:t>which</a:t>
+            </a:r>
+            <a:r>
+              <a:rPr lang="de-AT" dirty="0"/>
+              <a:t> </a:t>
+            </a:r>
+            <a:r>
+              <a:rPr lang="de-AT" dirty="0" err="1"/>
+              <a:t>are</a:t>
+            </a:r>
+            <a:r>
+              <a:rPr lang="de-AT" dirty="0"/>
+              <a:t> </a:t>
+            </a:r>
+            <a:r>
+              <a:rPr lang="de-AT" dirty="0" err="1"/>
+              <a:t>shown</a:t>
+            </a:r>
+            <a:r>
+              <a:rPr lang="de-AT" dirty="0"/>
+              <a:t> on </a:t>
+            </a:r>
+            <a:r>
+              <a:rPr lang="de-AT" dirty="0" err="1"/>
+              <a:t>the</a:t>
+            </a:r>
+            <a:r>
+              <a:rPr lang="de-AT" dirty="0"/>
+              <a:t> </a:t>
+            </a:r>
+            <a:r>
+              <a:rPr lang="de-AT" dirty="0" err="1"/>
+              <a:t>slide</a:t>
+            </a:r>
+            <a:r>
+              <a:rPr lang="de-AT" dirty="0"/>
+              <a:t>. </a:t>
+            </a:r>
+            <a:r>
+              <a:rPr lang="de-AT" dirty="0" err="1"/>
+              <a:t>We</a:t>
+            </a:r>
+            <a:r>
+              <a:rPr lang="de-AT" dirty="0"/>
+              <a:t> </a:t>
+            </a:r>
+            <a:r>
+              <a:rPr lang="de-AT" dirty="0" err="1"/>
+              <a:t>can</a:t>
+            </a:r>
+            <a:r>
+              <a:rPr lang="de-AT" dirty="0"/>
+              <a:t> </a:t>
+            </a:r>
+            <a:r>
+              <a:rPr lang="de-AT" dirty="0" err="1"/>
+              <a:t>see</a:t>
+            </a:r>
+            <a:r>
+              <a:rPr lang="de-AT" dirty="0"/>
+              <a:t> </a:t>
+            </a:r>
+            <a:r>
+              <a:rPr lang="de-AT" dirty="0" err="1"/>
+              <a:t>upwards</a:t>
+            </a:r>
+            <a:r>
+              <a:rPr lang="de-AT" dirty="0"/>
+              <a:t> </a:t>
+            </a:r>
+            <a:r>
+              <a:rPr lang="de-AT" dirty="0" err="1"/>
+              <a:t>of</a:t>
+            </a:r>
+            <a:r>
+              <a:rPr lang="de-AT" dirty="0"/>
+              <a:t> 85% </a:t>
+            </a:r>
+            <a:r>
+              <a:rPr lang="de-AT" dirty="0" err="1"/>
+              <a:t>correct</a:t>
+            </a:r>
+            <a:r>
+              <a:rPr lang="de-AT" dirty="0"/>
+              <a:t> </a:t>
+            </a:r>
+            <a:r>
+              <a:rPr lang="de-AT" dirty="0" err="1"/>
+              <a:t>predicition</a:t>
+            </a:r>
+            <a:r>
+              <a:rPr lang="de-AT" dirty="0"/>
+              <a:t> </a:t>
+            </a:r>
+            <a:r>
+              <a:rPr lang="de-AT" dirty="0" err="1"/>
+              <a:t>for</a:t>
+            </a:r>
+            <a:r>
+              <a:rPr lang="de-AT" dirty="0"/>
+              <a:t> </a:t>
+            </a:r>
+            <a:r>
+              <a:rPr lang="de-AT" dirty="0" err="1"/>
+              <a:t>each</a:t>
+            </a:r>
+            <a:r>
+              <a:rPr lang="de-AT" dirty="0"/>
+              <a:t> </a:t>
+            </a:r>
+            <a:r>
+              <a:rPr lang="de-AT" dirty="0" err="1"/>
+              <a:t>punch</a:t>
+            </a:r>
+            <a:r>
+              <a:rPr lang="de-AT" dirty="0"/>
+              <a:t> type in </a:t>
+            </a:r>
+            <a:r>
+              <a:rPr lang="de-AT" dirty="0" err="1"/>
+              <a:t>the</a:t>
+            </a:r>
+            <a:r>
+              <a:rPr lang="de-AT" dirty="0"/>
+              <a:t> </a:t>
+            </a:r>
+            <a:r>
+              <a:rPr lang="de-AT" dirty="0" err="1"/>
+              <a:t>test</a:t>
+            </a:r>
+            <a:r>
+              <a:rPr lang="de-AT" dirty="0"/>
+              <a:t> </a:t>
+            </a:r>
+            <a:r>
+              <a:rPr lang="de-AT" dirty="0" err="1"/>
+              <a:t>statistics</a:t>
+            </a:r>
+            <a:r>
+              <a:rPr lang="de-AT" dirty="0"/>
+              <a:t>. </a:t>
+            </a:r>
+            <a:r>
+              <a:rPr lang="de-AT" dirty="0" err="1"/>
+              <a:t>For</a:t>
+            </a:r>
+            <a:r>
+              <a:rPr lang="de-AT" dirty="0"/>
+              <a:t> </a:t>
+            </a:r>
+            <a:r>
+              <a:rPr lang="de-AT" dirty="0" err="1"/>
+              <a:t>the</a:t>
+            </a:r>
+            <a:r>
+              <a:rPr lang="de-AT" dirty="0"/>
+              <a:t> </a:t>
+            </a:r>
+            <a:r>
+              <a:rPr lang="de-AT" dirty="0" err="1"/>
+              <a:t>jab</a:t>
+            </a:r>
+            <a:r>
+              <a:rPr lang="de-AT" dirty="0"/>
+              <a:t> and </a:t>
+            </a:r>
+            <a:r>
+              <a:rPr lang="de-AT" dirty="0" err="1"/>
+              <a:t>the</a:t>
+            </a:r>
+            <a:r>
+              <a:rPr lang="de-AT" dirty="0"/>
+              <a:t> </a:t>
+            </a:r>
+            <a:r>
+              <a:rPr lang="de-AT" dirty="0" err="1"/>
+              <a:t>sidehook</a:t>
+            </a:r>
+            <a:r>
+              <a:rPr lang="de-AT" dirty="0"/>
+              <a:t> </a:t>
+            </a:r>
+            <a:r>
+              <a:rPr lang="de-AT" dirty="0" err="1"/>
+              <a:t>they</a:t>
+            </a:r>
+            <a:r>
+              <a:rPr lang="de-AT" dirty="0"/>
+              <a:t> </a:t>
+            </a:r>
+            <a:r>
+              <a:rPr lang="de-AT" dirty="0" err="1"/>
+              <a:t>were</a:t>
+            </a:r>
+            <a:r>
+              <a:rPr lang="de-AT" dirty="0"/>
+              <a:t> </a:t>
+            </a:r>
+            <a:r>
+              <a:rPr lang="de-AT" dirty="0" err="1"/>
+              <a:t>even</a:t>
+            </a:r>
+            <a:r>
+              <a:rPr lang="de-AT" dirty="0"/>
+              <a:t> </a:t>
+            </a:r>
+            <a:r>
+              <a:rPr lang="de-AT" dirty="0" err="1"/>
+              <a:t>above</a:t>
+            </a:r>
+            <a:r>
+              <a:rPr lang="de-AT" dirty="0"/>
+              <a:t> 90%, </a:t>
+            </a:r>
+            <a:r>
+              <a:rPr lang="de-AT" dirty="0" err="1"/>
+              <a:t>which</a:t>
+            </a:r>
+            <a:r>
+              <a:rPr lang="de-AT" dirty="0"/>
+              <a:t> </a:t>
+            </a:r>
+            <a:r>
+              <a:rPr lang="de-AT" dirty="0" err="1"/>
+              <a:t>is</a:t>
+            </a:r>
+            <a:r>
+              <a:rPr lang="de-AT" dirty="0"/>
+              <a:t> </a:t>
+            </a:r>
+            <a:r>
+              <a:rPr lang="de-AT" dirty="0" err="1"/>
+              <a:t>more</a:t>
+            </a:r>
+            <a:r>
+              <a:rPr lang="de-AT" dirty="0"/>
+              <a:t> </a:t>
+            </a:r>
+            <a:r>
+              <a:rPr lang="de-AT" dirty="0" err="1"/>
+              <a:t>than</a:t>
+            </a:r>
+            <a:r>
+              <a:rPr lang="de-AT" dirty="0"/>
+              <a:t> </a:t>
+            </a:r>
+            <a:r>
+              <a:rPr lang="de-AT" dirty="0" err="1"/>
+              <a:t>good</a:t>
+            </a:r>
+            <a:r>
+              <a:rPr lang="de-AT" dirty="0"/>
+              <a:t> </a:t>
+            </a:r>
+            <a:r>
+              <a:rPr lang="de-AT" dirty="0" err="1"/>
+              <a:t>enough</a:t>
+            </a:r>
+            <a:r>
+              <a:rPr lang="de-AT" dirty="0"/>
+              <a:t> </a:t>
+            </a:r>
+            <a:r>
+              <a:rPr lang="de-AT" dirty="0" err="1"/>
+              <a:t>for</a:t>
+            </a:r>
+            <a:r>
+              <a:rPr lang="de-AT" dirty="0"/>
+              <a:t> </a:t>
+            </a:r>
+            <a:r>
+              <a:rPr lang="de-AT" dirty="0" err="1"/>
+              <a:t>our</a:t>
+            </a:r>
+            <a:r>
+              <a:rPr lang="de-AT" dirty="0"/>
+              <a:t> </a:t>
+            </a:r>
+            <a:r>
+              <a:rPr lang="de-AT" dirty="0" err="1"/>
+              <a:t>project</a:t>
+            </a:r>
+            <a:r>
+              <a:rPr lang="de-AT" dirty="0"/>
+              <a:t> </a:t>
+            </a:r>
           </a:p>
         </p:txBody>
       </p:sp>
@@ -11693,7 +15164,7 @@
                   <a:schemeClr val="bg1"/>
                 </a:solidFill>
               </a:rPr>
-              <a:t>Corneaux</a:t>
+              <a:t>Corneux</a:t>
             </a:r>
             <a:r>
               <a:rPr lang="en-GB" noProof="0" dirty="0">
@@ -12892,7 +16363,7 @@
           <p:nvPr>
             <p:extLst>
               <p:ext uri="{D42A27DB-BD31-4B8C-83A1-F6EECF244321}">
-                <p14:modId xmlns:p14="http://schemas.microsoft.com/office/powerpoint/2010/main" val="2324947360"/>
+                <p14:modId xmlns:p14="http://schemas.microsoft.com/office/powerpoint/2010/main" val="3638342055"/>
               </p:ext>
             </p:extLst>
           </p:nvPr>
@@ -17531,20 +21002,20 @@
 </file>
 
 <file path=customXml/item1.xml><?xml version="1.0" encoding="utf-8"?>
+<p:properties xmlns:p="http://schemas.microsoft.com/office/2006/metadata/properties" xmlns:xsi="http://www.w3.org/2001/XMLSchema-instance" xmlns:pc="http://schemas.microsoft.com/office/infopath/2007/PartnerControls">
+  <documentManagement>
+    <_activity xmlns="bf1a47b5-10f0-4178-af4a-bbe7cc4004c3" xsi:nil="true"/>
+  </documentManagement>
+</p:properties>
+</file>
+
+<file path=customXml/item2.xml><?xml version="1.0" encoding="utf-8"?>
 <?mso-contentType ?>
 <FormTemplates xmlns="http://schemas.microsoft.com/sharepoint/v3/contenttype/forms">
   <Display>DocumentLibraryForm</Display>
   <Edit>DocumentLibraryForm</Edit>
   <New>DocumentLibraryForm</New>
 </FormTemplates>
-</file>
-
-<file path=customXml/item2.xml><?xml version="1.0" encoding="utf-8"?>
-<p:properties xmlns:p="http://schemas.microsoft.com/office/2006/metadata/properties" xmlns:xsi="http://www.w3.org/2001/XMLSchema-instance" xmlns:pc="http://schemas.microsoft.com/office/infopath/2007/PartnerControls">
-  <documentManagement>
-    <_activity xmlns="bf1a47b5-10f0-4178-af4a-bbe7cc4004c3" xsi:nil="true"/>
-  </documentManagement>
-</p:properties>
 </file>
 
 <file path=customXml/item3.xml><?xml version="1.0" encoding="utf-8"?>
@@ -17736,14 +21207,6 @@
 </file>
 
 <file path=customXml/itemProps1.xml><?xml version="1.0" encoding="utf-8"?>
-<ds:datastoreItem xmlns:ds="http://schemas.openxmlformats.org/officeDocument/2006/customXml" ds:itemID="{D12945CB-A677-4013-820C-0AEFE2C4DC48}">
-  <ds:schemaRefs>
-    <ds:schemaRef ds:uri="http://schemas.microsoft.com/sharepoint/v3/contenttype/forms"/>
-  </ds:schemaRefs>
-</ds:datastoreItem>
-</file>
-
-<file path=customXml/itemProps2.xml><?xml version="1.0" encoding="utf-8"?>
 <ds:datastoreItem xmlns:ds="http://schemas.openxmlformats.org/officeDocument/2006/customXml" ds:itemID="{2C2A40F2-5398-4DE1-A8FC-C0BA56DCE4EA}">
   <ds:schemaRefs>
     <ds:schemaRef ds:uri="bf1a47b5-10f0-4178-af4a-bbe7cc4004c3"/>
@@ -17755,6 +21218,14 @@
     <ds:schemaRef ds:uri="http://www.w3.org/XML/1998/namespace"/>
     <ds:schemaRef ds:uri="http://purl.org/dc/dcmitype/"/>
     <ds:schemaRef ds:uri="http://schemas.microsoft.com/office/2006/metadata/properties"/>
+  </ds:schemaRefs>
+</ds:datastoreItem>
+</file>
+
+<file path=customXml/itemProps2.xml><?xml version="1.0" encoding="utf-8"?>
+<ds:datastoreItem xmlns:ds="http://schemas.openxmlformats.org/officeDocument/2006/customXml" ds:itemID="{D12945CB-A677-4013-820C-0AEFE2C4DC48}">
+  <ds:schemaRefs>
+    <ds:schemaRef ds:uri="http://schemas.microsoft.com/sharepoint/v3/contenttype/forms"/>
   </ds:schemaRefs>
 </ds:datastoreItem>
 </file>

--- a/report/Präsentation_final.pptx
+++ b/report/Präsentation_final.pptx
@@ -2257,6 +2257,11 @@
         <a:bodyPr/>
         <a:lstStyle/>
         <a:p>
+          <a:pPr>
+            <a:lnSpc>
+              <a:spcPct val="100000"/>
+            </a:lnSpc>
+          </a:pPr>
           <a:r>
             <a:rPr lang="en-GB" sz="1600" dirty="0"/>
             <a:t>Implementing the game function</a:t>
@@ -2283,6 +2288,11 @@
         <a:bodyPr/>
         <a:lstStyle/>
         <a:p>
+          <a:pPr>
+            <a:lnSpc>
+              <a:spcPct val="100000"/>
+            </a:lnSpc>
+          </a:pPr>
           <a:endParaRPr lang="en-US"/>
         </a:p>
       </dgm:t>
@@ -2294,6 +2304,11 @@
         <a:bodyPr/>
         <a:lstStyle/>
         <a:p>
+          <a:pPr>
+            <a:lnSpc>
+              <a:spcPct val="100000"/>
+            </a:lnSpc>
+          </a:pPr>
           <a:r>
             <a:rPr lang="en-GB" sz="1600" dirty="0"/>
             <a:t>Gathering more sampling data from more different people </a:t>
@@ -2320,6 +2335,11 @@
         <a:bodyPr/>
         <a:lstStyle/>
         <a:p>
+          <a:pPr>
+            <a:lnSpc>
+              <a:spcPct val="100000"/>
+            </a:lnSpc>
+          </a:pPr>
           <a:endParaRPr lang="en-US"/>
         </a:p>
       </dgm:t>
@@ -2331,6 +2351,11 @@
         <a:bodyPr/>
         <a:lstStyle/>
         <a:p>
+          <a:pPr>
+            <a:lnSpc>
+              <a:spcPct val="100000"/>
+            </a:lnSpc>
+          </a:pPr>
           <a:r>
             <a:rPr lang="en-GB" sz="1600" dirty="0"/>
             <a:t>Gather data of left-handed punches</a:t>
@@ -2357,88 +2382,11 @@
         <a:bodyPr/>
         <a:lstStyle/>
         <a:p>
-          <a:endParaRPr lang="en-US"/>
-        </a:p>
-      </dgm:t>
-    </dgm:pt>
-    <dgm:pt modelId="{97911CDD-4D56-4FAD-B230-E820EA6F5EDC}">
-      <dgm:prSet custT="1"/>
-      <dgm:spPr/>
-      <dgm:t>
-        <a:bodyPr/>
-        <a:lstStyle/>
-        <a:p>
-          <a:r>
-            <a:rPr lang="en-GB" sz="1600" b="1" i="1" dirty="0">
-              <a:solidFill>
-                <a:srgbClr val="FF0000"/>
-              </a:solidFill>
-            </a:rPr>
-            <a:t>Creating a function to read the velocity of thrown punches/calculate it using the IMU-Data</a:t>
-          </a:r>
-          <a:endParaRPr lang="en-US" sz="1600" b="1" i="1" dirty="0">
-            <a:solidFill>
-              <a:srgbClr val="FF0000"/>
-            </a:solidFill>
-          </a:endParaRPr>
-        </a:p>
-      </dgm:t>
-    </dgm:pt>
-    <dgm:pt modelId="{9408CE91-114F-4DD3-87AF-6547655575AF}" type="parTrans" cxnId="{871FED78-9D19-4944-8BF9-CB57AE0CB102}">
-      <dgm:prSet/>
-      <dgm:spPr/>
-      <dgm:t>
-        <a:bodyPr/>
-        <a:lstStyle/>
-        <a:p>
-          <a:endParaRPr lang="en-US"/>
-        </a:p>
-      </dgm:t>
-    </dgm:pt>
-    <dgm:pt modelId="{994E05E9-8C60-43A4-AC92-103588B9227A}" type="sibTrans" cxnId="{871FED78-9D19-4944-8BF9-CB57AE0CB102}">
-      <dgm:prSet/>
-      <dgm:spPr/>
-      <dgm:t>
-        <a:bodyPr/>
-        <a:lstStyle/>
-        <a:p>
-          <a:endParaRPr lang="en-US"/>
-        </a:p>
-      </dgm:t>
-    </dgm:pt>
-    <dgm:pt modelId="{7F76AD4F-8B72-4582-95FF-7536972DC93A}">
-      <dgm:prSet custT="1"/>
-      <dgm:spPr/>
-      <dgm:t>
-        <a:bodyPr/>
-        <a:lstStyle/>
-        <a:p>
-          <a:r>
-            <a:rPr lang="en-GB" sz="1600" dirty="0"/>
-            <a:t>Using the boards button to start and stop sessions</a:t>
-          </a:r>
-          <a:endParaRPr lang="en-US" sz="1600" dirty="0"/>
-        </a:p>
-      </dgm:t>
-    </dgm:pt>
-    <dgm:pt modelId="{DF5A7208-B58D-41FE-9B05-BFAD1F10B6CC}" type="parTrans" cxnId="{B5EDE874-05A6-4F56-8031-163AB97D07B7}">
-      <dgm:prSet/>
-      <dgm:spPr/>
-      <dgm:t>
-        <a:bodyPr/>
-        <a:lstStyle/>
-        <a:p>
-          <a:endParaRPr lang="en-US"/>
-        </a:p>
-      </dgm:t>
-    </dgm:pt>
-    <dgm:pt modelId="{B73C57B2-5527-4964-8071-36D4C9219B55}" type="sibTrans" cxnId="{B5EDE874-05A6-4F56-8031-163AB97D07B7}">
-      <dgm:prSet/>
-      <dgm:spPr/>
-      <dgm:t>
-        <a:bodyPr/>
-        <a:lstStyle/>
-        <a:p>
+          <a:pPr>
+            <a:lnSpc>
+              <a:spcPct val="100000"/>
+            </a:lnSpc>
+          </a:pPr>
           <a:endParaRPr lang="en-US"/>
         </a:p>
       </dgm:t>
@@ -2450,6 +2398,11 @@
         <a:bodyPr/>
         <a:lstStyle/>
         <a:p>
+          <a:pPr>
+            <a:lnSpc>
+              <a:spcPct val="100000"/>
+            </a:lnSpc>
+          </a:pPr>
           <a:r>
             <a:rPr lang="en-GB" sz="1600" dirty="0"/>
             <a:t>Creation of charts for easier understanding/adding statistic analysis</a:t>
@@ -2503,11 +2456,11 @@
       <dgm:spPr/>
     </dgm:pt>
     <dgm:pt modelId="{F119D8C5-A181-4F4E-8BBB-2FB69E1D29B8}" type="pres">
-      <dgm:prSet presAssocID="{0AF64318-A85A-4303-9683-728BA2BDD792}" presName="iconBgRect" presStyleLbl="bgShp" presStyleIdx="0" presStyleCnt="6"/>
+      <dgm:prSet presAssocID="{0AF64318-A85A-4303-9683-728BA2BDD792}" presName="iconBgRect" presStyleLbl="bgShp" presStyleIdx="0" presStyleCnt="4"/>
       <dgm:spPr/>
     </dgm:pt>
     <dgm:pt modelId="{3E26FC50-BDA3-43B7-B6AA-78517DBAD1CE}" type="pres">
-      <dgm:prSet presAssocID="{0AF64318-A85A-4303-9683-728BA2BDD792}" presName="iconRect" presStyleLbl="node1" presStyleIdx="0" presStyleCnt="6"/>
+      <dgm:prSet presAssocID="{0AF64318-A85A-4303-9683-728BA2BDD792}" presName="iconRect" presStyleLbl="node1" presStyleIdx="0" presStyleCnt="4"/>
       <dgm:spPr>
         <a:blipFill>
           <a:blip xmlns:r="http://schemas.openxmlformats.org/officeDocument/2006/relationships" r:embed="rId1">
@@ -2539,7 +2492,7 @@
       <dgm:spPr/>
     </dgm:pt>
     <dgm:pt modelId="{43E6FB21-E331-4FE5-B2DF-F808B38FAF68}" type="pres">
-      <dgm:prSet presAssocID="{0AF64318-A85A-4303-9683-728BA2BDD792}" presName="textRect" presStyleLbl="revTx" presStyleIdx="0" presStyleCnt="6">
+      <dgm:prSet presAssocID="{0AF64318-A85A-4303-9683-728BA2BDD792}" presName="textRect" presStyleLbl="revTx" presStyleIdx="0" presStyleCnt="4">
         <dgm:presLayoutVars>
           <dgm:chMax val="1"/>
           <dgm:chPref val="1"/>
@@ -2556,11 +2509,11 @@
       <dgm:spPr/>
     </dgm:pt>
     <dgm:pt modelId="{7B0FC50B-C7E3-4553-BEDD-A022A09ECF40}" type="pres">
-      <dgm:prSet presAssocID="{C5E10533-0528-456E-B464-59CC464A28FF}" presName="iconBgRect" presStyleLbl="bgShp" presStyleIdx="1" presStyleCnt="6"/>
+      <dgm:prSet presAssocID="{C5E10533-0528-456E-B464-59CC464A28FF}" presName="iconBgRect" presStyleLbl="bgShp" presStyleIdx="1" presStyleCnt="4"/>
       <dgm:spPr/>
     </dgm:pt>
     <dgm:pt modelId="{EAF16A2C-7688-4E64-8D6E-B70766EF0BA5}" type="pres">
-      <dgm:prSet presAssocID="{C5E10533-0528-456E-B464-59CC464A28FF}" presName="iconRect" presStyleLbl="node1" presStyleIdx="1" presStyleCnt="6"/>
+      <dgm:prSet presAssocID="{C5E10533-0528-456E-B464-59CC464A28FF}" presName="iconRect" presStyleLbl="node1" presStyleIdx="1" presStyleCnt="4"/>
       <dgm:spPr>
         <a:blipFill>
           <a:blip xmlns:r="http://schemas.openxmlformats.org/officeDocument/2006/relationships" r:embed="rId3">
@@ -2592,7 +2545,7 @@
       <dgm:spPr/>
     </dgm:pt>
     <dgm:pt modelId="{BAEB9C88-5660-49CA-B840-84E958B65DED}" type="pres">
-      <dgm:prSet presAssocID="{C5E10533-0528-456E-B464-59CC464A28FF}" presName="textRect" presStyleLbl="revTx" presStyleIdx="1" presStyleCnt="6">
+      <dgm:prSet presAssocID="{C5E10533-0528-456E-B464-59CC464A28FF}" presName="textRect" presStyleLbl="revTx" presStyleIdx="1" presStyleCnt="4">
         <dgm:presLayoutVars>
           <dgm:chMax val="1"/>
           <dgm:chPref val="1"/>
@@ -2609,11 +2562,11 @@
       <dgm:spPr/>
     </dgm:pt>
     <dgm:pt modelId="{65A51382-B10A-4300-9B36-432A188BE9FF}" type="pres">
-      <dgm:prSet presAssocID="{22BFE0F4-BC91-4AC0-8179-2F9BA57CE287}" presName="iconBgRect" presStyleLbl="bgShp" presStyleIdx="2" presStyleCnt="6"/>
+      <dgm:prSet presAssocID="{22BFE0F4-BC91-4AC0-8179-2F9BA57CE287}" presName="iconBgRect" presStyleLbl="bgShp" presStyleIdx="2" presStyleCnt="4"/>
       <dgm:spPr/>
     </dgm:pt>
     <dgm:pt modelId="{82C402E1-4C18-40C9-97F2-772F03E0A867}" type="pres">
-      <dgm:prSet presAssocID="{22BFE0F4-BC91-4AC0-8179-2F9BA57CE287}" presName="iconRect" presStyleLbl="node1" presStyleIdx="2" presStyleCnt="6"/>
+      <dgm:prSet presAssocID="{22BFE0F4-BC91-4AC0-8179-2F9BA57CE287}" presName="iconRect" presStyleLbl="node1" presStyleIdx="2" presStyleCnt="4"/>
       <dgm:spPr>
         <a:blipFill>
           <a:blip xmlns:r="http://schemas.openxmlformats.org/officeDocument/2006/relationships" r:embed="rId5">
@@ -2645,7 +2598,7 @@
       <dgm:spPr/>
     </dgm:pt>
     <dgm:pt modelId="{89C7CE4C-4F0B-40A7-9B70-36CD72322155}" type="pres">
-      <dgm:prSet presAssocID="{22BFE0F4-BC91-4AC0-8179-2F9BA57CE287}" presName="textRect" presStyleLbl="revTx" presStyleIdx="2" presStyleCnt="6">
+      <dgm:prSet presAssocID="{22BFE0F4-BC91-4AC0-8179-2F9BA57CE287}" presName="textRect" presStyleLbl="revTx" presStyleIdx="2" presStyleCnt="4">
         <dgm:presLayoutVars>
           <dgm:chMax val="1"/>
           <dgm:chPref val="1"/>
@@ -2657,16 +2610,16 @@
       <dgm:prSet presAssocID="{B487F059-77E6-4578-BC88-B141F60995AF}" presName="sibTrans" presStyleLbl="sibTrans2D1" presStyleIdx="0" presStyleCnt="0"/>
       <dgm:spPr/>
     </dgm:pt>
-    <dgm:pt modelId="{F9140F90-8CAB-4462-BCD9-663267D50EA6}" type="pres">
-      <dgm:prSet presAssocID="{97911CDD-4D56-4FAD-B230-E820EA6F5EDC}" presName="compNode" presStyleCnt="0"/>
+    <dgm:pt modelId="{C54DA008-4E2F-436F-A32A-B7658B58950A}" type="pres">
+      <dgm:prSet presAssocID="{90DF3C5F-828E-4860-9D42-300784C5FAA4}" presName="compNode" presStyleCnt="0"/>
       <dgm:spPr/>
     </dgm:pt>
-    <dgm:pt modelId="{4CAC33BE-CB49-4C17-BCBA-12207794AB4B}" type="pres">
-      <dgm:prSet presAssocID="{97911CDD-4D56-4FAD-B230-E820EA6F5EDC}" presName="iconBgRect" presStyleLbl="bgShp" presStyleIdx="3" presStyleCnt="6"/>
+    <dgm:pt modelId="{7E618979-FA85-4BF1-91E9-6B063BA35058}" type="pres">
+      <dgm:prSet presAssocID="{90DF3C5F-828E-4860-9D42-300784C5FAA4}" presName="iconBgRect" presStyleLbl="bgShp" presStyleIdx="3" presStyleCnt="4"/>
       <dgm:spPr/>
     </dgm:pt>
-    <dgm:pt modelId="{1A46AF24-C28B-44E7-BC19-872D586A0717}" type="pres">
-      <dgm:prSet presAssocID="{97911CDD-4D56-4FAD-B230-E820EA6F5EDC}" presName="iconRect" presStyleLbl="node1" presStyleIdx="3" presStyleCnt="6"/>
+    <dgm:pt modelId="{8D8B2062-9B8F-4F5A-8B31-0460C19DEF3E}" type="pres">
+      <dgm:prSet presAssocID="{90DF3C5F-828E-4860-9D42-300784C5FAA4}" presName="iconRect" presStyleLbl="node1" presStyleIdx="3" presStyleCnt="4"/>
       <dgm:spPr>
         <a:blipFill>
           <a:blip xmlns:r="http://schemas.openxmlformats.org/officeDocument/2006/relationships" r:embed="rId7">
@@ -2689,112 +2642,6 @@
       </dgm:spPr>
       <dgm:extLst>
         <a:ext uri="{E40237B7-FDA0-4F09-8148-C483321AD2D9}">
-          <dgm14:cNvPr xmlns:dgm14="http://schemas.microsoft.com/office/drawing/2010/diagram" id="0" name="" descr="Taschenrechner"/>
-        </a:ext>
-      </dgm:extLst>
-    </dgm:pt>
-    <dgm:pt modelId="{79EB5CDA-83D7-4214-897E-8E8F11B3D1E7}" type="pres">
-      <dgm:prSet presAssocID="{97911CDD-4D56-4FAD-B230-E820EA6F5EDC}" presName="spaceRect" presStyleCnt="0"/>
-      <dgm:spPr/>
-    </dgm:pt>
-    <dgm:pt modelId="{E55A07AF-06E5-40F7-A21E-A8DC99415E06}" type="pres">
-      <dgm:prSet presAssocID="{97911CDD-4D56-4FAD-B230-E820EA6F5EDC}" presName="textRect" presStyleLbl="revTx" presStyleIdx="3" presStyleCnt="6">
-        <dgm:presLayoutVars>
-          <dgm:chMax val="1"/>
-          <dgm:chPref val="1"/>
-        </dgm:presLayoutVars>
-      </dgm:prSet>
-      <dgm:spPr/>
-    </dgm:pt>
-    <dgm:pt modelId="{A3E95B30-1347-4D54-B73B-43E7D122C065}" type="pres">
-      <dgm:prSet presAssocID="{994E05E9-8C60-43A4-AC92-103588B9227A}" presName="sibTrans" presStyleLbl="sibTrans2D1" presStyleIdx="0" presStyleCnt="0"/>
-      <dgm:spPr/>
-    </dgm:pt>
-    <dgm:pt modelId="{3B2AF1E6-9E16-4B86-9E2E-137CB27BB35B}" type="pres">
-      <dgm:prSet presAssocID="{7F76AD4F-8B72-4582-95FF-7536972DC93A}" presName="compNode" presStyleCnt="0"/>
-      <dgm:spPr/>
-    </dgm:pt>
-    <dgm:pt modelId="{8135A4A7-55A2-493C-AAF6-7717B56CAC2D}" type="pres">
-      <dgm:prSet presAssocID="{7F76AD4F-8B72-4582-95FF-7536972DC93A}" presName="iconBgRect" presStyleLbl="bgShp" presStyleIdx="4" presStyleCnt="6"/>
-      <dgm:spPr/>
-    </dgm:pt>
-    <dgm:pt modelId="{7327B8CD-CF2F-45AA-8AED-6F7086F4245E}" type="pres">
-      <dgm:prSet presAssocID="{7F76AD4F-8B72-4582-95FF-7536972DC93A}" presName="iconRect" presStyleLbl="node1" presStyleIdx="4" presStyleCnt="6"/>
-      <dgm:spPr>
-        <a:blipFill>
-          <a:blip xmlns:r="http://schemas.openxmlformats.org/officeDocument/2006/relationships" r:embed="rId9">
-            <a:extLst>
-              <a:ext uri="{28A0092B-C50C-407E-A947-70E740481C1C}">
-                <a14:useLocalDpi xmlns:a14="http://schemas.microsoft.com/office/drawing/2010/main" val="0"/>
-              </a:ext>
-              <a:ext uri="{96DAC541-7B7A-43D3-8B79-37D633B846F1}">
-                <asvg:svgBlip xmlns:asvg="http://schemas.microsoft.com/office/drawing/2016/SVG/main" r:embed="rId10"/>
-              </a:ext>
-            </a:extLst>
-          </a:blip>
-          <a:stretch>
-            <a:fillRect/>
-          </a:stretch>
-        </a:blipFill>
-        <a:ln>
-          <a:noFill/>
-        </a:ln>
-      </dgm:spPr>
-      <dgm:extLst>
-        <a:ext uri="{E40237B7-FDA0-4F09-8148-C483321AD2D9}">
-          <dgm14:cNvPr xmlns:dgm14="http://schemas.microsoft.com/office/drawing/2010/diagram" id="0" name="" descr="Rakete"/>
-        </a:ext>
-      </dgm:extLst>
-    </dgm:pt>
-    <dgm:pt modelId="{40A84DC4-42D5-4D96-BDD4-FBF3094638C1}" type="pres">
-      <dgm:prSet presAssocID="{7F76AD4F-8B72-4582-95FF-7536972DC93A}" presName="spaceRect" presStyleCnt="0"/>
-      <dgm:spPr/>
-    </dgm:pt>
-    <dgm:pt modelId="{F1BF262F-24FE-4AF5-BBAA-D73D58F15A79}" type="pres">
-      <dgm:prSet presAssocID="{7F76AD4F-8B72-4582-95FF-7536972DC93A}" presName="textRect" presStyleLbl="revTx" presStyleIdx="4" presStyleCnt="6">
-        <dgm:presLayoutVars>
-          <dgm:chMax val="1"/>
-          <dgm:chPref val="1"/>
-        </dgm:presLayoutVars>
-      </dgm:prSet>
-      <dgm:spPr/>
-    </dgm:pt>
-    <dgm:pt modelId="{052D99BE-B70E-486E-8B02-13A3CCE43BF9}" type="pres">
-      <dgm:prSet presAssocID="{B73C57B2-5527-4964-8071-36D4C9219B55}" presName="sibTrans" presStyleLbl="sibTrans2D1" presStyleIdx="0" presStyleCnt="0"/>
-      <dgm:spPr/>
-    </dgm:pt>
-    <dgm:pt modelId="{C54DA008-4E2F-436F-A32A-B7658B58950A}" type="pres">
-      <dgm:prSet presAssocID="{90DF3C5F-828E-4860-9D42-300784C5FAA4}" presName="compNode" presStyleCnt="0"/>
-      <dgm:spPr/>
-    </dgm:pt>
-    <dgm:pt modelId="{7E618979-FA85-4BF1-91E9-6B063BA35058}" type="pres">
-      <dgm:prSet presAssocID="{90DF3C5F-828E-4860-9D42-300784C5FAA4}" presName="iconBgRect" presStyleLbl="bgShp" presStyleIdx="5" presStyleCnt="6"/>
-      <dgm:spPr/>
-    </dgm:pt>
-    <dgm:pt modelId="{8D8B2062-9B8F-4F5A-8B31-0460C19DEF3E}" type="pres">
-      <dgm:prSet presAssocID="{90DF3C5F-828E-4860-9D42-300784C5FAA4}" presName="iconRect" presStyleLbl="node1" presStyleIdx="5" presStyleCnt="6"/>
-      <dgm:spPr>
-        <a:blipFill>
-          <a:blip xmlns:r="http://schemas.openxmlformats.org/officeDocument/2006/relationships" r:embed="rId11">
-            <a:extLst>
-              <a:ext uri="{28A0092B-C50C-407E-A947-70E740481C1C}">
-                <a14:useLocalDpi xmlns:a14="http://schemas.microsoft.com/office/drawing/2010/main" val="0"/>
-              </a:ext>
-              <a:ext uri="{96DAC541-7B7A-43D3-8B79-37D633B846F1}">
-                <asvg:svgBlip xmlns:asvg="http://schemas.microsoft.com/office/drawing/2016/SVG/main" r:embed="rId12"/>
-              </a:ext>
-            </a:extLst>
-          </a:blip>
-          <a:stretch>
-            <a:fillRect/>
-          </a:stretch>
-        </a:blipFill>
-        <a:ln>
-          <a:noFill/>
-        </a:ln>
-      </dgm:spPr>
-      <dgm:extLst>
-        <a:ext uri="{E40237B7-FDA0-4F09-8148-C483321AD2D9}">
           <dgm14:cNvPr xmlns:dgm14="http://schemas.microsoft.com/office/drawing/2010/diagram" id="0" name="" descr="Statistiken"/>
         </a:ext>
       </dgm:extLst>
@@ -2804,7 +2651,7 @@
       <dgm:spPr/>
     </dgm:pt>
     <dgm:pt modelId="{AD9C48AA-817A-4433-BE41-97F9C63E25C7}" type="pres">
-      <dgm:prSet presAssocID="{90DF3C5F-828E-4860-9D42-300784C5FAA4}" presName="textRect" presStyleLbl="revTx" presStyleIdx="5" presStyleCnt="6">
+      <dgm:prSet presAssocID="{90DF3C5F-828E-4860-9D42-300784C5FAA4}" presName="textRect" presStyleLbl="revTx" presStyleIdx="3" presStyleCnt="4">
         <dgm:presLayoutVars>
           <dgm:chMax val="1"/>
           <dgm:chPref val="1"/>
@@ -2814,24 +2661,18 @@
     </dgm:pt>
   </dgm:ptLst>
   <dgm:cxnLst>
-    <dgm:cxn modelId="{90E0E90D-EDF4-4B50-ACD1-E34B69801376}" type="presOf" srcId="{97911CDD-4D56-4FAD-B230-E820EA6F5EDC}" destId="{E55A07AF-06E5-40F7-A21E-A8DC99415E06}" srcOrd="0" destOrd="0" presId="urn:microsoft.com/office/officeart/2018/2/layout/IconCircleList"/>
     <dgm:cxn modelId="{A9F6CD18-E56D-45E6-A580-9D47697BD9FC}" type="presOf" srcId="{C5E10533-0528-456E-B464-59CC464A28FF}" destId="{BAEB9C88-5660-49CA-B840-84E958B65DED}" srcOrd="0" destOrd="0" presId="urn:microsoft.com/office/officeart/2018/2/layout/IconCircleList"/>
     <dgm:cxn modelId="{371C1E32-3E21-4DD6-977C-484BDCBF7765}" type="presOf" srcId="{90DF3C5F-828E-4860-9D42-300784C5FAA4}" destId="{AD9C48AA-817A-4433-BE41-97F9C63E25C7}" srcOrd="0" destOrd="0" presId="urn:microsoft.com/office/officeart/2018/2/layout/IconCircleList"/>
     <dgm:cxn modelId="{860E913D-28E8-483F-A605-BEE10431040F}" type="presOf" srcId="{0AF64318-A85A-4303-9683-728BA2BDD792}" destId="{43E6FB21-E331-4FE5-B2DF-F808B38FAF68}" srcOrd="0" destOrd="0" presId="urn:microsoft.com/office/officeart/2018/2/layout/IconCircleList"/>
     <dgm:cxn modelId="{17A0F045-9A97-4F89-A903-50FA948CE61B}" srcId="{817FE160-FE28-46AD-A75E-046504E0C265}" destId="{0AF64318-A85A-4303-9683-728BA2BDD792}" srcOrd="0" destOrd="0" parTransId="{65C7A07E-EE76-412E-8A7D-9D3DA7A2A9AF}" sibTransId="{248F62C4-08EB-4268-9FFA-093EC4283AA8}"/>
-    <dgm:cxn modelId="{B5EDE874-05A6-4F56-8031-163AB97D07B7}" srcId="{817FE160-FE28-46AD-A75E-046504E0C265}" destId="{7F76AD4F-8B72-4582-95FF-7536972DC93A}" srcOrd="4" destOrd="0" parTransId="{DF5A7208-B58D-41FE-9B05-BFAD1F10B6CC}" sibTransId="{B73C57B2-5527-4964-8071-36D4C9219B55}"/>
-    <dgm:cxn modelId="{871FED78-9D19-4944-8BF9-CB57AE0CB102}" srcId="{817FE160-FE28-46AD-A75E-046504E0C265}" destId="{97911CDD-4D56-4FAD-B230-E820EA6F5EDC}" srcOrd="3" destOrd="0" parTransId="{9408CE91-114F-4DD3-87AF-6547655575AF}" sibTransId="{994E05E9-8C60-43A4-AC92-103588B9227A}"/>
     <dgm:cxn modelId="{7F06E383-3E23-4A7D-981C-4529A3F6E340}" type="presOf" srcId="{248F62C4-08EB-4268-9FFA-093EC4283AA8}" destId="{E62EC052-9A2C-48BE-81DE-CCA26B45D975}" srcOrd="0" destOrd="0" presId="urn:microsoft.com/office/officeart/2018/2/layout/IconCircleList"/>
     <dgm:cxn modelId="{F0C8CC88-63ED-411D-8423-6451AD24E9B9}" type="presOf" srcId="{B487F059-77E6-4578-BC88-B141F60995AF}" destId="{2BDFC975-09D9-4F71-9744-15B1DB827712}" srcOrd="0" destOrd="0" presId="urn:microsoft.com/office/officeart/2018/2/layout/IconCircleList"/>
     <dgm:cxn modelId="{7EDF5D8A-6E70-4018-81A7-CD2136F61B50}" srcId="{817FE160-FE28-46AD-A75E-046504E0C265}" destId="{C5E10533-0528-456E-B464-59CC464A28FF}" srcOrd="1" destOrd="0" parTransId="{4388137D-C655-43FC-A461-97A2F376FC26}" sibTransId="{48C21B95-0034-429D-B59A-92D6CD9A0CF3}"/>
-    <dgm:cxn modelId="{AB8E0B93-80A5-4BAE-ABA5-9FC6C4DA8A25}" type="presOf" srcId="{7F76AD4F-8B72-4582-95FF-7536972DC93A}" destId="{F1BF262F-24FE-4AF5-BBAA-D73D58F15A79}" srcOrd="0" destOrd="0" presId="urn:microsoft.com/office/officeart/2018/2/layout/IconCircleList"/>
-    <dgm:cxn modelId="{2B96269E-A3C6-4923-87E6-6B114BE88845}" type="presOf" srcId="{994E05E9-8C60-43A4-AC92-103588B9227A}" destId="{A3E95B30-1347-4D54-B73B-43E7D122C065}" srcOrd="0" destOrd="0" presId="urn:microsoft.com/office/officeart/2018/2/layout/IconCircleList"/>
     <dgm:cxn modelId="{8D7930A0-AC62-44A4-92FA-AAE25A2EB1A4}" srcId="{817FE160-FE28-46AD-A75E-046504E0C265}" destId="{22BFE0F4-BC91-4AC0-8179-2F9BA57CE287}" srcOrd="2" destOrd="0" parTransId="{42BEEF56-66E0-42FB-B8F0-540E569DFB79}" sibTransId="{B487F059-77E6-4578-BC88-B141F60995AF}"/>
     <dgm:cxn modelId="{547A85AB-5B08-404B-9275-9A0C7E638ADE}" type="presOf" srcId="{817FE160-FE28-46AD-A75E-046504E0C265}" destId="{222EBB9A-0857-41EC-B960-73E35A029BF1}" srcOrd="0" destOrd="0" presId="urn:microsoft.com/office/officeart/2018/2/layout/IconCircleList"/>
     <dgm:cxn modelId="{4180CCB3-5B26-4C8D-901A-632C51D161E4}" type="presOf" srcId="{48C21B95-0034-429D-B59A-92D6CD9A0CF3}" destId="{447EC37D-2E5A-4D98-A176-D261E25C18E6}" srcOrd="0" destOrd="0" presId="urn:microsoft.com/office/officeart/2018/2/layout/IconCircleList"/>
     <dgm:cxn modelId="{D857D4C5-C480-4C7E-8430-C2E6CF5CD3A0}" type="presOf" srcId="{22BFE0F4-BC91-4AC0-8179-2F9BA57CE287}" destId="{89C7CE4C-4F0B-40A7-9B70-36CD72322155}" srcOrd="0" destOrd="0" presId="urn:microsoft.com/office/officeart/2018/2/layout/IconCircleList"/>
-    <dgm:cxn modelId="{87CC3EF1-F7E2-450D-9FDB-78ECBAA2DA5D}" srcId="{817FE160-FE28-46AD-A75E-046504E0C265}" destId="{90DF3C5F-828E-4860-9D42-300784C5FAA4}" srcOrd="5" destOrd="0" parTransId="{CFEEEFB5-7ABE-48A1-A0BD-124F8DD326D1}" sibTransId="{4215305C-91D8-4B48-9701-A4DE91C162EB}"/>
-    <dgm:cxn modelId="{EAA969F1-8707-4308-9E27-B8450D55C362}" type="presOf" srcId="{B73C57B2-5527-4964-8071-36D4C9219B55}" destId="{052D99BE-B70E-486E-8B02-13A3CCE43BF9}" srcOrd="0" destOrd="0" presId="urn:microsoft.com/office/officeart/2018/2/layout/IconCircleList"/>
+    <dgm:cxn modelId="{87CC3EF1-F7E2-450D-9FDB-78ECBAA2DA5D}" srcId="{817FE160-FE28-46AD-A75E-046504E0C265}" destId="{90DF3C5F-828E-4860-9D42-300784C5FAA4}" srcOrd="3" destOrd="0" parTransId="{CFEEEFB5-7ABE-48A1-A0BD-124F8DD326D1}" sibTransId="{4215305C-91D8-4B48-9701-A4DE91C162EB}"/>
     <dgm:cxn modelId="{EBC6CE7C-B0A8-4877-8817-1CAD8E97122C}" type="presParOf" srcId="{222EBB9A-0857-41EC-B960-73E35A029BF1}" destId="{D20BD080-91B9-4B34-B276-B867952A579E}" srcOrd="0" destOrd="0" presId="urn:microsoft.com/office/officeart/2018/2/layout/IconCircleList"/>
     <dgm:cxn modelId="{1133E07C-DD8B-4A88-BCA1-CEC76D5B029A}" type="presParOf" srcId="{D20BD080-91B9-4B34-B276-B867952A579E}" destId="{BD346CE1-592A-4F08-98DE-6D2541A8F8FB}" srcOrd="0" destOrd="0" presId="urn:microsoft.com/office/officeart/2018/2/layout/IconCircleList"/>
     <dgm:cxn modelId="{62EA1444-A1B5-4E84-9866-D540E14F98E6}" type="presParOf" srcId="{BD346CE1-592A-4F08-98DE-6D2541A8F8FB}" destId="{F119D8C5-A181-4F4E-8BBB-2FB69E1D29B8}" srcOrd="0" destOrd="0" presId="urn:microsoft.com/office/officeart/2018/2/layout/IconCircleList"/>
@@ -2851,19 +2692,7 @@
     <dgm:cxn modelId="{1F377B95-423A-493B-9E65-742F1A802F1E}" type="presParOf" srcId="{EB1AFE4F-9A60-415F-BBB5-18F6BFAA6D82}" destId="{DDA65273-5E6C-4CE5-8BF5-CF436D78CD7A}" srcOrd="2" destOrd="0" presId="urn:microsoft.com/office/officeart/2018/2/layout/IconCircleList"/>
     <dgm:cxn modelId="{A04CA48A-1619-4DDF-9CD9-6ABEC14E1967}" type="presParOf" srcId="{EB1AFE4F-9A60-415F-BBB5-18F6BFAA6D82}" destId="{89C7CE4C-4F0B-40A7-9B70-36CD72322155}" srcOrd="3" destOrd="0" presId="urn:microsoft.com/office/officeart/2018/2/layout/IconCircleList"/>
     <dgm:cxn modelId="{98F8E086-1B92-4033-A7ED-F3100B62A28A}" type="presParOf" srcId="{D20BD080-91B9-4B34-B276-B867952A579E}" destId="{2BDFC975-09D9-4F71-9744-15B1DB827712}" srcOrd="5" destOrd="0" presId="urn:microsoft.com/office/officeart/2018/2/layout/IconCircleList"/>
-    <dgm:cxn modelId="{3AAB80F5-FD08-4FAC-9EE6-6607E635A958}" type="presParOf" srcId="{D20BD080-91B9-4B34-B276-B867952A579E}" destId="{F9140F90-8CAB-4462-BCD9-663267D50EA6}" srcOrd="6" destOrd="0" presId="urn:microsoft.com/office/officeart/2018/2/layout/IconCircleList"/>
-    <dgm:cxn modelId="{AAB9CF81-BC87-40A8-B714-DAD2C571A612}" type="presParOf" srcId="{F9140F90-8CAB-4462-BCD9-663267D50EA6}" destId="{4CAC33BE-CB49-4C17-BCBA-12207794AB4B}" srcOrd="0" destOrd="0" presId="urn:microsoft.com/office/officeart/2018/2/layout/IconCircleList"/>
-    <dgm:cxn modelId="{3470D2D1-9C42-4CF7-AB93-3ABB4A21BD8E}" type="presParOf" srcId="{F9140F90-8CAB-4462-BCD9-663267D50EA6}" destId="{1A46AF24-C28B-44E7-BC19-872D586A0717}" srcOrd="1" destOrd="0" presId="urn:microsoft.com/office/officeart/2018/2/layout/IconCircleList"/>
-    <dgm:cxn modelId="{D88FA28E-C6C0-4170-8EDD-4E74D0E397B9}" type="presParOf" srcId="{F9140F90-8CAB-4462-BCD9-663267D50EA6}" destId="{79EB5CDA-83D7-4214-897E-8E8F11B3D1E7}" srcOrd="2" destOrd="0" presId="urn:microsoft.com/office/officeart/2018/2/layout/IconCircleList"/>
-    <dgm:cxn modelId="{FE89EE72-DBA4-48A0-A12D-5D93D2A9D630}" type="presParOf" srcId="{F9140F90-8CAB-4462-BCD9-663267D50EA6}" destId="{E55A07AF-06E5-40F7-A21E-A8DC99415E06}" srcOrd="3" destOrd="0" presId="urn:microsoft.com/office/officeart/2018/2/layout/IconCircleList"/>
-    <dgm:cxn modelId="{ED437F6D-AF35-4981-819C-62FE3487A54C}" type="presParOf" srcId="{D20BD080-91B9-4B34-B276-B867952A579E}" destId="{A3E95B30-1347-4D54-B73B-43E7D122C065}" srcOrd="7" destOrd="0" presId="urn:microsoft.com/office/officeart/2018/2/layout/IconCircleList"/>
-    <dgm:cxn modelId="{6F94A864-51FA-4E01-967D-A8279CA32722}" type="presParOf" srcId="{D20BD080-91B9-4B34-B276-B867952A579E}" destId="{3B2AF1E6-9E16-4B86-9E2E-137CB27BB35B}" srcOrd="8" destOrd="0" presId="urn:microsoft.com/office/officeart/2018/2/layout/IconCircleList"/>
-    <dgm:cxn modelId="{32F90A4D-A16E-42FC-92A1-129202BE5953}" type="presParOf" srcId="{3B2AF1E6-9E16-4B86-9E2E-137CB27BB35B}" destId="{8135A4A7-55A2-493C-AAF6-7717B56CAC2D}" srcOrd="0" destOrd="0" presId="urn:microsoft.com/office/officeart/2018/2/layout/IconCircleList"/>
-    <dgm:cxn modelId="{41DF4BE7-38F4-49D5-A8DE-CAD4823023A1}" type="presParOf" srcId="{3B2AF1E6-9E16-4B86-9E2E-137CB27BB35B}" destId="{7327B8CD-CF2F-45AA-8AED-6F7086F4245E}" srcOrd="1" destOrd="0" presId="urn:microsoft.com/office/officeart/2018/2/layout/IconCircleList"/>
-    <dgm:cxn modelId="{11CCC9A4-2715-44C9-9BF3-F4C040EC94B5}" type="presParOf" srcId="{3B2AF1E6-9E16-4B86-9E2E-137CB27BB35B}" destId="{40A84DC4-42D5-4D96-BDD4-FBF3094638C1}" srcOrd="2" destOrd="0" presId="urn:microsoft.com/office/officeart/2018/2/layout/IconCircleList"/>
-    <dgm:cxn modelId="{D35C7932-FCF3-439E-B521-A855459C52F2}" type="presParOf" srcId="{3B2AF1E6-9E16-4B86-9E2E-137CB27BB35B}" destId="{F1BF262F-24FE-4AF5-BBAA-D73D58F15A79}" srcOrd="3" destOrd="0" presId="urn:microsoft.com/office/officeart/2018/2/layout/IconCircleList"/>
-    <dgm:cxn modelId="{BEEA4EE7-5110-4E29-BD55-2914A92C2CF8}" type="presParOf" srcId="{D20BD080-91B9-4B34-B276-B867952A579E}" destId="{052D99BE-B70E-486E-8B02-13A3CCE43BF9}" srcOrd="9" destOrd="0" presId="urn:microsoft.com/office/officeart/2018/2/layout/IconCircleList"/>
-    <dgm:cxn modelId="{C84D745C-43A0-4D47-B7AF-845913201818}" type="presParOf" srcId="{D20BD080-91B9-4B34-B276-B867952A579E}" destId="{C54DA008-4E2F-436F-A32A-B7658B58950A}" srcOrd="10" destOrd="0" presId="urn:microsoft.com/office/officeart/2018/2/layout/IconCircleList"/>
+    <dgm:cxn modelId="{C84D745C-43A0-4D47-B7AF-845913201818}" type="presParOf" srcId="{D20BD080-91B9-4B34-B276-B867952A579E}" destId="{C54DA008-4E2F-436F-A32A-B7658B58950A}" srcOrd="6" destOrd="0" presId="urn:microsoft.com/office/officeart/2018/2/layout/IconCircleList"/>
     <dgm:cxn modelId="{48847EA1-5BA4-4B2B-982A-609BDD7BD3C7}" type="presParOf" srcId="{C54DA008-4E2F-436F-A32A-B7658B58950A}" destId="{7E618979-FA85-4BF1-91E9-6B063BA35058}" srcOrd="0" destOrd="0" presId="urn:microsoft.com/office/officeart/2018/2/layout/IconCircleList"/>
     <dgm:cxn modelId="{48953D7B-D965-4864-83DD-602F54634E49}" type="presParOf" srcId="{C54DA008-4E2F-436F-A32A-B7658B58950A}" destId="{8D8B2062-9B8F-4F5A-8B31-0460C19DEF3E}" srcOrd="1" destOrd="0" presId="urn:microsoft.com/office/officeart/2018/2/layout/IconCircleList"/>
     <dgm:cxn modelId="{8CC1F64E-0E82-4F65-8943-C58223868957}" type="presParOf" srcId="{C54DA008-4E2F-436F-A32A-B7658B58950A}" destId="{4F5BEC18-6281-426C-BEA3-A40FDFB6D5F7}" srcOrd="2" destOrd="0" presId="urn:microsoft.com/office/officeart/2018/2/layout/IconCircleList"/>
@@ -3424,8 +3253,8 @@
       </dsp:nvSpPr>
       <dsp:spPr>
         <a:xfrm>
-          <a:off x="965743" y="51045"/>
-          <a:ext cx="888386" cy="888386"/>
+          <a:off x="108906" y="624758"/>
+          <a:ext cx="1115255" cy="1115255"/>
         </a:xfrm>
         <a:prstGeom prst="ellipse">
           <a:avLst/>
@@ -3463,8 +3292,8 @@
       </dsp:nvSpPr>
       <dsp:spPr>
         <a:xfrm>
-          <a:off x="1152304" y="237607"/>
-          <a:ext cx="515264" cy="515264"/>
+          <a:off x="343110" y="858962"/>
+          <a:ext cx="646848" cy="646848"/>
         </a:xfrm>
         <a:prstGeom prst="rect">
           <a:avLst/>
@@ -3513,8 +3342,8 @@
       </dsp:nvSpPr>
       <dsp:spPr>
         <a:xfrm>
-          <a:off x="2044498" y="51045"/>
-          <a:ext cx="2094053" cy="888386"/>
+          <a:off x="1463145" y="624758"/>
+          <a:ext cx="2628816" cy="1115255"/>
         </a:xfrm>
         <a:prstGeom prst="rect">
           <a:avLst/>
@@ -3545,7 +3374,7 @@
         <a:p>
           <a:pPr marL="0" lvl="0" indent="0" algn="l" defTabSz="711200">
             <a:lnSpc>
-              <a:spcPct val="90000"/>
+              <a:spcPct val="100000"/>
             </a:lnSpc>
             <a:spcBef>
               <a:spcPct val="0"/>
@@ -3563,8 +3392,8 @@
         </a:p>
       </dsp:txBody>
       <dsp:txXfrm>
-        <a:off x="2044498" y="51045"/>
-        <a:ext cx="2094053" cy="888386"/>
+        <a:off x="1463145" y="624758"/>
+        <a:ext cx="2628816" cy="1115255"/>
       </dsp:txXfrm>
     </dsp:sp>
     <dsp:sp modelId="{7B0FC50B-C7E3-4553-BEDD-A022A09ECF40}">
@@ -3574,8 +3403,8 @@
       </dsp:nvSpPr>
       <dsp:spPr>
         <a:xfrm>
-          <a:off x="4503425" y="51045"/>
-          <a:ext cx="888386" cy="888386"/>
+          <a:off x="4550014" y="624758"/>
+          <a:ext cx="1115255" cy="1115255"/>
         </a:xfrm>
         <a:prstGeom prst="ellipse">
           <a:avLst/>
@@ -3613,8 +3442,8 @@
       </dsp:nvSpPr>
       <dsp:spPr>
         <a:xfrm>
-          <a:off x="4689986" y="237607"/>
-          <a:ext cx="515264" cy="515264"/>
+          <a:off x="4784217" y="858962"/>
+          <a:ext cx="646848" cy="646848"/>
         </a:xfrm>
         <a:prstGeom prst="rect">
           <a:avLst/>
@@ -3663,8 +3492,8 @@
       </dsp:nvSpPr>
       <dsp:spPr>
         <a:xfrm>
-          <a:off x="5582180" y="51045"/>
-          <a:ext cx="2094053" cy="888386"/>
+          <a:off x="5904253" y="624758"/>
+          <a:ext cx="2628816" cy="1115255"/>
         </a:xfrm>
         <a:prstGeom prst="rect">
           <a:avLst/>
@@ -3695,7 +3524,7 @@
         <a:p>
           <a:pPr marL="0" lvl="0" indent="0" algn="l" defTabSz="711200">
             <a:lnSpc>
-              <a:spcPct val="90000"/>
+              <a:spcPct val="100000"/>
             </a:lnSpc>
             <a:spcBef>
               <a:spcPct val="0"/>
@@ -3713,8 +3542,8 @@
         </a:p>
       </dsp:txBody>
       <dsp:txXfrm>
-        <a:off x="5582180" y="51045"/>
-        <a:ext cx="2094053" cy="888386"/>
+        <a:off x="5904253" y="624758"/>
+        <a:ext cx="2628816" cy="1115255"/>
       </dsp:txXfrm>
     </dsp:sp>
     <dsp:sp modelId="{65A51382-B10A-4300-9B36-432A188BE9FF}">
@@ -3724,8 +3553,8 @@
       </dsp:nvSpPr>
       <dsp:spPr>
         <a:xfrm>
-          <a:off x="965743" y="1652209"/>
-          <a:ext cx="888386" cy="888386"/>
+          <a:off x="108906" y="2452790"/>
+          <a:ext cx="1115255" cy="1115255"/>
         </a:xfrm>
         <a:prstGeom prst="ellipse">
           <a:avLst/>
@@ -3763,8 +3592,8 @@
       </dsp:nvSpPr>
       <dsp:spPr>
         <a:xfrm>
-          <a:off x="1152304" y="1838770"/>
-          <a:ext cx="515264" cy="515264"/>
+          <a:off x="343110" y="2686994"/>
+          <a:ext cx="646848" cy="646848"/>
         </a:xfrm>
         <a:prstGeom prst="rect">
           <a:avLst/>
@@ -3813,8 +3642,8 @@
       </dsp:nvSpPr>
       <dsp:spPr>
         <a:xfrm>
-          <a:off x="2044498" y="1652209"/>
-          <a:ext cx="2094053" cy="888386"/>
+          <a:off x="1463145" y="2452790"/>
+          <a:ext cx="2628816" cy="1115255"/>
         </a:xfrm>
         <a:prstGeom prst="rect">
           <a:avLst/>
@@ -3845,7 +3674,7 @@
         <a:p>
           <a:pPr marL="0" lvl="0" indent="0" algn="l" defTabSz="711200">
             <a:lnSpc>
-              <a:spcPct val="90000"/>
+              <a:spcPct val="100000"/>
             </a:lnSpc>
             <a:spcBef>
               <a:spcPct val="0"/>
@@ -3863,19 +3692,19 @@
         </a:p>
       </dsp:txBody>
       <dsp:txXfrm>
-        <a:off x="2044498" y="1652209"/>
-        <a:ext cx="2094053" cy="888386"/>
+        <a:off x="1463145" y="2452790"/>
+        <a:ext cx="2628816" cy="1115255"/>
       </dsp:txXfrm>
     </dsp:sp>
-    <dsp:sp modelId="{4CAC33BE-CB49-4C17-BCBA-12207794AB4B}">
+    <dsp:sp modelId="{7E618979-FA85-4BF1-91E9-6B063BA35058}">
       <dsp:nvSpPr>
         <dsp:cNvPr id="0" name=""/>
         <dsp:cNvSpPr/>
       </dsp:nvSpPr>
       <dsp:spPr>
         <a:xfrm>
-          <a:off x="4503425" y="1652209"/>
-          <a:ext cx="888386" cy="888386"/>
+          <a:off x="4550014" y="2452790"/>
+          <a:ext cx="1115255" cy="1115255"/>
         </a:xfrm>
         <a:prstGeom prst="ellipse">
           <a:avLst/>
@@ -3906,15 +3735,15 @@
         <a:fontRef idx="minor"/>
       </dsp:style>
     </dsp:sp>
-    <dsp:sp modelId="{1A46AF24-C28B-44E7-BC19-872D586A0717}">
+    <dsp:sp modelId="{8D8B2062-9B8F-4F5A-8B31-0460C19DEF3E}">
       <dsp:nvSpPr>
         <dsp:cNvPr id="0" name=""/>
         <dsp:cNvSpPr/>
       </dsp:nvSpPr>
       <dsp:spPr>
         <a:xfrm>
-          <a:off x="4689986" y="1838770"/>
-          <a:ext cx="515264" cy="515264"/>
+          <a:off x="4784217" y="2686994"/>
+          <a:ext cx="646848" cy="646848"/>
         </a:xfrm>
         <a:prstGeom prst="rect">
           <a:avLst/>
@@ -3956,15 +3785,15 @@
         </a:fontRef>
       </dsp:style>
     </dsp:sp>
-    <dsp:sp modelId="{E55A07AF-06E5-40F7-A21E-A8DC99415E06}">
+    <dsp:sp modelId="{AD9C48AA-817A-4433-BE41-97F9C63E25C7}">
       <dsp:nvSpPr>
         <dsp:cNvPr id="0" name=""/>
         <dsp:cNvSpPr/>
       </dsp:nvSpPr>
       <dsp:spPr>
         <a:xfrm>
-          <a:off x="5582180" y="1652209"/>
-          <a:ext cx="2094053" cy="888386"/>
+          <a:off x="5904253" y="2452790"/>
+          <a:ext cx="2628816" cy="1115255"/>
         </a:xfrm>
         <a:prstGeom prst="rect">
           <a:avLst/>
@@ -3995,315 +3824,7 @@
         <a:p>
           <a:pPr marL="0" lvl="0" indent="0" algn="l" defTabSz="711200">
             <a:lnSpc>
-              <a:spcPct val="90000"/>
-            </a:lnSpc>
-            <a:spcBef>
-              <a:spcPct val="0"/>
-            </a:spcBef>
-            <a:spcAft>
-              <a:spcPct val="35000"/>
-            </a:spcAft>
-            <a:buNone/>
-          </a:pPr>
-          <a:r>
-            <a:rPr lang="en-GB" sz="1600" b="1" i="1" kern="1200" dirty="0">
-              <a:solidFill>
-                <a:srgbClr val="FF0000"/>
-              </a:solidFill>
-            </a:rPr>
-            <a:t>Creating a function to read the velocity of thrown punches/calculate it using the IMU-Data</a:t>
-          </a:r>
-          <a:endParaRPr lang="en-US" sz="1600" b="1" i="1" kern="1200" dirty="0">
-            <a:solidFill>
-              <a:srgbClr val="FF0000"/>
-            </a:solidFill>
-          </a:endParaRPr>
-        </a:p>
-      </dsp:txBody>
-      <dsp:txXfrm>
-        <a:off x="5582180" y="1652209"/>
-        <a:ext cx="2094053" cy="888386"/>
-      </dsp:txXfrm>
-    </dsp:sp>
-    <dsp:sp modelId="{8135A4A7-55A2-493C-AAF6-7717B56CAC2D}">
-      <dsp:nvSpPr>
-        <dsp:cNvPr id="0" name=""/>
-        <dsp:cNvSpPr/>
-      </dsp:nvSpPr>
-      <dsp:spPr>
-        <a:xfrm>
-          <a:off x="965743" y="3253372"/>
-          <a:ext cx="888386" cy="888386"/>
-        </a:xfrm>
-        <a:prstGeom prst="ellipse">
-          <a:avLst/>
-        </a:prstGeom>
-        <a:solidFill>
-          <a:schemeClr val="accent6">
-            <a:hueOff val="0"/>
-            <a:satOff val="0"/>
-            <a:lumOff val="0"/>
-            <a:alphaOff val="0"/>
-          </a:schemeClr>
-        </a:solidFill>
-        <a:ln>
-          <a:noFill/>
-        </a:ln>
-        <a:effectLst/>
-      </dsp:spPr>
-      <dsp:style>
-        <a:lnRef idx="0">
-          <a:scrgbClr r="0" g="0" b="0"/>
-        </a:lnRef>
-        <a:fillRef idx="1">
-          <a:scrgbClr r="0" g="0" b="0"/>
-        </a:fillRef>
-        <a:effectRef idx="0">
-          <a:scrgbClr r="0" g="0" b="0"/>
-        </a:effectRef>
-        <a:fontRef idx="minor"/>
-      </dsp:style>
-    </dsp:sp>
-    <dsp:sp modelId="{7327B8CD-CF2F-45AA-8AED-6F7086F4245E}">
-      <dsp:nvSpPr>
-        <dsp:cNvPr id="0" name=""/>
-        <dsp:cNvSpPr/>
-      </dsp:nvSpPr>
-      <dsp:spPr>
-        <a:xfrm>
-          <a:off x="1152304" y="3439933"/>
-          <a:ext cx="515264" cy="515264"/>
-        </a:xfrm>
-        <a:prstGeom prst="rect">
-          <a:avLst/>
-        </a:prstGeom>
-        <a:blipFill>
-          <a:blip xmlns:r="http://schemas.openxmlformats.org/officeDocument/2006/relationships" r:embed="rId9">
-            <a:extLst>
-              <a:ext uri="{28A0092B-C50C-407E-A947-70E740481C1C}">
-                <a14:useLocalDpi xmlns:a14="http://schemas.microsoft.com/office/drawing/2010/main" val="0"/>
-              </a:ext>
-              <a:ext uri="{96DAC541-7B7A-43D3-8B79-37D633B846F1}">
-                <asvg:svgBlip xmlns:asvg="http://schemas.microsoft.com/office/drawing/2016/SVG/main" r:embed="rId10"/>
-              </a:ext>
-            </a:extLst>
-          </a:blip>
-          <a:stretch>
-            <a:fillRect/>
-          </a:stretch>
-        </a:blipFill>
-        <a:ln w="19050" cap="flat" cmpd="sng" algn="ctr">
-          <a:noFill/>
-          <a:prstDash val="solid"/>
-          <a:miter lim="800000"/>
-        </a:ln>
-        <a:effectLst/>
-      </dsp:spPr>
-      <dsp:style>
-        <a:lnRef idx="2">
-          <a:scrgbClr r="0" g="0" b="0"/>
-        </a:lnRef>
-        <a:fillRef idx="1">
-          <a:scrgbClr r="0" g="0" b="0"/>
-        </a:fillRef>
-        <a:effectRef idx="0">
-          <a:scrgbClr r="0" g="0" b="0"/>
-        </a:effectRef>
-        <a:fontRef idx="minor">
-          <a:schemeClr val="lt1"/>
-        </a:fontRef>
-      </dsp:style>
-    </dsp:sp>
-    <dsp:sp modelId="{F1BF262F-24FE-4AF5-BBAA-D73D58F15A79}">
-      <dsp:nvSpPr>
-        <dsp:cNvPr id="0" name=""/>
-        <dsp:cNvSpPr/>
-      </dsp:nvSpPr>
-      <dsp:spPr>
-        <a:xfrm>
-          <a:off x="2044498" y="3253372"/>
-          <a:ext cx="2094053" cy="888386"/>
-        </a:xfrm>
-        <a:prstGeom prst="rect">
-          <a:avLst/>
-        </a:prstGeom>
-        <a:noFill/>
-        <a:ln>
-          <a:noFill/>
-        </a:ln>
-        <a:effectLst/>
-      </dsp:spPr>
-      <dsp:style>
-        <a:lnRef idx="0">
-          <a:scrgbClr r="0" g="0" b="0"/>
-        </a:lnRef>
-        <a:fillRef idx="0">
-          <a:scrgbClr r="0" g="0" b="0"/>
-        </a:fillRef>
-        <a:effectRef idx="0">
-          <a:scrgbClr r="0" g="0" b="0"/>
-        </a:effectRef>
-        <a:fontRef idx="minor"/>
-      </dsp:style>
-      <dsp:txBody>
-        <a:bodyPr spcFirstLastPara="0" vert="horz" wrap="square" lIns="0" tIns="0" rIns="0" bIns="0" numCol="1" spcCol="1270" anchor="ctr" anchorCtr="0">
-          <a:noAutofit/>
-        </a:bodyPr>
-        <a:lstStyle/>
-        <a:p>
-          <a:pPr marL="0" lvl="0" indent="0" algn="l" defTabSz="711200">
-            <a:lnSpc>
-              <a:spcPct val="90000"/>
-            </a:lnSpc>
-            <a:spcBef>
-              <a:spcPct val="0"/>
-            </a:spcBef>
-            <a:spcAft>
-              <a:spcPct val="35000"/>
-            </a:spcAft>
-            <a:buNone/>
-          </a:pPr>
-          <a:r>
-            <a:rPr lang="en-GB" sz="1600" kern="1200" dirty="0"/>
-            <a:t>Using the boards button to start and stop sessions</a:t>
-          </a:r>
-          <a:endParaRPr lang="en-US" sz="1600" kern="1200" dirty="0"/>
-        </a:p>
-      </dsp:txBody>
-      <dsp:txXfrm>
-        <a:off x="2044498" y="3253372"/>
-        <a:ext cx="2094053" cy="888386"/>
-      </dsp:txXfrm>
-    </dsp:sp>
-    <dsp:sp modelId="{7E618979-FA85-4BF1-91E9-6B063BA35058}">
-      <dsp:nvSpPr>
-        <dsp:cNvPr id="0" name=""/>
-        <dsp:cNvSpPr/>
-      </dsp:nvSpPr>
-      <dsp:spPr>
-        <a:xfrm>
-          <a:off x="4503425" y="3253372"/>
-          <a:ext cx="888386" cy="888386"/>
-        </a:xfrm>
-        <a:prstGeom prst="ellipse">
-          <a:avLst/>
-        </a:prstGeom>
-        <a:solidFill>
-          <a:schemeClr val="accent2">
-            <a:hueOff val="0"/>
-            <a:satOff val="0"/>
-            <a:lumOff val="0"/>
-            <a:alphaOff val="0"/>
-          </a:schemeClr>
-        </a:solidFill>
-        <a:ln>
-          <a:noFill/>
-        </a:ln>
-        <a:effectLst/>
-      </dsp:spPr>
-      <dsp:style>
-        <a:lnRef idx="0">
-          <a:scrgbClr r="0" g="0" b="0"/>
-        </a:lnRef>
-        <a:fillRef idx="1">
-          <a:scrgbClr r="0" g="0" b="0"/>
-        </a:fillRef>
-        <a:effectRef idx="0">
-          <a:scrgbClr r="0" g="0" b="0"/>
-        </a:effectRef>
-        <a:fontRef idx="minor"/>
-      </dsp:style>
-    </dsp:sp>
-    <dsp:sp modelId="{8D8B2062-9B8F-4F5A-8B31-0460C19DEF3E}">
-      <dsp:nvSpPr>
-        <dsp:cNvPr id="0" name=""/>
-        <dsp:cNvSpPr/>
-      </dsp:nvSpPr>
-      <dsp:spPr>
-        <a:xfrm>
-          <a:off x="4689986" y="3439933"/>
-          <a:ext cx="515264" cy="515264"/>
-        </a:xfrm>
-        <a:prstGeom prst="rect">
-          <a:avLst/>
-        </a:prstGeom>
-        <a:blipFill>
-          <a:blip xmlns:r="http://schemas.openxmlformats.org/officeDocument/2006/relationships" r:embed="rId11">
-            <a:extLst>
-              <a:ext uri="{28A0092B-C50C-407E-A947-70E740481C1C}">
-                <a14:useLocalDpi xmlns:a14="http://schemas.microsoft.com/office/drawing/2010/main" val="0"/>
-              </a:ext>
-              <a:ext uri="{96DAC541-7B7A-43D3-8B79-37D633B846F1}">
-                <asvg:svgBlip xmlns:asvg="http://schemas.microsoft.com/office/drawing/2016/SVG/main" r:embed="rId12"/>
-              </a:ext>
-            </a:extLst>
-          </a:blip>
-          <a:stretch>
-            <a:fillRect/>
-          </a:stretch>
-        </a:blipFill>
-        <a:ln w="19050" cap="flat" cmpd="sng" algn="ctr">
-          <a:noFill/>
-          <a:prstDash val="solid"/>
-          <a:miter lim="800000"/>
-        </a:ln>
-        <a:effectLst/>
-      </dsp:spPr>
-      <dsp:style>
-        <a:lnRef idx="2">
-          <a:scrgbClr r="0" g="0" b="0"/>
-        </a:lnRef>
-        <a:fillRef idx="1">
-          <a:scrgbClr r="0" g="0" b="0"/>
-        </a:fillRef>
-        <a:effectRef idx="0">
-          <a:scrgbClr r="0" g="0" b="0"/>
-        </a:effectRef>
-        <a:fontRef idx="minor">
-          <a:schemeClr val="lt1"/>
-        </a:fontRef>
-      </dsp:style>
-    </dsp:sp>
-    <dsp:sp modelId="{AD9C48AA-817A-4433-BE41-97F9C63E25C7}">
-      <dsp:nvSpPr>
-        <dsp:cNvPr id="0" name=""/>
-        <dsp:cNvSpPr/>
-      </dsp:nvSpPr>
-      <dsp:spPr>
-        <a:xfrm>
-          <a:off x="5582180" y="3253372"/>
-          <a:ext cx="2094053" cy="888386"/>
-        </a:xfrm>
-        <a:prstGeom prst="rect">
-          <a:avLst/>
-        </a:prstGeom>
-        <a:noFill/>
-        <a:ln>
-          <a:noFill/>
-        </a:ln>
-        <a:effectLst/>
-      </dsp:spPr>
-      <dsp:style>
-        <a:lnRef idx="0">
-          <a:scrgbClr r="0" g="0" b="0"/>
-        </a:lnRef>
-        <a:fillRef idx="0">
-          <a:scrgbClr r="0" g="0" b="0"/>
-        </a:fillRef>
-        <a:effectRef idx="0">
-          <a:scrgbClr r="0" g="0" b="0"/>
-        </a:effectRef>
-        <a:fontRef idx="minor"/>
-      </dsp:style>
-      <dsp:txBody>
-        <a:bodyPr spcFirstLastPara="0" vert="horz" wrap="square" lIns="0" tIns="0" rIns="0" bIns="0" numCol="1" spcCol="1270" anchor="ctr" anchorCtr="0">
-          <a:noAutofit/>
-        </a:bodyPr>
-        <a:lstStyle/>
-        <a:p>
-          <a:pPr marL="0" lvl="0" indent="0" algn="l" defTabSz="711200">
-            <a:lnSpc>
-              <a:spcPct val="90000"/>
+              <a:spcPct val="100000"/>
             </a:lnSpc>
             <a:spcBef>
               <a:spcPct val="0"/>
@@ -4321,8 +3842,8 @@
         </a:p>
       </dsp:txBody>
       <dsp:txXfrm>
-        <a:off x="5582180" y="3253372"/>
-        <a:ext cx="2094053" cy="888386"/>
+        <a:off x="5904253" y="2452790"/>
+        <a:ext cx="2628816" cy="1115255"/>
       </dsp:txXfrm>
     </dsp:sp>
   </dsp:spTree>
@@ -15098,7 +14619,7 @@
         <p:spPr>
           <a:xfrm>
             <a:off x="5538411" y="3801115"/>
-            <a:ext cx="1115177" cy="369332"/>
+            <a:ext cx="1161665" cy="369332"/>
           </a:xfrm>
           <a:prstGeom prst="rect">
             <a:avLst/>
@@ -15117,7 +14638,7 @@
                   <a:schemeClr val="bg1"/>
                 </a:solidFill>
               </a:rPr>
-              <a:t>Team T²C</a:t>
+              <a:t>Team T²C </a:t>
             </a:r>
           </a:p>
         </p:txBody>
@@ -15534,7 +15055,7 @@
             <a:pPr lvl="1"/>
             <a:r>
               <a:rPr lang="en-GB" dirty="0"/>
-              <a:t>Transmission to MQTT server</a:t>
+              <a:t>Publish to MQTT server</a:t>
             </a:r>
           </a:p>
           <a:p>
@@ -15575,6 +15096,33 @@
             <a:r>
               <a:rPr lang="de-AT" dirty="0" err="1"/>
               <a:t>sessions</a:t>
+            </a:r>
+            <a:r>
+              <a:rPr lang="de-AT" dirty="0"/>
+              <a:t> </a:t>
+            </a:r>
+            <a:r>
+              <a:rPr lang="de-AT" dirty="0" err="1"/>
+              <a:t>with</a:t>
+            </a:r>
+            <a:r>
+              <a:rPr lang="de-AT" dirty="0"/>
+              <a:t> </a:t>
+            </a:r>
+            <a:r>
+              <a:rPr lang="de-AT" dirty="0" err="1"/>
+              <a:t>user</a:t>
+            </a:r>
+            <a:r>
+              <a:rPr lang="de-AT" dirty="0"/>
+              <a:t> </a:t>
+            </a:r>
+            <a:br>
+              <a:rPr lang="de-AT" dirty="0"/>
+            </a:br>
+            <a:r>
+              <a:rPr lang="de-AT" dirty="0" err="1"/>
+              <a:t>button</a:t>
             </a:r>
             <a:endParaRPr lang="de-AT" dirty="0"/>
           </a:p>
@@ -15602,7 +15150,7 @@
         </p:blipFill>
         <p:spPr>
           <a:xfrm>
-            <a:off x="6400800" y="1870074"/>
+            <a:off x="6657975" y="1870075"/>
             <a:ext cx="5043604" cy="3641725"/>
           </a:xfrm>
           <a:prstGeom prst="rect">
@@ -15763,7 +15311,7 @@
           <a:p>
             <a:r>
               <a:rPr lang="en-GB" dirty="0"/>
-              <a:t>Reaction and loop time got worse pushing messages to </a:t>
+              <a:t>Reaction and loop time got worse publishing messages to </a:t>
             </a:r>
             <a:r>
               <a:rPr lang="en-GB" dirty="0" err="1"/>
@@ -16363,7 +15911,7 @@
           <p:nvPr>
             <p:extLst>
               <p:ext uri="{D42A27DB-BD31-4B8C-83A1-F6EECF244321}">
-                <p14:modId xmlns:p14="http://schemas.microsoft.com/office/powerpoint/2010/main" val="3638342055"/>
+                <p14:modId xmlns:p14="http://schemas.microsoft.com/office/powerpoint/2010/main" val="2423330161"/>
               </p:ext>
             </p:extLst>
           </p:nvPr>
@@ -20138,7 +19686,9 @@
         </p:nvSpPr>
         <p:spPr/>
         <p:txBody>
-          <a:bodyPr/>
+          <a:bodyPr>
+            <a:normAutofit/>
+          </a:bodyPr>
           <a:lstStyle/>
           <a:p>
             <a:r>
@@ -20152,6 +19702,12 @@
             <a:endParaRPr lang="en-GB" dirty="0"/>
           </a:p>
           <a:p>
+            <a:pPr marL="0" indent="0">
+              <a:buNone/>
+            </a:pPr>
+            <a:endParaRPr lang="en-GB" dirty="0"/>
+          </a:p>
+          <a:p>
             <a:r>
               <a:rPr lang="en-GB" dirty="0"/>
               <a:t>Mode of operation</a:t>
@@ -20183,6 +19739,18 @@
             <a:r>
               <a:rPr lang="en-GB" dirty="0"/>
               <a:t>Transmission of result to client</a:t>
+            </a:r>
+          </a:p>
+          <a:p>
+            <a:pPr marL="457200" lvl="1" indent="0">
+              <a:buNone/>
+            </a:pPr>
+            <a:endParaRPr lang="en-GB" dirty="0"/>
+          </a:p>
+          <a:p>
+            <a:r>
+              <a:rPr lang="en-GB" dirty="0"/>
+              <a:t>Calculating velocity of punch using the IMU-acceleration</a:t>
             </a:r>
           </a:p>
         </p:txBody>
@@ -21002,20 +20570,20 @@
 </file>
 
 <file path=customXml/item1.xml><?xml version="1.0" encoding="utf-8"?>
-<p:properties xmlns:p="http://schemas.microsoft.com/office/2006/metadata/properties" xmlns:xsi="http://www.w3.org/2001/XMLSchema-instance" xmlns:pc="http://schemas.microsoft.com/office/infopath/2007/PartnerControls">
-  <documentManagement>
-    <_activity xmlns="bf1a47b5-10f0-4178-af4a-bbe7cc4004c3" xsi:nil="true"/>
-  </documentManagement>
-</p:properties>
-</file>
-
-<file path=customXml/item2.xml><?xml version="1.0" encoding="utf-8"?>
 <?mso-contentType ?>
 <FormTemplates xmlns="http://schemas.microsoft.com/sharepoint/v3/contenttype/forms">
   <Display>DocumentLibraryForm</Display>
   <Edit>DocumentLibraryForm</Edit>
   <New>DocumentLibraryForm</New>
 </FormTemplates>
+</file>
+
+<file path=customXml/item2.xml><?xml version="1.0" encoding="utf-8"?>
+<p:properties xmlns:p="http://schemas.microsoft.com/office/2006/metadata/properties" xmlns:xsi="http://www.w3.org/2001/XMLSchema-instance" xmlns:pc="http://schemas.microsoft.com/office/infopath/2007/PartnerControls">
+  <documentManagement>
+    <_activity xmlns="bf1a47b5-10f0-4178-af4a-bbe7cc4004c3" xsi:nil="true"/>
+  </documentManagement>
+</p:properties>
 </file>
 
 <file path=customXml/item3.xml><?xml version="1.0" encoding="utf-8"?>
@@ -21207,6 +20775,14 @@
 </file>
 
 <file path=customXml/itemProps1.xml><?xml version="1.0" encoding="utf-8"?>
+<ds:datastoreItem xmlns:ds="http://schemas.openxmlformats.org/officeDocument/2006/customXml" ds:itemID="{D12945CB-A677-4013-820C-0AEFE2C4DC48}">
+  <ds:schemaRefs>
+    <ds:schemaRef ds:uri="http://schemas.microsoft.com/sharepoint/v3/contenttype/forms"/>
+  </ds:schemaRefs>
+</ds:datastoreItem>
+</file>
+
+<file path=customXml/itemProps2.xml><?xml version="1.0" encoding="utf-8"?>
 <ds:datastoreItem xmlns:ds="http://schemas.openxmlformats.org/officeDocument/2006/customXml" ds:itemID="{2C2A40F2-5398-4DE1-A8FC-C0BA56DCE4EA}">
   <ds:schemaRefs>
     <ds:schemaRef ds:uri="bf1a47b5-10f0-4178-af4a-bbe7cc4004c3"/>
@@ -21218,14 +20794,6 @@
     <ds:schemaRef ds:uri="http://www.w3.org/XML/1998/namespace"/>
     <ds:schemaRef ds:uri="http://purl.org/dc/dcmitype/"/>
     <ds:schemaRef ds:uri="http://schemas.microsoft.com/office/2006/metadata/properties"/>
-  </ds:schemaRefs>
-</ds:datastoreItem>
-</file>
-
-<file path=customXml/itemProps2.xml><?xml version="1.0" encoding="utf-8"?>
-<ds:datastoreItem xmlns:ds="http://schemas.openxmlformats.org/officeDocument/2006/customXml" ds:itemID="{D12945CB-A677-4013-820C-0AEFE2C4DC48}">
-  <ds:schemaRefs>
-    <ds:schemaRef ds:uri="http://schemas.microsoft.com/sharepoint/v3/contenttype/forms"/>
   </ds:schemaRefs>
 </ds:datastoreItem>
 </file>

--- a/report/Präsentation_final.pptx
+++ b/report/Präsentation_final.pptx
@@ -2702,7 +2702,7 @@
   <dgm:whole/>
   <dgm:extLst>
     <a:ext uri="http://schemas.microsoft.com/office/drawing/2008/diagram">
-      <dsp:dataModelExt xmlns:dsp="http://schemas.microsoft.com/office/drawing/2008/diagram" relId="rId6" minVer="http://schemas.openxmlformats.org/drawingml/2006/diagram"/>
+      <dsp:dataModelExt xmlns:dsp="http://schemas.microsoft.com/office/drawing/2008/diagram" relId="rId7" minVer="http://schemas.openxmlformats.org/drawingml/2006/diagram"/>
     </a:ext>
   </dgm:extLst>
 </dgm:dataModel>
@@ -6741,6 +6741,13 @@
           </p:nvPr>
         </p:nvSpPr>
         <p:spPr/>
+        <p:txBody>
+          <a:bodyPr/>
+          <a:lstStyle/>
+          <a:p>
+            <a:endParaRPr lang="de-AT"/>
+          </a:p>
+        </p:txBody>
       </p:sp>
       <p:sp>
         <p:nvSpPr>
@@ -6829,6 +6836,13 @@
           </p:nvPr>
         </p:nvSpPr>
         <p:spPr/>
+        <p:txBody>
+          <a:bodyPr/>
+          <a:lstStyle/>
+          <a:p>
+            <a:endParaRPr lang="de-AT"/>
+          </a:p>
+        </p:txBody>
       </p:sp>
       <p:sp>
         <p:nvSpPr>
@@ -6913,6 +6927,13 @@
           </p:nvPr>
         </p:nvSpPr>
         <p:spPr/>
+        <p:txBody>
+          <a:bodyPr/>
+          <a:lstStyle/>
+          <a:p>
+            <a:endParaRPr lang="de-AT"/>
+          </a:p>
+        </p:txBody>
       </p:sp>
       <p:sp>
         <p:nvSpPr>
@@ -8553,7 +8574,7 @@
               <a:t>Micropython</a:t>
             </a:r>
             <a:r>
-              <a:rPr lang="de-AT"/>
+              <a:rPr lang="de-AT" dirty="0"/>
               <a:t> code</a:t>
             </a:r>
           </a:p>
@@ -8623,6 +8644,13 @@
           </p:nvPr>
         </p:nvSpPr>
         <p:spPr/>
+        <p:txBody>
+          <a:bodyPr/>
+          <a:lstStyle/>
+          <a:p>
+            <a:endParaRPr lang="de-AT"/>
+          </a:p>
+        </p:txBody>
       </p:sp>
       <p:sp>
         <p:nvSpPr>
@@ -8670,6 +8698,97 @@
     <p:extLst>
       <p:ext uri="{BB962C8B-B14F-4D97-AF65-F5344CB8AC3E}">
         <p14:creationId xmlns:p14="http://schemas.microsoft.com/office/powerpoint/2010/main" val="10960042"/>
+      </p:ext>
+    </p:extLst>
+  </p:cSld>
+  <p:clrMapOvr>
+    <a:masterClrMapping/>
+  </p:clrMapOvr>
+</p:notes>
+</file>
+
+<file path=ppt/notesSlides/notesSlide13.xml><?xml version="1.0" encoding="utf-8"?>
+<p:notes xmlns:a="http://schemas.openxmlformats.org/drawingml/2006/main" xmlns:r="http://schemas.openxmlformats.org/officeDocument/2006/relationships" xmlns:p="http://schemas.openxmlformats.org/presentationml/2006/main">
+  <p:cSld>
+    <p:spTree>
+      <p:nvGrpSpPr>
+        <p:cNvPr id="1" name=""/>
+        <p:cNvGrpSpPr/>
+        <p:nvPr/>
+      </p:nvGrpSpPr>
+      <p:grpSpPr>
+        <a:xfrm>
+          <a:off x="0" y="0"/>
+          <a:ext cx="0" cy="0"/>
+          <a:chOff x="0" y="0"/>
+          <a:chExt cx="0" cy="0"/>
+        </a:xfrm>
+      </p:grpSpPr>
+      <p:sp>
+        <p:nvSpPr>
+          <p:cNvPr id="2" name="Folienbildplatzhalter 1"/>
+          <p:cNvSpPr>
+            <a:spLocks noGrp="1" noRot="1" noChangeAspect="1"/>
+          </p:cNvSpPr>
+          <p:nvPr>
+            <p:ph type="sldImg"/>
+          </p:nvPr>
+        </p:nvSpPr>
+        <p:spPr/>
+        <p:txBody>
+          <a:bodyPr/>
+          <a:lstStyle/>
+          <a:p>
+            <a:endParaRPr lang="de-AT"/>
+          </a:p>
+        </p:txBody>
+      </p:sp>
+      <p:sp>
+        <p:nvSpPr>
+          <p:cNvPr id="3" name="Notizenplatzhalter 2"/>
+          <p:cNvSpPr>
+            <a:spLocks noGrp="1"/>
+          </p:cNvSpPr>
+          <p:nvPr>
+            <p:ph type="body" idx="1"/>
+          </p:nvPr>
+        </p:nvSpPr>
+        <p:spPr/>
+        <p:txBody>
+          <a:bodyPr/>
+          <a:lstStyle/>
+          <a:p>
+            <a:endParaRPr lang="de-AT" dirty="0"/>
+          </a:p>
+        </p:txBody>
+      </p:sp>
+      <p:sp>
+        <p:nvSpPr>
+          <p:cNvPr id="4" name="Foliennummernplatzhalter 3"/>
+          <p:cNvSpPr>
+            <a:spLocks noGrp="1"/>
+          </p:cNvSpPr>
+          <p:nvPr>
+            <p:ph type="sldNum" sz="quarter" idx="5"/>
+          </p:nvPr>
+        </p:nvSpPr>
+        <p:spPr/>
+        <p:txBody>
+          <a:bodyPr/>
+          <a:lstStyle/>
+          <a:p>
+            <a:fld id="{46421F40-A2A0-451B-91E9-F1FF0F435D37}" type="slidenum">
+              <a:rPr lang="de-AT" smtClean="0"/>
+              <a:t>13</a:t>
+            </a:fld>
+            <a:endParaRPr lang="de-AT"/>
+          </a:p>
+        </p:txBody>
+      </p:sp>
+    </p:spTree>
+    <p:extLst>
+      <p:ext uri="{BB962C8B-B14F-4D97-AF65-F5344CB8AC3E}">
+        <p14:creationId xmlns:p14="http://schemas.microsoft.com/office/powerpoint/2010/main" val="2759145001"/>
       </p:ext>
     </p:extLst>
   </p:cSld>
@@ -8707,6 +8826,13 @@
           </p:nvPr>
         </p:nvSpPr>
         <p:spPr/>
+        <p:txBody>
+          <a:bodyPr/>
+          <a:lstStyle/>
+          <a:p>
+            <a:endParaRPr lang="de-AT"/>
+          </a:p>
+        </p:txBody>
       </p:sp>
       <p:sp>
         <p:nvSpPr>
@@ -8795,6 +8921,13 @@
           </p:nvPr>
         </p:nvSpPr>
         <p:spPr/>
+        <p:txBody>
+          <a:bodyPr/>
+          <a:lstStyle/>
+          <a:p>
+            <a:endParaRPr lang="de-AT"/>
+          </a:p>
+        </p:txBody>
       </p:sp>
       <p:sp>
         <p:nvSpPr>
@@ -8883,6 +9016,13 @@
           </p:nvPr>
         </p:nvSpPr>
         <p:spPr/>
+        <p:txBody>
+          <a:bodyPr/>
+          <a:lstStyle/>
+          <a:p>
+            <a:endParaRPr lang="de-AT"/>
+          </a:p>
+        </p:txBody>
       </p:sp>
       <p:sp>
         <p:nvSpPr>
@@ -8971,6 +9111,13 @@
           </p:nvPr>
         </p:nvSpPr>
         <p:spPr/>
+        <p:txBody>
+          <a:bodyPr/>
+          <a:lstStyle/>
+          <a:p>
+            <a:endParaRPr lang="de-AT"/>
+          </a:p>
+        </p:txBody>
       </p:sp>
       <p:sp>
         <p:nvSpPr>
@@ -9541,6 +9688,13 @@
           </p:nvPr>
         </p:nvSpPr>
         <p:spPr/>
+        <p:txBody>
+          <a:bodyPr/>
+          <a:lstStyle/>
+          <a:p>
+            <a:endParaRPr lang="de-AT"/>
+          </a:p>
+        </p:txBody>
       </p:sp>
       <p:sp>
         <p:nvSpPr>
@@ -10125,6 +10279,13 @@
           </p:nvPr>
         </p:nvSpPr>
         <p:spPr/>
+        <p:txBody>
+          <a:bodyPr/>
+          <a:lstStyle/>
+          <a:p>
+            <a:endParaRPr lang="de-AT"/>
+          </a:p>
+        </p:txBody>
       </p:sp>
       <p:sp>
         <p:nvSpPr>
@@ -11055,6 +11216,13 @@
           </p:nvPr>
         </p:nvSpPr>
         <p:spPr/>
+        <p:txBody>
+          <a:bodyPr/>
+          <a:lstStyle/>
+          <a:p>
+            <a:endParaRPr lang="de-AT"/>
+          </a:p>
+        </p:txBody>
       </p:sp>
       <p:sp>
         <p:nvSpPr>
@@ -11199,6 +11367,13 @@
           </p:nvPr>
         </p:nvSpPr>
         <p:spPr/>
+        <p:txBody>
+          <a:bodyPr/>
+          <a:lstStyle/>
+          <a:p>
+            <a:endParaRPr lang="de-AT"/>
+          </a:p>
+        </p:txBody>
       </p:sp>
       <p:sp>
         <p:nvSpPr>
@@ -11403,9 +11578,10 @@
           <a:lstStyle/>
           <a:p>
             <a:r>
-              <a:rPr lang="de-AT"/>
+              <a:rPr lang="de-DE"/>
               <a:t>23.02.2026</a:t>
             </a:r>
+            <a:endParaRPr lang="de-AT"/>
           </a:p>
         </p:txBody>
       </p:sp>
@@ -11602,9 +11778,10 @@
           <a:lstStyle/>
           <a:p>
             <a:r>
-              <a:rPr lang="de-AT"/>
+              <a:rPr lang="de-DE"/>
               <a:t>23.02.2026</a:t>
             </a:r>
+            <a:endParaRPr lang="de-AT"/>
           </a:p>
         </p:txBody>
       </p:sp>
@@ -11811,9 +11988,10 @@
           <a:lstStyle/>
           <a:p>
             <a:r>
-              <a:rPr lang="de-AT"/>
+              <a:rPr lang="de-DE"/>
               <a:t>23.02.2026</a:t>
             </a:r>
+            <a:endParaRPr lang="de-AT"/>
           </a:p>
         </p:txBody>
       </p:sp>
@@ -12010,9 +12188,10 @@
           <a:lstStyle/>
           <a:p>
             <a:r>
-              <a:rPr lang="de-AT"/>
+              <a:rPr lang="de-DE"/>
               <a:t>23.02.2026</a:t>
             </a:r>
+            <a:endParaRPr lang="de-AT"/>
           </a:p>
         </p:txBody>
       </p:sp>
@@ -12285,9 +12464,10 @@
           <a:lstStyle/>
           <a:p>
             <a:r>
-              <a:rPr lang="de-AT"/>
+              <a:rPr lang="de-DE"/>
               <a:t>23.02.2026</a:t>
             </a:r>
+            <a:endParaRPr lang="de-AT"/>
           </a:p>
         </p:txBody>
       </p:sp>
@@ -12552,9 +12732,10 @@
           <a:lstStyle/>
           <a:p>
             <a:r>
-              <a:rPr lang="de-AT"/>
+              <a:rPr lang="de-DE"/>
               <a:t>23.02.2026</a:t>
             </a:r>
+            <a:endParaRPr lang="de-AT"/>
           </a:p>
         </p:txBody>
       </p:sp>
@@ -12966,9 +13147,10 @@
           <a:lstStyle/>
           <a:p>
             <a:r>
-              <a:rPr lang="de-AT"/>
+              <a:rPr lang="de-DE"/>
               <a:t>23.02.2026</a:t>
             </a:r>
+            <a:endParaRPr lang="de-AT"/>
           </a:p>
         </p:txBody>
       </p:sp>
@@ -13107,9 +13289,10 @@
           <a:lstStyle/>
           <a:p>
             <a:r>
-              <a:rPr lang="de-AT"/>
+              <a:rPr lang="de-DE"/>
               <a:t>23.02.2026</a:t>
             </a:r>
+            <a:endParaRPr lang="de-AT"/>
           </a:p>
         </p:txBody>
       </p:sp>
@@ -13219,9 +13402,10 @@
           <a:lstStyle/>
           <a:p>
             <a:r>
-              <a:rPr lang="de-AT"/>
+              <a:rPr lang="de-DE"/>
               <a:t>23.02.2026</a:t>
             </a:r>
+            <a:endParaRPr lang="de-AT"/>
           </a:p>
         </p:txBody>
       </p:sp>
@@ -13531,9 +13715,10 @@
           <a:lstStyle/>
           <a:p>
             <a:r>
-              <a:rPr lang="de-AT"/>
+              <a:rPr lang="de-DE"/>
               <a:t>23.02.2026</a:t>
             </a:r>
+            <a:endParaRPr lang="de-AT"/>
           </a:p>
         </p:txBody>
       </p:sp>
@@ -13819,9 +14004,10 @@
           <a:lstStyle/>
           <a:p>
             <a:r>
-              <a:rPr lang="de-AT"/>
+              <a:rPr lang="de-DE"/>
               <a:t>23.02.2026</a:t>
             </a:r>
+            <a:endParaRPr lang="de-AT"/>
           </a:p>
         </p:txBody>
       </p:sp>
@@ -14061,9 +14247,10 @@
           </a:lstStyle>
           <a:p>
             <a:r>
-              <a:rPr lang="de-AT"/>
+              <a:rPr lang="de-DE"/>
               <a:t>23.02.2026</a:t>
             </a:r>
+            <a:endParaRPr lang="de-AT"/>
           </a:p>
         </p:txBody>
       </p:sp>
@@ -14677,23 +14864,7 @@
                   <a:schemeClr val="bg1"/>
                 </a:solidFill>
               </a:rPr>
-              <a:t>Tobias Riedelberger, Theo </a:t>
-            </a:r>
-            <a:r>
-              <a:rPr lang="en-GB" noProof="0" dirty="0" err="1">
-                <a:solidFill>
-                  <a:schemeClr val="bg1"/>
-                </a:solidFill>
-              </a:rPr>
-              <a:t>Corneux</a:t>
-            </a:r>
-            <a:r>
-              <a:rPr lang="en-GB" noProof="0" dirty="0">
-                <a:solidFill>
-                  <a:schemeClr val="bg1"/>
-                </a:solidFill>
-              </a:rPr>
-              <a:t>, Tobias Holzner</a:t>
+              <a:t>Tobias Riedelberger, Theo Corneux, Tobias Holzner</a:t>
             </a:r>
           </a:p>
         </p:txBody>
@@ -14771,9 +14942,10 @@
           <a:lstStyle/>
           <a:p>
             <a:r>
-              <a:rPr lang="en-GB" noProof="0" dirty="0"/>
+              <a:rPr lang="de-DE" noProof="0"/>
               <a:t>23.02.2026</a:t>
             </a:r>
+            <a:endParaRPr lang="en-GB" noProof="0" dirty="0"/>
           </a:p>
         </p:txBody>
       </p:sp>
@@ -14844,31 +15016,6 @@
       </p:grpSpPr>
       <p:sp>
         <p:nvSpPr>
-          <p:cNvPr id="2" name="Titel 1">
-            <a:extLst>
-              <a:ext uri="{FF2B5EF4-FFF2-40B4-BE49-F238E27FC236}">
-                <a16:creationId xmlns:a16="http://schemas.microsoft.com/office/drawing/2014/main" id="{35334B78-B348-9DDA-CFA6-298FC472A49C}"/>
-              </a:ext>
-            </a:extLst>
-          </p:cNvPr>
-          <p:cNvSpPr>
-            <a:spLocks noGrp="1"/>
-          </p:cNvSpPr>
-          <p:nvPr>
-            <p:ph type="title"/>
-          </p:nvPr>
-        </p:nvSpPr>
-        <p:spPr/>
-        <p:txBody>
-          <a:bodyPr/>
-          <a:lstStyle/>
-          <a:p>
-            <a:endParaRPr lang="en-GB" noProof="0" dirty="0"/>
-          </a:p>
-        </p:txBody>
-      </p:sp>
-      <p:sp>
-        <p:nvSpPr>
           <p:cNvPr id="4" name="Datumsplatzhalter 3">
             <a:extLst>
               <a:ext uri="{FF2B5EF4-FFF2-40B4-BE49-F238E27FC236}">
@@ -14889,9 +15036,10 @@
           <a:lstStyle/>
           <a:p>
             <a:r>
-              <a:rPr lang="en-GB" noProof="0" dirty="0"/>
+              <a:rPr lang="de-DE" noProof="0"/>
               <a:t>23.02.2026</a:t>
             </a:r>
+            <a:endParaRPr lang="en-GB" noProof="0" dirty="0"/>
           </a:p>
         </p:txBody>
       </p:sp>
@@ -15041,7 +15189,7 @@
           <a:p>
             <a:r>
               <a:rPr lang="en-GB" dirty="0"/>
-              <a:t>Mode  of operation</a:t>
+              <a:t>Mode of operation</a:t>
             </a:r>
           </a:p>
           <a:p>
@@ -15352,9 +15500,10 @@
           <a:lstStyle/>
           <a:p>
             <a:r>
-              <a:rPr lang="en-GB" noProof="0" dirty="0"/>
+              <a:rPr lang="de-DE" noProof="0"/>
               <a:t>23.02.2026</a:t>
             </a:r>
+            <a:endParaRPr lang="en-GB" noProof="0" dirty="0"/>
           </a:p>
         </p:txBody>
       </p:sp>
@@ -15568,9 +15717,10 @@
           <a:lstStyle/>
           <a:p>
             <a:r>
-              <a:rPr lang="en-GB" noProof="0" dirty="0"/>
+              <a:rPr lang="de-DE" noProof="0"/>
               <a:t>23.02.2026</a:t>
             </a:r>
+            <a:endParaRPr lang="en-GB" noProof="0" dirty="0"/>
           </a:p>
         </p:txBody>
       </p:sp>
@@ -15718,113 +15868,6 @@
       </p:grpSpPr>
       <p:sp>
         <p:nvSpPr>
-          <p:cNvPr id="2" name="Titel 1">
-            <a:extLst>
-              <a:ext uri="{FF2B5EF4-FFF2-40B4-BE49-F238E27FC236}">
-                <a16:creationId xmlns:a16="http://schemas.microsoft.com/office/drawing/2014/main" id="{658981FF-DF34-210B-697F-AD12EEA6396B}"/>
-              </a:ext>
-            </a:extLst>
-          </p:cNvPr>
-          <p:cNvSpPr>
-            <a:spLocks noGrp="1"/>
-          </p:cNvSpPr>
-          <p:nvPr>
-            <p:ph type="title"/>
-          </p:nvPr>
-        </p:nvSpPr>
-        <p:spPr/>
-        <p:txBody>
-          <a:bodyPr/>
-          <a:lstStyle/>
-          <a:p>
-            <a:endParaRPr lang="de-AT"/>
-          </a:p>
-        </p:txBody>
-      </p:sp>
-      <p:sp>
-        <p:nvSpPr>
-          <p:cNvPr id="3" name="Inhaltsplatzhalter 2">
-            <a:extLst>
-              <a:ext uri="{FF2B5EF4-FFF2-40B4-BE49-F238E27FC236}">
-                <a16:creationId xmlns:a16="http://schemas.microsoft.com/office/drawing/2014/main" id="{EBC768FE-B886-8689-5A86-F98AFDEEA5A2}"/>
-              </a:ext>
-            </a:extLst>
-          </p:cNvPr>
-          <p:cNvSpPr>
-            <a:spLocks noGrp="1"/>
-          </p:cNvSpPr>
-          <p:nvPr>
-            <p:ph idx="1"/>
-          </p:nvPr>
-        </p:nvSpPr>
-        <p:spPr/>
-        <p:txBody>
-          <a:bodyPr/>
-          <a:lstStyle/>
-          <a:p>
-            <a:endParaRPr lang="de-AT"/>
-          </a:p>
-        </p:txBody>
-      </p:sp>
-      <p:sp>
-        <p:nvSpPr>
-          <p:cNvPr id="4" name="Datumsplatzhalter 3">
-            <a:extLst>
-              <a:ext uri="{FF2B5EF4-FFF2-40B4-BE49-F238E27FC236}">
-                <a16:creationId xmlns:a16="http://schemas.microsoft.com/office/drawing/2014/main" id="{01F83679-7393-E73C-8E4A-B339DCFD0603}"/>
-              </a:ext>
-            </a:extLst>
-          </p:cNvPr>
-          <p:cNvSpPr>
-            <a:spLocks noGrp="1"/>
-          </p:cNvSpPr>
-          <p:nvPr>
-            <p:ph type="dt" sz="half" idx="10"/>
-          </p:nvPr>
-        </p:nvSpPr>
-        <p:spPr/>
-        <p:txBody>
-          <a:bodyPr/>
-          <a:lstStyle/>
-          <a:p>
-            <a:r>
-              <a:rPr lang="de-AT"/>
-              <a:t>23.02.2026</a:t>
-            </a:r>
-          </a:p>
-        </p:txBody>
-      </p:sp>
-      <p:sp>
-        <p:nvSpPr>
-          <p:cNvPr id="5" name="Foliennummernplatzhalter 4">
-            <a:extLst>
-              <a:ext uri="{FF2B5EF4-FFF2-40B4-BE49-F238E27FC236}">
-                <a16:creationId xmlns:a16="http://schemas.microsoft.com/office/drawing/2014/main" id="{ED15210C-214C-8774-3C71-6AD6E442E718}"/>
-              </a:ext>
-            </a:extLst>
-          </p:cNvPr>
-          <p:cNvSpPr>
-            <a:spLocks noGrp="1"/>
-          </p:cNvSpPr>
-          <p:nvPr>
-            <p:ph type="sldNum" sz="quarter" idx="12"/>
-          </p:nvPr>
-        </p:nvSpPr>
-        <p:spPr/>
-        <p:txBody>
-          <a:bodyPr/>
-          <a:lstStyle/>
-          <a:p>
-            <a:fld id="{533690DF-FFD6-462A-8578-786984FF8DCB}" type="slidenum">
-              <a:rPr lang="de-AT" smtClean="0"/>
-              <a:t>13</a:t>
-            </a:fld>
-            <a:endParaRPr lang="de-AT"/>
-          </a:p>
-        </p:txBody>
-      </p:sp>
-      <p:sp>
-        <p:nvSpPr>
           <p:cNvPr id="6" name="Rectangle: Rounded Corners 3">
             <a:extLst>
               <a:ext uri="{FF2B5EF4-FFF2-40B4-BE49-F238E27FC236}">
@@ -15837,7 +15880,7 @@
         </p:nvSpPr>
         <p:spPr bwMode="auto">
           <a:xfrm>
-            <a:off x="-841829" y="-1"/>
+            <a:off x="-1180788" y="0"/>
             <a:ext cx="14006285" cy="7039429"/>
           </a:xfrm>
           <a:prstGeom prst="roundRect">
@@ -15892,6 +15935,80 @@
               </a:solidFill>
               <a:latin typeface="Arial"/>
               <a:cs typeface="Arial"/>
+            </a:endParaRPr>
+          </a:p>
+        </p:txBody>
+      </p:sp>
+      <p:sp>
+        <p:nvSpPr>
+          <p:cNvPr id="4" name="Datumsplatzhalter 3">
+            <a:extLst>
+              <a:ext uri="{FF2B5EF4-FFF2-40B4-BE49-F238E27FC236}">
+                <a16:creationId xmlns:a16="http://schemas.microsoft.com/office/drawing/2014/main" id="{01F83679-7393-E73C-8E4A-B339DCFD0603}"/>
+              </a:ext>
+            </a:extLst>
+          </p:cNvPr>
+          <p:cNvSpPr>
+            <a:spLocks noGrp="1"/>
+          </p:cNvSpPr>
+          <p:nvPr>
+            <p:ph type="dt" sz="half" idx="10"/>
+          </p:nvPr>
+        </p:nvSpPr>
+        <p:spPr/>
+        <p:txBody>
+          <a:bodyPr/>
+          <a:lstStyle/>
+          <a:p>
+            <a:r>
+              <a:rPr lang="de-DE" dirty="0">
+                <a:solidFill>
+                  <a:schemeClr val="bg1"/>
+                </a:solidFill>
+              </a:rPr>
+              <a:t>23.02.2026</a:t>
+            </a:r>
+            <a:endParaRPr lang="de-AT" dirty="0">
+              <a:solidFill>
+                <a:schemeClr val="bg1"/>
+              </a:solidFill>
+            </a:endParaRPr>
+          </a:p>
+        </p:txBody>
+      </p:sp>
+      <p:sp>
+        <p:nvSpPr>
+          <p:cNvPr id="5" name="Foliennummernplatzhalter 4">
+            <a:extLst>
+              <a:ext uri="{FF2B5EF4-FFF2-40B4-BE49-F238E27FC236}">
+                <a16:creationId xmlns:a16="http://schemas.microsoft.com/office/drawing/2014/main" id="{ED15210C-214C-8774-3C71-6AD6E442E718}"/>
+              </a:ext>
+            </a:extLst>
+          </p:cNvPr>
+          <p:cNvSpPr>
+            <a:spLocks noGrp="1"/>
+          </p:cNvSpPr>
+          <p:nvPr>
+            <p:ph type="sldNum" sz="quarter" idx="12"/>
+          </p:nvPr>
+        </p:nvSpPr>
+        <p:spPr/>
+        <p:txBody>
+          <a:bodyPr/>
+          <a:lstStyle/>
+          <a:p>
+            <a:fld id="{533690DF-FFD6-462A-8578-786984FF8DCB}" type="slidenum">
+              <a:rPr lang="de-AT" smtClean="0">
+                <a:solidFill>
+                  <a:schemeClr val="bg1"/>
+                </a:solidFill>
+              </a:rPr>
+              <a:t>13</a:t>
+            </a:fld>
+            <a:endParaRPr lang="de-AT" dirty="0">
+              <a:solidFill>
+                <a:schemeClr val="bg1"/>
+              </a:solidFill>
             </a:endParaRPr>
           </a:p>
         </p:txBody>
@@ -15922,7 +16039,7 @@
         </p:xfrm>
         <a:graphic>
           <a:graphicData uri="http://schemas.openxmlformats.org/drawingml/2006/diagram">
-            <dgm:relIds xmlns:dgm="http://schemas.openxmlformats.org/drawingml/2006/diagram" xmlns:r="http://schemas.openxmlformats.org/officeDocument/2006/relationships" r:dm="rId2" r:lo="rId3" r:qs="rId4" r:cs="rId5"/>
+            <dgm:relIds xmlns:dgm="http://schemas.openxmlformats.org/drawingml/2006/diagram" xmlns:r="http://schemas.openxmlformats.org/officeDocument/2006/relationships" r:dm="rId3" r:lo="rId4" r:qs="rId5" r:cs="rId6"/>
           </a:graphicData>
         </a:graphic>
       </p:graphicFrame>
@@ -16208,23 +16325,7 @@
                   <a:schemeClr val="bg1"/>
                 </a:solidFill>
               </a:rPr>
-              <a:t>Tobias Riedelberger, Theo </a:t>
-            </a:r>
-            <a:r>
-              <a:rPr lang="en-GB" noProof="0" dirty="0" err="1">
-                <a:solidFill>
-                  <a:schemeClr val="bg1"/>
-                </a:solidFill>
-              </a:rPr>
-              <a:t>Corneaux</a:t>
-            </a:r>
-            <a:r>
-              <a:rPr lang="en-GB" noProof="0" dirty="0">
-                <a:solidFill>
-                  <a:schemeClr val="bg1"/>
-                </a:solidFill>
-              </a:rPr>
-              <a:t>, Tobias Holzner</a:t>
+              <a:t>Tobias Riedelberger, Theo Corneux, Tobias Holzner</a:t>
             </a:r>
           </a:p>
         </p:txBody>
@@ -16302,9 +16403,10 @@
           <a:lstStyle/>
           <a:p>
             <a:r>
-              <a:rPr lang="en-GB" noProof="0" dirty="0"/>
+              <a:rPr lang="de-DE" noProof="0"/>
               <a:t>23.02.2026</a:t>
             </a:r>
+            <a:endParaRPr lang="en-GB" noProof="0" dirty="0"/>
           </a:p>
         </p:txBody>
       </p:sp>
@@ -16369,31 +16471,6 @@
       </p:grpSpPr>
       <p:sp>
         <p:nvSpPr>
-          <p:cNvPr id="2" name="Titel 1">
-            <a:extLst>
-              <a:ext uri="{FF2B5EF4-FFF2-40B4-BE49-F238E27FC236}">
-                <a16:creationId xmlns:a16="http://schemas.microsoft.com/office/drawing/2014/main" id="{FA3E06E0-A1F6-EE09-82B9-909CF77BDA1F}"/>
-              </a:ext>
-            </a:extLst>
-          </p:cNvPr>
-          <p:cNvSpPr>
-            <a:spLocks noGrp="1"/>
-          </p:cNvSpPr>
-          <p:nvPr>
-            <p:ph type="title"/>
-          </p:nvPr>
-        </p:nvSpPr>
-        <p:spPr/>
-        <p:txBody>
-          <a:bodyPr/>
-          <a:lstStyle/>
-          <a:p>
-            <a:endParaRPr lang="en-GB" noProof="0" dirty="0"/>
-          </a:p>
-        </p:txBody>
-      </p:sp>
-      <p:sp>
-        <p:nvSpPr>
           <p:cNvPr id="3" name="Inhaltsplatzhalter 2">
             <a:extLst>
               <a:ext uri="{FF2B5EF4-FFF2-40B4-BE49-F238E27FC236}">
@@ -16523,9 +16600,10 @@
           <a:lstStyle/>
           <a:p>
             <a:r>
-              <a:rPr lang="en-GB" noProof="0" dirty="0"/>
+              <a:rPr lang="de-DE" noProof="0"/>
               <a:t>23.02.2026</a:t>
             </a:r>
+            <a:endParaRPr lang="en-GB" noProof="0" dirty="0"/>
           </a:p>
         </p:txBody>
       </p:sp>
@@ -16648,6 +16726,65 @@
           </a:p>
         </p:txBody>
       </p:sp>
+      <p:pic>
+        <p:nvPicPr>
+          <p:cNvPr id="1026" name="Picture 2" descr="[100+] Mike Tyson Wallpapers | Wallpapers.com">
+            <a:extLst>
+              <a:ext uri="{FF2B5EF4-FFF2-40B4-BE49-F238E27FC236}">
+                <a16:creationId xmlns:a16="http://schemas.microsoft.com/office/drawing/2014/main" id="{FC34E753-CBB4-F901-8B11-D8BDAEB7374E}"/>
+              </a:ext>
+            </a:extLst>
+          </p:cNvPr>
+          <p:cNvPicPr>
+            <a:picLocks noChangeAspect="1" noChangeArrowheads="1"/>
+          </p:cNvPicPr>
+          <p:nvPr/>
+        </p:nvPicPr>
+        <p:blipFill>
+          <a:blip r:embed="rId3">
+            <a:extLst>
+              <a:ext uri="{28A0092B-C50C-407E-A947-70E740481C1C}">
+                <a14:useLocalDpi xmlns:a14="http://schemas.microsoft.com/office/drawing/2010/main" val="0"/>
+              </a:ext>
+            </a:extLst>
+          </a:blip>
+          <a:srcRect/>
+          <a:stretch>
+            <a:fillRect/>
+          </a:stretch>
+        </p:blipFill>
+        <p:spPr bwMode="auto">
+          <a:xfrm>
+            <a:off x="8685932" y="1646238"/>
+            <a:ext cx="2667868" cy="4075386"/>
+          </a:xfrm>
+          <a:prstGeom prst="roundRect">
+            <a:avLst>
+              <a:gd name="adj" fmla="val 8594"/>
+            </a:avLst>
+          </a:prstGeom>
+          <a:solidFill>
+            <a:srgbClr val="FFFFFF">
+              <a:shade val="85000"/>
+            </a:srgbClr>
+          </a:solidFill>
+          <a:ln>
+            <a:noFill/>
+          </a:ln>
+          <a:effectLst>
+            <a:reflection blurRad="12700" stA="38000" endPos="28000" dist="5000" dir="5400000" sy="-100000" algn="bl" rotWithShape="0"/>
+          </a:effectLst>
+          <a:extLst>
+            <a:ext uri="{909E8E84-426E-40DD-AFC4-6F175D3DCCD1}">
+              <a14:hiddenFill xmlns:a14="http://schemas.microsoft.com/office/drawing/2010/main">
+                <a:solidFill>
+                  <a:srgbClr val="FFFFFF"/>
+                </a:solidFill>
+              </a14:hiddenFill>
+            </a:ext>
+          </a:extLst>
+        </p:spPr>
+      </p:pic>
     </p:spTree>
     <p:extLst>
       <p:ext uri="{BB962C8B-B14F-4D97-AF65-F5344CB8AC3E}">
@@ -16940,9 +17077,10 @@
               </a:spcAft>
             </a:pPr>
             <a:r>
-              <a:rPr lang="en-GB" noProof="0"/>
+              <a:rPr lang="de-DE" noProof="0"/>
               <a:t>23.02.2026</a:t>
             </a:r>
+            <a:endParaRPr lang="en-GB" noProof="0"/>
           </a:p>
         </p:txBody>
       </p:sp>
@@ -17357,31 +17495,6 @@
       </p:grpSpPr>
       <p:sp>
         <p:nvSpPr>
-          <p:cNvPr id="2" name="Titel 1">
-            <a:extLst>
-              <a:ext uri="{FF2B5EF4-FFF2-40B4-BE49-F238E27FC236}">
-                <a16:creationId xmlns:a16="http://schemas.microsoft.com/office/drawing/2014/main" id="{EAD98913-DDB8-2AB6-B450-694B78EB5F3C}"/>
-              </a:ext>
-            </a:extLst>
-          </p:cNvPr>
-          <p:cNvSpPr>
-            <a:spLocks noGrp="1"/>
-          </p:cNvSpPr>
-          <p:nvPr>
-            <p:ph type="title"/>
-          </p:nvPr>
-        </p:nvSpPr>
-        <p:spPr/>
-        <p:txBody>
-          <a:bodyPr/>
-          <a:lstStyle/>
-          <a:p>
-            <a:endParaRPr lang="en-GB" noProof="0" dirty="0"/>
-          </a:p>
-        </p:txBody>
-      </p:sp>
-      <p:sp>
-        <p:nvSpPr>
           <p:cNvPr id="3" name="Inhaltsplatzhalter 2">
             <a:extLst>
               <a:ext uri="{FF2B5EF4-FFF2-40B4-BE49-F238E27FC236}">
@@ -17462,9 +17575,10 @@
           <a:lstStyle/>
           <a:p>
             <a:r>
-              <a:rPr lang="en-GB" noProof="0" dirty="0"/>
+              <a:rPr lang="de-DE" noProof="0"/>
               <a:t>23.02.2026</a:t>
             </a:r>
+            <a:endParaRPr lang="en-GB" noProof="0" dirty="0"/>
           </a:p>
         </p:txBody>
       </p:sp>
@@ -17698,31 +17812,6 @@
       </p:grpSpPr>
       <p:sp>
         <p:nvSpPr>
-          <p:cNvPr id="2" name="Titel 1">
-            <a:extLst>
-              <a:ext uri="{FF2B5EF4-FFF2-40B4-BE49-F238E27FC236}">
-                <a16:creationId xmlns:a16="http://schemas.microsoft.com/office/drawing/2014/main" id="{188B87C8-6E80-5220-D562-38D83250C70A}"/>
-              </a:ext>
-            </a:extLst>
-          </p:cNvPr>
-          <p:cNvSpPr>
-            <a:spLocks noGrp="1"/>
-          </p:cNvSpPr>
-          <p:nvPr>
-            <p:ph type="title"/>
-          </p:nvPr>
-        </p:nvSpPr>
-        <p:spPr/>
-        <p:txBody>
-          <a:bodyPr/>
-          <a:lstStyle/>
-          <a:p>
-            <a:endParaRPr lang="en-GB" noProof="0" dirty="0"/>
-          </a:p>
-        </p:txBody>
-      </p:sp>
-      <p:sp>
-        <p:nvSpPr>
           <p:cNvPr id="3" name="Inhaltsplatzhalter 2">
             <a:extLst>
               <a:ext uri="{FF2B5EF4-FFF2-40B4-BE49-F238E27FC236}">
@@ -17744,7 +17833,7 @@
           <a:p>
             <a:r>
               <a:rPr lang="en-GB" dirty="0"/>
-              <a:t>Data of one person </a:t>
+              <a:t>Data of one person</a:t>
             </a:r>
           </a:p>
           <a:p>
@@ -17800,9 +17889,10 @@
           <a:lstStyle/>
           <a:p>
             <a:r>
-              <a:rPr lang="en-GB" noProof="0" dirty="0"/>
+              <a:rPr lang="de-DE" noProof="0"/>
               <a:t>23.02.2026</a:t>
             </a:r>
+            <a:endParaRPr lang="en-GB" noProof="0" dirty="0"/>
           </a:p>
         </p:txBody>
       </p:sp>
@@ -18208,13 +18298,18 @@
               </a:spcAft>
             </a:pPr>
             <a:r>
-              <a:rPr lang="en-US" noProof="0">
+              <a:rPr lang="de-DE" noProof="0">
                 <a:solidFill>
                   <a:srgbClr val="FFFFFF"/>
                 </a:solidFill>
               </a:rPr>
               <a:t>23.02.2026</a:t>
             </a:r>
+            <a:endParaRPr lang="en-US" noProof="0">
+              <a:solidFill>
+                <a:srgbClr val="FFFFFF"/>
+              </a:solidFill>
+            </a:endParaRPr>
           </a:p>
         </p:txBody>
       </p:sp>
@@ -18400,31 +18495,6 @@
       </p:grpSpPr>
       <p:sp>
         <p:nvSpPr>
-          <p:cNvPr id="2" name="Titel 1">
-            <a:extLst>
-              <a:ext uri="{FF2B5EF4-FFF2-40B4-BE49-F238E27FC236}">
-                <a16:creationId xmlns:a16="http://schemas.microsoft.com/office/drawing/2014/main" id="{10465A4F-AE0F-8B98-CC0D-AE35ADD19547}"/>
-              </a:ext>
-            </a:extLst>
-          </p:cNvPr>
-          <p:cNvSpPr>
-            <a:spLocks noGrp="1"/>
-          </p:cNvSpPr>
-          <p:nvPr>
-            <p:ph type="title"/>
-          </p:nvPr>
-        </p:nvSpPr>
-        <p:spPr/>
-        <p:txBody>
-          <a:bodyPr/>
-          <a:lstStyle/>
-          <a:p>
-            <a:endParaRPr lang="en-GB" noProof="0" dirty="0"/>
-          </a:p>
-        </p:txBody>
-      </p:sp>
-      <p:sp>
-        <p:nvSpPr>
           <p:cNvPr id="3" name="Inhaltsplatzhalter 2">
             <a:extLst>
               <a:ext uri="{FF2B5EF4-FFF2-40B4-BE49-F238E27FC236}">
@@ -18480,7 +18550,7 @@
             <a:pPr lvl="1"/>
             <a:r>
               <a:rPr lang="en-GB" dirty="0"/>
-              <a:t>Mid Learn Rate &amp; Regularization</a:t>
+              <a:t>Mid Learning Rate &amp; Regularization</a:t>
             </a:r>
           </a:p>
           <a:p>
@@ -18498,7 +18568,7 @@
           <a:p>
             <a:r>
               <a:rPr lang="en-GB" dirty="0"/>
-              <a:t>Selection of classification with best test Statistics</a:t>
+              <a:t>Selection of classification with best test statistics</a:t>
             </a:r>
           </a:p>
         </p:txBody>
@@ -18525,9 +18595,10 @@
           <a:lstStyle/>
           <a:p>
             <a:r>
-              <a:rPr lang="en-GB" noProof="0" dirty="0"/>
+              <a:rPr lang="de-DE" noProof="0"/>
               <a:t>23.02.2026</a:t>
             </a:r>
+            <a:endParaRPr lang="en-GB" noProof="0" dirty="0"/>
           </a:p>
         </p:txBody>
       </p:sp>
@@ -18914,7 +18985,7 @@
           <a:p>
             <a:r>
               <a:rPr lang="en-GB" noProof="0" dirty="0"/>
-              <a:t>Code generation of Model</a:t>
+              <a:t>Code generation</a:t>
             </a:r>
           </a:p>
           <a:p>
@@ -19080,7 +19151,7 @@
               <a:defRPr/>
             </a:pPr>
             <a:r>
-              <a:rPr kumimoji="0" lang="en-GB" sz="1200" b="0" i="0" u="none" strike="noStrike" kern="1200" cap="none" spc="0" normalizeH="0" baseline="0" noProof="0" dirty="0">
+              <a:rPr kumimoji="0" lang="de-DE" sz="1200" b="0" i="0" u="none" strike="noStrike" kern="1200" cap="none" spc="0" normalizeH="0" baseline="0" noProof="0">
                 <a:ln>
                   <a:noFill/>
                 </a:ln>
@@ -19777,9 +19848,10 @@
           <a:lstStyle/>
           <a:p>
             <a:r>
-              <a:rPr lang="en-GB" noProof="0" dirty="0"/>
+              <a:rPr lang="de-DE" noProof="0"/>
               <a:t>23.02.2026</a:t>
             </a:r>
+            <a:endParaRPr lang="en-GB" noProof="0" dirty="0"/>
           </a:p>
         </p:txBody>
       </p:sp>
@@ -19918,7 +19990,7 @@
         </p:blipFill>
         <p:spPr>
           <a:xfrm>
-            <a:off x="8487828" y="1870075"/>
+            <a:off x="10165634" y="1688862"/>
             <a:ext cx="1744744" cy="2977923"/>
           </a:xfrm>
           <a:prstGeom prst="rect">
@@ -20570,23 +20642,6 @@
 </file>
 
 <file path=customXml/item1.xml><?xml version="1.0" encoding="utf-8"?>
-<?mso-contentType ?>
-<FormTemplates xmlns="http://schemas.microsoft.com/sharepoint/v3/contenttype/forms">
-  <Display>DocumentLibraryForm</Display>
-  <Edit>DocumentLibraryForm</Edit>
-  <New>DocumentLibraryForm</New>
-</FormTemplates>
-</file>
-
-<file path=customXml/item2.xml><?xml version="1.0" encoding="utf-8"?>
-<p:properties xmlns:p="http://schemas.microsoft.com/office/2006/metadata/properties" xmlns:xsi="http://www.w3.org/2001/XMLSchema-instance" xmlns:pc="http://schemas.microsoft.com/office/infopath/2007/PartnerControls">
-  <documentManagement>
-    <_activity xmlns="bf1a47b5-10f0-4178-af4a-bbe7cc4004c3" xsi:nil="true"/>
-  </documentManagement>
-</p:properties>
-</file>
-
-<file path=customXml/item3.xml><?xml version="1.0" encoding="utf-8"?>
 <ct:contentTypeSchema xmlns:ct="http://schemas.microsoft.com/office/2006/metadata/contentType" xmlns:ma="http://schemas.microsoft.com/office/2006/metadata/properties/metaAttributes" ct:_="" ma:_="" ma:contentTypeName="Dokument" ma:contentTypeID="0x010100B041D5FB7F9ADB4FA3268D6933894E4E" ma:contentTypeVersion="11" ma:contentTypeDescription="Ein neues Dokument erstellen." ma:contentTypeScope="" ma:versionID="1716f861161e7a5f6104ad8e56853467">
   <xsd:schema xmlns:xsd="http://www.w3.org/2001/XMLSchema" xmlns:xs="http://www.w3.org/2001/XMLSchema" xmlns:p="http://schemas.microsoft.com/office/2006/metadata/properties" xmlns:ns3="bf1a47b5-10f0-4178-af4a-bbe7cc4004c3" targetNamespace="http://schemas.microsoft.com/office/2006/metadata/properties" ma:root="true" ma:fieldsID="8ee1bf931531000dc41501df99fd4e2b" ns3:_="">
     <xsd:import namespace="bf1a47b5-10f0-4178-af4a-bbe7cc4004c3"/>
@@ -20774,10 +20829,37 @@
 </ct:contentTypeSchema>
 </file>
 
+<file path=customXml/item2.xml><?xml version="1.0" encoding="utf-8"?>
+<p:properties xmlns:p="http://schemas.microsoft.com/office/2006/metadata/properties" xmlns:xsi="http://www.w3.org/2001/XMLSchema-instance" xmlns:pc="http://schemas.microsoft.com/office/infopath/2007/PartnerControls">
+  <documentManagement>
+    <_activity xmlns="bf1a47b5-10f0-4178-af4a-bbe7cc4004c3" xsi:nil="true"/>
+  </documentManagement>
+</p:properties>
+</file>
+
+<file path=customXml/item3.xml><?xml version="1.0" encoding="utf-8"?>
+<?mso-contentType ?>
+<FormTemplates xmlns="http://schemas.microsoft.com/sharepoint/v3/contenttype/forms">
+  <Display>DocumentLibraryForm</Display>
+  <Edit>DocumentLibraryForm</Edit>
+  <New>DocumentLibraryForm</New>
+</FormTemplates>
+</file>
+
 <file path=customXml/itemProps1.xml><?xml version="1.0" encoding="utf-8"?>
-<ds:datastoreItem xmlns:ds="http://schemas.openxmlformats.org/officeDocument/2006/customXml" ds:itemID="{D12945CB-A677-4013-820C-0AEFE2C4DC48}">
+<ds:datastoreItem xmlns:ds="http://schemas.openxmlformats.org/officeDocument/2006/customXml" ds:itemID="{68909959-C625-4C65-88C3-A1F8ACE56D22}">
   <ds:schemaRefs>
-    <ds:schemaRef ds:uri="http://schemas.microsoft.com/sharepoint/v3/contenttype/forms"/>
+    <ds:schemaRef ds:uri="http://schemas.microsoft.com/office/2006/metadata/contentType"/>
+    <ds:schemaRef ds:uri="http://schemas.microsoft.com/office/2006/metadata/properties/metaAttributes"/>
+    <ds:schemaRef ds:uri="http://www.w3.org/2001/XMLSchema"/>
+    <ds:schemaRef ds:uri="http://schemas.microsoft.com/office/2006/metadata/properties"/>
+    <ds:schemaRef ds:uri="bf1a47b5-10f0-4178-af4a-bbe7cc4004c3"/>
+    <ds:schemaRef ds:uri="http://schemas.microsoft.com/office/2006/documentManagement/types"/>
+    <ds:schemaRef ds:uri="http://schemas.microsoft.com/office/infopath/2007/PartnerControls"/>
+    <ds:schemaRef ds:uri="http://schemas.openxmlformats.org/package/2006/metadata/core-properties"/>
+    <ds:schemaRef ds:uri="http://purl.org/dc/elements/1.1/"/>
+    <ds:schemaRef ds:uri="http://purl.org/dc/terms/"/>
+    <ds:schemaRef ds:uri="http://schemas.microsoft.com/internal/obd"/>
   </ds:schemaRefs>
 </ds:datastoreItem>
 </file>
@@ -20799,19 +20881,9 @@
 </file>
 
 <file path=customXml/itemProps3.xml><?xml version="1.0" encoding="utf-8"?>
-<ds:datastoreItem xmlns:ds="http://schemas.openxmlformats.org/officeDocument/2006/customXml" ds:itemID="{68909959-C625-4C65-88C3-A1F8ACE56D22}">
+<ds:datastoreItem xmlns:ds="http://schemas.openxmlformats.org/officeDocument/2006/customXml" ds:itemID="{D12945CB-A677-4013-820C-0AEFE2C4DC48}">
   <ds:schemaRefs>
-    <ds:schemaRef ds:uri="http://schemas.microsoft.com/office/2006/metadata/contentType"/>
-    <ds:schemaRef ds:uri="http://schemas.microsoft.com/office/2006/metadata/properties/metaAttributes"/>
-    <ds:schemaRef ds:uri="http://www.w3.org/2001/XMLSchema"/>
-    <ds:schemaRef ds:uri="http://schemas.microsoft.com/office/2006/metadata/properties"/>
-    <ds:schemaRef ds:uri="bf1a47b5-10f0-4178-af4a-bbe7cc4004c3"/>
-    <ds:schemaRef ds:uri="http://schemas.microsoft.com/office/2006/documentManagement/types"/>
-    <ds:schemaRef ds:uri="http://schemas.microsoft.com/office/infopath/2007/PartnerControls"/>
-    <ds:schemaRef ds:uri="http://schemas.openxmlformats.org/package/2006/metadata/core-properties"/>
-    <ds:schemaRef ds:uri="http://purl.org/dc/elements/1.1/"/>
-    <ds:schemaRef ds:uri="http://purl.org/dc/terms/"/>
-    <ds:schemaRef ds:uri="http://schemas.microsoft.com/internal/obd"/>
+    <ds:schemaRef ds:uri="http://schemas.microsoft.com/sharepoint/v3/contenttype/forms"/>
   </ds:schemaRefs>
 </ds:datastoreItem>
 </file>
--- a/report/Präsentation_final.pptx
+++ b/report/Präsentation_final.pptx
@@ -1826,10 +1826,9 @@
         <a:lstStyle/>
         <a:p>
           <a:r>
-            <a:rPr lang="en-GB"/>
+            <a:rPr lang="en-GB" noProof="0" dirty="0"/>
             <a:t>Purpose</a:t>
           </a:r>
-          <a:endParaRPr lang="en-US"/>
         </a:p>
       </dgm:t>
     </dgm:pt>
@@ -1863,10 +1862,9 @@
         <a:lstStyle/>
         <a:p>
           <a:r>
-            <a:rPr lang="en-GB" dirty="0"/>
+            <a:rPr lang="en-GB" noProof="0" dirty="0"/>
             <a:t>Accurate collection and evaluation of data</a:t>
           </a:r>
-          <a:endParaRPr lang="en-US" dirty="0"/>
         </a:p>
       </dgm:t>
     </dgm:pt>
@@ -1900,10 +1898,9 @@
         <a:lstStyle/>
         <a:p>
           <a:r>
-            <a:rPr lang="en-GB"/>
+            <a:rPr lang="en-GB" noProof="0" dirty="0"/>
             <a:t>Construction</a:t>
           </a:r>
-          <a:endParaRPr lang="en-US"/>
         </a:p>
       </dgm:t>
     </dgm:pt>
@@ -1937,10 +1934,9 @@
         <a:lstStyle/>
         <a:p>
           <a:r>
-            <a:rPr lang="en-GB" dirty="0"/>
+            <a:rPr lang="en-GB" noProof="0" dirty="0"/>
             <a:t>Holder fixation on box latch</a:t>
           </a:r>
-          <a:endParaRPr lang="en-US" dirty="0"/>
         </a:p>
       </dgm:t>
     </dgm:pt>
@@ -1974,10 +1970,9 @@
         <a:lstStyle/>
         <a:p>
           <a:r>
-            <a:rPr lang="en-GB" dirty="0"/>
+            <a:rPr lang="en-GB" noProof="0" dirty="0"/>
             <a:t>Custom fit cavity for battery</a:t>
           </a:r>
-          <a:endParaRPr lang="en-US" dirty="0"/>
         </a:p>
       </dgm:t>
     </dgm:pt>
@@ -2011,10 +2006,9 @@
         <a:lstStyle/>
         <a:p>
           <a:r>
-            <a:rPr lang="en-GB" dirty="0"/>
+            <a:rPr lang="en-GB" noProof="0" dirty="0"/>
             <a:t>Screwing points for PSOC6</a:t>
           </a:r>
-          <a:endParaRPr lang="en-US" dirty="0"/>
         </a:p>
       </dgm:t>
     </dgm:pt>
@@ -2048,10 +2042,9 @@
         <a:lstStyle/>
         <a:p>
           <a:r>
-            <a:rPr lang="en-GB"/>
+            <a:rPr lang="en-GB" noProof="0" dirty="0"/>
             <a:t>Result</a:t>
           </a:r>
-          <a:endParaRPr lang="en-US"/>
         </a:p>
       </dgm:t>
     </dgm:pt>
@@ -2085,10 +2078,9 @@
         <a:lstStyle/>
         <a:p>
           <a:r>
-            <a:rPr lang="en-GB" dirty="0"/>
+            <a:rPr lang="en-GB" noProof="0" dirty="0"/>
             <a:t>Worked perfectly during testing</a:t>
           </a:r>
-          <a:endParaRPr lang="en-US" dirty="0"/>
         </a:p>
       </dgm:t>
     </dgm:pt>
@@ -2263,10 +2255,9 @@
             </a:lnSpc>
           </a:pPr>
           <a:r>
-            <a:rPr lang="en-GB" sz="1600" dirty="0"/>
+            <a:rPr lang="en-GB" sz="1600" noProof="0" dirty="0"/>
             <a:t>Implementing the game function</a:t>
           </a:r>
-          <a:endParaRPr lang="en-US" sz="1600" dirty="0"/>
         </a:p>
       </dgm:t>
     </dgm:pt>
@@ -2310,10 +2301,9 @@
             </a:lnSpc>
           </a:pPr>
           <a:r>
-            <a:rPr lang="en-GB" sz="1600" dirty="0"/>
+            <a:rPr lang="en-GB" sz="1600" noProof="0" dirty="0"/>
             <a:t>Gathering more sampling data from more different people </a:t>
           </a:r>
-          <a:endParaRPr lang="en-US" sz="1600" dirty="0"/>
         </a:p>
       </dgm:t>
     </dgm:pt>
@@ -2357,10 +2347,9 @@
             </a:lnSpc>
           </a:pPr>
           <a:r>
-            <a:rPr lang="en-GB" sz="1600" dirty="0"/>
+            <a:rPr lang="en-GB" sz="1600" noProof="0" dirty="0"/>
             <a:t>Gather data of left-handed punches</a:t>
           </a:r>
-          <a:endParaRPr lang="en-US" sz="1600" dirty="0"/>
         </a:p>
       </dgm:t>
     </dgm:pt>
@@ -2404,10 +2393,9 @@
             </a:lnSpc>
           </a:pPr>
           <a:r>
-            <a:rPr lang="en-GB" sz="1600" dirty="0"/>
+            <a:rPr lang="en-GB" sz="1600" noProof="0" dirty="0"/>
             <a:t>Creation of charts for easier understanding/adding statistic analysis</a:t>
           </a:r>
-          <a:endParaRPr lang="en-US" sz="1600" dirty="0"/>
         </a:p>
       </dgm:t>
     </dgm:pt>
@@ -2786,10 +2774,9 @@
             <a:buChar char="•"/>
           </a:pPr>
           <a:r>
-            <a:rPr lang="en-GB" sz="1900" kern="1200" dirty="0"/>
+            <a:rPr lang="en-GB" sz="1900" kern="1200" noProof="0" dirty="0"/>
             <a:t>Accurate collection and evaluation of data</a:t>
           </a:r>
-          <a:endParaRPr lang="en-US" sz="1900" kern="1200" dirty="0"/>
         </a:p>
       </dsp:txBody>
       <dsp:txXfrm rot="-5400000">
@@ -2865,10 +2852,9 @@
             <a:buNone/>
           </a:pPr>
           <a:r>
-            <a:rPr lang="en-GB" sz="2000" kern="1200"/>
+            <a:rPr lang="en-GB" sz="2000" kern="1200" noProof="0" dirty="0"/>
             <a:t>Purpose</a:t>
           </a:r>
-          <a:endParaRPr lang="en-US" sz="2000" kern="1200"/>
         </a:p>
       </dsp:txBody>
       <dsp:txXfrm>
@@ -2946,10 +2932,9 @@
             <a:buChar char="•"/>
           </a:pPr>
           <a:r>
-            <a:rPr lang="en-GB" sz="1900" kern="1200" dirty="0"/>
+            <a:rPr lang="en-GB" sz="1900" kern="1200" noProof="0" dirty="0"/>
             <a:t>Holder fixation on box latch</a:t>
           </a:r>
-          <a:endParaRPr lang="en-US" sz="1900" kern="1200" dirty="0"/>
         </a:p>
         <a:p>
           <a:pPr marL="171450" lvl="1" indent="-171450" algn="l" defTabSz="844550">
@@ -2965,10 +2950,9 @@
             <a:buChar char="•"/>
           </a:pPr>
           <a:r>
-            <a:rPr lang="en-GB" sz="1900" kern="1200" dirty="0"/>
+            <a:rPr lang="en-GB" sz="1900" kern="1200" noProof="0" dirty="0"/>
             <a:t>Custom fit cavity for battery</a:t>
           </a:r>
-          <a:endParaRPr lang="en-US" sz="1900" kern="1200" dirty="0"/>
         </a:p>
         <a:p>
           <a:pPr marL="171450" lvl="1" indent="-171450" algn="l" defTabSz="844550">
@@ -2984,10 +2968,9 @@
             <a:buChar char="•"/>
           </a:pPr>
           <a:r>
-            <a:rPr lang="en-GB" sz="1900" kern="1200" dirty="0"/>
+            <a:rPr lang="en-GB" sz="1900" kern="1200" noProof="0" dirty="0"/>
             <a:t>Screwing points for PSOC6</a:t>
           </a:r>
-          <a:endParaRPr lang="en-US" sz="1900" kern="1200" dirty="0"/>
         </a:p>
       </dsp:txBody>
       <dsp:txXfrm rot="-5400000">
@@ -3063,10 +3046,9 @@
             <a:buNone/>
           </a:pPr>
           <a:r>
-            <a:rPr lang="en-GB" sz="2000" kern="1200"/>
+            <a:rPr lang="en-GB" sz="2000" kern="1200" noProof="0" dirty="0"/>
             <a:t>Construction</a:t>
           </a:r>
-          <a:endParaRPr lang="en-US" sz="2000" kern="1200"/>
         </a:p>
       </dsp:txBody>
       <dsp:txXfrm>
@@ -3144,10 +3126,9 @@
             <a:buChar char="•"/>
           </a:pPr>
           <a:r>
-            <a:rPr lang="en-GB" sz="1900" kern="1200" dirty="0"/>
+            <a:rPr lang="en-GB" sz="1900" kern="1200" noProof="0" dirty="0"/>
             <a:t>Worked perfectly during testing</a:t>
           </a:r>
-          <a:endParaRPr lang="en-US" sz="1900" kern="1200" dirty="0"/>
         </a:p>
       </dsp:txBody>
       <dsp:txXfrm rot="-5400000">
@@ -3223,10 +3204,9 @@
             <a:buNone/>
           </a:pPr>
           <a:r>
-            <a:rPr lang="en-GB" sz="2000" kern="1200"/>
+            <a:rPr lang="en-GB" sz="2000" kern="1200" noProof="0" dirty="0"/>
             <a:t>Result</a:t>
           </a:r>
-          <a:endParaRPr lang="en-US" sz="2000" kern="1200"/>
         </a:p>
       </dsp:txBody>
       <dsp:txXfrm>
@@ -3385,10 +3365,9 @@
             <a:buNone/>
           </a:pPr>
           <a:r>
-            <a:rPr lang="en-GB" sz="1600" kern="1200" dirty="0"/>
+            <a:rPr lang="en-GB" sz="1600" kern="1200" noProof="0" dirty="0"/>
             <a:t>Implementing the game function</a:t>
           </a:r>
-          <a:endParaRPr lang="en-US" sz="1600" kern="1200" dirty="0"/>
         </a:p>
       </dsp:txBody>
       <dsp:txXfrm>
@@ -3535,10 +3514,9 @@
             <a:buNone/>
           </a:pPr>
           <a:r>
-            <a:rPr lang="en-GB" sz="1600" kern="1200" dirty="0"/>
+            <a:rPr lang="en-GB" sz="1600" kern="1200" noProof="0" dirty="0"/>
             <a:t>Gathering more sampling data from more different people </a:t>
           </a:r>
-          <a:endParaRPr lang="en-US" sz="1600" kern="1200" dirty="0"/>
         </a:p>
       </dsp:txBody>
       <dsp:txXfrm>
@@ -3685,10 +3663,9 @@
             <a:buNone/>
           </a:pPr>
           <a:r>
-            <a:rPr lang="en-GB" sz="1600" kern="1200" dirty="0"/>
+            <a:rPr lang="en-GB" sz="1600" kern="1200" noProof="0" dirty="0"/>
             <a:t>Gather data of left-handed punches</a:t>
           </a:r>
-          <a:endParaRPr lang="en-US" sz="1600" kern="1200" dirty="0"/>
         </a:p>
       </dsp:txBody>
       <dsp:txXfrm>
@@ -3835,10 +3812,9 @@
             <a:buNone/>
           </a:pPr>
           <a:r>
-            <a:rPr lang="en-GB" sz="1600" kern="1200" dirty="0"/>
+            <a:rPr lang="en-GB" sz="1600" kern="1200" noProof="0" dirty="0"/>
             <a:t>Creation of charts for easier understanding/adding statistic analysis</a:t>
           </a:r>
-          <a:endParaRPr lang="en-US" sz="1600" kern="1200" dirty="0"/>
         </a:p>
       </dsp:txBody>
       <dsp:txXfrm>
@@ -8758,7 +8734,495 @@
           <a:bodyPr/>
           <a:lstStyle/>
           <a:p>
+            <a:r>
+              <a:rPr lang="de-AT" dirty="0"/>
+              <a:t>In </a:t>
+            </a:r>
+            <a:r>
+              <a:rPr lang="de-AT" dirty="0" err="1"/>
+              <a:t>the</a:t>
+            </a:r>
+            <a:r>
+              <a:rPr lang="de-AT" dirty="0"/>
+              <a:t> </a:t>
+            </a:r>
+            <a:r>
+              <a:rPr lang="de-AT" dirty="0" err="1"/>
+              <a:t>future</a:t>
+            </a:r>
+            <a:r>
+              <a:rPr lang="de-AT" dirty="0"/>
+              <a:t> </a:t>
+            </a:r>
+            <a:r>
+              <a:rPr lang="de-AT" dirty="0" err="1"/>
+              <a:t>we</a:t>
+            </a:r>
+            <a:r>
+              <a:rPr lang="de-AT" dirty="0"/>
+              <a:t> </a:t>
+            </a:r>
+            <a:r>
+              <a:rPr lang="de-AT" dirty="0" err="1"/>
+              <a:t>wanted</a:t>
+            </a:r>
+            <a:r>
+              <a:rPr lang="de-AT" dirty="0"/>
+              <a:t> </a:t>
+            </a:r>
+            <a:r>
+              <a:rPr lang="de-AT" dirty="0" err="1"/>
+              <a:t>to</a:t>
+            </a:r>
+            <a:r>
+              <a:rPr lang="de-AT" dirty="0"/>
+              <a:t> </a:t>
+            </a:r>
+            <a:r>
+              <a:rPr lang="de-AT" dirty="0" err="1"/>
+              <a:t>implement</a:t>
+            </a:r>
+            <a:r>
+              <a:rPr lang="de-AT" dirty="0"/>
+              <a:t> </a:t>
+            </a:r>
+            <a:r>
+              <a:rPr lang="de-AT" dirty="0" err="1"/>
+              <a:t>the</a:t>
+            </a:r>
+            <a:r>
+              <a:rPr lang="de-AT" dirty="0"/>
+              <a:t> game </a:t>
+            </a:r>
+            <a:r>
+              <a:rPr lang="de-AT" dirty="0" err="1"/>
+              <a:t>function</a:t>
+            </a:r>
+            <a:r>
+              <a:rPr lang="de-AT" dirty="0"/>
+              <a:t> </a:t>
+            </a:r>
+            <a:r>
+              <a:rPr lang="de-AT" dirty="0" err="1"/>
+              <a:t>that</a:t>
+            </a:r>
+            <a:r>
+              <a:rPr lang="de-AT" dirty="0"/>
+              <a:t> was </a:t>
+            </a:r>
+            <a:r>
+              <a:rPr lang="de-AT" dirty="0" err="1"/>
+              <a:t>mentioned</a:t>
+            </a:r>
+            <a:r>
+              <a:rPr lang="de-AT" dirty="0"/>
+              <a:t> </a:t>
+            </a:r>
+            <a:r>
+              <a:rPr lang="de-AT" dirty="0" err="1"/>
+              <a:t>earlier</a:t>
+            </a:r>
+            <a:r>
+              <a:rPr lang="de-AT" dirty="0"/>
+              <a:t> </a:t>
+            </a:r>
+          </a:p>
+          <a:p>
             <a:endParaRPr lang="de-AT" dirty="0"/>
+          </a:p>
+          <a:p>
+            <a:r>
+              <a:rPr lang="de-AT" dirty="0"/>
+              <a:t>Gather </a:t>
+            </a:r>
+            <a:r>
+              <a:rPr lang="de-AT" dirty="0" err="1"/>
+              <a:t>more</a:t>
+            </a:r>
+            <a:r>
+              <a:rPr lang="de-AT" dirty="0"/>
+              <a:t> </a:t>
+            </a:r>
+            <a:r>
+              <a:rPr lang="de-AT" dirty="0" err="1"/>
+              <a:t>data</a:t>
+            </a:r>
+            <a:r>
+              <a:rPr lang="de-AT" dirty="0"/>
+              <a:t> </a:t>
+            </a:r>
+            <a:r>
+              <a:rPr lang="de-AT" dirty="0" err="1"/>
+              <a:t>of</a:t>
+            </a:r>
+            <a:r>
+              <a:rPr lang="de-AT" dirty="0"/>
+              <a:t> different </a:t>
+            </a:r>
+            <a:r>
+              <a:rPr lang="de-AT" dirty="0" err="1"/>
+              <a:t>people</a:t>
+            </a:r>
+            <a:r>
+              <a:rPr lang="de-AT" dirty="0"/>
+              <a:t> and also </a:t>
+            </a:r>
+            <a:r>
+              <a:rPr lang="de-AT" dirty="0" err="1"/>
+              <a:t>have</a:t>
+            </a:r>
+            <a:r>
+              <a:rPr lang="de-AT" dirty="0"/>
+              <a:t> </a:t>
+            </a:r>
+            <a:r>
+              <a:rPr lang="de-AT" dirty="0" err="1"/>
+              <a:t>more</a:t>
+            </a:r>
+            <a:r>
+              <a:rPr lang="de-AT" dirty="0"/>
+              <a:t> </a:t>
+            </a:r>
+            <a:r>
+              <a:rPr lang="de-AT" dirty="0" err="1"/>
+              <a:t>session</a:t>
+            </a:r>
+            <a:r>
+              <a:rPr lang="de-AT" dirty="0"/>
+              <a:t> time in </a:t>
+            </a:r>
+            <a:r>
+              <a:rPr lang="de-AT" dirty="0" err="1"/>
+              <a:t>general</a:t>
+            </a:r>
+            <a:endParaRPr lang="de-AT" dirty="0"/>
+          </a:p>
+          <a:p>
+            <a:endParaRPr lang="de-AT" dirty="0"/>
+          </a:p>
+          <a:p>
+            <a:r>
+              <a:rPr lang="de-AT" dirty="0"/>
+              <a:t>Also </a:t>
+            </a:r>
+            <a:r>
+              <a:rPr lang="de-AT" dirty="0" err="1"/>
+              <a:t>implement</a:t>
+            </a:r>
+            <a:r>
+              <a:rPr lang="de-AT" dirty="0"/>
+              <a:t> </a:t>
+            </a:r>
+            <a:r>
+              <a:rPr lang="de-AT" dirty="0" err="1"/>
+              <a:t>the</a:t>
+            </a:r>
+            <a:r>
+              <a:rPr lang="de-AT" dirty="0"/>
+              <a:t> </a:t>
+            </a:r>
+            <a:r>
+              <a:rPr lang="de-AT" dirty="0" err="1"/>
+              <a:t>data</a:t>
+            </a:r>
+            <a:r>
+              <a:rPr lang="de-AT" dirty="0"/>
+              <a:t> </a:t>
+            </a:r>
+            <a:r>
+              <a:rPr lang="de-AT" dirty="0" err="1"/>
+              <a:t>of</a:t>
+            </a:r>
+            <a:r>
+              <a:rPr lang="de-AT" dirty="0"/>
+              <a:t> </a:t>
+            </a:r>
+            <a:r>
+              <a:rPr lang="de-AT" dirty="0" err="1"/>
+              <a:t>left-handed</a:t>
+            </a:r>
+            <a:r>
+              <a:rPr lang="de-AT" dirty="0"/>
+              <a:t> </a:t>
+            </a:r>
+            <a:r>
+              <a:rPr lang="de-AT" dirty="0" err="1"/>
+              <a:t>punches</a:t>
+            </a:r>
+            <a:r>
+              <a:rPr lang="de-AT" dirty="0"/>
+              <a:t> </a:t>
+            </a:r>
+            <a:r>
+              <a:rPr lang="de-AT" dirty="0" err="1"/>
+              <a:t>as</a:t>
+            </a:r>
+            <a:r>
+              <a:rPr lang="de-AT" dirty="0"/>
+              <a:t> </a:t>
+            </a:r>
+            <a:r>
+              <a:rPr lang="de-AT" dirty="0" err="1"/>
+              <a:t>the</a:t>
+            </a:r>
+            <a:r>
+              <a:rPr lang="de-AT" dirty="0"/>
+              <a:t> </a:t>
+            </a:r>
+            <a:r>
+              <a:rPr lang="de-AT" dirty="0" err="1"/>
+              <a:t>product</a:t>
+            </a:r>
+            <a:r>
+              <a:rPr lang="de-AT" dirty="0"/>
+              <a:t> </a:t>
+            </a:r>
+            <a:r>
+              <a:rPr lang="de-AT" dirty="0" err="1"/>
+              <a:t>is</a:t>
+            </a:r>
+            <a:r>
+              <a:rPr lang="de-AT" dirty="0"/>
+              <a:t> not </a:t>
+            </a:r>
+            <a:r>
+              <a:rPr lang="de-AT" dirty="0" err="1"/>
+              <a:t>very</a:t>
+            </a:r>
+            <a:r>
+              <a:rPr lang="de-AT" dirty="0"/>
+              <a:t> </a:t>
+            </a:r>
+            <a:r>
+              <a:rPr lang="de-AT" dirty="0" err="1"/>
+              <a:t>usable</a:t>
+            </a:r>
+            <a:r>
+              <a:rPr lang="de-AT" dirty="0"/>
+              <a:t> </a:t>
+            </a:r>
+            <a:r>
+              <a:rPr lang="de-AT" dirty="0" err="1"/>
+              <a:t>without</a:t>
+            </a:r>
+            <a:r>
+              <a:rPr lang="de-AT" dirty="0"/>
+              <a:t> </a:t>
+            </a:r>
+            <a:r>
+              <a:rPr lang="de-AT" dirty="0" err="1"/>
+              <a:t>it</a:t>
+            </a:r>
+            <a:endParaRPr lang="de-AT" dirty="0"/>
+          </a:p>
+          <a:p>
+            <a:endParaRPr lang="de-AT" dirty="0"/>
+          </a:p>
+          <a:p>
+            <a:r>
+              <a:rPr lang="de-AT" dirty="0"/>
+              <a:t>And </a:t>
+            </a:r>
+            <a:r>
+              <a:rPr lang="de-AT" dirty="0" err="1"/>
+              <a:t>finally</a:t>
+            </a:r>
+            <a:r>
+              <a:rPr lang="de-AT" dirty="0"/>
+              <a:t> </a:t>
+            </a:r>
+            <a:r>
+              <a:rPr lang="de-AT" dirty="0" err="1"/>
+              <a:t>create</a:t>
+            </a:r>
+            <a:r>
+              <a:rPr lang="de-AT" dirty="0"/>
+              <a:t> </a:t>
+            </a:r>
+            <a:r>
+              <a:rPr lang="de-AT" dirty="0" err="1"/>
+              <a:t>charts</a:t>
+            </a:r>
+            <a:r>
+              <a:rPr lang="de-AT" dirty="0"/>
+              <a:t> in </a:t>
+            </a:r>
+            <a:r>
+              <a:rPr lang="de-AT" dirty="0" err="1"/>
+              <a:t>the</a:t>
+            </a:r>
+            <a:r>
+              <a:rPr lang="de-AT" dirty="0"/>
+              <a:t> </a:t>
+            </a:r>
+            <a:r>
+              <a:rPr lang="de-AT" dirty="0" err="1"/>
+              <a:t>session</a:t>
+            </a:r>
+            <a:r>
+              <a:rPr lang="de-AT" dirty="0"/>
+              <a:t> </a:t>
+            </a:r>
+            <a:r>
+              <a:rPr lang="de-AT" dirty="0" err="1"/>
+              <a:t>analytics</a:t>
+            </a:r>
+            <a:r>
+              <a:rPr lang="de-AT" dirty="0"/>
+              <a:t> </a:t>
+            </a:r>
+            <a:r>
+              <a:rPr lang="de-AT" dirty="0" err="1"/>
+              <a:t>to</a:t>
+            </a:r>
+            <a:r>
+              <a:rPr lang="de-AT" dirty="0"/>
+              <a:t> </a:t>
+            </a:r>
+            <a:r>
+              <a:rPr lang="de-AT" dirty="0" err="1"/>
+              <a:t>make</a:t>
+            </a:r>
+            <a:r>
+              <a:rPr lang="de-AT" dirty="0"/>
+              <a:t> </a:t>
+            </a:r>
+            <a:r>
+              <a:rPr lang="de-AT" dirty="0" err="1"/>
+              <a:t>it</a:t>
+            </a:r>
+            <a:r>
+              <a:rPr lang="de-AT" dirty="0"/>
+              <a:t> </a:t>
+            </a:r>
+            <a:r>
+              <a:rPr lang="de-AT" dirty="0" err="1"/>
+              <a:t>easier</a:t>
+            </a:r>
+            <a:r>
+              <a:rPr lang="de-AT" dirty="0"/>
+              <a:t> </a:t>
+            </a:r>
+            <a:r>
+              <a:rPr lang="de-AT" dirty="0" err="1"/>
+              <a:t>for</a:t>
+            </a:r>
+            <a:r>
+              <a:rPr lang="de-AT" dirty="0"/>
+              <a:t> </a:t>
+            </a:r>
+            <a:r>
+              <a:rPr lang="de-AT" dirty="0" err="1"/>
+              <a:t>the</a:t>
+            </a:r>
+            <a:r>
+              <a:rPr lang="de-AT" dirty="0"/>
+              <a:t> </a:t>
+            </a:r>
+            <a:r>
+              <a:rPr lang="de-AT" dirty="0" err="1"/>
+              <a:t>user</a:t>
+            </a:r>
+            <a:r>
+              <a:rPr lang="de-AT" dirty="0"/>
+              <a:t> </a:t>
+            </a:r>
+            <a:r>
+              <a:rPr lang="de-AT" dirty="0" err="1"/>
+              <a:t>to</a:t>
+            </a:r>
+            <a:r>
+              <a:rPr lang="de-AT" dirty="0"/>
+              <a:t> </a:t>
+            </a:r>
+            <a:r>
+              <a:rPr lang="de-AT" dirty="0" err="1"/>
+              <a:t>see</a:t>
+            </a:r>
+            <a:r>
+              <a:rPr lang="de-AT" dirty="0"/>
+              <a:t> in </a:t>
+            </a:r>
+            <a:r>
+              <a:rPr lang="de-AT" dirty="0" err="1"/>
+              <a:t>the</a:t>
+            </a:r>
+            <a:r>
+              <a:rPr lang="de-AT" dirty="0"/>
+              <a:t> </a:t>
+            </a:r>
+            <a:r>
+              <a:rPr lang="de-AT" dirty="0" err="1"/>
+              <a:t>spot</a:t>
+            </a:r>
+            <a:r>
+              <a:rPr lang="de-AT" dirty="0"/>
+              <a:t> </a:t>
+            </a:r>
+            <a:r>
+              <a:rPr lang="de-AT" dirty="0" err="1"/>
+              <a:t>which</a:t>
+            </a:r>
+            <a:r>
+              <a:rPr lang="de-AT" dirty="0"/>
+              <a:t> </a:t>
+            </a:r>
+            <a:r>
+              <a:rPr lang="de-AT" dirty="0" err="1"/>
+              <a:t>punches</a:t>
+            </a:r>
+            <a:r>
+              <a:rPr lang="de-AT" dirty="0"/>
+              <a:t> and </a:t>
+            </a:r>
+            <a:r>
+              <a:rPr lang="de-AT" dirty="0" err="1"/>
+              <a:t>which</a:t>
+            </a:r>
+            <a:r>
+              <a:rPr lang="de-AT" dirty="0"/>
+              <a:t> </a:t>
+            </a:r>
+            <a:r>
+              <a:rPr lang="de-AT" dirty="0" err="1"/>
+              <a:t>combiantions</a:t>
+            </a:r>
+            <a:r>
+              <a:rPr lang="de-AT" dirty="0"/>
+              <a:t> </a:t>
+            </a:r>
+            <a:r>
+              <a:rPr lang="de-AT" dirty="0" err="1"/>
+              <a:t>were</a:t>
+            </a:r>
+            <a:r>
+              <a:rPr lang="de-AT" dirty="0"/>
+              <a:t> </a:t>
+            </a:r>
+            <a:r>
+              <a:rPr lang="de-AT" dirty="0" err="1"/>
+              <a:t>used</a:t>
+            </a:r>
+            <a:r>
+              <a:rPr lang="de-AT" dirty="0"/>
+              <a:t> </a:t>
+            </a:r>
+            <a:r>
+              <a:rPr lang="de-AT" dirty="0" err="1"/>
+              <a:t>the</a:t>
+            </a:r>
+            <a:r>
+              <a:rPr lang="de-AT" dirty="0"/>
+              <a:t> </a:t>
+            </a:r>
+            <a:r>
+              <a:rPr lang="de-AT" dirty="0" err="1"/>
+              <a:t>most</a:t>
+            </a:r>
+            <a:r>
+              <a:rPr lang="de-AT" dirty="0"/>
+              <a:t> </a:t>
+            </a:r>
           </a:p>
         </p:txBody>
       </p:sp>
@@ -8850,10 +9314,890 @@
           <a:lstStyle/>
           <a:p>
             <a:r>
-              <a:rPr lang="de-AT" dirty="0" err="1"/>
-              <a:t>Riedi</a:t>
-            </a:r>
+              <a:rPr lang="de-AT" dirty="0"/>
+              <a:t>The </a:t>
+            </a:r>
+            <a:r>
+              <a:rPr lang="de-AT" dirty="0" err="1"/>
+              <a:t>project</a:t>
+            </a:r>
+            <a:r>
+              <a:rPr lang="de-AT" dirty="0"/>
+              <a:t> </a:t>
+            </a:r>
+            <a:r>
+              <a:rPr lang="de-AT" dirty="0" err="1"/>
+              <a:t>idea</a:t>
+            </a:r>
+            <a:r>
+              <a:rPr lang="de-AT" dirty="0"/>
+              <a:t> was </a:t>
+            </a:r>
+            <a:r>
+              <a:rPr lang="de-AT" dirty="0" err="1"/>
+              <a:t>to</a:t>
+            </a:r>
+            <a:r>
+              <a:rPr lang="de-AT" dirty="0"/>
+              <a:t> </a:t>
+            </a:r>
+            <a:r>
+              <a:rPr lang="de-AT" dirty="0" err="1"/>
+              <a:t>detect</a:t>
+            </a:r>
+            <a:r>
+              <a:rPr lang="de-AT" dirty="0"/>
+              <a:t> and </a:t>
+            </a:r>
+            <a:r>
+              <a:rPr lang="de-AT" dirty="0" err="1"/>
+              <a:t>analyze</a:t>
+            </a:r>
+            <a:r>
+              <a:rPr lang="de-AT" dirty="0"/>
+              <a:t> </a:t>
+            </a:r>
+            <a:r>
+              <a:rPr lang="de-AT" dirty="0" err="1"/>
+              <a:t>thrown</a:t>
+            </a:r>
+            <a:r>
+              <a:rPr lang="de-AT" dirty="0"/>
+              <a:t> </a:t>
+            </a:r>
+            <a:r>
+              <a:rPr lang="de-AT" dirty="0" err="1"/>
+              <a:t>punches</a:t>
+            </a:r>
+            <a:r>
+              <a:rPr lang="de-AT" dirty="0"/>
+              <a:t> </a:t>
+            </a:r>
+            <a:r>
+              <a:rPr lang="de-AT" dirty="0" err="1"/>
+              <a:t>using</a:t>
+            </a:r>
+            <a:r>
+              <a:rPr lang="de-AT" dirty="0"/>
+              <a:t> </a:t>
+            </a:r>
+            <a:r>
+              <a:rPr lang="de-AT" dirty="0" err="1"/>
+              <a:t>the</a:t>
+            </a:r>
+            <a:r>
+              <a:rPr lang="de-AT" dirty="0"/>
+              <a:t> </a:t>
+            </a:r>
+            <a:r>
+              <a:rPr lang="de-AT" dirty="0" err="1"/>
+              <a:t>boards</a:t>
+            </a:r>
+            <a:r>
+              <a:rPr lang="de-AT" dirty="0"/>
+              <a:t> IMU</a:t>
+            </a:r>
+          </a:p>
+          <a:p>
             <a:endParaRPr lang="de-AT" dirty="0"/>
+          </a:p>
+          <a:p>
+            <a:r>
+              <a:rPr lang="de-AT" dirty="0"/>
+              <a:t>The </a:t>
+            </a:r>
+            <a:r>
+              <a:rPr lang="de-AT" dirty="0" err="1"/>
+              <a:t>punches</a:t>
+            </a:r>
+            <a:r>
+              <a:rPr lang="de-AT" dirty="0"/>
+              <a:t> </a:t>
+            </a:r>
+            <a:r>
+              <a:rPr lang="de-AT" dirty="0" err="1"/>
+              <a:t>we</a:t>
+            </a:r>
+            <a:r>
+              <a:rPr lang="de-AT" dirty="0"/>
+              <a:t> </a:t>
+            </a:r>
+            <a:r>
+              <a:rPr lang="de-AT" dirty="0" err="1"/>
+              <a:t>wanted</a:t>
+            </a:r>
+            <a:r>
+              <a:rPr lang="de-AT" dirty="0"/>
+              <a:t> </a:t>
+            </a:r>
+            <a:r>
+              <a:rPr lang="de-AT" dirty="0" err="1"/>
+              <a:t>to</a:t>
+            </a:r>
+            <a:r>
+              <a:rPr lang="de-AT" dirty="0"/>
+              <a:t> </a:t>
+            </a:r>
+            <a:r>
+              <a:rPr lang="de-AT" dirty="0" err="1"/>
+              <a:t>differentiate</a:t>
+            </a:r>
+            <a:r>
+              <a:rPr lang="de-AT" dirty="0"/>
+              <a:t> </a:t>
+            </a:r>
+            <a:r>
+              <a:rPr lang="de-AT" dirty="0" err="1"/>
+              <a:t>between</a:t>
+            </a:r>
+            <a:r>
+              <a:rPr lang="de-AT" dirty="0"/>
+              <a:t> </a:t>
+            </a:r>
+            <a:r>
+              <a:rPr lang="de-AT" dirty="0" err="1"/>
+              <a:t>were</a:t>
+            </a:r>
+            <a:r>
+              <a:rPr lang="de-AT" dirty="0"/>
+              <a:t> </a:t>
+            </a:r>
+            <a:r>
+              <a:rPr lang="de-AT" dirty="0" err="1"/>
+              <a:t>the</a:t>
+            </a:r>
+            <a:r>
+              <a:rPr lang="de-AT" dirty="0"/>
+              <a:t> </a:t>
+            </a:r>
+            <a:r>
+              <a:rPr lang="de-AT" dirty="0" err="1"/>
+              <a:t>jab</a:t>
+            </a:r>
+            <a:r>
+              <a:rPr lang="de-AT" dirty="0"/>
+              <a:t> , </a:t>
+            </a:r>
+            <a:r>
+              <a:rPr lang="de-AT" dirty="0" err="1"/>
+              <a:t>the</a:t>
+            </a:r>
+            <a:r>
+              <a:rPr lang="de-AT" dirty="0"/>
+              <a:t> hook and </a:t>
+            </a:r>
+            <a:r>
+              <a:rPr lang="de-AT" dirty="0" err="1"/>
+              <a:t>the</a:t>
+            </a:r>
+            <a:r>
+              <a:rPr lang="de-AT" dirty="0"/>
+              <a:t> </a:t>
+            </a:r>
+            <a:r>
+              <a:rPr lang="de-AT" dirty="0" err="1"/>
+              <a:t>uppercut</a:t>
+            </a:r>
+            <a:endParaRPr lang="de-AT" dirty="0"/>
+          </a:p>
+          <a:p>
+            <a:endParaRPr lang="de-AT" dirty="0"/>
+          </a:p>
+          <a:p>
+            <a:r>
+              <a:rPr lang="de-AT" dirty="0"/>
+              <a:t>The </a:t>
+            </a:r>
+            <a:r>
+              <a:rPr lang="de-AT" dirty="0" err="1"/>
+              <a:t>goal</a:t>
+            </a:r>
+            <a:r>
+              <a:rPr lang="de-AT" dirty="0"/>
+              <a:t> </a:t>
+            </a:r>
+            <a:r>
+              <a:rPr lang="de-AT" dirty="0" err="1"/>
+              <a:t>of</a:t>
+            </a:r>
+            <a:r>
+              <a:rPr lang="de-AT" dirty="0"/>
+              <a:t> </a:t>
+            </a:r>
+            <a:r>
+              <a:rPr lang="de-AT" dirty="0" err="1"/>
+              <a:t>this</a:t>
+            </a:r>
+            <a:r>
+              <a:rPr lang="de-AT" dirty="0"/>
+              <a:t> </a:t>
+            </a:r>
+            <a:r>
+              <a:rPr lang="de-AT" dirty="0" err="1"/>
+              <a:t>product</a:t>
+            </a:r>
+            <a:r>
+              <a:rPr lang="de-AT" dirty="0"/>
+              <a:t> </a:t>
+            </a:r>
+            <a:r>
+              <a:rPr lang="de-AT" dirty="0" err="1"/>
+              <a:t>or</a:t>
+            </a:r>
+            <a:r>
+              <a:rPr lang="de-AT" dirty="0"/>
+              <a:t> </a:t>
+            </a:r>
+            <a:r>
+              <a:rPr lang="de-AT" dirty="0" err="1"/>
+              <a:t>idea</a:t>
+            </a:r>
+            <a:r>
+              <a:rPr lang="de-AT" dirty="0"/>
+              <a:t> was </a:t>
+            </a:r>
+            <a:r>
+              <a:rPr lang="de-AT" dirty="0" err="1"/>
+              <a:t>to</a:t>
+            </a:r>
+            <a:r>
+              <a:rPr lang="de-AT" dirty="0"/>
+              <a:t> </a:t>
+            </a:r>
+            <a:r>
+              <a:rPr lang="de-AT" dirty="0" err="1"/>
+              <a:t>help</a:t>
+            </a:r>
+            <a:r>
+              <a:rPr lang="de-AT" dirty="0"/>
+              <a:t> </a:t>
+            </a:r>
+            <a:r>
+              <a:rPr lang="de-AT" dirty="0" err="1"/>
+              <a:t>boxers</a:t>
+            </a:r>
+            <a:r>
+              <a:rPr lang="de-AT" dirty="0"/>
+              <a:t> </a:t>
+            </a:r>
+            <a:r>
+              <a:rPr lang="de-AT" dirty="0" err="1"/>
+              <a:t>understand</a:t>
+            </a:r>
+            <a:r>
+              <a:rPr lang="de-AT" dirty="0"/>
+              <a:t> </a:t>
+            </a:r>
+            <a:r>
+              <a:rPr lang="de-AT" dirty="0" err="1"/>
+              <a:t>their</a:t>
+            </a:r>
+            <a:r>
+              <a:rPr lang="de-AT" dirty="0"/>
+              <a:t> </a:t>
+            </a:r>
+            <a:r>
+              <a:rPr lang="de-AT" dirty="0" err="1"/>
+              <a:t>performance</a:t>
+            </a:r>
+            <a:r>
+              <a:rPr lang="de-AT" dirty="0"/>
+              <a:t> </a:t>
+            </a:r>
+            <a:r>
+              <a:rPr lang="de-AT" dirty="0" err="1"/>
+              <a:t>during</a:t>
+            </a:r>
+            <a:r>
+              <a:rPr lang="de-AT" dirty="0"/>
+              <a:t> </a:t>
+            </a:r>
+            <a:r>
+              <a:rPr lang="de-AT" dirty="0" err="1"/>
+              <a:t>boxing</a:t>
+            </a:r>
+            <a:r>
+              <a:rPr lang="de-AT" dirty="0"/>
+              <a:t> </a:t>
+            </a:r>
+            <a:r>
+              <a:rPr lang="de-AT" dirty="0" err="1"/>
+              <a:t>sessions</a:t>
+            </a:r>
+            <a:r>
+              <a:rPr lang="de-AT" dirty="0"/>
+              <a:t> and </a:t>
+            </a:r>
+            <a:r>
+              <a:rPr lang="de-AT" dirty="0" err="1"/>
+              <a:t>prevent</a:t>
+            </a:r>
+            <a:r>
+              <a:rPr lang="de-AT" dirty="0"/>
+              <a:t> </a:t>
+            </a:r>
+            <a:r>
+              <a:rPr lang="de-AT" dirty="0" err="1"/>
+              <a:t>them</a:t>
+            </a:r>
+            <a:r>
+              <a:rPr lang="de-AT" dirty="0"/>
+              <a:t> </a:t>
+            </a:r>
+            <a:r>
+              <a:rPr lang="de-AT" dirty="0" err="1"/>
+              <a:t>from</a:t>
+            </a:r>
+            <a:r>
+              <a:rPr lang="de-AT" dirty="0"/>
+              <a:t> </a:t>
+            </a:r>
+            <a:r>
+              <a:rPr lang="de-AT" dirty="0" err="1"/>
+              <a:t>developing</a:t>
+            </a:r>
+            <a:r>
+              <a:rPr lang="de-AT" dirty="0"/>
+              <a:t> </a:t>
+            </a:r>
+            <a:r>
+              <a:rPr lang="de-AT" dirty="0" err="1"/>
+              <a:t>habits</a:t>
+            </a:r>
+            <a:r>
+              <a:rPr lang="de-AT" dirty="0"/>
+              <a:t> </a:t>
+            </a:r>
+            <a:r>
+              <a:rPr lang="de-AT" dirty="0" err="1"/>
+              <a:t>of</a:t>
+            </a:r>
+            <a:r>
+              <a:rPr lang="de-AT" dirty="0"/>
+              <a:t> </a:t>
+            </a:r>
+            <a:r>
+              <a:rPr lang="de-AT" dirty="0" err="1"/>
+              <a:t>overusing</a:t>
+            </a:r>
+            <a:r>
+              <a:rPr lang="de-AT" dirty="0"/>
+              <a:t> </a:t>
+            </a:r>
+            <a:r>
+              <a:rPr lang="de-AT" dirty="0" err="1"/>
+              <a:t>the</a:t>
+            </a:r>
+            <a:r>
+              <a:rPr lang="de-AT" dirty="0"/>
+              <a:t> same type </a:t>
+            </a:r>
+            <a:r>
+              <a:rPr lang="de-AT" dirty="0" err="1"/>
+              <a:t>of</a:t>
+            </a:r>
+            <a:r>
+              <a:rPr lang="de-AT" dirty="0"/>
+              <a:t> </a:t>
+            </a:r>
+            <a:r>
+              <a:rPr lang="de-AT" dirty="0" err="1"/>
+              <a:t>punch</a:t>
+            </a:r>
+            <a:r>
+              <a:rPr lang="de-AT" dirty="0"/>
+              <a:t> and </a:t>
+            </a:r>
+            <a:r>
+              <a:rPr lang="de-AT" dirty="0" err="1"/>
+              <a:t>become</a:t>
+            </a:r>
+            <a:r>
+              <a:rPr lang="de-AT" dirty="0"/>
+              <a:t> </a:t>
+            </a:r>
+            <a:r>
+              <a:rPr lang="de-AT" dirty="0" err="1"/>
+              <a:t>less</a:t>
+            </a:r>
+            <a:r>
+              <a:rPr lang="de-AT" dirty="0"/>
+              <a:t> </a:t>
+            </a:r>
+            <a:r>
+              <a:rPr lang="de-AT" dirty="0" err="1"/>
+              <a:t>predictable</a:t>
+            </a:r>
+            <a:r>
+              <a:rPr lang="de-AT" dirty="0"/>
+              <a:t> </a:t>
+            </a:r>
+            <a:r>
+              <a:rPr lang="de-AT" dirty="0" err="1"/>
+              <a:t>for</a:t>
+            </a:r>
+            <a:r>
+              <a:rPr lang="de-AT" dirty="0"/>
+              <a:t> </a:t>
+            </a:r>
+            <a:r>
+              <a:rPr lang="de-AT" dirty="0" err="1"/>
+              <a:t>their</a:t>
+            </a:r>
+            <a:r>
+              <a:rPr lang="de-AT" dirty="0"/>
+              <a:t> </a:t>
+            </a:r>
+            <a:r>
+              <a:rPr lang="de-AT" dirty="0" err="1"/>
+              <a:t>opponent</a:t>
+            </a:r>
+            <a:endParaRPr lang="de-AT" dirty="0"/>
+          </a:p>
+          <a:p>
+            <a:endParaRPr lang="de-AT" dirty="0"/>
+          </a:p>
+          <a:p>
+            <a:r>
+              <a:rPr lang="de-AT" dirty="0" err="1"/>
+              <a:t>We</a:t>
+            </a:r>
+            <a:r>
+              <a:rPr lang="de-AT" dirty="0"/>
+              <a:t> </a:t>
+            </a:r>
+            <a:r>
+              <a:rPr lang="de-AT" dirty="0" err="1"/>
+              <a:t>wanted</a:t>
+            </a:r>
+            <a:r>
+              <a:rPr lang="de-AT" dirty="0"/>
+              <a:t> </a:t>
+            </a:r>
+            <a:r>
+              <a:rPr lang="de-AT" dirty="0" err="1"/>
+              <a:t>to</a:t>
+            </a:r>
+            <a:r>
+              <a:rPr lang="de-AT" dirty="0"/>
+              <a:t> </a:t>
+            </a:r>
+            <a:r>
+              <a:rPr lang="de-AT" dirty="0" err="1"/>
+              <a:t>assist</a:t>
+            </a:r>
+            <a:r>
+              <a:rPr lang="de-AT" dirty="0"/>
+              <a:t> </a:t>
+            </a:r>
+            <a:r>
+              <a:rPr lang="de-AT" dirty="0" err="1"/>
+              <a:t>this</a:t>
+            </a:r>
+            <a:r>
+              <a:rPr lang="de-AT" dirty="0"/>
+              <a:t> </a:t>
+            </a:r>
+            <a:r>
+              <a:rPr lang="de-AT" dirty="0" err="1"/>
+              <a:t>process</a:t>
+            </a:r>
+            <a:r>
+              <a:rPr lang="de-AT" dirty="0"/>
+              <a:t> </a:t>
+            </a:r>
+            <a:r>
+              <a:rPr lang="de-AT" dirty="0" err="1"/>
+              <a:t>by</a:t>
+            </a:r>
+            <a:r>
+              <a:rPr lang="de-AT" dirty="0"/>
+              <a:t> </a:t>
+            </a:r>
+            <a:r>
+              <a:rPr lang="de-AT" dirty="0" err="1"/>
+              <a:t>implementing</a:t>
+            </a:r>
+            <a:r>
+              <a:rPr lang="de-AT" dirty="0"/>
+              <a:t> a game </a:t>
+            </a:r>
+            <a:r>
+              <a:rPr lang="de-AT" dirty="0" err="1"/>
+              <a:t>function</a:t>
+            </a:r>
+            <a:r>
+              <a:rPr lang="de-AT" dirty="0"/>
+              <a:t> in </a:t>
+            </a:r>
+            <a:r>
+              <a:rPr lang="de-AT" dirty="0" err="1"/>
+              <a:t>which</a:t>
+            </a:r>
+            <a:r>
+              <a:rPr lang="de-AT" dirty="0"/>
+              <a:t> </a:t>
+            </a:r>
+            <a:r>
+              <a:rPr lang="de-AT" dirty="0" err="1"/>
+              <a:t>the</a:t>
+            </a:r>
+            <a:r>
+              <a:rPr lang="de-AT" dirty="0"/>
+              <a:t> </a:t>
+            </a:r>
+            <a:r>
+              <a:rPr lang="de-AT" dirty="0" err="1"/>
+              <a:t>boxer</a:t>
+            </a:r>
+            <a:r>
+              <a:rPr lang="de-AT" dirty="0"/>
+              <a:t> </a:t>
+            </a:r>
+            <a:r>
+              <a:rPr lang="de-AT" dirty="0" err="1"/>
+              <a:t>gets</a:t>
+            </a:r>
+            <a:r>
+              <a:rPr lang="de-AT" dirty="0"/>
+              <a:t> </a:t>
+            </a:r>
+            <a:r>
+              <a:rPr lang="de-AT" dirty="0" err="1"/>
+              <a:t>rewarded</a:t>
+            </a:r>
+            <a:r>
+              <a:rPr lang="de-AT" dirty="0"/>
+              <a:t> </a:t>
+            </a:r>
+            <a:r>
+              <a:rPr lang="de-AT" dirty="0" err="1"/>
+              <a:t>points</a:t>
+            </a:r>
+            <a:r>
+              <a:rPr lang="de-AT" dirty="0"/>
+              <a:t> </a:t>
+            </a:r>
+            <a:r>
+              <a:rPr lang="de-AT" dirty="0" err="1"/>
+              <a:t>for</a:t>
+            </a:r>
+            <a:r>
+              <a:rPr lang="de-AT" dirty="0"/>
+              <a:t> </a:t>
+            </a:r>
+            <a:r>
+              <a:rPr lang="de-AT" dirty="0" err="1"/>
+              <a:t>following</a:t>
+            </a:r>
+            <a:r>
+              <a:rPr lang="de-AT" dirty="0"/>
+              <a:t> </a:t>
+            </a:r>
+            <a:r>
+              <a:rPr lang="de-AT" dirty="0" err="1"/>
+              <a:t>instructed</a:t>
+            </a:r>
+            <a:r>
+              <a:rPr lang="de-AT" dirty="0"/>
+              <a:t> </a:t>
+            </a:r>
+            <a:r>
+              <a:rPr lang="de-AT" dirty="0" err="1"/>
+              <a:t>punches</a:t>
+            </a:r>
+            <a:endParaRPr lang="de-AT" dirty="0"/>
+          </a:p>
+          <a:p>
+            <a:endParaRPr lang="de-AT" dirty="0"/>
+          </a:p>
+          <a:p>
+            <a:r>
+              <a:rPr lang="de-AT" dirty="0"/>
+              <a:t>These </a:t>
+            </a:r>
+            <a:r>
+              <a:rPr lang="de-AT" dirty="0" err="1"/>
+              <a:t>punches</a:t>
+            </a:r>
+            <a:r>
+              <a:rPr lang="de-AT" dirty="0"/>
+              <a:t> </a:t>
+            </a:r>
+            <a:r>
+              <a:rPr lang="de-AT" dirty="0" err="1"/>
+              <a:t>would</a:t>
+            </a:r>
+            <a:r>
+              <a:rPr lang="de-AT" dirty="0"/>
+              <a:t> </a:t>
+            </a:r>
+            <a:r>
+              <a:rPr lang="de-AT" dirty="0" err="1"/>
+              <a:t>be</a:t>
+            </a:r>
+            <a:r>
+              <a:rPr lang="de-AT" dirty="0"/>
+              <a:t> </a:t>
+            </a:r>
+            <a:r>
+              <a:rPr lang="de-AT" dirty="0" err="1"/>
+              <a:t>ordered</a:t>
+            </a:r>
+            <a:r>
+              <a:rPr lang="de-AT" dirty="0"/>
+              <a:t> in a </a:t>
+            </a:r>
+            <a:r>
+              <a:rPr lang="de-AT" dirty="0" err="1"/>
+              <a:t>way</a:t>
+            </a:r>
+            <a:r>
+              <a:rPr lang="de-AT" dirty="0"/>
+              <a:t> </a:t>
+            </a:r>
+            <a:r>
+              <a:rPr lang="de-AT" dirty="0" err="1"/>
+              <a:t>that</a:t>
+            </a:r>
+            <a:r>
+              <a:rPr lang="de-AT" dirty="0"/>
+              <a:t> </a:t>
+            </a:r>
+            <a:r>
+              <a:rPr lang="de-AT" dirty="0" err="1"/>
+              <a:t>the</a:t>
+            </a:r>
+            <a:r>
+              <a:rPr lang="de-AT" dirty="0"/>
+              <a:t> </a:t>
+            </a:r>
+            <a:r>
+              <a:rPr lang="de-AT" dirty="0" err="1"/>
+              <a:t>boxer</a:t>
+            </a:r>
+            <a:r>
+              <a:rPr lang="de-AT" dirty="0"/>
+              <a:t> </a:t>
+            </a:r>
+            <a:r>
+              <a:rPr lang="de-AT" dirty="0" err="1"/>
+              <a:t>always</a:t>
+            </a:r>
+            <a:r>
+              <a:rPr lang="de-AT" dirty="0"/>
+              <a:t> </a:t>
+            </a:r>
+            <a:r>
+              <a:rPr lang="de-AT" dirty="0" err="1"/>
+              <a:t>uses</a:t>
+            </a:r>
+            <a:r>
+              <a:rPr lang="de-AT" dirty="0"/>
+              <a:t> different </a:t>
+            </a:r>
+            <a:r>
+              <a:rPr lang="de-AT" dirty="0" err="1"/>
+              <a:t>combinations</a:t>
+            </a:r>
+            <a:r>
+              <a:rPr lang="de-AT" dirty="0"/>
+              <a:t> and </a:t>
+            </a:r>
+            <a:r>
+              <a:rPr lang="de-AT" dirty="0" err="1"/>
+              <a:t>the</a:t>
+            </a:r>
+            <a:r>
+              <a:rPr lang="de-AT" dirty="0"/>
+              <a:t> </a:t>
+            </a:r>
+            <a:r>
+              <a:rPr lang="de-AT" dirty="0" err="1"/>
+              <a:t>longer</a:t>
+            </a:r>
+            <a:r>
+              <a:rPr lang="de-AT" dirty="0"/>
+              <a:t> he </a:t>
+            </a:r>
+            <a:r>
+              <a:rPr lang="de-AT" dirty="0" err="1"/>
+              <a:t>can</a:t>
+            </a:r>
+            <a:r>
+              <a:rPr lang="de-AT" dirty="0"/>
+              <a:t> hold out and </a:t>
+            </a:r>
+            <a:r>
+              <a:rPr lang="de-AT" dirty="0" err="1"/>
+              <a:t>the</a:t>
+            </a:r>
+            <a:r>
+              <a:rPr lang="de-AT" dirty="0"/>
+              <a:t> </a:t>
+            </a:r>
+            <a:r>
+              <a:rPr lang="de-AT" dirty="0" err="1"/>
+              <a:t>better</a:t>
+            </a:r>
+            <a:r>
+              <a:rPr lang="de-AT" dirty="0"/>
+              <a:t> </a:t>
+            </a:r>
+            <a:r>
+              <a:rPr lang="de-AT" dirty="0" err="1"/>
+              <a:t>the</a:t>
+            </a:r>
+            <a:r>
+              <a:rPr lang="de-AT" dirty="0"/>
+              <a:t> </a:t>
+            </a:r>
+            <a:r>
+              <a:rPr lang="de-AT" dirty="0" err="1"/>
+              <a:t>punch</a:t>
+            </a:r>
+            <a:r>
+              <a:rPr lang="de-AT" dirty="0"/>
+              <a:t> </a:t>
+            </a:r>
+            <a:r>
+              <a:rPr lang="de-AT" dirty="0" err="1"/>
+              <a:t>is</a:t>
+            </a:r>
+            <a:r>
+              <a:rPr lang="de-AT" dirty="0"/>
+              <a:t> </a:t>
+            </a:r>
+            <a:r>
+              <a:rPr lang="de-AT" dirty="0" err="1"/>
+              <a:t>thrown</a:t>
+            </a:r>
+            <a:r>
+              <a:rPr lang="de-AT" dirty="0"/>
+              <a:t> </a:t>
+            </a:r>
+            <a:r>
+              <a:rPr lang="de-AT" dirty="0" err="1"/>
+              <a:t>the</a:t>
+            </a:r>
+            <a:r>
+              <a:rPr lang="de-AT" dirty="0"/>
+              <a:t> </a:t>
+            </a:r>
+            <a:r>
+              <a:rPr lang="de-AT" dirty="0" err="1"/>
+              <a:t>more</a:t>
+            </a:r>
+            <a:r>
+              <a:rPr lang="de-AT" dirty="0"/>
+              <a:t> </a:t>
+            </a:r>
+            <a:r>
+              <a:rPr lang="de-AT" dirty="0" err="1"/>
+              <a:t>points</a:t>
+            </a:r>
+            <a:r>
+              <a:rPr lang="de-AT" dirty="0"/>
+              <a:t> he </a:t>
+            </a:r>
+            <a:r>
+              <a:rPr lang="de-AT" dirty="0" err="1"/>
+              <a:t>gets</a:t>
+            </a:r>
+            <a:endParaRPr lang="de-AT" dirty="0"/>
+          </a:p>
+          <a:p>
+            <a:endParaRPr lang="de-AT" dirty="0"/>
+          </a:p>
+          <a:p>
+            <a:r>
+              <a:rPr lang="de-AT" dirty="0" err="1"/>
+              <a:t>Sadly</a:t>
+            </a:r>
+            <a:r>
+              <a:rPr lang="de-AT" dirty="0"/>
+              <a:t> </a:t>
+            </a:r>
+            <a:r>
+              <a:rPr lang="de-AT" dirty="0" err="1"/>
+              <a:t>the</a:t>
+            </a:r>
+            <a:r>
+              <a:rPr lang="de-AT" dirty="0"/>
+              <a:t> </a:t>
+            </a:r>
+            <a:r>
+              <a:rPr lang="de-AT" dirty="0" err="1"/>
+              <a:t>timespan</a:t>
+            </a:r>
+            <a:r>
+              <a:rPr lang="de-AT" dirty="0"/>
+              <a:t> </a:t>
+            </a:r>
+            <a:r>
+              <a:rPr lang="de-AT" dirty="0" err="1"/>
+              <a:t>of</a:t>
+            </a:r>
+            <a:r>
+              <a:rPr lang="de-AT" dirty="0"/>
+              <a:t> </a:t>
+            </a:r>
+            <a:r>
+              <a:rPr lang="de-AT" dirty="0" err="1"/>
+              <a:t>this</a:t>
+            </a:r>
+            <a:r>
+              <a:rPr lang="de-AT" dirty="0"/>
+              <a:t> </a:t>
+            </a:r>
+            <a:r>
+              <a:rPr lang="de-AT" dirty="0" err="1"/>
+              <a:t>project</a:t>
+            </a:r>
+            <a:r>
+              <a:rPr lang="de-AT" dirty="0"/>
+              <a:t> was not </a:t>
+            </a:r>
+            <a:r>
+              <a:rPr lang="de-AT" dirty="0" err="1"/>
+              <a:t>enough</a:t>
+            </a:r>
+            <a:r>
+              <a:rPr lang="de-AT" dirty="0"/>
+              <a:t> </a:t>
+            </a:r>
+            <a:r>
+              <a:rPr lang="de-AT" dirty="0" err="1"/>
+              <a:t>to</a:t>
+            </a:r>
+            <a:r>
+              <a:rPr lang="de-AT" dirty="0"/>
+              <a:t> </a:t>
+            </a:r>
+            <a:r>
+              <a:rPr lang="de-AT" dirty="0" err="1"/>
+              <a:t>implement</a:t>
+            </a:r>
+            <a:r>
+              <a:rPr lang="de-AT" dirty="0"/>
+              <a:t> </a:t>
+            </a:r>
+            <a:r>
+              <a:rPr lang="de-AT" dirty="0" err="1"/>
+              <a:t>this</a:t>
+            </a:r>
+            <a:r>
+              <a:rPr lang="de-AT" dirty="0"/>
+              <a:t> </a:t>
+            </a:r>
+            <a:r>
+              <a:rPr lang="de-AT" dirty="0" err="1"/>
+              <a:t>function</a:t>
+            </a:r>
+            <a:r>
+              <a:rPr lang="de-AT" dirty="0"/>
+              <a:t> </a:t>
+            </a:r>
           </a:p>
         </p:txBody>
       </p:sp>
@@ -8946,7 +10290,663 @@
           <a:p>
             <a:r>
               <a:rPr lang="de-AT" dirty="0" err="1"/>
-              <a:t>Riedi</a:t>
+              <a:t>We</a:t>
+            </a:r>
+            <a:r>
+              <a:rPr lang="de-AT" dirty="0"/>
+              <a:t> </a:t>
+            </a:r>
+            <a:r>
+              <a:rPr lang="de-AT" dirty="0" err="1"/>
+              <a:t>designed</a:t>
+            </a:r>
+            <a:r>
+              <a:rPr lang="de-AT" dirty="0"/>
+              <a:t> a holder </a:t>
+            </a:r>
+            <a:r>
+              <a:rPr lang="de-AT" dirty="0" err="1"/>
+              <a:t>for</a:t>
+            </a:r>
+            <a:r>
+              <a:rPr lang="de-AT" dirty="0"/>
+              <a:t> </a:t>
+            </a:r>
+            <a:r>
+              <a:rPr lang="de-AT" dirty="0" err="1"/>
+              <a:t>the</a:t>
+            </a:r>
+            <a:r>
+              <a:rPr lang="de-AT" dirty="0"/>
+              <a:t> </a:t>
+            </a:r>
+            <a:r>
+              <a:rPr lang="de-AT" dirty="0" err="1"/>
+              <a:t>board</a:t>
+            </a:r>
+            <a:r>
+              <a:rPr lang="de-AT" dirty="0"/>
+              <a:t> </a:t>
+            </a:r>
+            <a:r>
+              <a:rPr lang="de-AT" dirty="0" err="1"/>
+              <a:t>with</a:t>
+            </a:r>
+            <a:r>
+              <a:rPr lang="de-AT" dirty="0"/>
+              <a:t> </a:t>
+            </a:r>
+            <a:r>
+              <a:rPr lang="de-AT" dirty="0" err="1"/>
+              <a:t>the</a:t>
+            </a:r>
+            <a:r>
+              <a:rPr lang="de-AT" dirty="0"/>
+              <a:t> </a:t>
+            </a:r>
+            <a:r>
+              <a:rPr lang="de-AT" dirty="0" err="1"/>
+              <a:t>intention</a:t>
+            </a:r>
+            <a:r>
+              <a:rPr lang="de-AT" dirty="0"/>
+              <a:t> </a:t>
+            </a:r>
+            <a:r>
+              <a:rPr lang="de-AT" dirty="0" err="1"/>
+              <a:t>to</a:t>
+            </a:r>
+            <a:r>
+              <a:rPr lang="de-AT" dirty="0"/>
+              <a:t> </a:t>
+            </a:r>
+            <a:r>
+              <a:rPr lang="de-AT" dirty="0" err="1"/>
+              <a:t>meassure</a:t>
+            </a:r>
+            <a:r>
+              <a:rPr lang="de-AT" dirty="0"/>
+              <a:t> and </a:t>
+            </a:r>
+            <a:r>
+              <a:rPr lang="de-AT" dirty="0" err="1"/>
+              <a:t>evaluate</a:t>
+            </a:r>
+            <a:r>
+              <a:rPr lang="de-AT" dirty="0"/>
+              <a:t> </a:t>
+            </a:r>
+            <a:r>
+              <a:rPr lang="de-AT" dirty="0" err="1"/>
+              <a:t>data</a:t>
+            </a:r>
+            <a:r>
+              <a:rPr lang="de-AT" dirty="0"/>
+              <a:t> </a:t>
+            </a:r>
+            <a:r>
+              <a:rPr lang="de-AT" dirty="0" err="1"/>
+              <a:t>as</a:t>
+            </a:r>
+            <a:r>
+              <a:rPr lang="de-AT" dirty="0"/>
+              <a:t> </a:t>
+            </a:r>
+            <a:r>
+              <a:rPr lang="de-AT" dirty="0" err="1"/>
+              <a:t>closely</a:t>
+            </a:r>
+            <a:r>
+              <a:rPr lang="de-AT" dirty="0"/>
+              <a:t> </a:t>
+            </a:r>
+            <a:r>
+              <a:rPr lang="de-AT" dirty="0" err="1"/>
+              <a:t>as</a:t>
+            </a:r>
+            <a:r>
+              <a:rPr lang="de-AT" dirty="0"/>
+              <a:t> </a:t>
+            </a:r>
+            <a:r>
+              <a:rPr lang="de-AT" dirty="0" err="1"/>
+              <a:t>it</a:t>
+            </a:r>
+            <a:r>
+              <a:rPr lang="de-AT" dirty="0"/>
+              <a:t> </a:t>
+            </a:r>
+            <a:r>
+              <a:rPr lang="de-AT" dirty="0" err="1"/>
+              <a:t>would</a:t>
+            </a:r>
+            <a:r>
+              <a:rPr lang="de-AT" dirty="0"/>
+              <a:t> happen in a real </a:t>
+            </a:r>
+            <a:r>
+              <a:rPr lang="de-AT" dirty="0" err="1"/>
+              <a:t>life</a:t>
+            </a:r>
+            <a:r>
+              <a:rPr lang="de-AT" dirty="0"/>
+              <a:t> </a:t>
+            </a:r>
+            <a:r>
+              <a:rPr lang="de-AT" dirty="0" err="1"/>
+              <a:t>application</a:t>
+            </a:r>
+            <a:endParaRPr lang="de-AT" dirty="0"/>
+          </a:p>
+          <a:p>
+            <a:endParaRPr lang="de-AT" dirty="0"/>
+          </a:p>
+          <a:p>
+            <a:r>
+              <a:rPr lang="de-AT" dirty="0" err="1"/>
+              <a:t>For</a:t>
+            </a:r>
+            <a:r>
+              <a:rPr lang="de-AT" dirty="0"/>
+              <a:t> </a:t>
+            </a:r>
+            <a:r>
+              <a:rPr lang="de-AT" dirty="0" err="1"/>
+              <a:t>this</a:t>
+            </a:r>
+            <a:r>
+              <a:rPr lang="de-AT" dirty="0"/>
+              <a:t> </a:t>
+            </a:r>
+            <a:r>
+              <a:rPr lang="de-AT" dirty="0" err="1"/>
+              <a:t>we</a:t>
+            </a:r>
+            <a:r>
+              <a:rPr lang="de-AT" dirty="0"/>
+              <a:t> </a:t>
+            </a:r>
+            <a:r>
+              <a:rPr lang="de-AT" dirty="0" err="1"/>
+              <a:t>constructed</a:t>
+            </a:r>
+            <a:r>
+              <a:rPr lang="de-AT" dirty="0"/>
+              <a:t> a 3d printed </a:t>
+            </a:r>
+            <a:r>
+              <a:rPr lang="de-AT" dirty="0" err="1"/>
+              <a:t>model</a:t>
+            </a:r>
+            <a:r>
+              <a:rPr lang="de-AT" dirty="0"/>
+              <a:t> </a:t>
+            </a:r>
+            <a:r>
+              <a:rPr lang="de-AT" dirty="0" err="1"/>
+              <a:t>that</a:t>
+            </a:r>
+            <a:r>
+              <a:rPr lang="de-AT" dirty="0"/>
+              <a:t> </a:t>
+            </a:r>
+            <a:r>
+              <a:rPr lang="de-AT" dirty="0" err="1"/>
+              <a:t>uses</a:t>
+            </a:r>
+            <a:r>
+              <a:rPr lang="de-AT" dirty="0"/>
+              <a:t> </a:t>
+            </a:r>
+            <a:r>
+              <a:rPr lang="de-AT" dirty="0" err="1"/>
+              <a:t>the</a:t>
+            </a:r>
+            <a:r>
+              <a:rPr lang="de-AT" dirty="0"/>
+              <a:t> </a:t>
+            </a:r>
+            <a:r>
+              <a:rPr lang="de-AT" dirty="0" err="1"/>
+              <a:t>boxing</a:t>
+            </a:r>
+            <a:r>
+              <a:rPr lang="de-AT" dirty="0"/>
+              <a:t> </a:t>
+            </a:r>
+            <a:r>
+              <a:rPr lang="de-AT" dirty="0" err="1"/>
+              <a:t>glove‘s</a:t>
+            </a:r>
+            <a:r>
+              <a:rPr lang="de-AT" dirty="0"/>
+              <a:t> </a:t>
+            </a:r>
+            <a:r>
+              <a:rPr lang="de-AT" dirty="0" err="1"/>
+              <a:t>latch</a:t>
+            </a:r>
+            <a:r>
+              <a:rPr lang="de-AT" dirty="0"/>
+              <a:t> </a:t>
+            </a:r>
+            <a:r>
+              <a:rPr lang="de-AT" dirty="0" err="1"/>
+              <a:t>to</a:t>
+            </a:r>
+            <a:r>
+              <a:rPr lang="de-AT" dirty="0"/>
+              <a:t> </a:t>
+            </a:r>
+            <a:r>
+              <a:rPr lang="de-AT" dirty="0" err="1"/>
+              <a:t>fixiate</a:t>
+            </a:r>
+            <a:r>
+              <a:rPr lang="de-AT" dirty="0"/>
+              <a:t> </a:t>
+            </a:r>
+            <a:r>
+              <a:rPr lang="de-AT" dirty="0" err="1"/>
+              <a:t>onto</a:t>
+            </a:r>
+            <a:r>
+              <a:rPr lang="de-AT" dirty="0"/>
+              <a:t>. This happend </a:t>
+            </a:r>
+            <a:r>
+              <a:rPr lang="de-AT" dirty="0" err="1"/>
+              <a:t>by</a:t>
+            </a:r>
+            <a:r>
+              <a:rPr lang="de-AT" dirty="0"/>
+              <a:t> </a:t>
+            </a:r>
+            <a:r>
+              <a:rPr lang="de-AT" dirty="0" err="1"/>
+              <a:t>threading</a:t>
+            </a:r>
+            <a:r>
+              <a:rPr lang="de-AT" dirty="0"/>
+              <a:t> </a:t>
+            </a:r>
+            <a:r>
+              <a:rPr lang="de-AT" dirty="0" err="1"/>
+              <a:t>the</a:t>
+            </a:r>
+            <a:r>
+              <a:rPr lang="de-AT" dirty="0"/>
+              <a:t> </a:t>
+            </a:r>
+            <a:r>
+              <a:rPr lang="de-AT" dirty="0" err="1"/>
+              <a:t>latch</a:t>
+            </a:r>
+            <a:r>
+              <a:rPr lang="de-AT" dirty="0"/>
+              <a:t> </a:t>
+            </a:r>
+            <a:r>
+              <a:rPr lang="de-AT" dirty="0" err="1"/>
+              <a:t>through</a:t>
+            </a:r>
+            <a:r>
+              <a:rPr lang="de-AT" dirty="0"/>
+              <a:t> a hole in </a:t>
+            </a:r>
+            <a:r>
+              <a:rPr lang="de-AT" dirty="0" err="1"/>
+              <a:t>the</a:t>
+            </a:r>
+            <a:r>
+              <a:rPr lang="de-AT" dirty="0"/>
+              <a:t> holder</a:t>
+            </a:r>
+          </a:p>
+          <a:p>
+            <a:endParaRPr lang="de-AT" dirty="0"/>
+          </a:p>
+          <a:p>
+            <a:r>
+              <a:rPr lang="de-AT" dirty="0"/>
+              <a:t>On top </a:t>
+            </a:r>
+            <a:r>
+              <a:rPr lang="de-AT" dirty="0" err="1"/>
+              <a:t>of</a:t>
+            </a:r>
+            <a:r>
+              <a:rPr lang="de-AT" dirty="0"/>
+              <a:t> </a:t>
+            </a:r>
+            <a:r>
+              <a:rPr lang="de-AT" dirty="0" err="1"/>
+              <a:t>this</a:t>
+            </a:r>
+            <a:r>
+              <a:rPr lang="de-AT" dirty="0"/>
+              <a:t> hole </a:t>
+            </a:r>
+            <a:r>
+              <a:rPr lang="de-AT" dirty="0" err="1"/>
+              <a:t>is</a:t>
+            </a:r>
+            <a:r>
+              <a:rPr lang="de-AT" dirty="0"/>
+              <a:t> a </a:t>
+            </a:r>
+            <a:r>
+              <a:rPr lang="de-AT" dirty="0" err="1"/>
+              <a:t>custom</a:t>
+            </a:r>
+            <a:r>
+              <a:rPr lang="de-AT" dirty="0"/>
+              <a:t> fit </a:t>
+            </a:r>
+            <a:r>
+              <a:rPr lang="de-AT" dirty="0" err="1"/>
+              <a:t>cavity</a:t>
+            </a:r>
+            <a:r>
+              <a:rPr lang="de-AT" dirty="0"/>
+              <a:t> </a:t>
+            </a:r>
+            <a:r>
+              <a:rPr lang="de-AT" dirty="0" err="1"/>
+              <a:t>for</a:t>
+            </a:r>
+            <a:r>
+              <a:rPr lang="de-AT" dirty="0"/>
+              <a:t> </a:t>
+            </a:r>
+            <a:r>
+              <a:rPr lang="de-AT" dirty="0" err="1"/>
+              <a:t>the</a:t>
+            </a:r>
+            <a:r>
+              <a:rPr lang="de-AT" dirty="0"/>
+              <a:t> </a:t>
+            </a:r>
+            <a:r>
+              <a:rPr lang="de-AT" dirty="0" err="1"/>
+              <a:t>battery</a:t>
+            </a:r>
+            <a:r>
+              <a:rPr lang="de-AT" dirty="0"/>
+              <a:t> </a:t>
+            </a:r>
+            <a:r>
+              <a:rPr lang="de-AT" dirty="0" err="1"/>
+              <a:t>that</a:t>
+            </a:r>
+            <a:r>
+              <a:rPr lang="de-AT" dirty="0"/>
+              <a:t> was </a:t>
+            </a:r>
+            <a:r>
+              <a:rPr lang="de-AT" dirty="0" err="1"/>
+              <a:t>borrowed</a:t>
+            </a:r>
+            <a:r>
+              <a:rPr lang="de-AT" dirty="0"/>
+              <a:t> </a:t>
+            </a:r>
+            <a:r>
+              <a:rPr lang="de-AT" dirty="0" err="1"/>
+              <a:t>to</a:t>
+            </a:r>
+            <a:r>
+              <a:rPr lang="de-AT" dirty="0"/>
+              <a:t> </a:t>
+            </a:r>
+            <a:r>
+              <a:rPr lang="de-AT" dirty="0" err="1"/>
+              <a:t>us</a:t>
+            </a:r>
+            <a:r>
+              <a:rPr lang="de-AT" dirty="0"/>
+              <a:t> and on top </a:t>
+            </a:r>
+            <a:r>
+              <a:rPr lang="de-AT" dirty="0" err="1"/>
+              <a:t>of</a:t>
+            </a:r>
+            <a:r>
+              <a:rPr lang="de-AT" dirty="0"/>
+              <a:t> </a:t>
+            </a:r>
+            <a:r>
+              <a:rPr lang="de-AT" dirty="0" err="1"/>
+              <a:t>that</a:t>
+            </a:r>
+            <a:r>
+              <a:rPr lang="de-AT" dirty="0"/>
+              <a:t> </a:t>
+            </a:r>
+            <a:r>
+              <a:rPr lang="de-AT" dirty="0" err="1"/>
+              <a:t>is</a:t>
+            </a:r>
+            <a:r>
+              <a:rPr lang="de-AT" dirty="0"/>
+              <a:t> </a:t>
+            </a:r>
+            <a:r>
+              <a:rPr lang="de-AT" dirty="0" err="1"/>
+              <a:t>the</a:t>
+            </a:r>
+            <a:r>
+              <a:rPr lang="de-AT" dirty="0"/>
+              <a:t> </a:t>
+            </a:r>
+            <a:r>
+              <a:rPr lang="de-AT" dirty="0" err="1"/>
+              <a:t>PsoC</a:t>
+            </a:r>
+            <a:r>
+              <a:rPr lang="de-AT" dirty="0"/>
+              <a:t> </a:t>
+            </a:r>
+            <a:r>
+              <a:rPr lang="de-AT" dirty="0" err="1"/>
+              <a:t>that</a:t>
+            </a:r>
+            <a:r>
+              <a:rPr lang="de-AT" dirty="0"/>
+              <a:t> </a:t>
+            </a:r>
+            <a:r>
+              <a:rPr lang="de-AT" dirty="0" err="1"/>
+              <a:t>is</a:t>
+            </a:r>
+            <a:r>
+              <a:rPr lang="de-AT" dirty="0"/>
+              <a:t> </a:t>
+            </a:r>
+            <a:r>
+              <a:rPr lang="de-AT" dirty="0" err="1"/>
+              <a:t>simply</a:t>
+            </a:r>
+            <a:r>
+              <a:rPr lang="de-AT" dirty="0"/>
+              <a:t> </a:t>
+            </a:r>
+            <a:r>
+              <a:rPr lang="de-AT" dirty="0" err="1"/>
+              <a:t>screwed</a:t>
+            </a:r>
+            <a:r>
+              <a:rPr lang="de-AT" dirty="0"/>
+              <a:t> on.</a:t>
+            </a:r>
+          </a:p>
+          <a:p>
+            <a:endParaRPr lang="de-AT" dirty="0"/>
+          </a:p>
+          <a:p>
+            <a:r>
+              <a:rPr lang="de-AT" dirty="0" err="1"/>
+              <a:t>During</a:t>
+            </a:r>
+            <a:r>
+              <a:rPr lang="de-AT" dirty="0"/>
+              <a:t> </a:t>
+            </a:r>
+            <a:r>
+              <a:rPr lang="de-AT" dirty="0" err="1"/>
+              <a:t>our</a:t>
+            </a:r>
+            <a:r>
+              <a:rPr lang="de-AT" dirty="0"/>
+              <a:t> </a:t>
+            </a:r>
+            <a:r>
+              <a:rPr lang="de-AT" dirty="0" err="1"/>
+              <a:t>testing</a:t>
+            </a:r>
+            <a:r>
+              <a:rPr lang="de-AT" dirty="0"/>
+              <a:t> </a:t>
+            </a:r>
+            <a:r>
+              <a:rPr lang="de-AT" dirty="0" err="1"/>
+              <a:t>this</a:t>
+            </a:r>
+            <a:r>
+              <a:rPr lang="de-AT" dirty="0"/>
+              <a:t> holder </a:t>
+            </a:r>
+            <a:r>
+              <a:rPr lang="de-AT" dirty="0" err="1"/>
+              <a:t>worked</a:t>
+            </a:r>
+            <a:r>
+              <a:rPr lang="de-AT" dirty="0"/>
+              <a:t> out </a:t>
+            </a:r>
+            <a:r>
+              <a:rPr lang="de-AT" dirty="0" err="1"/>
+              <a:t>perfectly</a:t>
+            </a:r>
+            <a:r>
+              <a:rPr lang="de-AT" dirty="0"/>
+              <a:t> </a:t>
+            </a:r>
+            <a:r>
+              <a:rPr lang="de-AT" dirty="0" err="1"/>
+              <a:t>with</a:t>
+            </a:r>
+            <a:r>
+              <a:rPr lang="de-AT" dirty="0"/>
+              <a:t> </a:t>
+            </a:r>
+            <a:r>
+              <a:rPr lang="de-AT" dirty="0" err="1"/>
+              <a:t>no</a:t>
+            </a:r>
+            <a:r>
+              <a:rPr lang="de-AT" dirty="0"/>
+              <a:t> </a:t>
+            </a:r>
+            <a:r>
+              <a:rPr lang="de-AT" dirty="0" err="1"/>
+              <a:t>rattling</a:t>
+            </a:r>
+            <a:r>
+              <a:rPr lang="de-AT" dirty="0"/>
+              <a:t> </a:t>
+            </a:r>
+            <a:r>
+              <a:rPr lang="de-AT" dirty="0" err="1"/>
+              <a:t>or</a:t>
+            </a:r>
+            <a:r>
+              <a:rPr lang="de-AT" dirty="0"/>
+              <a:t> </a:t>
+            </a:r>
+            <a:r>
+              <a:rPr lang="de-AT" dirty="0" err="1"/>
+              <a:t>unwanted</a:t>
+            </a:r>
+            <a:r>
+              <a:rPr lang="de-AT" dirty="0"/>
+              <a:t> </a:t>
+            </a:r>
+            <a:r>
+              <a:rPr lang="de-AT" dirty="0" err="1"/>
+              <a:t>noise</a:t>
+            </a:r>
+            <a:r>
+              <a:rPr lang="de-AT" dirty="0"/>
+              <a:t> in </a:t>
+            </a:r>
+            <a:r>
+              <a:rPr lang="de-AT" dirty="0" err="1"/>
+              <a:t>the</a:t>
+            </a:r>
+            <a:r>
+              <a:rPr lang="de-AT" dirty="0"/>
+              <a:t> </a:t>
+            </a:r>
+            <a:r>
+              <a:rPr lang="de-AT" dirty="0" err="1"/>
+              <a:t>sessions</a:t>
+            </a:r>
+            <a:r>
+              <a:rPr lang="de-AT" dirty="0"/>
+              <a:t> </a:t>
+            </a:r>
+            <a:r>
+              <a:rPr lang="de-AT" dirty="0" err="1"/>
+              <a:t>as</a:t>
+            </a:r>
+            <a:r>
+              <a:rPr lang="de-AT" dirty="0"/>
+              <a:t> </a:t>
+            </a:r>
+            <a:r>
+              <a:rPr lang="de-AT" dirty="0" err="1"/>
+              <a:t>we</a:t>
+            </a:r>
+            <a:r>
+              <a:rPr lang="de-AT" dirty="0"/>
+              <a:t> </a:t>
+            </a:r>
+            <a:r>
+              <a:rPr lang="de-AT" dirty="0" err="1"/>
+              <a:t>could</a:t>
+            </a:r>
+            <a:r>
+              <a:rPr lang="de-AT" dirty="0"/>
+              <a:t> </a:t>
+            </a:r>
+            <a:r>
+              <a:rPr lang="de-AT" dirty="0" err="1"/>
+              <a:t>fixiate</a:t>
+            </a:r>
+            <a:r>
+              <a:rPr lang="de-AT" dirty="0"/>
+              <a:t> </a:t>
+            </a:r>
+            <a:r>
+              <a:rPr lang="de-AT" dirty="0" err="1"/>
+              <a:t>it</a:t>
+            </a:r>
+            <a:r>
+              <a:rPr lang="de-AT" dirty="0"/>
+              <a:t> </a:t>
+            </a:r>
+            <a:r>
+              <a:rPr lang="de-AT" dirty="0" err="1"/>
+              <a:t>very</a:t>
+            </a:r>
+            <a:r>
+              <a:rPr lang="de-AT" dirty="0"/>
+              <a:t> </a:t>
+            </a:r>
+            <a:r>
+              <a:rPr lang="de-AT" dirty="0" err="1"/>
+              <a:t>tightly</a:t>
             </a:r>
             <a:endParaRPr lang="de-AT" dirty="0"/>
           </a:p>
@@ -9040,9 +11040,1033 @@
           <a:lstStyle/>
           <a:p>
             <a:r>
-              <a:rPr lang="de-AT"/>
-              <a:t>Rief</a:t>
-            </a:r>
+              <a:rPr lang="de-AT" dirty="0"/>
+              <a:t>The </a:t>
+            </a:r>
+            <a:r>
+              <a:rPr lang="de-AT" dirty="0" err="1"/>
+              <a:t>data</a:t>
+            </a:r>
+            <a:r>
+              <a:rPr lang="de-AT" dirty="0"/>
+              <a:t> </a:t>
+            </a:r>
+            <a:r>
+              <a:rPr lang="de-AT" dirty="0" err="1"/>
+              <a:t>we</a:t>
+            </a:r>
+            <a:r>
+              <a:rPr lang="de-AT" dirty="0"/>
+              <a:t> </a:t>
+            </a:r>
+            <a:r>
+              <a:rPr lang="de-AT" dirty="0" err="1"/>
+              <a:t>sampled</a:t>
+            </a:r>
+            <a:r>
+              <a:rPr lang="de-AT" dirty="0"/>
+              <a:t> </a:t>
+            </a:r>
+            <a:r>
+              <a:rPr lang="de-AT" dirty="0" err="1"/>
+              <a:t>contained</a:t>
+            </a:r>
+            <a:r>
+              <a:rPr lang="de-AT" dirty="0"/>
+              <a:t> </a:t>
+            </a:r>
+            <a:r>
+              <a:rPr lang="de-AT" dirty="0" err="1"/>
+              <a:t>roughly</a:t>
+            </a:r>
+            <a:r>
+              <a:rPr lang="de-AT" dirty="0"/>
+              <a:t> 1h30min and </a:t>
+            </a:r>
+            <a:r>
+              <a:rPr lang="de-AT" dirty="0" err="1"/>
+              <a:t>consists</a:t>
+            </a:r>
+            <a:r>
+              <a:rPr lang="de-AT" dirty="0"/>
+              <a:t> </a:t>
+            </a:r>
+            <a:r>
+              <a:rPr lang="de-AT" dirty="0" err="1"/>
+              <a:t>of</a:t>
+            </a:r>
+            <a:r>
+              <a:rPr lang="de-AT" dirty="0"/>
+              <a:t> </a:t>
+            </a:r>
+            <a:r>
+              <a:rPr lang="de-AT" dirty="0" err="1"/>
+              <a:t>about</a:t>
+            </a:r>
+            <a:r>
+              <a:rPr lang="de-AT" dirty="0"/>
+              <a:t> an </a:t>
+            </a:r>
+            <a:r>
+              <a:rPr lang="de-AT" dirty="0" err="1"/>
+              <a:t>hour</a:t>
+            </a:r>
+            <a:r>
+              <a:rPr lang="de-AT" dirty="0"/>
+              <a:t> </a:t>
+            </a:r>
+            <a:r>
+              <a:rPr lang="de-AT" dirty="0" err="1"/>
+              <a:t>of</a:t>
+            </a:r>
+            <a:r>
+              <a:rPr lang="de-AT" dirty="0"/>
+              <a:t> </a:t>
+            </a:r>
+            <a:r>
+              <a:rPr lang="de-AT" dirty="0" err="1"/>
+              <a:t>labled</a:t>
+            </a:r>
+            <a:r>
+              <a:rPr lang="de-AT" dirty="0"/>
+              <a:t> </a:t>
+            </a:r>
+            <a:r>
+              <a:rPr lang="de-AT" dirty="0" err="1"/>
+              <a:t>data</a:t>
+            </a:r>
+            <a:r>
+              <a:rPr lang="de-AT" dirty="0"/>
+              <a:t> and </a:t>
+            </a:r>
+            <a:r>
+              <a:rPr lang="de-AT" dirty="0" err="1"/>
+              <a:t>the</a:t>
+            </a:r>
+            <a:r>
+              <a:rPr lang="de-AT" dirty="0"/>
+              <a:t> </a:t>
+            </a:r>
+            <a:r>
+              <a:rPr lang="de-AT" dirty="0" err="1"/>
+              <a:t>rest</a:t>
+            </a:r>
+            <a:r>
+              <a:rPr lang="de-AT" dirty="0"/>
+              <a:t> </a:t>
+            </a:r>
+            <a:r>
+              <a:rPr lang="de-AT" dirty="0" err="1"/>
+              <a:t>of</a:t>
+            </a:r>
+            <a:r>
+              <a:rPr lang="de-AT" dirty="0"/>
+              <a:t> </a:t>
+            </a:r>
+            <a:r>
+              <a:rPr lang="de-AT" dirty="0" err="1"/>
+              <a:t>unlabeld</a:t>
+            </a:r>
+            <a:r>
+              <a:rPr lang="de-AT" dirty="0"/>
+              <a:t> </a:t>
+            </a:r>
+            <a:r>
+              <a:rPr lang="de-AT" dirty="0" err="1"/>
+              <a:t>data</a:t>
+            </a:r>
+            <a:r>
+              <a:rPr lang="de-AT" dirty="0"/>
+              <a:t>.</a:t>
+            </a:r>
+          </a:p>
+          <a:p>
+            <a:endParaRPr lang="de-AT" dirty="0"/>
+          </a:p>
+          <a:p>
+            <a:r>
+              <a:rPr lang="de-AT" dirty="0" err="1"/>
+              <a:t>For</a:t>
+            </a:r>
+            <a:r>
+              <a:rPr lang="de-AT" dirty="0"/>
+              <a:t> </a:t>
+            </a:r>
+            <a:r>
+              <a:rPr lang="de-AT" dirty="0" err="1"/>
+              <a:t>collection</a:t>
+            </a:r>
+            <a:r>
+              <a:rPr lang="de-AT" dirty="0"/>
+              <a:t> </a:t>
+            </a:r>
+            <a:r>
+              <a:rPr lang="de-AT" dirty="0" err="1"/>
+              <a:t>only</a:t>
+            </a:r>
+            <a:r>
+              <a:rPr lang="de-AT" dirty="0"/>
+              <a:t> </a:t>
+            </a:r>
+            <a:r>
+              <a:rPr lang="de-AT" dirty="0" err="1"/>
+              <a:t>the</a:t>
+            </a:r>
+            <a:r>
+              <a:rPr lang="de-AT" dirty="0"/>
+              <a:t> </a:t>
+            </a:r>
+            <a:r>
+              <a:rPr lang="de-AT" dirty="0" err="1"/>
+              <a:t>right</a:t>
+            </a:r>
+            <a:r>
+              <a:rPr lang="de-AT" dirty="0"/>
+              <a:t> </a:t>
+            </a:r>
+            <a:r>
+              <a:rPr lang="de-AT" dirty="0" err="1"/>
+              <a:t>hand</a:t>
+            </a:r>
+            <a:r>
+              <a:rPr lang="de-AT" dirty="0"/>
+              <a:t> was </a:t>
+            </a:r>
+            <a:r>
+              <a:rPr lang="de-AT" dirty="0" err="1"/>
+              <a:t>used</a:t>
+            </a:r>
+            <a:r>
+              <a:rPr lang="de-AT" dirty="0"/>
+              <a:t> </a:t>
+            </a:r>
+            <a:r>
+              <a:rPr lang="de-AT" dirty="0" err="1"/>
+              <a:t>as</a:t>
+            </a:r>
+            <a:r>
+              <a:rPr lang="de-AT" dirty="0"/>
+              <a:t> </a:t>
+            </a:r>
+            <a:r>
+              <a:rPr lang="de-AT" dirty="0" err="1"/>
+              <a:t>we</a:t>
+            </a:r>
+            <a:r>
+              <a:rPr lang="de-AT" dirty="0"/>
+              <a:t> </a:t>
+            </a:r>
+            <a:r>
+              <a:rPr lang="de-AT" dirty="0" err="1"/>
+              <a:t>were</a:t>
+            </a:r>
+            <a:r>
+              <a:rPr lang="de-AT" dirty="0"/>
+              <a:t> </a:t>
+            </a:r>
+            <a:r>
+              <a:rPr lang="de-AT" dirty="0" err="1"/>
+              <a:t>told</a:t>
+            </a:r>
+            <a:r>
+              <a:rPr lang="de-AT" dirty="0"/>
+              <a:t> </a:t>
+            </a:r>
+            <a:r>
+              <a:rPr lang="de-AT" dirty="0" err="1"/>
+              <a:t>to</a:t>
+            </a:r>
+            <a:r>
+              <a:rPr lang="de-AT" dirty="0"/>
+              <a:t> </a:t>
+            </a:r>
+            <a:r>
+              <a:rPr lang="de-AT" dirty="0" err="1"/>
+              <a:t>only</a:t>
+            </a:r>
+            <a:r>
+              <a:rPr lang="de-AT" dirty="0"/>
+              <a:t> </a:t>
+            </a:r>
+            <a:r>
+              <a:rPr lang="de-AT" dirty="0" err="1"/>
+              <a:t>focus</a:t>
+            </a:r>
+            <a:r>
+              <a:rPr lang="de-AT" dirty="0"/>
+              <a:t> on a </a:t>
+            </a:r>
+            <a:r>
+              <a:rPr lang="de-AT" dirty="0" err="1"/>
+              <a:t>proof</a:t>
+            </a:r>
+            <a:r>
+              <a:rPr lang="de-AT" dirty="0"/>
+              <a:t> </a:t>
+            </a:r>
+            <a:r>
+              <a:rPr lang="de-AT" dirty="0" err="1"/>
+              <a:t>of</a:t>
+            </a:r>
+            <a:r>
+              <a:rPr lang="de-AT" dirty="0"/>
+              <a:t> </a:t>
+            </a:r>
+            <a:r>
+              <a:rPr lang="de-AT" dirty="0" err="1"/>
+              <a:t>concept</a:t>
+            </a:r>
+            <a:r>
+              <a:rPr lang="de-AT" dirty="0"/>
+              <a:t> </a:t>
+            </a:r>
+            <a:r>
+              <a:rPr lang="de-AT" dirty="0" err="1"/>
+              <a:t>for</a:t>
+            </a:r>
+            <a:r>
+              <a:rPr lang="de-AT" dirty="0"/>
+              <a:t> </a:t>
+            </a:r>
+            <a:r>
+              <a:rPr lang="de-AT" dirty="0" err="1"/>
+              <a:t>this</a:t>
+            </a:r>
+            <a:r>
+              <a:rPr lang="de-AT" dirty="0"/>
+              <a:t> </a:t>
+            </a:r>
+            <a:r>
+              <a:rPr lang="de-AT" dirty="0" err="1"/>
+              <a:t>project</a:t>
+            </a:r>
+            <a:endParaRPr lang="de-AT" dirty="0"/>
+          </a:p>
+          <a:p>
+            <a:endParaRPr lang="de-AT" dirty="0"/>
+          </a:p>
+          <a:p>
+            <a:r>
+              <a:rPr lang="de-AT" dirty="0"/>
+              <a:t>The </a:t>
+            </a:r>
+            <a:r>
+              <a:rPr lang="de-AT" dirty="0" err="1"/>
+              <a:t>data</a:t>
+            </a:r>
+            <a:r>
+              <a:rPr lang="de-AT" dirty="0"/>
+              <a:t> </a:t>
+            </a:r>
+            <a:r>
+              <a:rPr lang="de-AT" dirty="0" err="1"/>
+              <a:t>we</a:t>
+            </a:r>
+            <a:r>
+              <a:rPr lang="de-AT" dirty="0"/>
+              <a:t> </a:t>
+            </a:r>
+            <a:r>
+              <a:rPr lang="de-AT" dirty="0" err="1"/>
+              <a:t>sampled</a:t>
+            </a:r>
+            <a:r>
+              <a:rPr lang="de-AT" dirty="0"/>
+              <a:t> was </a:t>
+            </a:r>
+            <a:r>
+              <a:rPr lang="de-AT" dirty="0" err="1"/>
+              <a:t>taken</a:t>
+            </a:r>
+            <a:r>
+              <a:rPr lang="de-AT" dirty="0"/>
+              <a:t> </a:t>
+            </a:r>
+            <a:r>
+              <a:rPr lang="de-AT" dirty="0" err="1"/>
+              <a:t>from</a:t>
+            </a:r>
+            <a:r>
+              <a:rPr lang="de-AT" dirty="0"/>
+              <a:t> </a:t>
+            </a:r>
+            <a:r>
+              <a:rPr lang="de-AT" dirty="0" err="1"/>
+              <a:t>every</a:t>
+            </a:r>
+            <a:r>
+              <a:rPr lang="de-AT" dirty="0"/>
+              <a:t> </a:t>
+            </a:r>
+            <a:r>
+              <a:rPr lang="de-AT" dirty="0" err="1"/>
+              <a:t>member</a:t>
+            </a:r>
+            <a:r>
+              <a:rPr lang="de-AT" dirty="0"/>
+              <a:t> </a:t>
+            </a:r>
+            <a:r>
+              <a:rPr lang="de-AT" dirty="0" err="1"/>
+              <a:t>of</a:t>
+            </a:r>
+            <a:r>
+              <a:rPr lang="de-AT" dirty="0"/>
+              <a:t> </a:t>
+            </a:r>
+            <a:r>
+              <a:rPr lang="de-AT" dirty="0" err="1"/>
+              <a:t>the</a:t>
+            </a:r>
+            <a:r>
+              <a:rPr lang="de-AT" dirty="0"/>
+              <a:t> </a:t>
+            </a:r>
+            <a:r>
+              <a:rPr lang="de-AT" dirty="0" err="1"/>
+              <a:t>team</a:t>
+            </a:r>
+            <a:r>
+              <a:rPr lang="de-AT" dirty="0"/>
+              <a:t> so </a:t>
+            </a:r>
+            <a:r>
+              <a:rPr lang="de-AT" dirty="0" err="1"/>
+              <a:t>we</a:t>
+            </a:r>
+            <a:r>
+              <a:rPr lang="de-AT" dirty="0"/>
+              <a:t> </a:t>
+            </a:r>
+            <a:r>
+              <a:rPr lang="de-AT" dirty="0" err="1"/>
+              <a:t>would</a:t>
+            </a:r>
+            <a:r>
+              <a:rPr lang="de-AT" dirty="0"/>
+              <a:t> </a:t>
+            </a:r>
+            <a:r>
+              <a:rPr lang="de-AT" dirty="0" err="1"/>
+              <a:t>have</a:t>
+            </a:r>
+            <a:r>
+              <a:rPr lang="de-AT" dirty="0"/>
+              <a:t> different </a:t>
+            </a:r>
+            <a:r>
+              <a:rPr lang="de-AT" dirty="0" err="1"/>
+              <a:t>techniques</a:t>
+            </a:r>
+            <a:r>
+              <a:rPr lang="de-AT" dirty="0"/>
+              <a:t> and all </a:t>
+            </a:r>
+            <a:r>
+              <a:rPr lang="de-AT" dirty="0" err="1"/>
+              <a:t>of</a:t>
+            </a:r>
+            <a:r>
+              <a:rPr lang="de-AT" dirty="0"/>
+              <a:t> </a:t>
+            </a:r>
+            <a:r>
+              <a:rPr lang="de-AT" dirty="0" err="1"/>
+              <a:t>us</a:t>
+            </a:r>
+            <a:r>
+              <a:rPr lang="de-AT" dirty="0"/>
+              <a:t> also </a:t>
+            </a:r>
+            <a:r>
+              <a:rPr lang="de-AT" dirty="0" err="1"/>
+              <a:t>tried</a:t>
+            </a:r>
+            <a:r>
+              <a:rPr lang="de-AT" dirty="0"/>
+              <a:t> </a:t>
+            </a:r>
+            <a:r>
+              <a:rPr lang="de-AT" dirty="0" err="1"/>
+              <a:t>to</a:t>
+            </a:r>
+            <a:r>
+              <a:rPr lang="de-AT" dirty="0"/>
+              <a:t> </a:t>
+            </a:r>
+            <a:r>
+              <a:rPr lang="de-AT" dirty="0" err="1"/>
+              <a:t>use</a:t>
+            </a:r>
+            <a:r>
+              <a:rPr lang="de-AT" dirty="0"/>
+              <a:t> different </a:t>
+            </a:r>
+            <a:r>
+              <a:rPr lang="de-AT" dirty="0" err="1"/>
+              <a:t>speeds</a:t>
+            </a:r>
+            <a:r>
+              <a:rPr lang="de-AT" dirty="0"/>
+              <a:t> </a:t>
+            </a:r>
+            <a:r>
+              <a:rPr lang="de-AT" dirty="0" err="1"/>
+              <a:t>for</a:t>
+            </a:r>
+            <a:r>
+              <a:rPr lang="de-AT" dirty="0"/>
+              <a:t> a </a:t>
+            </a:r>
+            <a:r>
+              <a:rPr lang="de-AT" dirty="0" err="1"/>
+              <a:t>greater</a:t>
+            </a:r>
+            <a:r>
+              <a:rPr lang="de-AT" dirty="0"/>
+              <a:t> </a:t>
+            </a:r>
+            <a:r>
+              <a:rPr lang="de-AT" dirty="0" err="1"/>
+              <a:t>variety</a:t>
+            </a:r>
+            <a:endParaRPr lang="de-AT" dirty="0"/>
+          </a:p>
+          <a:p>
+            <a:endParaRPr lang="de-AT" dirty="0"/>
+          </a:p>
+          <a:p>
+            <a:r>
+              <a:rPr lang="de-AT" dirty="0"/>
+              <a:t>The </a:t>
+            </a:r>
+            <a:r>
+              <a:rPr lang="de-AT" dirty="0" err="1"/>
+              <a:t>sessions</a:t>
+            </a:r>
+            <a:r>
+              <a:rPr lang="de-AT" dirty="0"/>
+              <a:t> </a:t>
+            </a:r>
+            <a:r>
+              <a:rPr lang="de-AT" dirty="0" err="1"/>
+              <a:t>were</a:t>
+            </a:r>
+            <a:r>
+              <a:rPr lang="de-AT" dirty="0"/>
+              <a:t> </a:t>
+            </a:r>
+            <a:r>
+              <a:rPr lang="de-AT" dirty="0" err="1"/>
+              <a:t>mostly</a:t>
+            </a:r>
+            <a:r>
+              <a:rPr lang="de-AT" dirty="0"/>
+              <a:t> </a:t>
+            </a:r>
+            <a:r>
+              <a:rPr lang="de-AT" dirty="0" err="1"/>
+              <a:t>only</a:t>
+            </a:r>
+            <a:r>
+              <a:rPr lang="de-AT" dirty="0"/>
+              <a:t> </a:t>
+            </a:r>
+            <a:r>
+              <a:rPr lang="de-AT" dirty="0" err="1"/>
+              <a:t>one</a:t>
+            </a:r>
+            <a:r>
+              <a:rPr lang="de-AT" dirty="0"/>
+              <a:t> type </a:t>
+            </a:r>
+            <a:r>
+              <a:rPr lang="de-AT" dirty="0" err="1"/>
+              <a:t>of</a:t>
+            </a:r>
+            <a:r>
+              <a:rPr lang="de-AT" dirty="0"/>
+              <a:t> </a:t>
+            </a:r>
+            <a:r>
+              <a:rPr lang="de-AT" dirty="0" err="1"/>
+              <a:t>punch</a:t>
+            </a:r>
+            <a:r>
+              <a:rPr lang="de-AT" dirty="0"/>
+              <a:t> </a:t>
+            </a:r>
+            <a:r>
+              <a:rPr lang="de-AT" dirty="0" err="1"/>
+              <a:t>with</a:t>
+            </a:r>
+            <a:r>
+              <a:rPr lang="de-AT" dirty="0"/>
+              <a:t> </a:t>
+            </a:r>
+            <a:r>
+              <a:rPr lang="de-AT" dirty="0" err="1"/>
+              <a:t>enough</a:t>
+            </a:r>
+            <a:r>
+              <a:rPr lang="de-AT" dirty="0"/>
+              <a:t> time </a:t>
+            </a:r>
+            <a:r>
+              <a:rPr lang="de-AT" dirty="0" err="1"/>
+              <a:t>inbetween</a:t>
+            </a:r>
+            <a:r>
+              <a:rPr lang="de-AT" dirty="0"/>
+              <a:t> so </a:t>
+            </a:r>
+            <a:r>
+              <a:rPr lang="de-AT" dirty="0" err="1"/>
+              <a:t>we</a:t>
+            </a:r>
+            <a:r>
+              <a:rPr lang="de-AT" dirty="0"/>
+              <a:t> </a:t>
+            </a:r>
+            <a:r>
+              <a:rPr lang="de-AT" dirty="0" err="1"/>
+              <a:t>could</a:t>
+            </a:r>
+            <a:r>
+              <a:rPr lang="de-AT" dirty="0"/>
+              <a:t> </a:t>
+            </a:r>
+            <a:r>
+              <a:rPr lang="de-AT" dirty="0" err="1"/>
+              <a:t>label</a:t>
+            </a:r>
+            <a:r>
+              <a:rPr lang="de-AT" dirty="0"/>
+              <a:t> </a:t>
+            </a:r>
+            <a:r>
+              <a:rPr lang="de-AT" dirty="0" err="1"/>
+              <a:t>the</a:t>
+            </a:r>
+            <a:r>
+              <a:rPr lang="de-AT" dirty="0"/>
+              <a:t> </a:t>
+            </a:r>
+            <a:r>
+              <a:rPr lang="de-AT" dirty="0" err="1"/>
+              <a:t>data</a:t>
+            </a:r>
+            <a:r>
+              <a:rPr lang="de-AT" dirty="0"/>
+              <a:t> </a:t>
+            </a:r>
+            <a:r>
+              <a:rPr lang="de-AT" dirty="0" err="1"/>
+              <a:t>very</a:t>
+            </a:r>
+            <a:r>
+              <a:rPr lang="de-AT" dirty="0"/>
+              <a:t> </a:t>
+            </a:r>
+            <a:r>
+              <a:rPr lang="de-AT" dirty="0" err="1"/>
+              <a:t>accuratly</a:t>
+            </a:r>
+            <a:r>
+              <a:rPr lang="de-AT" dirty="0"/>
+              <a:t> </a:t>
+            </a:r>
+          </a:p>
+          <a:p>
+            <a:endParaRPr lang="de-AT" dirty="0"/>
+          </a:p>
+          <a:p>
+            <a:r>
+              <a:rPr lang="de-AT" dirty="0" err="1"/>
+              <a:t>Some</a:t>
+            </a:r>
+            <a:r>
+              <a:rPr lang="de-AT" dirty="0"/>
+              <a:t> </a:t>
+            </a:r>
+            <a:r>
+              <a:rPr lang="de-AT" dirty="0" err="1"/>
+              <a:t>session</a:t>
+            </a:r>
+            <a:r>
+              <a:rPr lang="de-AT" dirty="0"/>
+              <a:t> also </a:t>
+            </a:r>
+            <a:r>
+              <a:rPr lang="de-AT" dirty="0" err="1"/>
+              <a:t>contained</a:t>
+            </a:r>
+            <a:r>
+              <a:rPr lang="de-AT" dirty="0"/>
+              <a:t> </a:t>
+            </a:r>
+            <a:r>
+              <a:rPr lang="de-AT" dirty="0" err="1"/>
+              <a:t>mixtures</a:t>
+            </a:r>
+            <a:r>
+              <a:rPr lang="de-AT" dirty="0"/>
+              <a:t> </a:t>
+            </a:r>
+            <a:r>
+              <a:rPr lang="de-AT" dirty="0" err="1"/>
+              <a:t>of</a:t>
+            </a:r>
+            <a:r>
+              <a:rPr lang="de-AT" dirty="0"/>
+              <a:t> </a:t>
+            </a:r>
+            <a:r>
+              <a:rPr lang="de-AT" dirty="0" err="1"/>
+              <a:t>punches</a:t>
+            </a:r>
+            <a:r>
+              <a:rPr lang="de-AT" dirty="0"/>
+              <a:t> </a:t>
+            </a:r>
+            <a:r>
+              <a:rPr lang="de-AT" dirty="0" err="1"/>
+              <a:t>to</a:t>
+            </a:r>
+            <a:r>
+              <a:rPr lang="de-AT" dirty="0"/>
+              <a:t> </a:t>
+            </a:r>
+            <a:r>
+              <a:rPr lang="de-AT" dirty="0" err="1"/>
+              <a:t>help</a:t>
+            </a:r>
+            <a:r>
+              <a:rPr lang="de-AT" dirty="0"/>
+              <a:t> </a:t>
+            </a:r>
+            <a:r>
+              <a:rPr lang="de-AT" dirty="0" err="1"/>
+              <a:t>the</a:t>
+            </a:r>
+            <a:r>
+              <a:rPr lang="de-AT" dirty="0"/>
+              <a:t> </a:t>
+            </a:r>
+            <a:r>
+              <a:rPr lang="de-AT" dirty="0" err="1"/>
+              <a:t>model</a:t>
+            </a:r>
+            <a:r>
+              <a:rPr lang="de-AT" dirty="0"/>
+              <a:t> in </a:t>
+            </a:r>
+            <a:r>
+              <a:rPr lang="de-AT" dirty="0" err="1"/>
+              <a:t>seeing</a:t>
+            </a:r>
+            <a:r>
+              <a:rPr lang="de-AT" dirty="0"/>
+              <a:t> </a:t>
+            </a:r>
+            <a:r>
+              <a:rPr lang="de-AT" dirty="0" err="1"/>
+              <a:t>faster</a:t>
+            </a:r>
+            <a:r>
+              <a:rPr lang="de-AT" dirty="0"/>
+              <a:t> </a:t>
+            </a:r>
+            <a:r>
+              <a:rPr lang="de-AT" dirty="0" err="1"/>
+              <a:t>transition</a:t>
+            </a:r>
+            <a:r>
+              <a:rPr lang="de-AT" dirty="0"/>
+              <a:t> </a:t>
+            </a:r>
+            <a:r>
+              <a:rPr lang="de-AT" dirty="0" err="1"/>
+              <a:t>between</a:t>
+            </a:r>
+            <a:r>
+              <a:rPr lang="de-AT" dirty="0"/>
+              <a:t> </a:t>
+            </a:r>
+            <a:r>
+              <a:rPr lang="de-AT" dirty="0" err="1"/>
+              <a:t>punches</a:t>
+            </a:r>
+            <a:r>
+              <a:rPr lang="de-AT" dirty="0"/>
+              <a:t> </a:t>
+            </a:r>
+            <a:r>
+              <a:rPr lang="de-AT" dirty="0" err="1"/>
+              <a:t>better</a:t>
+            </a:r>
+            <a:endParaRPr lang="de-AT" dirty="0"/>
+          </a:p>
+          <a:p>
+            <a:endParaRPr lang="de-AT" dirty="0"/>
+          </a:p>
+          <a:p>
+            <a:r>
+              <a:rPr lang="de-AT" dirty="0" err="1"/>
+              <a:t>For</a:t>
+            </a:r>
+            <a:r>
+              <a:rPr lang="de-AT" dirty="0"/>
+              <a:t> </a:t>
+            </a:r>
+            <a:r>
+              <a:rPr lang="de-AT" dirty="0" err="1"/>
+              <a:t>sampling</a:t>
+            </a:r>
+            <a:r>
+              <a:rPr lang="de-AT" dirty="0"/>
+              <a:t> </a:t>
+            </a:r>
+            <a:r>
+              <a:rPr lang="de-AT" dirty="0" err="1"/>
+              <a:t>we</a:t>
+            </a:r>
+            <a:r>
+              <a:rPr lang="de-AT" dirty="0"/>
+              <a:t> </a:t>
+            </a:r>
+            <a:r>
+              <a:rPr lang="de-AT" dirty="0" err="1"/>
+              <a:t>used</a:t>
+            </a:r>
+            <a:r>
+              <a:rPr lang="de-AT" dirty="0"/>
+              <a:t> a IMU </a:t>
+            </a:r>
+            <a:r>
+              <a:rPr lang="de-AT" dirty="0" err="1"/>
+              <a:t>frequency</a:t>
+            </a:r>
+            <a:r>
+              <a:rPr lang="de-AT" dirty="0"/>
+              <a:t> </a:t>
+            </a:r>
+            <a:r>
+              <a:rPr lang="de-AT" dirty="0" err="1"/>
+              <a:t>of</a:t>
+            </a:r>
+            <a:r>
+              <a:rPr lang="de-AT" dirty="0"/>
+              <a:t> 400Hz</a:t>
+            </a:r>
+          </a:p>
+          <a:p>
+            <a:endParaRPr lang="de-AT" dirty="0"/>
+          </a:p>
+          <a:p>
+            <a:r>
+              <a:rPr lang="de-AT" dirty="0"/>
+              <a:t>Under </a:t>
+            </a:r>
+            <a:r>
+              <a:rPr lang="de-AT" dirty="0" err="1"/>
+              <a:t>that</a:t>
+            </a:r>
+            <a:r>
+              <a:rPr lang="de-AT" dirty="0"/>
+              <a:t> </a:t>
+            </a:r>
+            <a:r>
+              <a:rPr lang="de-AT" dirty="0" err="1"/>
+              <a:t>you</a:t>
+            </a:r>
+            <a:r>
+              <a:rPr lang="de-AT" dirty="0"/>
+              <a:t> </a:t>
+            </a:r>
+            <a:r>
+              <a:rPr lang="de-AT" dirty="0" err="1"/>
+              <a:t>can</a:t>
+            </a:r>
+            <a:r>
+              <a:rPr lang="de-AT" dirty="0"/>
+              <a:t> </a:t>
+            </a:r>
+            <a:r>
+              <a:rPr lang="de-AT" dirty="0" err="1"/>
+              <a:t>see</a:t>
+            </a:r>
+            <a:r>
+              <a:rPr lang="de-AT" dirty="0"/>
+              <a:t> </a:t>
+            </a:r>
+            <a:r>
+              <a:rPr lang="de-AT" dirty="0" err="1"/>
+              <a:t>the</a:t>
+            </a:r>
+            <a:r>
+              <a:rPr lang="de-AT" dirty="0"/>
+              <a:t> </a:t>
+            </a:r>
+            <a:r>
+              <a:rPr lang="de-AT" dirty="0" err="1"/>
+              <a:t>three</a:t>
+            </a:r>
+            <a:r>
+              <a:rPr lang="de-AT" dirty="0"/>
+              <a:t> </a:t>
+            </a:r>
+            <a:r>
+              <a:rPr lang="de-AT" dirty="0" err="1"/>
+              <a:t>punches</a:t>
+            </a:r>
+            <a:r>
+              <a:rPr lang="de-AT" dirty="0"/>
+              <a:t> </a:t>
+            </a:r>
+            <a:r>
+              <a:rPr lang="de-AT" dirty="0" err="1"/>
+              <a:t>we</a:t>
+            </a:r>
+            <a:r>
+              <a:rPr lang="de-AT" dirty="0"/>
+              <a:t> </a:t>
+            </a:r>
+            <a:r>
+              <a:rPr lang="de-AT" dirty="0" err="1"/>
+              <a:t>labeld</a:t>
+            </a:r>
+            <a:r>
+              <a:rPr lang="de-AT" dirty="0"/>
+              <a:t> </a:t>
+            </a:r>
+            <a:r>
+              <a:rPr lang="de-AT" dirty="0" err="1"/>
+              <a:t>with</a:t>
+            </a:r>
+            <a:r>
+              <a:rPr lang="de-AT" dirty="0"/>
+              <a:t> </a:t>
+            </a:r>
+            <a:r>
+              <a:rPr lang="de-AT" dirty="0" err="1"/>
+              <a:t>the</a:t>
+            </a:r>
+            <a:r>
+              <a:rPr lang="de-AT" dirty="0"/>
+              <a:t> </a:t>
+            </a:r>
+            <a:r>
+              <a:rPr lang="de-AT" dirty="0" err="1"/>
+              <a:t>jab</a:t>
+            </a:r>
+            <a:r>
+              <a:rPr lang="de-AT" dirty="0"/>
+              <a:t> </a:t>
+            </a:r>
+            <a:r>
+              <a:rPr lang="de-AT" dirty="0" err="1"/>
+              <a:t>being</a:t>
+            </a:r>
+            <a:r>
+              <a:rPr lang="de-AT" dirty="0"/>
+              <a:t> </a:t>
+            </a:r>
+            <a:r>
+              <a:rPr lang="de-AT" dirty="0" err="1"/>
+              <a:t>the</a:t>
+            </a:r>
+            <a:r>
+              <a:rPr lang="de-AT" dirty="0"/>
+              <a:t> </a:t>
+            </a:r>
+            <a:r>
+              <a:rPr lang="de-AT" dirty="0" err="1"/>
+              <a:t>most</a:t>
+            </a:r>
+            <a:r>
+              <a:rPr lang="de-AT" dirty="0"/>
+              <a:t> </a:t>
+            </a:r>
+            <a:r>
+              <a:rPr lang="de-AT" dirty="0" err="1"/>
+              <a:t>unique</a:t>
+            </a:r>
+            <a:r>
+              <a:rPr lang="de-AT" dirty="0"/>
+              <a:t> and </a:t>
+            </a:r>
+            <a:r>
+              <a:rPr lang="de-AT" dirty="0" err="1"/>
+              <a:t>the</a:t>
+            </a:r>
+            <a:r>
+              <a:rPr lang="de-AT" dirty="0"/>
+              <a:t> </a:t>
+            </a:r>
+            <a:r>
+              <a:rPr lang="de-AT" dirty="0" err="1"/>
+              <a:t>other</a:t>
+            </a:r>
+            <a:r>
+              <a:rPr lang="de-AT" dirty="0"/>
+              <a:t> </a:t>
+            </a:r>
+            <a:r>
+              <a:rPr lang="de-AT" dirty="0" err="1"/>
+              <a:t>two</a:t>
+            </a:r>
+            <a:r>
+              <a:rPr lang="de-AT" dirty="0"/>
+              <a:t> </a:t>
+            </a:r>
+            <a:r>
+              <a:rPr lang="de-AT" dirty="0" err="1"/>
+              <a:t>with</a:t>
+            </a:r>
+            <a:r>
+              <a:rPr lang="de-AT" dirty="0"/>
+              <a:t> </a:t>
+            </a:r>
+            <a:r>
+              <a:rPr lang="de-AT" dirty="0" err="1"/>
+              <a:t>some</a:t>
+            </a:r>
+            <a:r>
+              <a:rPr lang="de-AT" dirty="0"/>
+              <a:t> </a:t>
+            </a:r>
+            <a:r>
+              <a:rPr lang="de-AT" dirty="0" err="1"/>
+              <a:t>similarities</a:t>
+            </a:r>
+            <a:r>
+              <a:rPr lang="de-AT" dirty="0"/>
+              <a:t> but still </a:t>
+            </a:r>
+            <a:r>
+              <a:rPr lang="de-AT" dirty="0" err="1"/>
+              <a:t>some</a:t>
+            </a:r>
+            <a:r>
+              <a:rPr lang="de-AT" dirty="0"/>
+              <a:t> </a:t>
+            </a:r>
+            <a:r>
+              <a:rPr lang="de-AT" dirty="0" err="1"/>
+              <a:t>great</a:t>
+            </a:r>
+            <a:r>
+              <a:rPr lang="de-AT" dirty="0"/>
+              <a:t> </a:t>
+            </a:r>
+            <a:r>
+              <a:rPr lang="de-AT" dirty="0" err="1"/>
+              <a:t>differences</a:t>
+            </a:r>
+            <a:endParaRPr lang="de-AT" dirty="0"/>
+          </a:p>
+          <a:p>
             <a:endParaRPr lang="de-AT" dirty="0"/>
           </a:p>
         </p:txBody>
@@ -14864,7 +17888,23 @@
                   <a:schemeClr val="bg1"/>
                 </a:solidFill>
               </a:rPr>
-              <a:t>Tobias Riedelberger, Theo Corneux, Tobias Holzner</a:t>
+              <a:t>Tobias Riedelberger, Theo </a:t>
+            </a:r>
+            <a:r>
+              <a:rPr lang="en-GB" noProof="0" dirty="0" err="1">
+                <a:solidFill>
+                  <a:schemeClr val="bg1"/>
+                </a:solidFill>
+              </a:rPr>
+              <a:t>Corneux</a:t>
+            </a:r>
+            <a:r>
+              <a:rPr lang="en-GB" noProof="0" dirty="0">
+                <a:solidFill>
+                  <a:schemeClr val="bg1"/>
+                </a:solidFill>
+              </a:rPr>
+              <a:t>, Tobias Holzner</a:t>
             </a:r>
           </a:p>
         </p:txBody>
@@ -14942,10 +17982,9 @@
           <a:lstStyle/>
           <a:p>
             <a:r>
-              <a:rPr lang="de-DE" noProof="0"/>
+              <a:rPr lang="en-GB" noProof="0" dirty="0"/>
               <a:t>23.02.2026</a:t>
             </a:r>
-            <a:endParaRPr lang="en-GB" noProof="0" dirty="0"/>
           </a:p>
         </p:txBody>
       </p:sp>
@@ -15036,10 +18075,9 @@
           <a:lstStyle/>
           <a:p>
             <a:r>
-              <a:rPr lang="de-DE" noProof="0"/>
+              <a:rPr lang="en-GB" noProof="0" dirty="0"/>
               <a:t>23.02.2026</a:t>
             </a:r>
-            <a:endParaRPr lang="en-GB" noProof="0" dirty="0"/>
           </a:p>
         </p:txBody>
       </p:sp>
@@ -15177,102 +18215,61 @@
           <a:lstStyle/>
           <a:p>
             <a:r>
-              <a:rPr lang="en-GB" dirty="0"/>
+              <a:rPr lang="en-GB" noProof="0" dirty="0"/>
               <a:t>Publish punch data to </a:t>
             </a:r>
             <a:r>
-              <a:rPr lang="en-GB" dirty="0" err="1"/>
+              <a:rPr lang="en-GB" noProof="0" dirty="0" err="1"/>
               <a:t>Ubidots</a:t>
             </a:r>
-            <a:endParaRPr lang="en-GB" dirty="0"/>
-          </a:p>
-          <a:p>
-            <a:r>
-              <a:rPr lang="en-GB" dirty="0"/>
+            <a:endParaRPr lang="en-GB" noProof="0" dirty="0"/>
+          </a:p>
+          <a:p>
+            <a:r>
+              <a:rPr lang="en-GB" noProof="0" dirty="0"/>
               <a:t>Mode of operation</a:t>
             </a:r>
           </a:p>
           <a:p>
             <a:pPr lvl="1"/>
             <a:r>
-              <a:rPr lang="en-GB" dirty="0"/>
+              <a:rPr lang="en-GB" noProof="0" dirty="0"/>
               <a:t>Same as first program</a:t>
             </a:r>
           </a:p>
           <a:p>
             <a:pPr lvl="1"/>
             <a:r>
-              <a:rPr lang="en-GB" dirty="0"/>
+              <a:rPr lang="en-GB" noProof="0" dirty="0"/>
               <a:t>Publish to MQTT server</a:t>
             </a:r>
           </a:p>
           <a:p>
             <a:r>
-              <a:rPr lang="en-GB" dirty="0"/>
+              <a:rPr lang="en-GB" noProof="0" dirty="0"/>
               <a:t>Dashboard</a:t>
             </a:r>
           </a:p>
           <a:p>
             <a:pPr lvl="1"/>
             <a:r>
-              <a:rPr lang="en-GB" dirty="0"/>
+              <a:rPr lang="en-GB" noProof="0" dirty="0"/>
               <a:t>Save data in a table</a:t>
             </a:r>
           </a:p>
           <a:p>
             <a:pPr lvl="1"/>
             <a:r>
-              <a:rPr lang="de-AT" dirty="0"/>
-              <a:t>Start </a:t>
-            </a:r>
-            <a:r>
-              <a:rPr lang="de-AT" dirty="0" err="1"/>
-              <a:t>new</a:t>
-            </a:r>
-            <a:r>
-              <a:rPr lang="de-AT" dirty="0"/>
-              <a:t> </a:t>
-            </a:r>
-            <a:r>
-              <a:rPr lang="de-AT" dirty="0" err="1"/>
-              <a:t>training</a:t>
-            </a:r>
-            <a:r>
-              <a:rPr lang="de-AT" dirty="0"/>
-              <a:t> </a:t>
-            </a:r>
-            <a:r>
-              <a:rPr lang="de-AT" dirty="0" err="1"/>
-              <a:t>sessions</a:t>
-            </a:r>
-            <a:r>
-              <a:rPr lang="de-AT" dirty="0"/>
-              <a:t> </a:t>
-            </a:r>
-            <a:r>
-              <a:rPr lang="de-AT" dirty="0" err="1"/>
-              <a:t>with</a:t>
-            </a:r>
-            <a:r>
-              <a:rPr lang="de-AT" dirty="0"/>
-              <a:t> </a:t>
-            </a:r>
-            <a:r>
-              <a:rPr lang="de-AT" dirty="0" err="1"/>
-              <a:t>user</a:t>
-            </a:r>
-            <a:r>
-              <a:rPr lang="de-AT" dirty="0"/>
-              <a:t> </a:t>
+              <a:rPr lang="en-GB" noProof="0" dirty="0"/>
+              <a:t>Start new training sessions with user </a:t>
             </a:r>
             <a:br>
-              <a:rPr lang="de-AT" dirty="0"/>
+              <a:rPr lang="en-GB" noProof="0" dirty="0"/>
             </a:br>
             <a:r>
-              <a:rPr lang="de-AT" dirty="0" err="1"/>
+              <a:rPr lang="en-GB" noProof="0" dirty="0"/>
               <a:t>button</a:t>
             </a:r>
-            <a:endParaRPr lang="de-AT" dirty="0"/>
           </a:p>
         </p:txBody>
       </p:sp>
@@ -15392,86 +18389,73 @@
           <a:p>
             <a:r>
               <a:rPr lang="en-GB" noProof="0" dirty="0"/>
-              <a:t>Overlapping labels</a:t>
-            </a:r>
-            <a:r>
-              <a:rPr lang="en-GB" dirty="0"/>
-              <a:t>, DEEPCRAFT Studio sometimes set two labels above each other</a:t>
+              <a:t>Overlapping labels, DEEPCRAFT Studio sometimes set two labels above each other</a:t>
+            </a:r>
+          </a:p>
+          <a:p>
+            <a:r>
+              <a:rPr lang="en-GB" noProof="0" dirty="0"/>
+              <a:t>No clear indications on what makes model better or worse</a:t>
+            </a:r>
+          </a:p>
+          <a:p>
+            <a:r>
+              <a:rPr lang="en-GB" noProof="0" dirty="0"/>
+              <a:t>It was not achievable to enqueue Data fast enough in our </a:t>
+            </a:r>
+            <a:r>
+              <a:rPr lang="en-GB" noProof="0" dirty="0" err="1"/>
+              <a:t>Micropython</a:t>
+            </a:r>
+            <a:r>
+              <a:rPr lang="en-GB" noProof="0" dirty="0"/>
+              <a:t> Code (fastest Loop runtime 3ms). Needed to </a:t>
+            </a:r>
+            <a:r>
+              <a:rPr lang="en-GB" noProof="0" dirty="0" err="1"/>
+              <a:t>downsample</a:t>
+            </a:r>
+            <a:r>
+              <a:rPr lang="en-GB" noProof="0" dirty="0"/>
+              <a:t> our Data to 100Hz</a:t>
+            </a:r>
+          </a:p>
+          <a:p>
+            <a:r>
+              <a:rPr lang="en-GB" noProof="0" dirty="0"/>
+              <a:t>Using an if-selection to time enqueue did not work/lead to the PSOC6 stalling after a few seconds (Busy waiting). Used </a:t>
+            </a:r>
+            <a:r>
+              <a:rPr lang="en-GB" noProof="0" dirty="0" err="1"/>
+              <a:t>time.wait_ms</a:t>
+            </a:r>
+            <a:r>
+              <a:rPr lang="en-GB" noProof="0" dirty="0"/>
+              <a:t>() instead</a:t>
+            </a:r>
+          </a:p>
+          <a:p>
+            <a:r>
+              <a:rPr lang="en-GB" noProof="0" dirty="0"/>
+              <a:t>Predictions for one punch are greater than 0.6 over two contextual windows.</a:t>
+            </a:r>
+          </a:p>
+          <a:p>
+            <a:r>
+              <a:rPr lang="en-GB" noProof="0" dirty="0"/>
+              <a:t>Reaction and loop time got worse publishing messages to </a:t>
+            </a:r>
+            <a:r>
+              <a:rPr lang="en-GB" noProof="0" dirty="0" err="1"/>
+              <a:t>Ubidots</a:t>
             </a:r>
             <a:endParaRPr lang="en-GB" noProof="0" dirty="0"/>
           </a:p>
           <a:p>
-            <a:r>
-              <a:rPr lang="en-GB" noProof="0" dirty="0"/>
-              <a:t>No clear indications on what ma</a:t>
-            </a:r>
-            <a:r>
-              <a:rPr lang="en-GB" dirty="0" err="1"/>
-              <a:t>kes</a:t>
-            </a:r>
-            <a:r>
-              <a:rPr lang="en-GB" dirty="0"/>
-              <a:t> model better or worse</a:t>
-            </a:r>
-          </a:p>
-          <a:p>
-            <a:r>
-              <a:rPr lang="en-GB" dirty="0"/>
-              <a:t>It was not achievable to enqueue Data fast enough in our </a:t>
-            </a:r>
-            <a:r>
-              <a:rPr lang="en-GB" dirty="0" err="1"/>
-              <a:t>Micropython</a:t>
-            </a:r>
-            <a:r>
-              <a:rPr lang="en-GB" dirty="0"/>
-              <a:t> Code (fastest Loop runtime 3ms). Needed to </a:t>
-            </a:r>
-            <a:r>
-              <a:rPr lang="en-GB" dirty="0" err="1"/>
-              <a:t>downsample</a:t>
-            </a:r>
-            <a:r>
-              <a:rPr lang="en-GB" dirty="0"/>
-              <a:t> our Data to 100Hz</a:t>
-            </a:r>
-          </a:p>
-          <a:p>
-            <a:r>
-              <a:rPr lang="en-GB" dirty="0"/>
-              <a:t>Using an if-selection to time enqueue did not work/lead to the PSOC6 stalling after a few seconds (Busy waiting). Used </a:t>
-            </a:r>
-            <a:r>
-              <a:rPr lang="en-GB" dirty="0" err="1"/>
-              <a:t>time.wait_ms</a:t>
-            </a:r>
-            <a:r>
-              <a:rPr lang="en-GB" dirty="0"/>
-              <a:t>() instead</a:t>
-            </a:r>
-          </a:p>
-          <a:p>
-            <a:r>
-              <a:rPr lang="en-GB" dirty="0"/>
-              <a:t>Predictions for one punch are greater than 0.6 over two contextual windows.</a:t>
-            </a:r>
-          </a:p>
-          <a:p>
-            <a:r>
-              <a:rPr lang="en-GB" dirty="0"/>
-              <a:t>Reaction and loop time got worse publishing messages to </a:t>
-            </a:r>
-            <a:r>
-              <a:rPr lang="en-GB" dirty="0" err="1"/>
-              <a:t>Ubidots</a:t>
-            </a:r>
-            <a:endParaRPr lang="en-GB" dirty="0"/>
-          </a:p>
-          <a:p>
-            <a:endParaRPr lang="en-GB" dirty="0"/>
-          </a:p>
-          <a:p>
-            <a:endParaRPr lang="en-GB" dirty="0"/>
+            <a:endParaRPr lang="en-GB" noProof="0" dirty="0"/>
+          </a:p>
+          <a:p>
+            <a:endParaRPr lang="en-GB" noProof="0" dirty="0"/>
           </a:p>
           <a:p>
             <a:endParaRPr lang="en-GB" noProof="0" dirty="0"/>
@@ -15500,10 +18484,9 @@
           <a:lstStyle/>
           <a:p>
             <a:r>
-              <a:rPr lang="de-DE" noProof="0"/>
+              <a:rPr lang="en-GB" noProof="0" dirty="0"/>
               <a:t>23.02.2026</a:t>
             </a:r>
-            <a:endParaRPr lang="en-GB" noProof="0" dirty="0"/>
           </a:p>
         </p:txBody>
       </p:sp>
@@ -15717,10 +18700,9 @@
           <a:lstStyle/>
           <a:p>
             <a:r>
-              <a:rPr lang="de-DE" noProof="0"/>
+              <a:rPr lang="en-GB" noProof="0" dirty="0"/>
               <a:t>23.02.2026</a:t>
             </a:r>
-            <a:endParaRPr lang="en-GB" noProof="0" dirty="0"/>
           </a:p>
         </p:txBody>
       </p:sp>
@@ -15961,18 +18943,13 @@
           <a:lstStyle/>
           <a:p>
             <a:r>
-              <a:rPr lang="de-DE" dirty="0">
+              <a:rPr lang="en-GB" noProof="0" dirty="0">
                 <a:solidFill>
                   <a:schemeClr val="bg1"/>
                 </a:solidFill>
               </a:rPr>
               <a:t>23.02.2026</a:t>
             </a:r>
-            <a:endParaRPr lang="de-AT" dirty="0">
-              <a:solidFill>
-                <a:schemeClr val="bg1"/>
-              </a:solidFill>
-            </a:endParaRPr>
           </a:p>
         </p:txBody>
       </p:sp>
@@ -15998,14 +18975,14 @@
           <a:lstStyle/>
           <a:p>
             <a:fld id="{533690DF-FFD6-462A-8578-786984FF8DCB}" type="slidenum">
-              <a:rPr lang="de-AT" smtClean="0">
+              <a:rPr lang="en-GB" noProof="0" smtClean="0">
                 <a:solidFill>
                   <a:schemeClr val="bg1"/>
                 </a:solidFill>
               </a:rPr>
               <a:t>13</a:t>
             </a:fld>
-            <a:endParaRPr lang="de-AT" dirty="0">
+            <a:endParaRPr lang="en-GB" noProof="0" dirty="0">
               <a:solidFill>
                 <a:schemeClr val="bg1"/>
               </a:solidFill>
@@ -16028,7 +19005,7 @@
           <p:nvPr>
             <p:extLst>
               <p:ext uri="{D42A27DB-BD31-4B8C-83A1-F6EECF244321}">
-                <p14:modId xmlns:p14="http://schemas.microsoft.com/office/powerpoint/2010/main" val="2423330161"/>
+                <p14:modId xmlns:p14="http://schemas.microsoft.com/office/powerpoint/2010/main" val="774377457"/>
               </p:ext>
             </p:extLst>
           </p:nvPr>
@@ -16097,7 +19074,7 @@
               <a:defRPr/>
             </a:pPr>
             <a:r>
-              <a:rPr lang="en-GB" sz="4000" b="1" kern="0">
+              <a:rPr lang="en-GB" sz="4000" b="1" kern="0" noProof="0" dirty="0">
                 <a:solidFill>
                   <a:srgbClr val="FFFFFF"/>
                 </a:solidFill>
@@ -16106,7 +19083,7 @@
               </a:rPr>
               <a:t>About the future </a:t>
             </a:r>
-            <a:endParaRPr lang="en-GB" sz="4000" b="1" i="1" kern="0" baseline="30000">
+            <a:endParaRPr lang="en-GB" sz="4000" b="1" i="1" kern="0" baseline="30000" noProof="0" dirty="0">
               <a:solidFill>
                 <a:srgbClr val="FFFFFF"/>
               </a:solidFill>
@@ -16273,21 +19250,8 @@
                   <a:schemeClr val="bg1"/>
                 </a:solidFill>
               </a:rPr>
-              <a:t>Thank you for</a:t>
-            </a:r>
-            <a:r>
-              <a:rPr lang="en-GB" sz="6000" dirty="0">
-                <a:solidFill>
-                  <a:schemeClr val="bg1"/>
-                </a:solidFill>
-              </a:rPr>
-              <a:t> your attention!</a:t>
-            </a:r>
-            <a:endParaRPr lang="en-GB" sz="6000" noProof="0" dirty="0">
-              <a:solidFill>
-                <a:schemeClr val="bg1"/>
-              </a:solidFill>
-            </a:endParaRPr>
+              <a:t>Thank you for your attention!</a:t>
+            </a:r>
           </a:p>
         </p:txBody>
       </p:sp>
@@ -16325,7 +19289,23 @@
                   <a:schemeClr val="bg1"/>
                 </a:solidFill>
               </a:rPr>
-              <a:t>Tobias Riedelberger, Theo Corneux, Tobias Holzner</a:t>
+              <a:t>Tobias Riedelberger, Theo </a:t>
+            </a:r>
+            <a:r>
+              <a:rPr lang="en-GB" noProof="0" dirty="0" err="1">
+                <a:solidFill>
+                  <a:schemeClr val="bg1"/>
+                </a:solidFill>
+              </a:rPr>
+              <a:t>Corneux</a:t>
+            </a:r>
+            <a:r>
+              <a:rPr lang="en-GB" noProof="0" dirty="0">
+                <a:solidFill>
+                  <a:schemeClr val="bg1"/>
+                </a:solidFill>
+              </a:rPr>
+              <a:t>, Tobias Holzner</a:t>
             </a:r>
           </a:p>
         </p:txBody>
@@ -16403,10 +19383,9 @@
           <a:lstStyle/>
           <a:p>
             <a:r>
-              <a:rPr lang="de-DE" noProof="0"/>
+              <a:rPr lang="en-GB" noProof="0" dirty="0"/>
               <a:t>23.02.2026</a:t>
             </a:r>
-            <a:endParaRPr lang="en-GB" noProof="0" dirty="0"/>
           </a:p>
         </p:txBody>
       </p:sp>
@@ -16492,89 +19471,66 @@
           <a:p>
             <a:pPr lvl="0"/>
             <a:r>
-              <a:rPr lang="en-GB" dirty="0"/>
+              <a:rPr lang="en-GB" noProof="0" dirty="0"/>
               <a:t>Punch detection and analyzation with IMU</a:t>
             </a:r>
           </a:p>
           <a:p>
             <a:r>
-              <a:rPr lang="de-AT" dirty="0"/>
-              <a:t>Differentiation </a:t>
-            </a:r>
-            <a:r>
-              <a:rPr lang="de-AT" dirty="0" err="1"/>
-              <a:t>between</a:t>
-            </a:r>
-            <a:r>
-              <a:rPr lang="de-AT" dirty="0"/>
-              <a:t> </a:t>
-            </a:r>
-            <a:r>
-              <a:rPr lang="de-AT" dirty="0" err="1"/>
-              <a:t>punch</a:t>
-            </a:r>
-            <a:r>
-              <a:rPr lang="de-AT" dirty="0"/>
-              <a:t> </a:t>
-            </a:r>
-            <a:r>
-              <a:rPr lang="de-AT" dirty="0" err="1"/>
-              <a:t>types</a:t>
-            </a:r>
-            <a:endParaRPr lang="de-AT" dirty="0"/>
+              <a:rPr lang="en-GB" noProof="0" dirty="0"/>
+              <a:t>Differentiation between punch types</a:t>
+            </a:r>
           </a:p>
           <a:p>
             <a:pPr lvl="1"/>
             <a:r>
-              <a:rPr lang="de-AT" dirty="0"/>
+              <a:rPr lang="en-GB" noProof="0" dirty="0"/>
               <a:t>Jab</a:t>
             </a:r>
           </a:p>
           <a:p>
             <a:pPr lvl="1"/>
             <a:r>
-              <a:rPr lang="de-AT" dirty="0"/>
+              <a:rPr lang="en-GB" noProof="0" dirty="0"/>
               <a:t>Hook</a:t>
             </a:r>
           </a:p>
           <a:p>
             <a:pPr lvl="1"/>
             <a:r>
-              <a:rPr lang="de-AT" dirty="0"/>
+              <a:rPr lang="en-GB" noProof="0" dirty="0"/>
               <a:t>Uppercut</a:t>
             </a:r>
           </a:p>
           <a:p>
             <a:r>
-              <a:rPr lang="en-US" dirty="0"/>
+              <a:rPr lang="en-GB" noProof="0" dirty="0"/>
               <a:t>Goals</a:t>
             </a:r>
           </a:p>
           <a:p>
             <a:pPr lvl="1"/>
             <a:r>
-              <a:rPr lang="en-GB" dirty="0"/>
+              <a:rPr lang="en-GB" noProof="0" dirty="0"/>
               <a:t>Prevent developing habits/predictability</a:t>
             </a:r>
-            <a:endParaRPr lang="en-US" dirty="0"/>
           </a:p>
           <a:p>
             <a:pPr lvl="1"/>
             <a:r>
-              <a:rPr lang="en-GB" dirty="0"/>
+              <a:rPr lang="en-GB" noProof="0" dirty="0"/>
               <a:t>Game which gives different punch combinations</a:t>
             </a:r>
-            <a:endParaRPr lang="en-US" dirty="0"/>
           </a:p>
           <a:p>
             <a:pPr marL="0" indent="0">
               <a:buNone/>
             </a:pPr>
-            <a:endParaRPr lang="en-US" dirty="0"/>
+            <a:endParaRPr lang="en-GB" noProof="0" dirty="0"/>
           </a:p>
           <a:p>
             <a:pPr lvl="0"/>
-            <a:endParaRPr lang="en-US" dirty="0"/>
+            <a:endParaRPr lang="en-GB" noProof="0" dirty="0"/>
           </a:p>
         </p:txBody>
       </p:sp>
@@ -16600,10 +19556,9 @@
           <a:lstStyle/>
           <a:p>
             <a:r>
-              <a:rPr lang="de-DE" noProof="0"/>
+              <a:rPr lang="en-GB" noProof="0" dirty="0"/>
               <a:t>23.02.2026</a:t>
             </a:r>
-            <a:endParaRPr lang="en-GB" noProof="0" dirty="0"/>
           </a:p>
         </p:txBody>
       </p:sp>
@@ -16774,15 +19729,6 @@
           <a:effectLst>
             <a:reflection blurRad="12700" stA="38000" endPos="28000" dist="5000" dir="5400000" sy="-100000" algn="bl" rotWithShape="0"/>
           </a:effectLst>
-          <a:extLst>
-            <a:ext uri="{909E8E84-426E-40DD-AFC4-6F175D3DCCD1}">
-              <a14:hiddenFill xmlns:a14="http://schemas.microsoft.com/office/drawing/2010/main">
-                <a:solidFill>
-                  <a:srgbClr val="FFFFFF"/>
-                </a:solidFill>
-              </a14:hiddenFill>
-            </a:ext>
-          </a:extLst>
         </p:spPr>
       </p:pic>
     </p:spTree>
@@ -16885,7 +19831,7 @@
           <a:lstStyle/>
           <a:p>
             <a:pPr algn="ctr"/>
-            <a:endParaRPr lang="en-US"/>
+            <a:endParaRPr lang="en-GB" noProof="0" dirty="0"/>
           </a:p>
         </p:txBody>
       </p:sp>
@@ -17026,7 +19972,7 @@
               <a:tabLst/>
               <a:defRPr/>
             </a:pPr>
-            <a:endParaRPr kumimoji="0" lang="en-US" sz="1800" b="0" i="0" u="none" strike="noStrike" kern="1200" cap="none" spc="0" normalizeH="0" baseline="0" noProof="0">
+            <a:endParaRPr kumimoji="0" lang="en-GB" sz="1800" b="0" i="0" u="none" strike="noStrike" kern="1200" cap="none" spc="0" normalizeH="0" baseline="0" noProof="0" dirty="0">
               <a:ln>
                 <a:noFill/>
               </a:ln>
@@ -17077,10 +20023,9 @@
               </a:spcAft>
             </a:pPr>
             <a:r>
-              <a:rPr lang="de-DE" noProof="0"/>
+              <a:rPr lang="en-GB" noProof="0" dirty="0"/>
               <a:t>23.02.2026</a:t>
             </a:r>
-            <a:endParaRPr lang="en-GB" noProof="0"/>
           </a:p>
         </p:txBody>
       </p:sp>
@@ -17220,7 +20165,7 @@
           <a:lstStyle/>
           <a:p>
             <a:pPr algn="ctr"/>
-            <a:endParaRPr lang="en-US" dirty="0"/>
+            <a:endParaRPr lang="en-GB" noProof="0" dirty="0"/>
           </a:p>
         </p:txBody>
       </p:sp>
@@ -17345,7 +20290,7 @@
               </a:pPr>
               <a:t>3</a:t>
             </a:fld>
-            <a:endParaRPr lang="en-GB" noProof="0">
+            <a:endParaRPr lang="en-GB" noProof="0" dirty="0">
               <a:solidFill>
                 <a:srgbClr val="FFFFFF"/>
               </a:solidFill>
@@ -17445,6 +20390,11 @@
           </p:cNvGraphicFramePr>
           <p:nvPr>
             <p:ph idx="1"/>
+            <p:extLst>
+              <p:ext uri="{D42A27DB-BD31-4B8C-83A1-F6EECF244321}">
+                <p14:modId xmlns:p14="http://schemas.microsoft.com/office/powerpoint/2010/main" val="2204171667"/>
+              </p:ext>
+            </p:extLst>
           </p:nvPr>
         </p:nvGraphicFramePr>
         <p:xfrm>
@@ -17515,41 +20465,41 @@
           <a:lstStyle/>
           <a:p>
             <a:r>
-              <a:rPr lang="en-GB" dirty="0"/>
+              <a:rPr lang="en-GB" noProof="0" dirty="0"/>
               <a:t>Sampled roughly 1h30min of data</a:t>
             </a:r>
           </a:p>
           <a:p>
             <a:pPr lvl="1"/>
             <a:r>
-              <a:rPr lang="en-GB" dirty="0"/>
+              <a:rPr lang="en-GB" noProof="0" dirty="0"/>
               <a:t>1h labelled and rest unlabelled</a:t>
             </a:r>
           </a:p>
           <a:p>
             <a:pPr lvl="1"/>
             <a:r>
-              <a:rPr lang="en-GB" dirty="0"/>
+              <a:rPr lang="en-GB" noProof="0" dirty="0"/>
               <a:t>Collection of right-hand punches</a:t>
             </a:r>
           </a:p>
           <a:p>
             <a:r>
-              <a:rPr lang="en-GB" dirty="0"/>
+              <a:rPr lang="en-GB" noProof="0" dirty="0"/>
               <a:t>Collection of various punch techniques and speed</a:t>
             </a:r>
           </a:p>
           <a:p>
             <a:r>
-              <a:rPr lang="en-GB" dirty="0"/>
+              <a:rPr lang="en-GB" noProof="0" dirty="0"/>
               <a:t>IMU Frequency of 400Hz</a:t>
             </a:r>
           </a:p>
           <a:p>
-            <a:endParaRPr lang="en-GB" dirty="0"/>
-          </a:p>
-          <a:p>
-            <a:endParaRPr lang="en-GB" dirty="0"/>
+            <a:endParaRPr lang="en-GB" noProof="0" dirty="0"/>
+          </a:p>
+          <a:p>
+            <a:endParaRPr lang="en-GB" noProof="0" dirty="0"/>
           </a:p>
         </p:txBody>
       </p:sp>
@@ -17575,10 +20525,9 @@
           <a:lstStyle/>
           <a:p>
             <a:r>
-              <a:rPr lang="de-DE" noProof="0"/>
+              <a:rPr lang="en-GB" noProof="0" dirty="0"/>
               <a:t>23.02.2026</a:t>
             </a:r>
-            <a:endParaRPr lang="en-GB" noProof="0" dirty="0"/>
           </a:p>
         </p:txBody>
       </p:sp>
@@ -17832,33 +20781,33 @@
           <a:lstStyle/>
           <a:p>
             <a:r>
-              <a:rPr lang="en-GB" dirty="0"/>
+              <a:rPr lang="en-GB" noProof="0" dirty="0"/>
               <a:t>Data of one person</a:t>
             </a:r>
           </a:p>
           <a:p>
             <a:pPr lvl="1"/>
             <a:r>
-              <a:rPr lang="en-GB" dirty="0"/>
+              <a:rPr lang="en-GB" noProof="0" dirty="0"/>
               <a:t>greater accuracy</a:t>
             </a:r>
           </a:p>
           <a:p>
             <a:pPr lvl="1"/>
             <a:r>
-              <a:rPr lang="en-GB" dirty="0"/>
+              <a:rPr lang="en-GB" noProof="0" dirty="0"/>
               <a:t>45 minutes of data, 18,5 of which are labelled</a:t>
             </a:r>
           </a:p>
           <a:p>
             <a:r>
-              <a:rPr lang="en-GB" dirty="0"/>
+              <a:rPr lang="en-GB" noProof="0" dirty="0"/>
               <a:t>Train/Validation/Test split is roughly 60/20/20</a:t>
             </a:r>
           </a:p>
           <a:p>
             <a:r>
-              <a:rPr lang="en-GB" dirty="0"/>
+              <a:rPr lang="en-GB" noProof="0" dirty="0"/>
               <a:t>Implementation of negative Data</a:t>
             </a:r>
           </a:p>
@@ -17889,10 +20838,9 @@
           <a:lstStyle/>
           <a:p>
             <a:r>
-              <a:rPr lang="de-DE" noProof="0"/>
+              <a:rPr lang="en-GB" noProof="0" dirty="0"/>
               <a:t>23.02.2026</a:t>
             </a:r>
-            <a:endParaRPr lang="en-GB" noProof="0" dirty="0"/>
           </a:p>
         </p:txBody>
       </p:sp>
@@ -18223,7 +21171,7 @@
           </a:lstStyle>
           <a:p>
             <a:pPr algn="ctr"/>
-            <a:endParaRPr lang="en-US"/>
+            <a:endParaRPr lang="en-GB" noProof="0" dirty="0"/>
           </a:p>
         </p:txBody>
       </p:sp>
@@ -18298,18 +21246,13 @@
               </a:spcAft>
             </a:pPr>
             <a:r>
-              <a:rPr lang="de-DE" noProof="0">
+              <a:rPr lang="en-GB" noProof="0" dirty="0">
                 <a:solidFill>
                   <a:srgbClr val="FFFFFF"/>
                 </a:solidFill>
               </a:rPr>
               <a:t>23.02.2026</a:t>
             </a:r>
-            <a:endParaRPr lang="en-US" noProof="0">
-              <a:solidFill>
-                <a:srgbClr val="FFFFFF"/>
-              </a:solidFill>
-            </a:endParaRPr>
           </a:p>
         </p:txBody>
       </p:sp>
@@ -18347,7 +21290,7 @@
               </a:spcAft>
             </a:pPr>
             <a:fld id="{533690DF-FFD6-462A-8578-786984FF8DCB}" type="slidenum">
-              <a:rPr lang="en-US" noProof="0">
+              <a:rPr lang="en-GB" noProof="0" smtClean="0">
                 <a:solidFill>
                   <a:srgbClr val="FFFFFF"/>
                 </a:solidFill>
@@ -18359,7 +21302,7 @@
               </a:pPr>
               <a:t>6</a:t>
             </a:fld>
-            <a:endParaRPr lang="en-US" noProof="0">
+            <a:endParaRPr lang="en-GB" noProof="0" dirty="0">
               <a:solidFill>
                 <a:srgbClr val="FFFFFF"/>
               </a:solidFill>
@@ -18515,41 +21458,41 @@
           <a:lstStyle/>
           <a:p>
             <a:r>
-              <a:rPr lang="en-GB" dirty="0"/>
+              <a:rPr lang="en-GB" noProof="0" dirty="0"/>
               <a:t>Contextual Window </a:t>
             </a:r>
           </a:p>
           <a:p>
             <a:r>
-              <a:rPr lang="en-GB" dirty="0"/>
+              <a:rPr lang="en-GB" noProof="0" dirty="0"/>
               <a:t>Created a model with:</a:t>
             </a:r>
           </a:p>
           <a:p>
             <a:pPr lvl="1"/>
             <a:r>
-              <a:rPr lang="en-GB" dirty="0"/>
+              <a:rPr lang="en-GB" noProof="0" dirty="0"/>
               <a:t>Model Family Conv1d</a:t>
             </a:r>
           </a:p>
           <a:p>
             <a:pPr lvl="1"/>
             <a:r>
-              <a:rPr lang="en-GB" dirty="0"/>
+              <a:rPr lang="en-GB" noProof="0" dirty="0"/>
               <a:t>Medium Model Size</a:t>
             </a:r>
           </a:p>
           <a:p>
             <a:pPr lvl="1"/>
             <a:r>
-              <a:rPr lang="en-GB" dirty="0"/>
+              <a:rPr lang="en-GB" noProof="0" dirty="0"/>
               <a:t>Balanced Optimization</a:t>
             </a:r>
           </a:p>
           <a:p>
             <a:pPr lvl="1"/>
             <a:r>
-              <a:rPr lang="en-GB" dirty="0"/>
+              <a:rPr lang="en-GB" noProof="0" dirty="0"/>
               <a:t>Mid Learning Rate &amp; Regularization</a:t>
             </a:r>
           </a:p>
@@ -18557,17 +21500,17 @@
             <a:pPr marL="457200" lvl="1" indent="0">
               <a:buNone/>
             </a:pPr>
-            <a:endParaRPr lang="en-GB" dirty="0"/>
-          </a:p>
-          <a:p>
-            <a:r>
-              <a:rPr lang="en-GB" dirty="0"/>
+            <a:endParaRPr lang="en-GB" noProof="0" dirty="0"/>
+          </a:p>
+          <a:p>
+            <a:r>
+              <a:rPr lang="en-GB" noProof="0" dirty="0"/>
               <a:t>Different parameters used</a:t>
             </a:r>
           </a:p>
           <a:p>
             <a:r>
-              <a:rPr lang="en-GB" dirty="0"/>
+              <a:rPr lang="en-GB" noProof="0" dirty="0"/>
               <a:t>Selection of classification with best test statistics</a:t>
             </a:r>
           </a:p>
@@ -18595,10 +21538,9 @@
           <a:lstStyle/>
           <a:p>
             <a:r>
-              <a:rPr lang="de-DE" noProof="0"/>
+              <a:rPr lang="en-GB" noProof="0" dirty="0"/>
               <a:t>23.02.2026</a:t>
             </a:r>
-            <a:endParaRPr lang="en-GB" noProof="0" dirty="0"/>
           </a:p>
         </p:txBody>
       </p:sp>
@@ -18880,7 +21822,7 @@
               <a:tabLst/>
               <a:defRPr/>
             </a:pPr>
-            <a:endParaRPr kumimoji="0" lang="en-US" sz="1800" b="0" i="0" u="none" strike="noStrike" kern="1200" cap="none" spc="0" normalizeH="0" baseline="0" noProof="0">
+            <a:endParaRPr kumimoji="0" lang="en-GB" sz="1800" b="0" i="0" u="none" strike="noStrike" kern="1200" cap="none" spc="0" normalizeH="0" baseline="0" noProof="0" dirty="0">
               <a:ln>
                 <a:noFill/>
               </a:ln>
@@ -18990,19 +21932,14 @@
           </a:p>
           <a:p>
             <a:r>
-              <a:rPr lang="en-GB" dirty="0"/>
+              <a:rPr lang="en-GB" noProof="0" dirty="0"/>
               <a:t>Conversion to usable MP-model</a:t>
             </a:r>
-            <a:endParaRPr lang="en-GB" noProof="0" dirty="0"/>
           </a:p>
           <a:p>
             <a:r>
               <a:rPr lang="en-GB" noProof="0" dirty="0"/>
-              <a:t>Implementation</a:t>
-            </a:r>
-            <a:r>
-              <a:rPr lang="en-GB" dirty="0"/>
-              <a:t> in two programs</a:t>
+              <a:t>Implementation in two programs</a:t>
             </a:r>
           </a:p>
           <a:p>
@@ -19088,7 +22025,7 @@
               <a:tabLst/>
               <a:defRPr/>
             </a:pPr>
-            <a:endParaRPr kumimoji="0" lang="en-US" sz="1800" b="0" i="0" u="none" strike="noStrike" kern="1200" cap="none" spc="0" normalizeH="0" baseline="0" noProof="0">
+            <a:endParaRPr kumimoji="0" lang="en-GB" sz="1800" b="0" i="0" u="none" strike="noStrike" kern="1200" cap="none" spc="0" normalizeH="0" baseline="0" noProof="0" dirty="0">
               <a:ln>
                 <a:noFill/>
               </a:ln>
@@ -19151,7 +22088,7 @@
               <a:defRPr/>
             </a:pPr>
             <a:r>
-              <a:rPr kumimoji="0" lang="de-DE" sz="1200" b="0" i="0" u="none" strike="noStrike" kern="1200" cap="none" spc="0" normalizeH="0" baseline="0" noProof="0">
+              <a:rPr kumimoji="0" lang="en-GB" sz="1200" b="0" i="0" u="none" strike="noStrike" kern="1200" cap="none" spc="0" normalizeH="0" baseline="0" noProof="0" dirty="0">
                 <a:ln>
                   <a:noFill/>
                 </a:ln>
@@ -19169,22 +22106,6 @@
               </a:rPr>
               <a:t>23.02.2026</a:t>
             </a:r>
-            <a:endParaRPr kumimoji="0" lang="en-GB" sz="1200" b="0" i="0" u="none" strike="noStrike" kern="1200" cap="none" spc="0" normalizeH="0" baseline="0" noProof="0">
-              <a:ln>
-                <a:noFill/>
-              </a:ln>
-              <a:solidFill>
-                <a:prstClr val="black">
-                  <a:tint val="82000"/>
-                </a:prstClr>
-              </a:solidFill>
-              <a:effectLst/>
-              <a:uLnTx/>
-              <a:uFillTx/>
-              <a:latin typeface="Aptos" panose="02110004020202020204"/>
-              <a:ea typeface="+mn-ea"/>
-              <a:cs typeface="+mn-cs"/>
-            </a:endParaRPr>
           </a:p>
         </p:txBody>
       </p:sp>
@@ -19334,7 +22255,7 @@
               <a:tabLst/>
               <a:defRPr/>
             </a:pPr>
-            <a:endParaRPr kumimoji="0" lang="en-US" sz="1800" b="0" i="0" u="none" strike="noStrike" kern="1200" cap="none" spc="0" normalizeH="0" baseline="0" noProof="0" dirty="0">
+            <a:endParaRPr kumimoji="0" lang="en-GB" sz="1800" b="0" i="0" u="none" strike="noStrike" kern="1200" cap="none" spc="0" normalizeH="0" baseline="0" noProof="0" dirty="0">
               <a:ln>
                 <a:noFill/>
               </a:ln>
@@ -19430,7 +22351,7 @@
               </a:pPr>
               <a:t>8</a:t>
             </a:fld>
-            <a:endParaRPr kumimoji="0" lang="en-GB" sz="1200" b="0" i="0" u="none" strike="noStrike" kern="1200" cap="none" spc="0" normalizeH="0" baseline="0" noProof="0">
+            <a:endParaRPr kumimoji="0" lang="en-GB" sz="1200" b="0" i="0" u="none" strike="noStrike" kern="1200" cap="none" spc="0" normalizeH="0" baseline="0" noProof="0" dirty="0">
               <a:ln>
                 <a:noFill/>
               </a:ln>
@@ -19505,7 +22426,7 @@
               <a:tabLst/>
               <a:defRPr/>
             </a:pPr>
-            <a:endParaRPr kumimoji="0" lang="de-AT" sz="1800" b="0" i="0" u="none" strike="noStrike" kern="1200" cap="none" spc="0" normalizeH="0" baseline="0" noProof="0">
+            <a:endParaRPr kumimoji="0" lang="en-GB" sz="1800" b="0" i="0" u="none" strike="noStrike" kern="1200" cap="none" spc="0" normalizeH="0" baseline="0" noProof="0" dirty="0">
               <a:ln>
                 <a:noFill/>
               </a:ln>
@@ -19763,52 +22684,52 @@
           <a:lstStyle/>
           <a:p>
             <a:r>
-              <a:rPr lang="en-GB" dirty="0"/>
+              <a:rPr lang="en-GB" noProof="0" dirty="0"/>
               <a:t>Transmission of punch data to client via </a:t>
             </a:r>
             <a:r>
-              <a:rPr lang="en-GB" dirty="0" err="1"/>
+              <a:rPr lang="en-GB" noProof="0" dirty="0" err="1"/>
               <a:t>WiFi</a:t>
             </a:r>
-            <a:endParaRPr lang="en-GB" dirty="0"/>
+            <a:endParaRPr lang="en-GB" noProof="0" dirty="0"/>
           </a:p>
           <a:p>
             <a:pPr marL="0" indent="0">
               <a:buNone/>
             </a:pPr>
-            <a:endParaRPr lang="en-GB" dirty="0"/>
-          </a:p>
-          <a:p>
-            <a:r>
-              <a:rPr lang="en-GB" dirty="0"/>
+            <a:endParaRPr lang="en-GB" noProof="0" dirty="0"/>
+          </a:p>
+          <a:p>
+            <a:r>
+              <a:rPr lang="en-GB" noProof="0" dirty="0"/>
               <a:t>Mode of operation</a:t>
             </a:r>
           </a:p>
           <a:p>
             <a:pPr lvl="1"/>
             <a:r>
-              <a:rPr lang="en-GB" dirty="0"/>
+              <a:rPr lang="en-GB" noProof="0" dirty="0"/>
               <a:t>Read Acceleration and Gyroscope data</a:t>
             </a:r>
           </a:p>
           <a:p>
             <a:pPr lvl="1"/>
             <a:r>
-              <a:rPr lang="en-GB" dirty="0"/>
+              <a:rPr lang="en-GB" noProof="0" dirty="0"/>
               <a:t>Hand over data to model</a:t>
             </a:r>
           </a:p>
           <a:p>
             <a:pPr lvl="1"/>
             <a:r>
-              <a:rPr lang="en-GB" dirty="0"/>
+              <a:rPr lang="en-GB" noProof="0" dirty="0"/>
               <a:t>Decision Logic</a:t>
             </a:r>
           </a:p>
           <a:p>
             <a:pPr lvl="1"/>
             <a:r>
-              <a:rPr lang="en-GB" dirty="0"/>
+              <a:rPr lang="en-GB" noProof="0" dirty="0"/>
               <a:t>Transmission of result to client</a:t>
             </a:r>
           </a:p>
@@ -19816,11 +22737,11 @@
             <a:pPr marL="457200" lvl="1" indent="0">
               <a:buNone/>
             </a:pPr>
-            <a:endParaRPr lang="en-GB" dirty="0"/>
-          </a:p>
-          <a:p>
-            <a:r>
-              <a:rPr lang="en-GB" dirty="0"/>
+            <a:endParaRPr lang="en-GB" noProof="0" dirty="0"/>
+          </a:p>
+          <a:p>
+            <a:r>
+              <a:rPr lang="en-GB" noProof="0" dirty="0"/>
               <a:t>Calculating velocity of punch using the IMU-acceleration</a:t>
             </a:r>
           </a:p>
@@ -19848,10 +22769,9 @@
           <a:lstStyle/>
           <a:p>
             <a:r>
-              <a:rPr lang="de-DE" noProof="0"/>
+              <a:rPr lang="en-GB" noProof="0" dirty="0"/>
               <a:t>23.02.2026</a:t>
             </a:r>
-            <a:endParaRPr lang="en-GB" noProof="0" dirty="0"/>
           </a:p>
         </p:txBody>
       </p:sp>
@@ -20642,6 +23562,14 @@
 </file>
 
 <file path=customXml/item1.xml><?xml version="1.0" encoding="utf-8"?>
+<p:properties xmlns:p="http://schemas.microsoft.com/office/2006/metadata/properties" xmlns:xsi="http://www.w3.org/2001/XMLSchema-instance" xmlns:pc="http://schemas.microsoft.com/office/infopath/2007/PartnerControls">
+  <documentManagement>
+    <_activity xmlns="bf1a47b5-10f0-4178-af4a-bbe7cc4004c3" xsi:nil="true"/>
+  </documentManagement>
+</p:properties>
+</file>
+
+<file path=customXml/item2.xml><?xml version="1.0" encoding="utf-8"?>
 <ct:contentTypeSchema xmlns:ct="http://schemas.microsoft.com/office/2006/metadata/contentType" xmlns:ma="http://schemas.microsoft.com/office/2006/metadata/properties/metaAttributes" ct:_="" ma:_="" ma:contentTypeName="Dokument" ma:contentTypeID="0x010100B041D5FB7F9ADB4FA3268D6933894E4E" ma:contentTypeVersion="11" ma:contentTypeDescription="Ein neues Dokument erstellen." ma:contentTypeScope="" ma:versionID="1716f861161e7a5f6104ad8e56853467">
   <xsd:schema xmlns:xsd="http://www.w3.org/2001/XMLSchema" xmlns:xs="http://www.w3.org/2001/XMLSchema" xmlns:p="http://schemas.microsoft.com/office/2006/metadata/properties" xmlns:ns3="bf1a47b5-10f0-4178-af4a-bbe7cc4004c3" targetNamespace="http://schemas.microsoft.com/office/2006/metadata/properties" ma:root="true" ma:fieldsID="8ee1bf931531000dc41501df99fd4e2b" ns3:_="">
     <xsd:import namespace="bf1a47b5-10f0-4178-af4a-bbe7cc4004c3"/>
@@ -20829,14 +23757,6 @@
 </ct:contentTypeSchema>
 </file>
 
-<file path=customXml/item2.xml><?xml version="1.0" encoding="utf-8"?>
-<p:properties xmlns:p="http://schemas.microsoft.com/office/2006/metadata/properties" xmlns:xsi="http://www.w3.org/2001/XMLSchema-instance" xmlns:pc="http://schemas.microsoft.com/office/infopath/2007/PartnerControls">
-  <documentManagement>
-    <_activity xmlns="bf1a47b5-10f0-4178-af4a-bbe7cc4004c3" xsi:nil="true"/>
-  </documentManagement>
-</p:properties>
-</file>
-
 <file path=customXml/item3.xml><?xml version="1.0" encoding="utf-8"?>
 <?mso-contentType ?>
 <FormTemplates xmlns="http://schemas.microsoft.com/sharepoint/v3/contenttype/forms">
@@ -20847,6 +23767,22 @@
 </file>
 
 <file path=customXml/itemProps1.xml><?xml version="1.0" encoding="utf-8"?>
+<ds:datastoreItem xmlns:ds="http://schemas.openxmlformats.org/officeDocument/2006/customXml" ds:itemID="{2C2A40F2-5398-4DE1-A8FC-C0BA56DCE4EA}">
+  <ds:schemaRefs>
+    <ds:schemaRef ds:uri="bf1a47b5-10f0-4178-af4a-bbe7cc4004c3"/>
+    <ds:schemaRef ds:uri="http://purl.org/dc/terms/"/>
+    <ds:schemaRef ds:uri="http://schemas.microsoft.com/office/infopath/2007/PartnerControls"/>
+    <ds:schemaRef ds:uri="http://schemas.openxmlformats.org/package/2006/metadata/core-properties"/>
+    <ds:schemaRef ds:uri="http://purl.org/dc/elements/1.1/"/>
+    <ds:schemaRef ds:uri="http://schemas.microsoft.com/office/2006/documentManagement/types"/>
+    <ds:schemaRef ds:uri="http://www.w3.org/XML/1998/namespace"/>
+    <ds:schemaRef ds:uri="http://purl.org/dc/dcmitype/"/>
+    <ds:schemaRef ds:uri="http://schemas.microsoft.com/office/2006/metadata/properties"/>
+  </ds:schemaRefs>
+</ds:datastoreItem>
+</file>
+
+<file path=customXml/itemProps2.xml><?xml version="1.0" encoding="utf-8"?>
 <ds:datastoreItem xmlns:ds="http://schemas.openxmlformats.org/officeDocument/2006/customXml" ds:itemID="{68909959-C625-4C65-88C3-A1F8ACE56D22}">
   <ds:schemaRefs>
     <ds:schemaRef ds:uri="http://schemas.microsoft.com/office/2006/metadata/contentType"/>
@@ -20864,22 +23800,6 @@
 </ds:datastoreItem>
 </file>
 
-<file path=customXml/itemProps2.xml><?xml version="1.0" encoding="utf-8"?>
-<ds:datastoreItem xmlns:ds="http://schemas.openxmlformats.org/officeDocument/2006/customXml" ds:itemID="{2C2A40F2-5398-4DE1-A8FC-C0BA56DCE4EA}">
-  <ds:schemaRefs>
-    <ds:schemaRef ds:uri="bf1a47b5-10f0-4178-af4a-bbe7cc4004c3"/>
-    <ds:schemaRef ds:uri="http://purl.org/dc/terms/"/>
-    <ds:schemaRef ds:uri="http://schemas.microsoft.com/office/infopath/2007/PartnerControls"/>
-    <ds:schemaRef ds:uri="http://schemas.openxmlformats.org/package/2006/metadata/core-properties"/>
-    <ds:schemaRef ds:uri="http://purl.org/dc/elements/1.1/"/>
-    <ds:schemaRef ds:uri="http://schemas.microsoft.com/office/2006/documentManagement/types"/>
-    <ds:schemaRef ds:uri="http://www.w3.org/XML/1998/namespace"/>
-    <ds:schemaRef ds:uri="http://purl.org/dc/dcmitype/"/>
-    <ds:schemaRef ds:uri="http://schemas.microsoft.com/office/2006/metadata/properties"/>
-  </ds:schemaRefs>
-</ds:datastoreItem>
-</file>
-
 <file path=customXml/itemProps3.xml><?xml version="1.0" encoding="utf-8"?>
 <ds:datastoreItem xmlns:ds="http://schemas.openxmlformats.org/officeDocument/2006/customXml" ds:itemID="{D12945CB-A677-4013-820C-0AEFE2C4DC48}">
   <ds:schemaRefs>

--- a/report/Präsentation_final.pptx
+++ b/report/Präsentation_final.pptx
@@ -6835,6 +6835,103 @@
           <a:bodyPr/>
           <a:lstStyle/>
           <a:p>
+            <a:r>
+              <a:rPr lang="en-US" dirty="0"/>
+              <a:t>The second, more advanced part of the project involved connecting to an </a:t>
+            </a:r>
+            <a:r>
+              <a:rPr lang="en-US" b="1" dirty="0"/>
+              <a:t>MQTT broker</a:t>
+            </a:r>
+            <a:r>
+              <a:rPr lang="en-US" dirty="0"/>
+              <a:t> to publish the detected </a:t>
+            </a:r>
+            <a:r>
+              <a:rPr lang="en-US" b="1" dirty="0"/>
+              <a:t>punch types</a:t>
+            </a:r>
+            <a:r>
+              <a:rPr lang="en-US" dirty="0"/>
+              <a:t>.</a:t>
+            </a:r>
+          </a:p>
+          <a:p>
+            <a:endParaRPr lang="en-US" dirty="0"/>
+          </a:p>
+          <a:p>
+            <a:r>
+              <a:rPr lang="en-US" dirty="0"/>
+              <a:t>We used </a:t>
+            </a:r>
+            <a:r>
+              <a:rPr lang="en-US" b="1" dirty="0" err="1"/>
+              <a:t>Ubidots</a:t>
+            </a:r>
+            <a:r>
+              <a:rPr lang="en-US" dirty="0"/>
+              <a:t> as our web dashboard to provide a clear and organized </a:t>
+            </a:r>
+            <a:r>
+              <a:rPr lang="en-US" b="1" dirty="0"/>
+              <a:t>content table</a:t>
+            </a:r>
+            <a:r>
+              <a:rPr lang="en-US" dirty="0"/>
+              <a:t> for the data.</a:t>
+            </a:r>
+          </a:p>
+          <a:p>
+            <a:endParaRPr lang="en-US" dirty="0"/>
+          </a:p>
+          <a:p>
+            <a:r>
+              <a:rPr lang="en-US" dirty="0"/>
+              <a:t>The dashboard includes a </a:t>
+            </a:r>
+            <a:r>
+              <a:rPr lang="en-US" b="1" dirty="0"/>
+              <a:t>Session Control</a:t>
+            </a:r>
+            <a:r>
+              <a:rPr lang="en-US" dirty="0"/>
+              <a:t> column with custom </a:t>
+            </a:r>
+            <a:r>
+              <a:rPr lang="en-US" b="1" dirty="0"/>
+              <a:t>session names</a:t>
+            </a:r>
+            <a:r>
+              <a:rPr lang="en-US" dirty="0"/>
+              <a:t>, allowing users to track their progress and achievements for each individual training.</a:t>
+            </a:r>
+          </a:p>
+          <a:p>
+            <a:endParaRPr lang="en-US" dirty="0"/>
+          </a:p>
+          <a:p>
+            <a:r>
+              <a:rPr lang="en-US" dirty="0"/>
+              <a:t>A </a:t>
+            </a:r>
+            <a:r>
+              <a:rPr lang="en-US" b="1" dirty="0"/>
+              <a:t>new session</a:t>
+            </a:r>
+            <a:r>
+              <a:rPr lang="en-US" dirty="0"/>
+              <a:t> can be triggered easily by pressing the </a:t>
+            </a:r>
+            <a:r>
+              <a:rPr lang="en-US" b="1" dirty="0"/>
+              <a:t>user button</a:t>
+            </a:r>
+            <a:r>
+              <a:rPr lang="en-US" dirty="0"/>
+              <a:t> directly on the board.</a:t>
+            </a:r>
+          </a:p>
+          <a:p>
             <a:endParaRPr lang="de-AT" dirty="0"/>
           </a:p>
         </p:txBody>
@@ -14262,6 +14359,130 @@
         <p:txBody>
           <a:bodyPr/>
           <a:lstStyle/>
+          <a:p>
+            <a:r>
+              <a:rPr lang="en-US" sz="2000" b="1" dirty="0" err="1"/>
+              <a:t>MicroPython</a:t>
+            </a:r>
+            <a:r>
+              <a:rPr lang="en-US" sz="2000" b="1" dirty="0"/>
+              <a:t> Implementation:</a:t>
+            </a:r>
+            <a:r>
+              <a:rPr lang="en-US" sz="2000" dirty="0"/>
+              <a:t> The final phase of the project focused on the </a:t>
+            </a:r>
+            <a:r>
+              <a:rPr lang="en-US" sz="2000" b="1" dirty="0" err="1"/>
+              <a:t>MicroPython</a:t>
+            </a:r>
+            <a:r>
+              <a:rPr lang="en-US" sz="2000" b="1" dirty="0"/>
+              <a:t> code</a:t>
+            </a:r>
+            <a:r>
+              <a:rPr lang="en-US" sz="2000" dirty="0"/>
+              <a:t> development.</a:t>
+            </a:r>
+          </a:p>
+          <a:p>
+            <a:endParaRPr lang="en-US" sz="2000" dirty="0"/>
+          </a:p>
+          <a:p>
+            <a:r>
+              <a:rPr lang="en-US" sz="2000" b="1" dirty="0"/>
+              <a:t>Model Conversion:</a:t>
+            </a:r>
+            <a:r>
+              <a:rPr lang="en-US" sz="2000" dirty="0"/>
+              <a:t> We selected the model with the </a:t>
+            </a:r>
+            <a:r>
+              <a:rPr lang="en-US" sz="2000" b="1" dirty="0"/>
+              <a:t>best statistical performance</a:t>
+            </a:r>
+            <a:r>
+              <a:rPr lang="en-US" sz="2000" dirty="0"/>
+              <a:t>, generated the corresponding </a:t>
+            </a:r>
+            <a:r>
+              <a:rPr lang="en-US" sz="2000" b="1" dirty="0"/>
+              <a:t>C code</a:t>
+            </a:r>
+            <a:r>
+              <a:rPr lang="en-US" sz="2000" dirty="0"/>
+              <a:t>, and converted it into </a:t>
+            </a:r>
+            <a:r>
+              <a:rPr lang="en-US" sz="2000" b="1" dirty="0"/>
+              <a:t>functional </a:t>
+            </a:r>
+            <a:r>
+              <a:rPr lang="en-US" sz="2000" b="1" dirty="0" err="1"/>
+              <a:t>MicroPython</a:t>
+            </a:r>
+            <a:r>
+              <a:rPr lang="en-US" sz="2000" b="1" dirty="0"/>
+              <a:t> code</a:t>
+            </a:r>
+            <a:r>
+              <a:rPr lang="en-US" sz="2000" dirty="0"/>
+              <a:t>.</a:t>
+            </a:r>
+          </a:p>
+          <a:p>
+            <a:endParaRPr lang="en-US" sz="2000" dirty="0"/>
+          </a:p>
+          <a:p>
+            <a:r>
+              <a:rPr lang="en-US" sz="2000" b="1" dirty="0"/>
+              <a:t>Integration:</a:t>
+            </a:r>
+            <a:r>
+              <a:rPr lang="en-US" sz="2000" dirty="0"/>
+              <a:t> This model was integrated into </a:t>
+            </a:r>
+            <a:r>
+              <a:rPr lang="en-US" sz="2000" b="1" dirty="0"/>
+              <a:t>two separate programs</a:t>
+            </a:r>
+            <a:r>
+              <a:rPr lang="en-US" sz="2000" dirty="0"/>
+              <a:t>, which will be demonstrated later in the presentation.</a:t>
+            </a:r>
+          </a:p>
+          <a:p>
+            <a:endParaRPr lang="en-US" sz="2000" dirty="0"/>
+          </a:p>
+          <a:p>
+            <a:r>
+              <a:rPr lang="en-US" sz="2000" b="1" dirty="0"/>
+              <a:t>Accuracy Testing:</a:t>
+            </a:r>
+            <a:r>
+              <a:rPr lang="en-US" sz="2000" dirty="0"/>
+              <a:t> For the final stage, we evaluated the </a:t>
+            </a:r>
+            <a:r>
+              <a:rPr lang="en-US" sz="2000" b="1" dirty="0"/>
+              <a:t>reliability and precision</a:t>
+            </a:r>
+            <a:r>
+              <a:rPr lang="en-US" sz="2000" dirty="0"/>
+              <a:t> of the </a:t>
+            </a:r>
+            <a:r>
+              <a:rPr lang="en-US" sz="2000" b="1" dirty="0"/>
+              <a:t>punch detection</a:t>
+            </a:r>
+            <a:r>
+              <a:rPr lang="en-US" sz="2000" dirty="0"/>
+              <a:t> system.</a:t>
+            </a:r>
+          </a:p>
+          <a:p>
+            <a:endParaRPr lang="de-AT" dirty="0"/>
+          </a:p>
           <a:p>
             <a:endParaRPr lang="de-AT" dirty="0"/>
           </a:p>
@@ -14413,6 +14634,423 @@
         <p:txBody>
           <a:bodyPr/>
           <a:lstStyle/>
+          <a:p>
+            <a:r>
+              <a:rPr lang="de-AT" dirty="0" err="1"/>
+              <a:t>For</a:t>
+            </a:r>
+            <a:r>
+              <a:rPr lang="de-AT" dirty="0"/>
+              <a:t> </a:t>
+            </a:r>
+            <a:r>
+              <a:rPr lang="de-AT" dirty="0" err="1"/>
+              <a:t>the</a:t>
+            </a:r>
+            <a:r>
+              <a:rPr lang="de-AT" dirty="0"/>
+              <a:t> </a:t>
+            </a:r>
+            <a:r>
+              <a:rPr lang="de-AT" dirty="0" err="1"/>
+              <a:t>first</a:t>
+            </a:r>
+            <a:r>
+              <a:rPr lang="de-AT" dirty="0"/>
+              <a:t> </a:t>
+            </a:r>
+            <a:r>
+              <a:rPr lang="de-AT" dirty="0" err="1"/>
+              <a:t>program</a:t>
+            </a:r>
+            <a:r>
+              <a:rPr lang="de-AT" dirty="0"/>
+              <a:t> </a:t>
+            </a:r>
+            <a:r>
+              <a:rPr lang="de-AT" dirty="0" err="1"/>
+              <a:t>we</a:t>
+            </a:r>
+            <a:r>
+              <a:rPr lang="de-AT" dirty="0"/>
+              <a:t> </a:t>
+            </a:r>
+            <a:r>
+              <a:rPr lang="de-AT" dirty="0" err="1"/>
+              <a:t>implemented</a:t>
+            </a:r>
+            <a:r>
+              <a:rPr lang="de-AT" dirty="0"/>
+              <a:t> </a:t>
+            </a:r>
+            <a:r>
+              <a:rPr lang="de-AT" dirty="0" err="1"/>
+              <a:t>the</a:t>
+            </a:r>
+            <a:r>
+              <a:rPr lang="de-AT" dirty="0"/>
+              <a:t> </a:t>
+            </a:r>
+            <a:r>
+              <a:rPr lang="de-AT" dirty="0" err="1"/>
+              <a:t>most</a:t>
+            </a:r>
+            <a:r>
+              <a:rPr lang="de-AT" dirty="0"/>
+              <a:t> </a:t>
+            </a:r>
+            <a:r>
+              <a:rPr lang="de-AT" dirty="0" err="1"/>
+              <a:t>rudimentary</a:t>
+            </a:r>
+            <a:r>
+              <a:rPr lang="de-AT" dirty="0"/>
+              <a:t> </a:t>
+            </a:r>
+            <a:r>
+              <a:rPr lang="de-AT" dirty="0" err="1"/>
+              <a:t>functions</a:t>
+            </a:r>
+            <a:r>
+              <a:rPr lang="de-AT" dirty="0"/>
+              <a:t> </a:t>
+            </a:r>
+            <a:r>
+              <a:rPr lang="de-AT" dirty="0" err="1"/>
+              <a:t>which</a:t>
+            </a:r>
+            <a:r>
+              <a:rPr lang="de-AT" dirty="0"/>
+              <a:t> </a:t>
+            </a:r>
+            <a:r>
+              <a:rPr lang="de-AT" dirty="0" err="1"/>
+              <a:t>were</a:t>
+            </a:r>
+            <a:r>
+              <a:rPr lang="de-AT" dirty="0"/>
+              <a:t> </a:t>
+            </a:r>
+            <a:r>
+              <a:rPr lang="de-AT" dirty="0" err="1"/>
+              <a:t>detection</a:t>
+            </a:r>
+            <a:r>
+              <a:rPr lang="de-AT" dirty="0"/>
+              <a:t> and </a:t>
+            </a:r>
+            <a:r>
+              <a:rPr lang="de-AT" dirty="0" err="1"/>
+              <a:t>data</a:t>
+            </a:r>
+            <a:r>
+              <a:rPr lang="de-AT" dirty="0"/>
+              <a:t> </a:t>
+            </a:r>
+            <a:r>
+              <a:rPr lang="de-AT" dirty="0" err="1"/>
+              <a:t>transmission</a:t>
+            </a:r>
+            <a:r>
+              <a:rPr lang="de-AT" dirty="0"/>
+              <a:t> </a:t>
+            </a:r>
+            <a:r>
+              <a:rPr lang="de-AT" dirty="0" err="1"/>
+              <a:t>to</a:t>
+            </a:r>
+            <a:r>
+              <a:rPr lang="de-AT" dirty="0"/>
+              <a:t> a </a:t>
+            </a:r>
+            <a:r>
+              <a:rPr lang="de-AT" dirty="0" err="1"/>
+              <a:t>client</a:t>
+            </a:r>
+            <a:r>
+              <a:rPr lang="de-AT" dirty="0"/>
+              <a:t> via WiFi.</a:t>
+            </a:r>
+          </a:p>
+          <a:p>
+            <a:endParaRPr lang="de-AT" dirty="0"/>
+          </a:p>
+          <a:p>
+            <a:r>
+              <a:rPr lang="de-AT" dirty="0"/>
+              <a:t>Quick </a:t>
+            </a:r>
+            <a:r>
+              <a:rPr lang="de-AT" dirty="0" err="1"/>
+              <a:t>overview</a:t>
+            </a:r>
+            <a:r>
+              <a:rPr lang="de-AT" dirty="0"/>
+              <a:t> </a:t>
+            </a:r>
+            <a:r>
+              <a:rPr lang="de-AT" dirty="0" err="1"/>
+              <a:t>of</a:t>
+            </a:r>
+            <a:r>
+              <a:rPr lang="de-AT" dirty="0"/>
+              <a:t> </a:t>
+            </a:r>
+            <a:r>
+              <a:rPr lang="de-AT" dirty="0" err="1"/>
+              <a:t>the</a:t>
+            </a:r>
+            <a:r>
+              <a:rPr lang="de-AT" dirty="0"/>
+              <a:t> </a:t>
+            </a:r>
+            <a:r>
+              <a:rPr lang="de-AT" dirty="0" err="1"/>
+              <a:t>mode</a:t>
+            </a:r>
+            <a:r>
+              <a:rPr lang="de-AT" dirty="0"/>
+              <a:t> </a:t>
+            </a:r>
+            <a:r>
+              <a:rPr lang="de-AT" dirty="0" err="1"/>
+              <a:t>of</a:t>
+            </a:r>
+            <a:r>
+              <a:rPr lang="de-AT" dirty="0"/>
+              <a:t> </a:t>
+            </a:r>
+            <a:r>
+              <a:rPr lang="de-AT" dirty="0" err="1"/>
+              <a:t>operation</a:t>
+            </a:r>
+            <a:r>
+              <a:rPr lang="de-AT" dirty="0"/>
+              <a:t>.</a:t>
+            </a:r>
+          </a:p>
+          <a:p>
+            <a:pPr marL="171450" indent="-171450">
+              <a:buFont typeface="Arial" panose="020B0604020202020204" pitchFamily="34" charset="0"/>
+              <a:buChar char="•"/>
+            </a:pPr>
+            <a:r>
+              <a:rPr lang="de-AT" dirty="0"/>
+              <a:t>Read IMU</a:t>
+            </a:r>
+          </a:p>
+          <a:p>
+            <a:pPr marL="171450" indent="-171450">
+              <a:buFont typeface="Arial" panose="020B0604020202020204" pitchFamily="34" charset="0"/>
+              <a:buChar char="•"/>
+            </a:pPr>
+            <a:r>
+              <a:rPr lang="de-AT" dirty="0"/>
+              <a:t>Hand </a:t>
+            </a:r>
+            <a:r>
+              <a:rPr lang="de-AT" dirty="0" err="1"/>
+              <a:t>over</a:t>
+            </a:r>
+            <a:r>
+              <a:rPr lang="de-AT" dirty="0"/>
+              <a:t> </a:t>
+            </a:r>
+            <a:r>
+              <a:rPr lang="de-AT" dirty="0" err="1"/>
+              <a:t>to</a:t>
+            </a:r>
+            <a:r>
+              <a:rPr lang="de-AT" dirty="0"/>
+              <a:t> </a:t>
+            </a:r>
+            <a:r>
+              <a:rPr lang="de-AT" dirty="0" err="1"/>
+              <a:t>the</a:t>
+            </a:r>
+            <a:r>
+              <a:rPr lang="de-AT" dirty="0"/>
+              <a:t> </a:t>
+            </a:r>
+            <a:r>
+              <a:rPr lang="de-AT" dirty="0" err="1"/>
+              <a:t>model</a:t>
+            </a:r>
+            <a:endParaRPr lang="de-AT" dirty="0"/>
+          </a:p>
+          <a:p>
+            <a:pPr marL="171450" indent="-171450">
+              <a:buFont typeface="Arial" panose="020B0604020202020204" pitchFamily="34" charset="0"/>
+              <a:buChar char="•"/>
+            </a:pPr>
+            <a:r>
+              <a:rPr lang="de-AT" dirty="0" err="1"/>
+              <a:t>Decision</a:t>
+            </a:r>
+            <a:r>
+              <a:rPr lang="de-AT" dirty="0"/>
+              <a:t> </a:t>
+            </a:r>
+            <a:r>
+              <a:rPr lang="de-AT" dirty="0" err="1"/>
+              <a:t>logic</a:t>
+            </a:r>
+            <a:r>
+              <a:rPr lang="de-AT" dirty="0"/>
+              <a:t> </a:t>
+            </a:r>
+            <a:r>
+              <a:rPr lang="de-AT" dirty="0" err="1"/>
+              <a:t>probability</a:t>
+            </a:r>
+            <a:r>
+              <a:rPr lang="de-AT" dirty="0"/>
+              <a:t> </a:t>
+            </a:r>
+            <a:r>
+              <a:rPr lang="de-AT" dirty="0" err="1"/>
+              <a:t>had</a:t>
+            </a:r>
+            <a:r>
+              <a:rPr lang="de-AT" dirty="0"/>
+              <a:t> </a:t>
+            </a:r>
+            <a:r>
+              <a:rPr lang="de-AT" dirty="0" err="1"/>
+              <a:t>to</a:t>
+            </a:r>
+            <a:r>
+              <a:rPr lang="de-AT" dirty="0"/>
+              <a:t> </a:t>
+            </a:r>
+            <a:r>
+              <a:rPr lang="de-AT" dirty="0" err="1"/>
+              <a:t>surpass</a:t>
+            </a:r>
+            <a:r>
+              <a:rPr lang="de-AT" dirty="0"/>
+              <a:t> </a:t>
+            </a:r>
+            <a:r>
+              <a:rPr lang="de-AT" dirty="0" err="1"/>
+              <a:t>threshhold</a:t>
+            </a:r>
+            <a:r>
+              <a:rPr lang="de-AT" dirty="0"/>
+              <a:t> </a:t>
+            </a:r>
+            <a:r>
+              <a:rPr lang="de-AT" dirty="0" err="1"/>
+              <a:t>of</a:t>
+            </a:r>
+            <a:r>
+              <a:rPr lang="de-AT" dirty="0"/>
+              <a:t> 60% </a:t>
+            </a:r>
+            <a:r>
+              <a:rPr lang="de-AT" dirty="0" err="1"/>
+              <a:t>to</a:t>
+            </a:r>
+            <a:r>
+              <a:rPr lang="de-AT" dirty="0"/>
+              <a:t> </a:t>
+            </a:r>
+            <a:r>
+              <a:rPr lang="de-AT" dirty="0" err="1"/>
+              <a:t>be</a:t>
+            </a:r>
+            <a:r>
+              <a:rPr lang="de-AT" dirty="0"/>
+              <a:t> </a:t>
+            </a:r>
+            <a:r>
+              <a:rPr lang="de-AT" dirty="0" err="1"/>
+              <a:t>counted</a:t>
+            </a:r>
+            <a:r>
+              <a:rPr lang="de-AT" dirty="0"/>
+              <a:t> </a:t>
+            </a:r>
+            <a:r>
+              <a:rPr lang="de-AT" dirty="0" err="1"/>
+              <a:t>as</a:t>
+            </a:r>
+            <a:r>
+              <a:rPr lang="de-AT" dirty="0"/>
+              <a:t> a </a:t>
+            </a:r>
+            <a:r>
+              <a:rPr lang="de-AT" dirty="0" err="1"/>
+              <a:t>punch</a:t>
+            </a:r>
+            <a:endParaRPr lang="de-AT" dirty="0"/>
+          </a:p>
+          <a:p>
+            <a:pPr marL="171450" indent="-171450">
+              <a:buFont typeface="Arial" panose="020B0604020202020204" pitchFamily="34" charset="0"/>
+              <a:buChar char="•"/>
+            </a:pPr>
+            <a:r>
+              <a:rPr lang="de-AT" dirty="0"/>
+              <a:t>Last but not least </a:t>
+            </a:r>
+            <a:r>
+              <a:rPr lang="de-AT" dirty="0" err="1"/>
+              <a:t>transmission</a:t>
+            </a:r>
+            <a:r>
+              <a:rPr lang="de-AT" dirty="0"/>
+              <a:t> </a:t>
+            </a:r>
+            <a:r>
+              <a:rPr lang="de-AT" dirty="0" err="1"/>
+              <a:t>of</a:t>
+            </a:r>
+            <a:r>
+              <a:rPr lang="de-AT" dirty="0"/>
+              <a:t> </a:t>
+            </a:r>
+            <a:r>
+              <a:rPr lang="de-AT" dirty="0" err="1"/>
+              <a:t>result</a:t>
+            </a:r>
+            <a:r>
+              <a:rPr lang="de-AT" dirty="0"/>
+              <a:t> </a:t>
+            </a:r>
+            <a:r>
+              <a:rPr lang="de-AT" dirty="0" err="1"/>
+              <a:t>to</a:t>
+            </a:r>
+            <a:r>
+              <a:rPr lang="de-AT" dirty="0"/>
+              <a:t> </a:t>
+            </a:r>
+            <a:r>
+              <a:rPr lang="de-AT" dirty="0" err="1"/>
+              <a:t>client</a:t>
+            </a:r>
+            <a:r>
+              <a:rPr lang="de-AT" dirty="0"/>
+              <a:t> (</a:t>
+            </a:r>
+            <a:r>
+              <a:rPr lang="de-AT" dirty="0" err="1"/>
+              <a:t>Tera</a:t>
+            </a:r>
+            <a:r>
+              <a:rPr lang="de-AT" dirty="0"/>
+              <a:t> Term) Connection </a:t>
+            </a:r>
+            <a:r>
+              <a:rPr lang="de-AT" dirty="0" err="1"/>
+              <a:t>with</a:t>
+            </a:r>
+            <a:r>
+              <a:rPr lang="de-AT" dirty="0"/>
+              <a:t> TCP/IP</a:t>
+            </a:r>
+          </a:p>
           <a:p>
             <a:endParaRPr lang="de-AT" dirty="0"/>
           </a:p>
@@ -23562,11 +24200,12 @@
 </file>
 
 <file path=customXml/item1.xml><?xml version="1.0" encoding="utf-8"?>
-<p:properties xmlns:p="http://schemas.microsoft.com/office/2006/metadata/properties" xmlns:xsi="http://www.w3.org/2001/XMLSchema-instance" xmlns:pc="http://schemas.microsoft.com/office/infopath/2007/PartnerControls">
-  <documentManagement>
-    <_activity xmlns="bf1a47b5-10f0-4178-af4a-bbe7cc4004c3" xsi:nil="true"/>
-  </documentManagement>
-</p:properties>
+<?mso-contentType ?>
+<FormTemplates xmlns="http://schemas.microsoft.com/sharepoint/v3/contenttype/forms">
+  <Display>DocumentLibraryForm</Display>
+  <Edit>DocumentLibraryForm</Edit>
+  <New>DocumentLibraryForm</New>
+</FormTemplates>
 </file>
 
 <file path=customXml/item2.xml><?xml version="1.0" encoding="utf-8"?>
@@ -23758,26 +24397,17 @@
 </file>
 
 <file path=customXml/item3.xml><?xml version="1.0" encoding="utf-8"?>
-<?mso-contentType ?>
-<FormTemplates xmlns="http://schemas.microsoft.com/sharepoint/v3/contenttype/forms">
-  <Display>DocumentLibraryForm</Display>
-  <Edit>DocumentLibraryForm</Edit>
-  <New>DocumentLibraryForm</New>
-</FormTemplates>
+<p:properties xmlns:p="http://schemas.microsoft.com/office/2006/metadata/properties" xmlns:xsi="http://www.w3.org/2001/XMLSchema-instance" xmlns:pc="http://schemas.microsoft.com/office/infopath/2007/PartnerControls">
+  <documentManagement>
+    <_activity xmlns="bf1a47b5-10f0-4178-af4a-bbe7cc4004c3" xsi:nil="true"/>
+  </documentManagement>
+</p:properties>
 </file>
 
 <file path=customXml/itemProps1.xml><?xml version="1.0" encoding="utf-8"?>
-<ds:datastoreItem xmlns:ds="http://schemas.openxmlformats.org/officeDocument/2006/customXml" ds:itemID="{2C2A40F2-5398-4DE1-A8FC-C0BA56DCE4EA}">
+<ds:datastoreItem xmlns:ds="http://schemas.openxmlformats.org/officeDocument/2006/customXml" ds:itemID="{D12945CB-A677-4013-820C-0AEFE2C4DC48}">
   <ds:schemaRefs>
-    <ds:schemaRef ds:uri="bf1a47b5-10f0-4178-af4a-bbe7cc4004c3"/>
-    <ds:schemaRef ds:uri="http://purl.org/dc/terms/"/>
-    <ds:schemaRef ds:uri="http://schemas.microsoft.com/office/infopath/2007/PartnerControls"/>
-    <ds:schemaRef ds:uri="http://schemas.openxmlformats.org/package/2006/metadata/core-properties"/>
-    <ds:schemaRef ds:uri="http://purl.org/dc/elements/1.1/"/>
-    <ds:schemaRef ds:uri="http://schemas.microsoft.com/office/2006/documentManagement/types"/>
-    <ds:schemaRef ds:uri="http://www.w3.org/XML/1998/namespace"/>
-    <ds:schemaRef ds:uri="http://purl.org/dc/dcmitype/"/>
-    <ds:schemaRef ds:uri="http://schemas.microsoft.com/office/2006/metadata/properties"/>
+    <ds:schemaRef ds:uri="http://schemas.microsoft.com/sharepoint/v3/contenttype/forms"/>
   </ds:schemaRefs>
 </ds:datastoreItem>
 </file>
@@ -23801,9 +24431,17 @@
 </file>
 
 <file path=customXml/itemProps3.xml><?xml version="1.0" encoding="utf-8"?>
-<ds:datastoreItem xmlns:ds="http://schemas.openxmlformats.org/officeDocument/2006/customXml" ds:itemID="{D12945CB-A677-4013-820C-0AEFE2C4DC48}">
+<ds:datastoreItem xmlns:ds="http://schemas.openxmlformats.org/officeDocument/2006/customXml" ds:itemID="{2C2A40F2-5398-4DE1-A8FC-C0BA56DCE4EA}">
   <ds:schemaRefs>
-    <ds:schemaRef ds:uri="http://schemas.microsoft.com/sharepoint/v3/contenttype/forms"/>
+    <ds:schemaRef ds:uri="bf1a47b5-10f0-4178-af4a-bbe7cc4004c3"/>
+    <ds:schemaRef ds:uri="http://purl.org/dc/terms/"/>
+    <ds:schemaRef ds:uri="http://schemas.microsoft.com/office/infopath/2007/PartnerControls"/>
+    <ds:schemaRef ds:uri="http://schemas.openxmlformats.org/package/2006/metadata/core-properties"/>
+    <ds:schemaRef ds:uri="http://purl.org/dc/elements/1.1/"/>
+    <ds:schemaRef ds:uri="http://schemas.microsoft.com/office/2006/documentManagement/types"/>
+    <ds:schemaRef ds:uri="http://www.w3.org/XML/1998/namespace"/>
+    <ds:schemaRef ds:uri="http://purl.org/dc/dcmitype/"/>
+    <ds:schemaRef ds:uri="http://schemas.microsoft.com/office/2006/metadata/properties"/>
   </ds:schemaRefs>
 </ds:datastoreItem>
 </file>